--- a/vi/files/slides/Session_3_VN.pptx
+++ b/vi/files/slides/Session_3_VN.pptx
@@ -732,7 +732,7 @@
           <a:p>
             <a:r>
               <a:rPr lang="en-US" sz="1400" b="0" dirty="0"/>
-              <a:t>MỞ ĐẦU BUỔI 3 (0:00). Chào mừng đến Cuối tuần 2. Ở Buổi 1 và 2 chúng ta đặt câu hỏi và tìm bằng chứng. Hôm nay chọn CÁCH một nghiên cứu trả lời câu hỏi; ngày mai (Buổi 4) đánh giá có tin được câu trả lời không và tác động lớn đến đâu.</a:t>
+              <a:t>MỞ ĐẦU BUỔI 3 (0:00). Chào mừng đến Tuần 3. Ở Buổi 1 và 2 chúng ta đặt câu hỏi và tìm bằng chứng. Hôm nay chọn CÁCH một nghiên cứu trả lời câu hỏi; thứ Bảy tuần sau (Buổi 4) đánh giá có tin được câu trả lời không và tác động lớn đến đâu.</a:t>
             </a:r>
           </a:p>
           <a:p>
@@ -960,7 +960,7 @@
           <a:p>
             <a:r>
               <a:rPr lang="en-US" sz="1400" b="0" dirty="0"/>
-              <a:t>Bước 1: ca bệnh là người CÓ kết cục. Bước 2: ca chứng là những người tương tự KHÔNG có kết cục, từ cùng nguồn (cùng ICU, cùng thời gian) - chọn ca chứng tốt là phần khó nhất. Bước 3: nhìn lại phơi nhiễm, cùng một cách cho cả hai nhóm. Bước 4: 60% ca bệnh so với 20% ca chứng có phơi nhiễm. Bước 5: kết quả là tỷ số chênh (OR = 6,0, sẽ tính ngày mai).</a:t>
+              <a:t>Bước 1: ca bệnh là người CÓ kết cục. Bước 2: ca chứng là những người tương tự KHÔNG có kết cục, từ cùng nguồn (cùng ICU, cùng thời gian) - chọn ca chứng tốt là phần khó nhất. Bước 3: nhìn lại phơi nhiễm, cùng một cách cho cả hai nhóm. Bước 4: 60% ca bệnh so với 20% ca chứng có phơi nhiễm. Bước 5: kết quả là tỷ số chênh (OR = 6,0, sẽ tính thứ Bảy tuần sau).</a:t>
             </a:r>
           </a:p>
           <a:p>
@@ -4035,7 +4035,7 @@
           <a:p>
             <a:r>
               <a:rPr lang="en-US" sz="1400" b="0" dirty="0"/>
-              <a:t>Đáp án câu hỏi cuối buổi: thuần tập (chia theo phơi nhiễm họ tự chọn, theo dõi về sau); chỉ được nói 'có liên quan' - người chọn tiêm vắc xin khác biệt ở nhiều mặt (hiệu ứng người dùng khỏe mạnh), một bước dẫn vào yếu tố nhiễu ngày mai.</a:t>
+              <a:t>Đáp án câu hỏi cuối buổi: thuần tập (chia theo phơi nhiễm họ tự chọn, theo dõi về sau); chỉ được nói 'có liên quan' - người chọn tiêm vắc xin khác biệt ở nhiều mặt (hiệu ứng người dùng khỏe mạnh), một bước dẫn vào yếu tố nhiễu thứ Bảy tuần sau.</a:t>
             </a:r>
           </a:p>
           <a:p>
@@ -8420,7 +8420,7 @@
                 <a:latin typeface="Segoe UI"/>
                 <a:cs typeface="Segoe UI"/>
               </a:rPr>
-              <a:t>Cuối tuần 2 · Thứ Bảy</a:t>
+              <a:t>Tuần 3 · Thứ Bảy</a:t>
             </a:r>
           </a:p>
           <a:p>
@@ -22765,7 +22765,7 @@
                 <a:latin typeface="Segoe UI"/>
                 <a:cs typeface="Segoe UI"/>
               </a:rPr>
-              <a:t>Ngày mai (Buổi 4): có tin được kết quả không, và tác động lớn đến đâu?</a:t>
+              <a:t>Thứ Bảy tuần sau (Buổi 4): có tin được kết quả không, và tác động lớn đến đâu?</a:t>
             </a:r>
           </a:p>
         </p:txBody>

--- a/vi/files/slides/Session_3_VN.pptx
+++ b/vi/files/slides/Session_3_VN.pptx
@@ -750,13 +750,13 @@
           <a:p>
             <a:r>
               <a:rPr lang="en-US" sz="1400" b="0" dirty="0"/>
-              <a:t>Ví dụ xuyên suốt: câu hỏi về dịch truyền được trả lời hai lần - bằng một thử nghiệm ngẫu nhiên nhỏ (Boulet 2024) và một nghiên cứu thuần tập lớn (Hyun 2023).</a:t>
+              <a:t>Ví dụ xuyên suốt: câu hỏi về dịch truyền được trả lời hai lần: bằng một thử nghiệm ngẫu nhiên nhỏ (Boulet 2024) và một nghiên cứu thuần tập lớn (Hyun 2023).</a:t>
             </a:r>
           </a:p>
           <a:p>
             <a:r>
               <a:rPr lang="en-US" sz="1400" b="0" dirty="0"/>
-              <a:t>Hỏi cả lớp: ai đã từng tham gia thu thập dữ liệu cho một nghiên cứu? Dự kiến: vài người - dùng họ làm ví dụ sau.</a:t>
+              <a:t>Hỏi cả lớp: ai đã từng tham gia thu thập dữ liệu cho một nghiên cứu? Dự kiến: vài người. Dùng họ làm ví dụ sau.</a:t>
             </a:r>
           </a:p>
           <a:p>
@@ -855,7 +855,7 @@
           <a:p>
             <a:r>
               <a:rPr lang="en-US" sz="1400" b="0" dirty="0"/>
-              <a:t>Điểm mạnh: hiệu quả với kết cục HIẾM hoặc thời gian ủ bệnh dài - không cần theo dõi hàng nghìn người. Điểm yếu: sai lệch nhớ lại, khó chọn nhóm chứng tốt, và chỉ tính được tỷ số chênh (OR), không tính được nguy cơ.</a:t>
+              <a:t>Điểm mạnh: hiệu quả với kết cục HIẾM hoặc thời gian ủ bệnh dài, vì không cần theo dõi hàng nghìn người. Điểm yếu: sai lệch nhớ lại, khó chọn nhóm chứng tốt, và chỉ tính được tỷ số chênh (OR), không tính được nguy cơ.</a:t>
             </a:r>
           </a:p>
           <a:p>
@@ -960,13 +960,13 @@
           <a:p>
             <a:r>
               <a:rPr lang="en-US" sz="1400" b="0" dirty="0"/>
-              <a:t>Bước 1: ca bệnh là người CÓ kết cục. Bước 2: ca chứng là những người tương tự KHÔNG có kết cục, từ cùng nguồn (cùng ICU, cùng thời gian) - chọn ca chứng tốt là phần khó nhất. Bước 3: nhìn lại phơi nhiễm, cùng một cách cho cả hai nhóm. Bước 4: 60% ca bệnh so với 20% ca chứng có phơi nhiễm. Bước 5: kết quả là tỷ số chênh (OR = 6,0, sẽ tính thứ Bảy tuần sau).</a:t>
+              <a:t>Bước 1: ca bệnh là người CÓ kết cục. Bước 2: ca chứng là những người tương tự KHÔNG có kết cục, từ cùng nguồn (cùng ICU, cùng thời gian). Chọn ca chứng tốt là phần khó nhất. Bước 3: nhìn lại phơi nhiễm, cùng một cách cho cả hai nhóm. Bước 4: 60% ca bệnh so với 20% ca chứng có phơi nhiễm. Bước 5: kết quả là tỷ số chênh (OR = 6,0, sẽ tính thứ Bảy tuần sau).</a:t>
             </a:r>
           </a:p>
           <a:p>
             <a:r>
               <a:rPr lang="en-US" sz="1400" b="0" dirty="0"/>
-              <a:t>Quan niệm sai: 'ca chứng nên là người tình nguyện khỏe mạnh'. Không - ca chứng phải đến từ quần thể đã sinh ra ca bệnh, nếu không phép so sánh không công bằng.</a:t>
+              <a:t>Quan niệm sai: 'ca chứng nên là người tình nguyện khỏe mạnh'. Không. Ca chứng phải đến từ quần thể đã sinh ra ca bệnh, nếu không phép so sánh không công bằng.</a:t>
             </a:r>
           </a:p>
           <a:p>
@@ -1071,13 +1071,13 @@
           <a:p>
             <a:r>
               <a:rPr lang="en-US" sz="1400" b="0" dirty="0"/>
-              <a:t>Điểm mạnh: trình tự thời gian rõ, xét được nhiều kết cục, cho nguy cơ và tỷ lệ mới mắc. Điểm yếu: chậm và tốn kém nếu tiến cứu, kém với kết cục hiếm, và yếu tố nhiễu - nhà nghiên cứu không chọn ai được truyền nhiều dịch hơn.</a:t>
+              <a:t>Điểm mạnh: trình tự thời gian rõ, xét được nhiều kết cục, cho nguy cơ và tỷ lệ mới mắc. Điểm yếu: chậm và tốn kém nếu tiến cứu, kém với kết cục hiếm, và yếu tố nhiễu, vì nhà nghiên cứu không chọn ai được truyền nhiều dịch hơn.</a:t>
             </a:r>
           </a:p>
           <a:p>
             <a:r>
               <a:rPr lang="en-US" sz="1400" b="0" dirty="0"/>
-              <a:t>Quan niệm sai: 'hồi cứu nghĩa là chất lượng kém'. Không hẳn - chất lượng phụ thuộc vào việc ghi chép dữ liệu tốt đến đâu.</a:t>
+              <a:t>Quan niệm sai: 'hồi cứu nghĩa là chất lượng kém'. Không hẳn. Chất lượng phụ thuộc vào việc ghi chép dữ liệu tốt đến đâu.</a:t>
             </a:r>
           </a:p>
           <a:p>
@@ -1170,13 +1170,13 @@
           <a:p>
             <a:r>
               <a:rPr lang="en-US" sz="1400" b="0" dirty="0"/>
-              <a:t>Đây là cách Bài báo 2 (Hyun 2023) hoạt động - ví dụ tốt về thuần tập xây dựng từ một sổ bộ có dữ liệu thu thập tiến cứu.</a:t>
+              <a:t>Đây là cách Bài báo 2 (Hyun 2023) hoạt động. Đây là ví dụ tốt về thuần tập xây dựng từ một sổ bộ có dữ liệu thu thập tiến cứu.</a:t>
             </a:r>
           </a:p>
           <a:p>
             <a:r>
               <a:rPr lang="en-US" sz="1400" b="0" dirty="0"/>
-              <a:t>Bước 1: nhóm thuần tập - ai được theo dõi (và ai bị loại: bệnh nhân rời ICU trước ngày 3). Bước 2: phơi nhiễm được đo TRƯỚC kết cục. Bước 3: kết cục được đếm sau đó. Bước 4: so sánh các nhóm; Hyun ghép cặp theo điểm xu hướng để các nhóm tương đồng (483, 373 và 392 cặp cho ngày 1, 2 và 3). Kết quả ngày 2: HR 2,13 (KTC 95% 1,48-3,06); ngày 1 không khác biệt rõ.</a:t>
+              <a:t>Bước 1: nhóm thuần tập: ai được theo dõi (và ai bị loại: bệnh nhân rời ICU trước ngày 3). Bước 2: phơi nhiễm được đo TRƯỚC kết cục. Bước 3: kết cục được đếm sau đó. Bước 4: so sánh các nhóm; Hyun ghép cặp theo điểm xu hướng để các nhóm tương đồng (483, 373 và 392 cặp cho ngày 1, 2 và 3). Kết quả ngày 2: HR 2,13 (KTC 95% 1,48-3,06); ngày 1 không khác biệt rõ.</a:t>
             </a:r>
           </a:p>
           <a:p>
@@ -1188,7 +1188,7 @@
           <a:p>
             <a:r>
               <a:rPr lang="en-US" sz="1400" b="0" dirty="0"/>
-              <a:t>Hỏi cả lớp: ai quyết định bệnh nhân nào được truyền nhiều dịch hơn? Dự kiến: bác sĩ điều trị, thường vì bệnh nhân nặng hơn - ta quay lại ở Buổi 4 (yếu tố nhiễu).</a:t>
+              <a:t>Hỏi cả lớp: ai quyết định bệnh nhân nào được truyền nhiều dịch hơn? Dự kiến: bác sĩ điều trị, thường vì bệnh nhân nặng hơn. Ta quay lại ở Buổi 4 (yếu tố nhiễu).</a:t>
             </a:r>
           </a:p>
           <a:p>
@@ -1287,7 +1287,7 @@
           <a:p>
             <a:r>
               <a:rPr lang="en-US" sz="1400" b="0" dirty="0"/>
-              <a:t>Lưu ý kết quả trung thực: mỗi nhóm có 6 ca tử vong đến ngày 28. Với 24 bệnh nhân mỗi nhóm, điều này gần như không nói được gì về tử vong - thử nghiệm thí điểm được tính cỡ mẫu cho cân bằng dịch.</a:t>
+              <a:t>Lưu ý kết quả trung thực: mỗi nhóm có 6 ca tử vong đến ngày 28. Với 24 bệnh nhân mỗi nhóm, điều này gần như không nói được gì về tử vong. Thử nghiệm thí điểm được tính cỡ mẫu cho cân bằng dịch.</a:t>
             </a:r>
           </a:p>
           <a:p>
@@ -1392,19 +1392,19 @@
           <a:p>
             <a:r>
               <a:rPr lang="en-US" sz="1400" b="0" dirty="0"/>
-              <a:t>Bước 1: tiêu chuẩn chọn chặt chẽ (ta quay lại khi xây dựng đề cương). Bước 2: đồng ý tham gia - ở ICU thường từ người đại diện, trước hoặc ngay sau phân nhóm. Bước 3: phân nhóm bằng máy tính trung tâm giữ kín lần phân bổ tiếp theo (che giấu phân bổ - Buổi 4). Bước 4: thực hiện hai chiến lược. Bước 5: kết cục chính là cân bằng dịch ngày 5; tử vong ngày 28 là 6/24 ở mỗi nhóm.</a:t>
+              <a:t>Bước 1: tiêu chuẩn chọn chặt chẽ (ta quay lại khi xây dựng đề cương). Bước 2: đồng ý tham gia (ở ICU thường từ người đại diện), trước hoặc ngay sau phân nhóm. Bước 3: phân nhóm bằng máy tính trung tâm giữ kín lần phân bổ tiếp theo (che giấu phân bổ, Buổi 4). Bước 4: thực hiện hai chiến lược. Bước 5: kết cục chính là cân bằng dịch ngày 5; tử vong ngày 28 là 6/24 ở mỗi nhóm.</a:t>
             </a:r>
           </a:p>
           <a:p>
             <a:r>
               <a:rPr lang="en-US" sz="1400" b="0" dirty="0"/>
-              <a:t>Quan niệm sai: 'ngẫu nhiên = làm mù'. Không phải ở đây - bác sĩ biết nhóm; chỉ bệnh nhân và nhà thống kê được làm mù.</a:t>
+              <a:t>Quan niệm sai: 'ngẫu nhiên = làm mù'. Không phải ở đây. Bác sĩ biết nhóm; chỉ bệnh nhân và nhà thống kê được làm mù.</a:t>
             </a:r>
           </a:p>
           <a:p>
             <a:r>
               <a:rPr lang="en-US" sz="1400" b="0" dirty="0"/>
-              <a:t>Hỏi cả lớp: bước nào biến đây thành THỰC NGHIỆM thay vì thuần tập? Dự kiến: bước 3 - nhà nghiên cứu chỉ định phơi nhiễm.</a:t>
+              <a:t>Hỏi cả lớp: bước nào biến đây thành THỰC NGHIỆM thay vì thuần tập? Dự kiến: bước 3, khi nhà nghiên cứu chỉ định phơi nhiễm.</a:t>
             </a:r>
           </a:p>
           <a:p>
@@ -1689,7 +1689,7 @@
           <a:p>
             <a:r>
               <a:rPr lang="en-US" sz="1400" b="0" dirty="0"/>
-              <a:t>Tổng quan hệ thống dùng chiến lược tìm kiếm định trước, có thể lặp lại (nhớ PubMed và Boolean ở Buổi 2) và thẩm định mọi nghiên cứu tìm được. Phân tích gộp sau đó gộp kết quả thành một ước lượng chung - hình thoi ở cuối biểu đồ rừng (forest plot).</a:t>
+              <a:t>Tổng quan hệ thống dùng chiến lược tìm kiếm định trước, có thể lặp lại (nhớ PubMed và Boolean ở Buổi 2) và thẩm định mọi nghiên cứu tìm được. Phân tích gộp sau đó gộp kết quả thành một ước lượng chung: hình thoi ở cuối biểu đồ rừng (forest plot).</a:t>
             </a:r>
           </a:p>
           <a:p>
@@ -1701,7 +1701,7 @@
           <a:p>
             <a:r>
               <a:rPr lang="en-US" sz="1400" b="0" dirty="0"/>
-              <a:t>Quan niệm sai: 'phân tích gộp luôn là bằng chứng tốt nhất'. Nó chỉ tốt bằng các nghiên cứu được gộp - đầu vào kém, đầu ra kém. Gộp các thử nghiệm nhỏ bị sai lệch cho một câu trả lời sai nhưng rất chính xác.</a:t>
+              <a:t>Quan niệm sai: 'phân tích gộp luôn là bằng chứng tốt nhất'. Nó chỉ tốt bằng các nghiên cứu được gộp: đầu vào kém, đầu ra kém. Gộp các thử nghiệm nhỏ bị sai lệch cho một câu trả lời sai nhưng rất chính xác.</a:t>
             </a:r>
           </a:p>
           <a:p>
@@ -1806,7 +1806,7 @@
           <a:p>
             <a:r>
               <a:rPr lang="en-US" sz="1400" b="0" dirty="0"/>
-              <a:t>Quan niệm sai: 'bất cứ thứ gì ở tầng cao hơn đều thắng tầng dưới'. Một RCT thí điểm 48 bệnh nhân không bác bỏ được một thuần tập đa trung tâm cẩn thận về tử vong - chúng trả lời những phần khác nhau của câu hỏi.</a:t>
+              <a:t>Quan niệm sai: 'bất cứ thứ gì ở tầng cao hơn đều thắng tầng dưới'. Một RCT thí điểm 48 bệnh nhân không bác bỏ được một thuần tập đa trung tâm cẩn thận về tử vong. Chúng trả lời những phần khác nhau của câu hỏi.</a:t>
             </a:r>
           </a:p>
           <a:p>
@@ -1899,13 +1899,13 @@
           <a:p>
             <a:r>
               <a:rPr lang="en-US" sz="1400" b="0" dirty="0"/>
-              <a:t>Mục đích: gợi lại Buổi 2 và đặt câu hỏi của từng nhóm trở lại bàn - phần xây dựng đề cương hôm nay chọn thiết kế cho câu hỏi đó.</a:t>
+              <a:t>Mục đích: gợi lại Buổi 2 và đặt câu hỏi của từng nhóm trở lại bàn. Phần xây dựng đề cương hôm nay chọn thiết kế cho câu hỏi đó.</a:t>
             </a:r>
           </a:p>
           <a:p>
             <a:r>
               <a:rPr lang="en-US" sz="1400" b="0" dirty="0"/>
-              <a:t>Đáp án. C1: AND với một khái niệm khác thu hẹp tìm kiếm; OR mở rộng. C2: hình và bảng (thứ tự đọc: tiêu đề, tóm tắt, hình và bảng, rồi phương pháp). C3: tô vẽ (spin) - mô tả kết quả không có ý nghĩa như thể có lợi.</a:t>
+              <a:t>Đáp án. C1: AND với một khái niệm khác thu hẹp tìm kiếm; OR mở rộng. C2: hình và bảng (thứ tự đọc: tiêu đề, tóm tắt, hình và bảng, rồi phương pháp). C3: tô vẽ (spin), tức là mô tả kết quả không có ý nghĩa như thể có lợi.</a:t>
             </a:r>
           </a:p>
           <a:p>
@@ -2022,7 +2022,7 @@
           <a:p>
             <a:r>
               <a:rPr lang="en-US" sz="1400" b="0" dirty="0"/>
-              <a:t>Quan niệm sai: gọi tên thiết kế theo chữ trong tiêu đề ('tiến cứu', 'sổ bộ', 'hồi cứu'). Tiêu đề có thể gây nhầm - hãy dùng ba câu hỏi.</a:t>
+              <a:t>Quan niệm sai: gọi tên thiết kế theo chữ trong tiêu đề ('tiến cứu', 'sổ bộ', 'hồi cứu'). Tiêu đề có thể gây nhầm, vì vậy hãy dùng ba câu hỏi.</a:t>
             </a:r>
           </a:p>
           <a:p>
@@ -2121,7 +2121,7 @@
           <a:p>
             <a:r>
               <a:rPr lang="en-US" sz="1400" b="0" dirty="0"/>
-              <a:t>Ý chính: điểm mạnh độc nhất của RCT là cân bằng các yếu tố nhiễu CHƯA BIẾT. Điểm yếu thường là khả năng khái quát - bệnh nhân thử nghiệm được chọn lọc (Boulet loại người trên 85 tuổi, người cần lọc máu và người suy dinh dưỡng nặng).</a:t>
+              <a:t>Ý chính: điểm mạnh độc nhất của RCT là cân bằng các yếu tố nhiễu CHƯA BIẾT. Điểm yếu thường là khả năng khái quát: bệnh nhân thử nghiệm được chọn lọc (Boulet loại người trên 85 tuổi, người cần lọc máu và người suy dinh dưỡng nặng).</a:t>
             </a:r>
           </a:p>
           <a:p>
@@ -2232,7 +2232,7 @@
           <a:p>
             <a:r>
               <a:rPr lang="en-US" sz="1400" b="0" dirty="0"/>
-              <a:t>Hyun (thuần tập): hàng nghìn bệnh nhân và đúng kết cục ta quan tâm. Cân bằng dịch dương ở ngày 2-3 có liên quan với tử vong ngày 28 cao hơn (HR 2,13 ở ngày 2; 1,56 ở ngày 3; ngày 1 không khác biệt rõ). Nhưng không chứng minh được dịch gây tử vong - bệnh nhân nặng hơn được truyền nhiều dịch hơn.</a:t>
+              <a:t>Hyun (thuần tập): hàng nghìn bệnh nhân và đúng kết cục ta quan tâm. Cân bằng dịch dương ở ngày 2-3 có liên quan với tử vong ngày 28 cao hơn (HR 2,13 ở ngày 2; 1,56 ở ngày 3; ngày 1 không khác biệt rõ). Nhưng không chứng minh được dịch gây tử vong, vì bệnh nhân nặng hơn được truyền nhiều dịch hơn.</a:t>
             </a:r>
           </a:p>
           <a:p>
@@ -2244,7 +2244,7 @@
           <a:p>
             <a:r>
               <a:rPr lang="en-US" sz="1400" b="0" dirty="0"/>
-              <a:t>Hỏi cả lớp: viết một câu kết luận trung thực cho mỗi bài. Dự kiến: Boulet - 'chiến lược không làm giảm rõ cân bằng dịch ngày 5'; Hyun - 'cân bằng dịch dương ở ngày 2-3 có liên quan với tử vong cao hơn'.</a:t>
+              <a:t>Hỏi cả lớp: viết một câu kết luận trung thực cho mỗi bài. Dự kiến: với Boulet, 'chiến lược không làm giảm rõ cân bằng dịch ngày 5'; với Hyun, 'cân bằng dịch dương ở ngày 2-3 có liên quan với tử vong cao hơn'.</a:t>
             </a:r>
           </a:p>
           <a:p>
@@ -2337,7 +2337,7 @@
           <a:p>
             <a:r>
               <a:rPr lang="en-US" sz="1400" b="0" dirty="0"/>
-              <a:t>Đáp án. A: lên - thử nghiệm ngẫu nhiên được phép nói về nhân quả, và câu này báo cáo trung thực một kết quả âm tính. B: XUỐNG - thuần tập chỉ nói 'có liên quan', không nói 'gây ra' (chính tóm tắt của Hyun dùng đúng chữ 'có liên quan'). C: lên - 'có liên quan' là từ đúng cho khảo sát cắt ngang; nó không cho biết cái nào có trước.</a:t>
+              <a:t>Đáp án. A: lên. Thử nghiệm ngẫu nhiên được phép nói về nhân quả, và câu này báo cáo trung thực một kết quả âm tính. B: XUỐNG. Thuần tập chỉ nói 'có liên quan', không nói 'gây ra' (chính tóm tắt của Hyun dùng đúng chữ 'có liên quan'). C: lên. 'Có liên quan' là từ đúng cho khảo sát cắt ngang; nó không cho biết cái nào có trước.</a:t>
             </a:r>
           </a:p>
           <a:p>
@@ -2436,13 +2436,13 @@
           <a:p>
             <a:r>
               <a:rPr lang="en-US" sz="1400" b="0" dirty="0"/>
-              <a:t>Cách chạy: 9 phút làm theo cặp, 6 phút thảo luận chung. Khi thảo luận, không đi qua cả tám câu - hỏi các cặp đã đánh dấu sao câu nào và thảo luận những câu đó. Tóm tắt 5 (thuần tập hồi cứu nghe giống bệnh - chứng), 7 (nghiên cứu trước - sau không ngẫu nhiên) và 9 (thử nghiệm theo cụm, tùy chọn - sẽ học sau giải lao) thường khó nhất.</a:t>
+              <a:t>Cách chạy: 9 phút làm theo cặp, 6 phút thảo luận chung. Khi thảo luận, không đi qua cả tám câu. Hỏi các cặp đã đánh dấu sao câu nào và thảo luận những câu đó. Tóm tắt 5 (thuần tập hồi cứu nghe giống bệnh - chứng), 7 (nghiên cứu trước-sau không ngẫu nhiên) và 9 (thử nghiệm theo cụm, tùy chọn; sẽ học sau giải lao) thường khó nhất.</a:t>
             </a:r>
           </a:p>
           <a:p>
             <a:r>
               <a:rPr lang="en-US" sz="1400" b="0" dirty="0"/>
-              <a:t>Ý chính: cụm từ làm bằng chứng quan trọng hơn cái nhãn - 'phân bổ ngẫu nhiên', 'chọn những bệnh nhân đã bị', 'theo dõi trong 12 tháng', 'trong một ngày'.</a:t>
+              <a:t>Ý chính: cụm từ làm bằng chứng quan trọng hơn cái nhãn: 'phân bổ ngẫu nhiên', 'chọn những bệnh nhân đã bị', 'theo dõi trong 12 tháng', 'trong một ngày'.</a:t>
             </a:r>
           </a:p>
           <a:p>
@@ -2541,7 +2541,7 @@
           <a:p>
             <a:r>
               <a:rPr lang="en-US" sz="1400" b="0" dirty="0"/>
-              <a:t>Trong giờ giải lao, đi qua các nhóm và hỏi nhẹ nhàng họ đang nghĩ đến thiết kế nào cho câu hỏi của mình - giúp bạn biết nhóm nào sẽ cần hỗ trợ trong phần xây dựng đề cương.</a:t>
+              <a:t>Trong giờ giải lao, đi qua các nhóm và hỏi nhẹ nhàng họ đang nghĩ đến thiết kế nào cho câu hỏi của mình. Điều này giúp bạn biết nhóm nào sẽ cần hỗ trợ trong phần xây dựng đề cương.</a:t>
             </a:r>
           </a:p>
           <a:p>
@@ -2727,7 +2727,7 @@
           <a:p>
             <a:r>
               <a:rPr lang="en-US" sz="1400" b="0" dirty="0"/>
-              <a:t>Bắt chéo (crossover): mỗi bệnh nhân nhận cả hai điều trị theo thứ tự ngẫu nhiên, có giai đoạn thải trừ ở giữa, và là đối chứng của chính mình - nên cần ít bệnh nhân hơn. Chỉ dùng cho bệnh mạn tính, ổn định, khi tác dụng hết đi (ví dụ thuốc hít trong COPD). Vô dụng trong sốc nhiễm khuẩn: bệnh nhân ở ngày 7 không còn như ngày 1.</a:t>
+              <a:t>Bắt chéo (crossover): mỗi bệnh nhân nhận cả hai điều trị theo thứ tự ngẫu nhiên, có giai đoạn thải trừ ở giữa, và là đối chứng của chính mình, nên cần ít bệnh nhân hơn. Chỉ dùng cho bệnh mạn tính, ổn định, khi tác dụng hết đi (ví dụ thuốc hít trong COPD). Vô dụng trong sốc nhiễm khuẩn: bệnh nhân ở ngày 7 không còn như ngày 1.</a:t>
             </a:r>
           </a:p>
           <a:p>
@@ -2739,7 +2739,7 @@
           <a:p>
             <a:r>
               <a:rPr lang="en-US" sz="1400" b="0" dirty="0"/>
-              <a:t>Giai thừa (factorial): hai câu hỏi trong một thử nghiệm - bệnh nhân được phân nhóm hai lần (ví dụ chiến lược dịch VÀ vitamin C), tạo bốn nhóm. Hiệu quả nếu hai điều trị không tương tác.</a:t>
+              <a:t>Giai thừa (factorial): hai câu hỏi trong một thử nghiệm. Bệnh nhân được phân nhóm hai lần (ví dụ chiến lược dịch VÀ vitamin C), tạo bốn nhóm. Hiệu quả nếu hai điều trị không tương tác.</a:t>
             </a:r>
           </a:p>
           <a:p>
@@ -2751,7 +2751,7 @@
           <a:p>
             <a:r>
               <a:rPr lang="en-US" sz="1400" b="0" dirty="0"/>
-              <a:t>Hỏi cả lớp: muốn thử một bảng kiểm bàn giao mới cho điều dưỡng, chọn cách bố trí nào? Dự kiến: theo cụm - phân nhóm ngẫu nhiên theo khoa hoặc ca trực, không theo bệnh nhân.</a:t>
+              <a:t>Hỏi cả lớp: muốn thử một bảng kiểm bàn giao mới cho điều dưỡng, chọn cách bố trí nào? Dự kiến: theo cụm. Phân nhóm ngẫu nhiên theo khoa hoặc ca trực, không theo bệnh nhân.</a:t>
             </a:r>
           </a:p>
           <a:p>
@@ -2838,7 +2838,7 @@
           <a:p>
             <a:r>
               <a:rPr lang="en-US" sz="1400" b="0" dirty="0"/>
-              <a:t>Thử nghiệm vượt trội (superiority) hỏi: điều trị mới có TỐT HƠN không? Thử nghiệm không kém hơn (non-inferiority) hỏi: nó có KHÔNG KÉM HƠN ĐẾN MỨC KHÔNG CHẤP NHẬN ĐƯỢC không - thường vì nó rẻ hơn, an toàn hơn, đơn giản hơn hoặc dùng ít dịch hơn.</a:t>
+              <a:t>Thử nghiệm vượt trội (superiority) hỏi: điều trị mới có TỐT HƠN không? Thử nghiệm không kém hơn (non-inferiority) hỏi: nó có KHÔNG KÉM HƠN ĐẾN MỨC KHÔNG CHẤP NHẬN ĐƯỢC không (thường vì nó rẻ hơn, an toàn hơn, đơn giản hơn hoặc dùng ít dịch hơn).</a:t>
             </a:r>
           </a:p>
           <a:p>
@@ -2850,19 +2850,19 @@
           <a:p>
             <a:r>
               <a:rPr lang="en-US" sz="1400" b="0" dirty="0"/>
-              <a:t>Đọc các thanh (hiệu số và KTC 95%). A: toàn bộ KTC dưới 0 - vượt trội. B: KTC cắt 0 nhưng vẫn dưới ngưỡng - không kém hơn. C: KTC cắt ngưỡng - chưa kết luận. D: toàn bộ KTC trên ngưỡng - kém hơn.</a:t>
+              <a:t>Đọc các thanh (hiệu số và KTC 95%). A: toàn bộ KTC dưới 0, vậy là vượt trội. B: KTC cắt 0 nhưng vẫn dưới ngưỡng, vậy là không kém hơn. C: KTC cắt ngưỡng, vậy là chưa kết luận. D: toàn bộ KTC trên ngưỡng, vậy là kém hơn.</a:t>
             </a:r>
           </a:p>
           <a:p>
             <a:r>
               <a:rPr lang="en-US" sz="1400" b="0" dirty="0"/>
-              <a:t>Quan niệm sai: 'p &gt; 0,05 trong thử nghiệm vượt trội chứng tỏ hai điều trị tương đương'. Không - không có bằng chứng không phải là bằng chứng của sự không có. p = 0,42 của Boulet không chứng tỏ hạn chế dịch tốt bằng chăm sóc thường quy.</a:t>
+              <a:t>Quan niệm sai: 'p &gt; 0,05 trong thử nghiệm vượt trội chứng tỏ hai điều trị tương đương'. Không. Không có bằng chứng không phải là bằng chứng của sự không có. p = 0,42 của Boulet không chứng tỏ hạn chế dịch tốt bằng chăm sóc thường quy.</a:t>
             </a:r>
           </a:p>
           <a:p>
             <a:r>
               <a:rPr lang="en-US" sz="1400" b="0" dirty="0"/>
-              <a:t>Hỏi cả lớp: ai nên quyết định ngưỡng - nhà thống kê hay bác sĩ lâm sàng? Dự kiến: bác sĩ lâm sàng (và bệnh nhân), cùng nhà thống kê; đó là một nhận định lâm sàng.</a:t>
+              <a:t>Hỏi cả lớp: ai nên quyết định ngưỡng: nhà thống kê hay bác sĩ lâm sàng? Dự kiến: bác sĩ lâm sàng (và bệnh nhân), cùng nhà thống kê; đó là một nhận định lâm sàng.</a:t>
             </a:r>
           </a:p>
           <a:p>
@@ -2973,7 +2973,7 @@
           <a:p>
             <a:r>
               <a:rPr lang="en-US" sz="1400" b="0" dirty="0"/>
-              <a:t>Hỏi cả lớp: với những con số này, có nên làm thử nghiệm 1.000 bệnh nhân tại đúng 3 ICU đó không? Dự kiến: không theo thiết kế này - 3 bệnh nhân mỗi tháng thì mất hàng chục năm; cần nhiều điểm hơn hoặc tiêu chuẩn chọn rộng hơn.</a:t>
+              <a:t>Hỏi cả lớp: với những con số này, có nên làm thử nghiệm 1.000 bệnh nhân tại đúng 3 ICU đó không? Dự kiến: không theo thiết kế này. Với 3 bệnh nhân mỗi tháng sẽ mất hàng chục năm; cần nhiều điểm hơn hoặc tiêu chuẩn chọn rộng hơn.</a:t>
             </a:r>
           </a:p>
           <a:p>
@@ -3072,7 +3072,7 @@
           <a:p>
             <a:r>
               <a:rPr lang="en-US" sz="1400" b="0" dirty="0"/>
-              <a:t>Quan niệm sai: 'phải học thuộc tên thiết kế'. Không - có thể suy ra từ hai câu hỏi ở thông điệp chính.</a:t>
+              <a:t>Quan niệm sai: 'phải học thuộc tên thiết kế'. Không. Có thể suy ra từ hai câu hỏi ở thông điệp chính.</a:t>
             </a:r>
           </a:p>
           <a:p>
@@ -3165,13 +3165,13 @@
           <a:p>
             <a:r>
               <a:rPr lang="en-US" sz="1400" b="0" dirty="0"/>
-              <a:t>Phần lớn dự án cải tiến chất lượng áp dụng thay đổi cho mọi người cùng lúc - không ngẫu nhiên, không có nhóm chứng song song. Đó là thiết kế bán thực nghiệm (quasi-experimental).</a:t>
+              <a:t>Phần lớn dự án cải tiến chất lượng áp dụng thay đổi cho mọi người cùng lúc, không ngẫu nhiên và không có nhóm chứng song song. Đó là thiết kế bán thực nghiệm (quasi-experimental).</a:t>
             </a:r>
           </a:p>
           <a:p>
             <a:r>
               <a:rPr lang="en-US" sz="1400" b="0" dirty="0"/>
-              <a:t>Nghiên cứu trước - sau đơn giản so sánh trung bình trước với trung bình sau. Yếu: tỷ lệ thường tự giảm (mùa, nhân viên mới, dự án khác, hồi quy về trung bình sau một tháng xấu).</a:t>
+              <a:t>Nghiên cứu trước-sau đơn giản so sánh trung bình trước với trung bình sau. Yếu: tỷ lệ thường tự giảm (mùa, nhân viên mới, dự án khác, hồi quy về trung bình sau một tháng xấu).</a:t>
             </a:r>
           </a:p>
           <a:p>
@@ -3195,7 +3195,7 @@
           <a:p>
             <a:r>
               <a:rPr lang="en-US" sz="1400" b="0" dirty="0"/>
-              <a:t>Hỏi cả lớp: trong tháng thực hiện dự án cải tiến gần nhất, bệnh viện còn thay đổi gì khác? Dự kiến: thường có - luân chuyển nhân sự, chính sách mới, kiểm tra - chính vì vậy xu hướng mới quan trọng.</a:t>
+              <a:t>Hỏi cả lớp: trong tháng thực hiện dự án cải tiến gần nhất, bệnh viện còn thay đổi gì khác? Dự kiến: thường có (luân chuyển nhân sự, chính sách mới, kiểm tra), chính vì vậy xu hướng mới quan trọng.</a:t>
             </a:r>
           </a:p>
           <a:p>
@@ -3405,7 +3405,7 @@
           <a:p>
             <a:r>
               <a:rPr lang="en-US" sz="1400" b="0" dirty="0"/>
-              <a:t>Ý chính: lát nữa các nhóm sẽ biện luận thiết kế của mình trong phần xây dựng đề cương bằng đúng logic này - 'câu hỏi của chúng tôi về X, nên thiết kế khả thi tốt nhất là Y'.</a:t>
+              <a:t>Ý chính: lát nữa các nhóm sẽ biện luận thiết kế của mình trong phần xây dựng đề cương bằng đúng logic này: 'câu hỏi của chúng tôi về X, nên thiết kế khả thi tốt nhất là Y'.</a:t>
             </a:r>
           </a:p>
           <a:p>
@@ -3516,7 +3516,7 @@
           <a:p>
             <a:r>
               <a:rPr lang="en-US" sz="1400" b="0" dirty="0"/>
-              <a:t>Đáp án. A: thử nghiệm không kém hơn - xác định ngưỡng từ trước. B: thử nghiệm ngẫu nhiên theo cụm - phân nhóm theo khoa, không theo bệnh nhân. C: chuỗi thời gian ngắt quãng - so sánh các tháng sau gói can thiệp với xu hướng trước đó. D: thiết kế định tính - phỏng vấn sâu (hoặc thảo luận nhóm) với gia đình.</a:t>
+              <a:t>Đáp án. A: thử nghiệm không kém hơn. Xác định ngưỡng từ trước. B: thử nghiệm ngẫu nhiên theo cụm. Phân nhóm theo khoa, không theo bệnh nhân. C: chuỗi thời gian ngắt quãng. So sánh các tháng sau gói can thiệp với xu hướng trước đó. D: thiết kế định tính, dùng phỏng vấn sâu (hoặc thảo luận nhóm) với gia đình.</a:t>
             </a:r>
           </a:p>
           <a:p>
@@ -3615,7 +3615,7 @@
           <a:p>
             <a:r>
               <a:rPr lang="en-US" sz="1400" b="0" dirty="0"/>
-              <a:t>Đáp án cho bốn câu (tài liệu Phần B; đáp án ở Solutions/s3_solutions.md): 1 hiện mắc loét tì đè - cắt ngang; 2 tắm chlorhexidine áp dụng lần lượt từng khoa - thử nghiệm ngẫu nhiên theo cụm; 3 gói xử trí nhiễm khuẩn huyết đã áp dụng, có số liệu theo tháng - chuỗi thời gian ngắt quãng; 4 vì sao điều dưỡng không báo cáo sự cố suýt xảy ra - phỏng vấn định tính hoặc thảo luận nhóm. Hai câu bổ sung tùy chọn: bệnh - chứng và không kém hơn.</a:t>
+              <a:t>Đáp án cho bốn câu (tài liệu Phần B; đáp án ở Solutions/s3_solutions.md): 1 hiện mắc loét tì đè (cắt ngang); 2 tắm chlorhexidine áp dụng lần lượt từng khoa (thử nghiệm ngẫu nhiên theo cụm); 3 gói xử trí nhiễm khuẩn huyết đã áp dụng, có số liệu theo tháng (chuỗi thời gian ngắt quãng); 4 vì sao điều dưỡng không báo cáo sự cố suýt xảy ra (phỏng vấn định tính hoặc thảo luận nhóm). Hai câu bổ sung tùy chọn: bệnh - chứng và không kém hơn.</a:t>
             </a:r>
           </a:p>
           <a:p>
@@ -3720,7 +3720,7 @@
           <a:p>
             <a:r>
               <a:rPr lang="en-US" sz="1400" b="0" dirty="0"/>
-              <a:t>Đi xuống phễu với ví dụ ICU (phiên bản quan sát của câu hỏi về dịch truyền). Quần thể nguồn: mọi người có thể được nghiên cứu. Tiêu chuẩn chọn: chữ P của PICO, đo được (từ 18 tuổi, sốc nhiễm khuẩn, vận mạch bắt đầu trong 24 giờ). Tiêu chuẩn loại trừ: người đạt tiêu chuẩn chọn nhưng phải loại vì một lý do - an toàn, hoặc không đo được kết cục (lọc máu mạn, chỉ chăm sóc giảm nhẹ).</a:t>
+              <a:t>Đi xuống phễu với ví dụ ICU (phiên bản quan sát của câu hỏi về dịch truyền). Quần thể nguồn: mọi người có thể được nghiên cứu. Tiêu chuẩn chọn: chữ P của PICO, đo được (từ 18 tuổi, sốc nhiễm khuẩn, vận mạch bắt đầu trong 24 giờ). Tiêu chuẩn loại trừ: người đạt tiêu chuẩn chọn nhưng phải loại vì một lý do như an toàn, hoặc không đo được kết cục (lọc máu mạn, chỉ chăm sóc giảm nhẹ).</a:t>
             </a:r>
           </a:p>
           <a:p>
@@ -3738,7 +3738,7 @@
           <a:p>
             <a:r>
               <a:rPr lang="en-US" sz="1400" b="0" dirty="0"/>
-              <a:t>Ý chính: mỗi tiêu chuẩn loại trừ thêm vào làm nghiên cứu 'sạch' hơn nhưng kết quả áp dụng cho ít bệnh nhân hơn (giá trị ngoại suy - Buổi 4).</a:t>
+              <a:t>Ý chính: mỗi tiêu chuẩn loại trừ thêm vào làm nghiên cứu 'sạch' hơn nhưng kết quả áp dụng cho ít bệnh nhân hơn (giá trị ngoại suy, Buổi 4).</a:t>
             </a:r>
           </a:p>
           <a:p>
@@ -3843,7 +3843,7 @@
           <a:p>
             <a:r>
               <a:rPr lang="en-US" sz="1400" b="0" dirty="0"/>
-              <a:t>Đáp án mẫu cho ví dụ xuyên suốt (phiên bản quan sát): thuần tập hồi cứu người lớn sốc nhiễm khuẩn tại ICU của chúng ta trong 3 năm; biện luận - RCT là lý tưởng nhưng không khả thi với một ICU không có kinh phí; hồ sơ sẵn có ghi dịch vào/ra và kết cục; sẽ kết luận 'có liên quan với'. Tiêu chuẩn chọn và loại trừ như slide phễu.</a:t>
+              <a:t>Đáp án mẫu cho ví dụ xuyên suốt (phiên bản quan sát): thuần tập hồi cứu người lớn sốc nhiễm khuẩn tại ICU của chúng ta trong 3 năm; biện luận: RCT là lý tưởng nhưng không khả thi với một ICU không có kinh phí; hồ sơ sẵn có ghi dịch vào/ra và kết cục; sẽ kết luận 'có liên quan với'. Tiêu chuẩn chọn và loại trừ như slide phễu.</a:t>
             </a:r>
           </a:p>
           <a:p>
@@ -4035,7 +4035,7 @@
           <a:p>
             <a:r>
               <a:rPr lang="en-US" sz="1400" b="0" dirty="0"/>
-              <a:t>Đáp án câu hỏi cuối buổi: thuần tập (chia theo phơi nhiễm họ tự chọn, theo dõi về sau); chỉ được nói 'có liên quan' - người chọn tiêm vắc xin khác biệt ở nhiều mặt (hiệu ứng người dùng khỏe mạnh), một bước dẫn vào yếu tố nhiễu thứ Bảy tuần sau.</a:t>
+              <a:t>Đáp án câu hỏi cuối buổi: thuần tập (chia theo phơi nhiễm họ tự chọn, theo dõi về sau); chỉ được nói 'có liên quan', vì người chọn tiêm vắc xin khác biệt ở nhiều mặt (hiệu ứng người dùng khỏe mạnh). Đây là bước dẫn vào yếu tố nhiễu thứ Bảy tuần sau.</a:t>
             </a:r>
           </a:p>
           <a:p>
@@ -4215,7 +4215,7 @@
           <a:p>
             <a:r>
               <a:rPr lang="en-US" sz="1400" b="0" dirty="0"/>
-              <a:t>Đây là sợi chỉ xuyên suốt cả buổi. Đọc to câu hỏi - đó là PICO cả lớp đã xây dựng ở Buổi 1.</a:t>
+              <a:t>Đây là sợi chỉ xuyên suốt cả buổi. Đọc to câu hỏi: đó là PICO cả lớp đã xây dựng ở Buổi 1.</a:t>
             </a:r>
           </a:p>
           <a:p>
@@ -4227,7 +4227,7 @@
           <a:p>
             <a:r>
               <a:rPr lang="en-US" sz="1400" b="0" dirty="0"/>
-              <a:t>Chi tiết hay bị bỏ qua: kết cục chính của Boulet là cân bằng dịch ngày 5, không phải tử vong. Đây là thử nghiệm thí điểm. Hyun xét tử vong ngày 28 - đúng câu hỏi của chúng ta - nhưng không chỉ định được gì.</a:t>
+              <a:t>Chi tiết hay bị bỏ qua: kết cục chính của Boulet là cân bằng dịch ngày 5, không phải tử vong. Đây là thử nghiệm thí điểm. Hyun xét tử vong ngày 28 (đúng câu hỏi của chúng ta) nhưng không chỉ định được gì.</a:t>
             </a:r>
           </a:p>
           <a:p>
@@ -4239,7 +4239,7 @@
           <a:p>
             <a:r>
               <a:rPr lang="en-US" sz="1400" b="0" dirty="0"/>
-              <a:t>Hỏi cả lớp: nghiên cứu nào đáng tin hơn để biết hạn chế dịch có CỨU SỐNG bệnh nhân không? Dự kiến: ý kiến khác nhau - đó chính là vấn đề; không nghiên cứu nào trả lời trọn vẹn. Giữ sự băn khoăn này đến cuối phần 3.1.</a:t>
+              <a:t>Hỏi cả lớp: nghiên cứu nào đáng tin hơn để biết hạn chế dịch có CỨU SỐNG bệnh nhân không? Dự kiến: ý kiến khác nhau, và đó chính là vấn đề. Không nghiên cứu nào trả lời trọn vẹn. Giữ sự băn khoăn này đến cuối phần 3.1.</a:t>
             </a:r>
           </a:p>
           <a:p>
@@ -4332,7 +4332,7 @@
           <a:p>
             <a:r>
               <a:rPr lang="en-US" sz="1400" b="0" dirty="0"/>
-              <a:t>Boulet: chỉ định - có; ngẫu nhiên - có; vậy là RCT. Hyun: chỉ định - không; có nhóm so sánh - có; phơi nhiễm đo trước kết cục - có; vậy là thuần tập.</a:t>
+              <a:t>Boulet: chỉ định? Có. Ngẫu nhiên? Có. Vậy là RCT. Hyun: chỉ định? Không. Có nhóm so sánh? Có. Phơi nhiễm đo trước kết cục? Có. Vậy là thuần tập.</a:t>
             </a:r>
           </a:p>
           <a:p>
@@ -4431,7 +4431,7 @@
           <a:p>
             <a:r>
               <a:rPr lang="en-US" sz="1400" b="0" dirty="0"/>
-              <a:t>Ca chứng phải đến từ quần thể đã sinh ra ca bệnh: trong ví dụ nhiễm Candida máu là những bệnh nhân ICU khác cùng khoa và cùng tháng - không phải người tình nguyện khỏe mạnh.</a:t>
+              <a:t>Ca chứng phải đến từ quần thể đã sinh ra ca bệnh: trong ví dụ nhiễm Candida máu là những bệnh nhân ICU khác cùng khoa và cùng tháng, không phải người tình nguyện khỏe mạnh.</a:t>
             </a:r>
           </a:p>
           <a:p>
@@ -4542,7 +4542,7 @@
           <a:p>
             <a:r>
               <a:rPr lang="en-US" sz="1400" b="0" dirty="0"/>
-              <a:t>Quan niệm sai: 'thử nghiệm vượt trội thất bại chứng tỏ tương đương'. Không - nó không được thiết kế với một ngưỡng.</a:t>
+              <a:t>Quan niệm sai: 'thử nghiệm vượt trội thất bại chứng tỏ tương đương'. Không. Nó không được thiết kế với một ngưỡng.</a:t>
             </a:r>
           </a:p>
           <a:p>
@@ -4728,7 +4728,7 @@
           <a:p>
             <a:r>
               <a:rPr lang="en-US" sz="1400" b="0" dirty="0"/>
-              <a:t>Slide bản quyền - để trên màn hình khi học viên ra về.</a:t>
+              <a:t>Slide bản quyền. Để trên màn hình khi học viên ra về.</a:t>
             </a:r>
           </a:p>
         </p:txBody>
@@ -4821,7 +4821,7 @@
           <a:p>
             <a:r>
               <a:rPr lang="en-US" sz="1400" b="0" dirty="0"/>
-              <a:t>Nói với cả lớp: không cần thuộc tên - cuối phần này họ sẽ tự vẽ được.</a:t>
+              <a:t>Nói với cả lớp: không cần thuộc tên. Cuối phần này họ sẽ tự vẽ được.</a:t>
             </a:r>
           </a:p>
           <a:p>
@@ -4908,7 +4908,7 @@
           <a:p>
             <a:r>
               <a:rPr lang="en-US" sz="1400" b="0" dirty="0"/>
-              <a:t>Đi từ trên xuống. Nghiên cứu mô tả mô tả điều đang có - không so sánh. Nghiên cứu phân tích so sánh các nhóm để kiểm định một mối liên quan.</a:t>
+              <a:t>Đi từ trên xuống. Nghiên cứu mô tả mô tả điều đang có, không so sánh. Nghiên cứu phân tích so sánh các nhóm để kiểm định một mối liên quan.</a:t>
             </a:r>
           </a:p>
           <a:p>
@@ -4926,7 +4926,7 @@
           <a:p>
             <a:r>
               <a:rPr lang="en-US" sz="1400" b="0" dirty="0"/>
-              <a:t>Quan niệm sai: 'quan sát nghĩa là kém'. Không - nhiều câu hỏi quan trọng (tác hại, tiên lượng, bệnh hiếm) chỉ trả lời được bằng nghiên cứu quan sát. Vấn đề là sự phù hợp, không phải thứ hạng.</a:t>
+              <a:t>Quan niệm sai: 'quan sát nghĩa là kém'. Không. Nhiều câu hỏi quan trọng (tác hại, tiên lượng, bệnh hiếm) chỉ trả lời được bằng nghiên cứu quan sát. Vấn đề là sự phù hợp, không phải thứ hạng.</a:t>
             </a:r>
           </a:p>
           <a:p>
@@ -5025,7 +5025,7 @@
           <a:p>
             <a:r>
               <a:rPr lang="en-US" sz="1400" b="0" dirty="0"/>
-              <a:t>Phơi nhiễm: điều có trước - một điều trị, chiến lược, yếu tố nguy cơ, hành vi. Kết cục: điều đếm sau đó - tử vong, nhiễm khuẩn, tổn thương, một chỉ số xét nghiệm. Nhóm so sánh là những người không có phơi nhiễm, hoặc được chăm sóc thường quy.</a:t>
+              <a:t>Phơi nhiễm: điều có trước (một điều trị, chiến lược, yếu tố nguy cơ, hành vi). Kết cục: điều đếm sau đó (tử vong, nhiễm khuẩn, tổn thương, một chỉ số xét nghiệm). Nhóm so sánh là những người không có phơi nhiễm, hoặc được chăm sóc thường quy.</a:t>
             </a:r>
           </a:p>
           <a:p>
@@ -5037,7 +5037,7 @@
           <a:p>
             <a:r>
               <a:rPr lang="en-US" sz="1400" b="0" dirty="0"/>
-              <a:t>Quan niệm sai: 'phơi nhiễm phải có hại'. Không - một điều trị cũng là phơi nhiễm.</a:t>
+              <a:t>Quan niệm sai: 'phơi nhiễm phải có hại'. Không. Một điều trị cũng là phơi nhiễm.</a:t>
             </a:r>
           </a:p>
           <a:p>
@@ -5136,7 +5136,7 @@
           <a:p>
             <a:r>
               <a:rPr lang="en-US" sz="1400" b="0" dirty="0"/>
-              <a:t>Nghiên cứu cắt ngang: một bức ảnh chụp quần thể tại một thời điểm - ví dụ khảo sát loét do tì đè ở mọi khoa trong một ngày. Nó đo tỷ lệ hiện mắc (bao nhiêu người đang mắc NGAY LÚC NÀY).</a:t>
+              <a:t>Nghiên cứu cắt ngang: một bức ảnh chụp quần thể tại một thời điểm, ví dụ khảo sát loét do tì đè ở mọi khoa trong một ngày. Nó đo tỷ lệ hiện mắc (bao nhiêu người đang mắc NGAY LÚC NÀY).</a:t>
             </a:r>
           </a:p>
           <a:p>
@@ -5154,7 +5154,7 @@
           <a:p>
             <a:r>
               <a:rPr lang="en-US" sz="1400" b="0" dirty="0"/>
-              <a:t>Hỏi cả lớp: cho một ví dụ nghiên cứu cắt ngang có thể làm ở khoa mình tuần tới. Dự kiến: khảo sát hiện mắc một thời điểm - dùng ống thông, sàng lọc mê sảng, tuân thủ vệ sinh tay.</a:t>
+              <a:t>Hỏi cả lớp: cho một ví dụ nghiên cứu cắt ngang có thể làm ở khoa mình tuần tới. Dự kiến: khảo sát hiện mắc một thời điểm (dùng ống thông, sàng lọc mê sảng, tuân thủ vệ sinh tay).</a:t>
             </a:r>
           </a:p>
           <a:p>
@@ -5247,7 +5247,7 @@
           <a:p>
             <a:r>
               <a:rPr lang="en-US" sz="1400" b="0" dirty="0"/>
-              <a:t>Bước 1-2: mọi người có mặt trong một ngày, được khám cùng một cách (giúp tránh sai lệch thông tin - Buổi 4). Bước 3: phơi nhiễm (đệm) và kết cục (loét) được ghi cùng lúc. Bước 4: kết quả là tỷ lệ hiện mắc - 37/412 bệnh nhân, 9%.</a:t>
+              <a:t>Bước 1-2: mọi người có mặt trong một ngày, được khám cùng một cách (giúp tránh sai lệch thông tin, sẽ học ở Buổi 4). Bước 3: phơi nhiễm (đệm) và kết cục (loét) được ghi cùng lúc. Bước 4: kết quả là tỷ lệ hiện mắc: 37/412 bệnh nhân, 9%.</a:t>
             </a:r>
           </a:p>
           <a:p>
@@ -8540,7 +8540,7 @@
                 <a:latin typeface="Segoe UI"/>
                 <a:cs typeface="Segoe UI"/>
               </a:rPr>
-              <a:t>Xây dựng đề cương 3: thiết kế, bối cảnh và đối tượng (35 phút) - tổng kết</a:t>
+              <a:t>Xây dựng đề cương 3: thiết kế, bối cảnh và đối tượng (35 phút), rồi tổng kết</a:t>
             </a:r>
           </a:p>
         </p:txBody>
@@ -9850,7 +9850,7 @@
                 <a:latin typeface="Segoe UI"/>
                 <a:cs typeface="Segoe UI"/>
               </a:rPr>
-              <a:t>Thuần tập: phơi nhiễm trước, kết cục sau - thời gian chạy đúng chiều.</a:t>
+              <a:t>Thuần tập: phơi nhiễm trước, kết cục sau, nên thời gian chạy đúng chiều.</a:t>
             </a:r>
           </a:p>
         </p:txBody>
@@ -10791,7 +10791,7 @@
                 <a:latin typeface="Segoe UI"/>
                 <a:cs typeface="Segoe UI"/>
               </a:rPr>
-              <a:t>Trong RCT, may rủi - không phải bác sĩ - quyết định ai nhận gì.</a:t>
+              <a:t>Trong RCT, may rủi (không phải bác sĩ) quyết định ai nhận gì.</a:t>
             </a:r>
           </a:p>
         </p:txBody>
@@ -11308,7 +11308,7 @@
                 <a:latin typeface="Segoe UI"/>
                 <a:cs typeface="Segoe UI"/>
               </a:rPr>
-              <a:t>Máy tính trung tâm, 1:1 - không ai đoán được</a:t>
+              <a:t>Máy tính trung tâm, 1:1, nên không ai đoán được</a:t>
             </a:r>
           </a:p>
         </p:txBody>
@@ -11551,7 +11551,7 @@
                 <a:latin typeface="Segoe UI"/>
                 <a:cs typeface="Segoe UI"/>
               </a:rPr>
-              <a:t>Trong thử nghiệm, nhà nghiên cứu chỉ định phơi nhiễm - bằng may rủi.</a:t>
+              <a:t>Trong thử nghiệm, nhà nghiên cứu chỉ định phơi nhiễm bằng may rủi.</a:t>
             </a:r>
           </a:p>
         </p:txBody>
@@ -12097,7 +12097,7 @@
                 <a:latin typeface="Segoe UI"/>
                 <a:cs typeface="Segoe UI"/>
               </a:rPr>
-              <a:t>Mỗi tình huống một thiết kế - đáp án ở slide sau</a:t>
+              <a:t>Mỗi tình huống một thiết kế (đáp án ở slide sau)</a:t>
             </a:r>
           </a:p>
         </p:txBody>
@@ -13858,7 +13858,7 @@
                 <a:latin typeface="Segoe UI"/>
                 <a:cs typeface="Segoe UI"/>
               </a:rPr>
-              <a:t>Không chấm điểm - chỉ khởi động</a:t>
+              <a:t>Không chấm điểm, chỉ khởi động</a:t>
             </a:r>
           </a:p>
         </p:txBody>
@@ -14358,7 +14358,7 @@
                 <a:latin typeface="Segoe UI"/>
                 <a:cs typeface="Segoe UI"/>
               </a:rPr>
-              <a:t>Điểm mạnh và điểm yếu trong nháy mắt</a:t>
+              <a:t>Thiết kế nào cũng phải đánh đổi một điều gì đó</a:t>
             </a:r>
           </a:p>
         </p:txBody>
@@ -14425,7 +14425,7 @@
                 <a:latin typeface="Segoe UI"/>
                 <a:cs typeface="Segoe UI"/>
               </a:rPr>
-              <a:t>Thiết kế nào cũng phải đánh đổi một điều gì đó.</a:t>
+              <a:t>Điểm mạnh và điểm yếu trong nháy mắt</a:t>
             </a:r>
           </a:p>
         </p:txBody>
@@ -16243,7 +16243,7 @@
                 <a:latin typeface="Segoe UI"/>
                 <a:cs typeface="Segoe UI"/>
               </a:rPr>
-              <a:t>Đánh dấu sao câu khó nhất - cả lớp sẽ cùng thảo luận</a:t>
+              <a:t>Đánh dấu sao câu khó nhất: cả lớp sẽ cùng thảo luận</a:t>
             </a:r>
           </a:p>
         </p:txBody>
@@ -16758,7 +16758,7 @@
                 <a:latin typeface="Segoe UI"/>
                 <a:cs typeface="Segoe UI"/>
               </a:rPr>
-              <a:t>Tùy chọn: nhìn lại câu hỏi của nhóm - thiết kế nào hợp nhất?</a:t>
+              <a:t>Tùy chọn: thiết kế nào hợp nhất với câu hỏi của nhóm?</a:t>
             </a:r>
           </a:p>
           <a:p>
@@ -18105,7 +18105,7 @@
                 <a:latin typeface="Segoe UI"/>
                 <a:cs typeface="Segoe UI"/>
               </a:rPr>
-              <a:t>Mười từ dùng suốt buổi - không cần học thuộc định nghĩa</a:t>
+              <a:t>Mười từ dùng suốt buổi (không cần học thuộc định nghĩa)</a:t>
             </a:r>
           </a:p>
         </p:txBody>
@@ -18857,14 +18857,14 @@
               <a:buNone/>
             </a:pPr>
             <a:r>
-              <a:rPr lang="en-US" sz="2100" b="1" dirty="0">
+              <a:rPr lang="en-US" sz="2400" b="1" dirty="0">
                 <a:solidFill>
                   <a:srgbClr val="0D7377"/>
                 </a:solidFill>
                 <a:latin typeface="Segoe UI"/>
                 <a:cs typeface="Segoe UI"/>
               </a:rPr>
-              <a:t>Thiết kế bán thực nghiệm: trước - sau và chuỗi thời gian ngắt quãng</a:t>
+              <a:t>Thiết kế bán thực nghiệm: trước-sau và chuỗi thời gian ngắt quãng</a:t>
             </a:r>
           </a:p>
         </p:txBody>
@@ -19560,7 +19560,7 @@
                 <a:latin typeface="Segoe UI"/>
                 <a:cs typeface="Segoe UI"/>
               </a:rPr>
-              <a:t>Bắt đầu từ câu hỏi - thiết kế sẽ theo sau.</a:t>
+              <a:t>Bắt đầu từ câu hỏi, thiết kế sẽ theo sau.</a:t>
             </a:r>
           </a:p>
         </p:txBody>
@@ -20137,7 +20137,7 @@
                 <a:latin typeface="Segoe UI"/>
                 <a:cs typeface="Segoe UI"/>
               </a:rPr>
-              <a:t>Mỗi câu một thiết kế - đáp án trong ghi chú</a:t>
+              <a:t>Mỗi câu một thiết kế (đáp án trong ghi chú)</a:t>
             </a:r>
           </a:p>
         </p:txBody>
@@ -20524,7 +20524,7 @@
                 <a:latin typeface="Segoe UI"/>
                 <a:cs typeface="Segoe UI"/>
               </a:rPr>
-              <a:t>Câu hỏi của nhóm: sẽ được phép kết luận gì - gây ra hay có liên quan?</a:t>
+              <a:t>Câu hỏi của nhóm: được nói 'gây ra' hay chỉ 'có liên quan'?</a:t>
             </a:r>
           </a:p>
           <a:p>
@@ -20789,7 +20789,7 @@
                 <a:latin typeface="Segoe UI"/>
                 <a:cs typeface="Segoe UI"/>
               </a:rPr>
-              <a:t>5 thiết kế kèm lý do và điểm yếu - gồm cả câu hỏi của nhóm</a:t>
+              <a:t>5 thiết kế kèm lý do và điểm yếu, gồm cả câu hỏi của nhóm</a:t>
             </a:r>
           </a:p>
         </p:txBody>
@@ -22990,7 +22990,7 @@
                 <a:latin typeface="Segoe UI"/>
                 <a:cs typeface="Segoe UI"/>
               </a:rPr>
-              <a:t>Slide bổ sung - Buổi 3</a:t>
+              <a:t>Slide bổ sung: Buổi 3</a:t>
             </a:r>
           </a:p>
         </p:txBody>
@@ -23060,7 +23060,7 @@
                 <a:latin typeface="Segoe UI"/>
                 <a:cs typeface="Segoe UI"/>
               </a:rPr>
-              <a:t>Slide bổ sung - Buổi 3</a:t>
+              <a:t>Slide bổ sung: Buổi 3</a:t>
             </a:r>
           </a:p>
           <a:p>
@@ -25886,7 +25886,7 @@
                 <a:latin typeface="Segoe UI"/>
                 <a:cs typeface="Segoe UI"/>
               </a:rPr>
-              <a:t>Trung bình trước - sau là yếu; chuỗi thời gian dài có đối chứng mạnh hơn nhiều.</a:t>
+              <a:t>Trung bình trước-sau là yếu; chuỗi thời gian dài có đối chứng mạnh hơn nhiều.</a:t>
             </a:r>
           </a:p>
         </p:txBody>
@@ -26968,7 +26968,7 @@
                 <a:latin typeface="Segoe UI"/>
                 <a:cs typeface="Segoe UI"/>
               </a:rPr>
-              <a:t>Gọi tên phơi nhiễm và kết cục trước - thiết kế sẽ theo sau.</a:t>
+              <a:t>Gọi tên phơi nhiễm và kết cục trước, thiết kế sẽ theo sau.</a:t>
             </a:r>
           </a:p>
         </p:txBody>

--- a/vi/files/slides/Session_3_VN.pptx
+++ b/vi/files/slides/Session_3_VN.pptx
@@ -861,13 +861,13 @@
           <a:p>
             <a:r>
               <a:rPr lang="en-US" sz="1400" b="0" dirty="0"/>
-              <a:t>Quan niệm sai: 'bệnh - chứng giống thuần tập hồi cứu vì cùng dùng hồ sơ cũ'. Khác biệt nằm ở cách chọn người: theo KẾT CỤC trong bệnh - chứng, theo PHƠI NHIỄM trong thuần tập.</a:t>
+              <a:t>Quan niệm sai: 'bệnh-chứng giống thuần tập hồi cứu vì cùng dùng hồ sơ cũ'. Khác biệt nằm ở cách chọn người: theo KẾT CỤC trong bệnh-chứng, theo PHƠI NHIỄM trong thuần tập.</a:t>
             </a:r>
           </a:p>
           <a:p>
             <a:r>
               <a:rPr lang="en-US" sz="1400" b="0" dirty="0"/>
-              <a:t>Hỏi cả lớp: vì sao không tính được nguy cơ nhiễm Candida máu từ nghiên cứu bệnh - chứng? Dự kiến: nhà nghiên cứu tự chọn số ca bệnh và ca chứng, nên tỷ lệ có kết cục do thiết kế quyết định chứ không phải do tự nhiên.</a:t>
+              <a:t>Hỏi cả lớp: vì sao không tính được nguy cơ nhiễm Candida máu từ nghiên cứu bệnh-chứng? Dự kiến: nhà nghiên cứu tự chọn số ca bệnh và ca chứng, nên tỷ lệ có kết cục do thiết kế quyết định chứ không phải do tự nhiên.</a:t>
             </a:r>
           </a:p>
           <a:p>
@@ -1596,7 +1596,7 @@
           <a:p>
             <a:r>
               <a:rPr lang="en-US" sz="1400" b="0" dirty="0"/>
-              <a:t>Quan niệm sai: 'xem hồ sơ cũ thì là bệnh - chứng'. Cách chọn mới quyết định: theo kết cục = bệnh - chứng; theo phơi nhiễm = thuần tập.</a:t>
+              <a:t>Quan niệm sai: 'xem hồ sơ cũ thì là bệnh-chứng'. Cách chọn mới quyết định: theo kết cục = bệnh-chứng; theo phơi nhiễm = thuần tập.</a:t>
             </a:r>
           </a:p>
           <a:p>
@@ -2127,13 +2127,13 @@
           <a:p>
             <a:r>
               <a:rPr lang="en-US" sz="1400" b="0" dirty="0"/>
-              <a:t>Quan niệm sai: 'nghiên cứu bệnh - chứng yếu'. Với kết cục hiếm, đó thường là thiết kế khả thi duy nhất, và chính nó lần đầu liên kết hút thuốc với ung thư phổi.</a:t>
+              <a:t>Quan niệm sai: 'nghiên cứu bệnh-chứng yếu'. Với kết cục hiếm, đó thường là thiết kế khả thi duy nhất, và chính nó lần đầu liên kết hút thuốc với ung thư phổi.</a:t>
             </a:r>
           </a:p>
           <a:p>
             <a:r>
               <a:rPr lang="en-US" sz="1400" b="0" dirty="0"/>
-              <a:t>Hỏi cả lớp: muốn tìm yếu tố nguy cơ của một phản ứng thuốc hiếm, chọn thiết kế nào? Dự kiến: bệnh - chứng.</a:t>
+              <a:t>Hỏi cả lớp: muốn tìm yếu tố nguy cơ của một phản ứng thuốc hiếm, chọn thiết kế nào? Dự kiến: bệnh-chứng.</a:t>
             </a:r>
           </a:p>
           <a:p>
@@ -2436,7 +2436,7 @@
           <a:p>
             <a:r>
               <a:rPr lang="en-US" sz="1400" b="0" dirty="0"/>
-              <a:t>Cách chạy: 9 phút làm theo cặp, 6 phút thảo luận chung. Khi thảo luận, không đi qua cả tám câu. Hỏi các cặp đã đánh dấu sao câu nào và thảo luận những câu đó. Tóm tắt 5 (thuần tập hồi cứu nghe giống bệnh - chứng), 7 (nghiên cứu trước-sau không ngẫu nhiên) và 9 (thử nghiệm theo cụm, tùy chọn; sẽ học sau giải lao) thường khó nhất.</a:t>
+              <a:t>Cách chạy: 9 phút làm theo cặp, 6 phút thảo luận chung. Khi thảo luận, không đi qua cả tám câu. Hỏi các cặp đã đánh dấu sao câu nào và thảo luận những câu đó. Tóm tắt 5 (thuần tập hồi cứu nghe giống bệnh-chứng), 7 (nghiên cứu trước-sau không ngẫu nhiên) và 9 (thử nghiệm theo cụm, tùy chọn; sẽ học sau giải lao) thường khó nhất.</a:t>
             </a:r>
           </a:p>
           <a:p>
@@ -2448,7 +2448,7 @@
           <a:p>
             <a:r>
               <a:rPr lang="en-US" sz="1400" b="0" dirty="0"/>
-              <a:t>Quan niệm sai cần lắng nghe: 'dùng hồ sơ cũ nên là bệnh - chứng'. Hỏi lại: người được chọn theo kết cục hay theo phơi nhiễm?</a:t>
+              <a:t>Quan niệm sai cần lắng nghe: 'dùng hồ sơ cũ nên là bệnh-chứng'. Hỏi lại: người được chọn theo kết cục hay theo phơi nhiễm?</a:t>
             </a:r>
           </a:p>
           <a:p>
@@ -3615,7 +3615,7 @@
           <a:p>
             <a:r>
               <a:rPr lang="en-US" sz="1400" b="0" dirty="0"/>
-              <a:t>Đáp án cho bốn câu (tài liệu Phần B; đáp án ở Solutions/s3_solutions.md): 1 hiện mắc loét tì đè (cắt ngang); 2 tắm chlorhexidine áp dụng lần lượt từng khoa (thử nghiệm ngẫu nhiên theo cụm); 3 gói xử trí nhiễm khuẩn huyết đã áp dụng, có số liệu theo tháng (chuỗi thời gian ngắt quãng); 4 vì sao điều dưỡng không báo cáo sự cố suýt xảy ra (phỏng vấn định tính hoặc thảo luận nhóm). Hai câu bổ sung tùy chọn: bệnh - chứng và không kém hơn.</a:t>
+              <a:t>Đáp án cho bốn câu (tài liệu Phần B; đáp án ở Solutions/s3_solutions.md): 1 hiện mắc loét tì đè (cắt ngang); 2 tắm chlorhexidine áp dụng lần lượt từng khoa (thử nghiệm ngẫu nhiên theo cụm); 3 gói xử trí nhiễm khuẩn huyết đã áp dụng, có số liệu theo tháng (chuỗi thời gian ngắt quãng); 4 vì sao điều dưỡng không báo cáo sự cố suýt xảy ra (phỏng vấn định tính hoặc thảo luận nhóm). Hai câu bổ sung tùy chọn: bệnh-chứng và không kém hơn.</a:t>
             </a:r>
           </a:p>
           <a:p>
@@ -4425,7 +4425,7 @@
           <a:p>
             <a:r>
               <a:rPr lang="en-US" sz="1400" b="0" dirty="0"/>
-              <a:t>EXTRA (slide bổ sung): Dành cho nhóm định làm nghiên cứu bệnh - chứng.</a:t>
+              <a:t>EXTRA (slide bổ sung): Dành cho nhóm định làm nghiên cứu bệnh-chứng.</a:t>
             </a:r>
           </a:p>
           <a:p>
@@ -8349,8 +8349,8 @@
                 <a:solidFill>
                   <a:srgbClr val="0D7377"/>
                 </a:solidFill>
-                <a:latin typeface="Segoe UI"/>
-                <a:cs typeface="Segoe UI"/>
+                <a:latin typeface="Arial"/>
+                <a:cs typeface="Arial"/>
               </a:rPr>
               <a:t>Buổi 3 · Thiết kế: chọn đúng loại nghiên cứu</a:t>
             </a:r>
@@ -8417,8 +8417,8 @@
                 <a:solidFill>
                   <a:srgbClr val="0070C0"/>
                 </a:solidFill>
-                <a:latin typeface="Segoe UI"/>
-                <a:cs typeface="Segoe UI"/>
+                <a:latin typeface="Arial"/>
+                <a:cs typeface="Arial"/>
               </a:rPr>
               <a:t>Tuần 3 · Thứ Bảy</a:t>
             </a:r>
@@ -8442,8 +8442,8 @@
                 <a:solidFill>
                   <a:srgbClr val="000000"/>
                 </a:solidFill>
-                <a:latin typeface="Segoe UI"/>
-                <a:cs typeface="Segoe UI"/>
+                <a:latin typeface="Arial"/>
+                <a:cs typeface="Arial"/>
               </a:rPr>
               <a:t>Câu hỏi ôn tập Buổi 2 (10 phút)</a:t>
             </a:r>
@@ -8461,8 +8461,8 @@
                 <a:solidFill>
                   <a:srgbClr val="000000"/>
                 </a:solidFill>
-                <a:latin typeface="Segoe UI"/>
-                <a:cs typeface="Segoe UI"/>
+                <a:latin typeface="Arial"/>
+                <a:cs typeface="Arial"/>
               </a:rPr>
               <a:t>3.1  Thiết kế nghiên cứu qua hình ảnh (45 phút) + bài tập "Gọi tên thiết kế" (15 phút)</a:t>
             </a:r>
@@ -8480,8 +8480,8 @@
                 <a:solidFill>
                   <a:srgbClr val="000000"/>
                 </a:solidFill>
-                <a:latin typeface="Segoe UI"/>
-                <a:cs typeface="Segoe UI"/>
+                <a:latin typeface="Arial"/>
+                <a:cs typeface="Arial"/>
               </a:rPr>
               <a:t>Giải lao (15 phút)</a:t>
             </a:r>
@@ -8499,8 +8499,8 @@
                 <a:solidFill>
                   <a:srgbClr val="000000"/>
                 </a:solidFill>
-                <a:latin typeface="Segoe UI"/>
-                <a:cs typeface="Segoe UI"/>
+                <a:latin typeface="Arial"/>
+                <a:cs typeface="Arial"/>
               </a:rPr>
               <a:t>3.2  Các thiết kế khác: biến thể thử nghiệm, thí điểm, cải tiến chất lượng, định tính (35 phút)</a:t>
             </a:r>
@@ -8518,8 +8518,8 @@
                 <a:solidFill>
                   <a:srgbClr val="000000"/>
                 </a:solidFill>
-                <a:latin typeface="Segoe UI"/>
-                <a:cs typeface="Segoe UI"/>
+                <a:latin typeface="Arial"/>
+                <a:cs typeface="Arial"/>
               </a:rPr>
               <a:t>Bài tập: chọn thiết kế cho 5 câu hỏi (20 phút)</a:t>
             </a:r>
@@ -8537,8 +8537,8 @@
                 <a:solidFill>
                   <a:srgbClr val="000000"/>
                 </a:solidFill>
-                <a:latin typeface="Segoe UI"/>
-                <a:cs typeface="Segoe UI"/>
+                <a:latin typeface="Arial"/>
+                <a:cs typeface="Arial"/>
               </a:rPr>
               <a:t>Xây dựng đề cương 3: thiết kế, bối cảnh và đối tượng (35 phút), rồi tổng kết</a:t>
             </a:r>
@@ -8575,7 +8575,7 @@
                     <a:lumMod val="50000"/>
                   </a:schemeClr>
                 </a:solidFill>
-                <a:latin typeface="Verdana"/>
+                <a:latin typeface="Arial"/>
               </a:rPr>
               <a:t>Neudata | #ClearDataClearImpact</a:t>
             </a:r>
@@ -8705,10 +8705,10 @@
                 <a:solidFill>
                   <a:srgbClr val="0D7377"/>
                 </a:solidFill>
-                <a:latin typeface="Segoe UI"/>
-                <a:cs typeface="Segoe UI"/>
-              </a:rPr>
-              <a:t>Bệnh - chứng: bắt đầu từ kết cục, nhìn ngược lại</a:t>
+                <a:latin typeface="Arial"/>
+                <a:cs typeface="Arial"/>
+              </a:rPr>
+              <a:t>Bệnh-chứng: bắt đầu từ kết cục, nhìn ngược lại</a:t>
             </a:r>
           </a:p>
         </p:txBody>
@@ -8802,8 +8802,8 @@
                 <a:solidFill>
                   <a:srgbClr val="FFFFFF"/>
                 </a:solidFill>
-                <a:latin typeface="Segoe UI"/>
-                <a:cs typeface="Segoe UI"/>
+                <a:latin typeface="Arial"/>
+                <a:cs typeface="Arial"/>
               </a:rPr>
               <a:t>THÔNG ĐIỆP CHÍNH   </a:t>
             </a:r>
@@ -8812,10 +8812,10 @@
                 <a:solidFill>
                   <a:srgbClr val="FFFFFF"/>
                 </a:solidFill>
-                <a:latin typeface="Segoe UI"/>
-                <a:cs typeface="Segoe UI"/>
-              </a:rPr>
-              <a:t>Bệnh - chứng: chọn người THEO kết cục, rồi so sánh phơi nhiễm trong quá khứ.</a:t>
+                <a:latin typeface="Arial"/>
+                <a:cs typeface="Arial"/>
+              </a:rPr>
+              <a:t>Bệnh-chứng: chọn người THEO kết cục, rồi so sánh phơi nhiễm trong quá khứ.</a:t>
             </a:r>
           </a:p>
         </p:txBody>
@@ -8850,7 +8850,7 @@
                     <a:lumMod val="50000"/>
                   </a:schemeClr>
                 </a:solidFill>
-                <a:latin typeface="Verdana"/>
+                <a:latin typeface="Arial"/>
               </a:rPr>
               <a:t>Neudata | #ClearDataClearImpact</a:t>
             </a:r>
@@ -8980,10 +8980,10 @@
                 <a:solidFill>
                   <a:srgbClr val="0D7377"/>
                 </a:solidFill>
-                <a:latin typeface="Segoe UI"/>
-                <a:cs typeface="Segoe UI"/>
-              </a:rPr>
-              <a:t>Ví dụ: một nghiên cứu bệnh - chứng ở ICU</a:t>
+                <a:latin typeface="Arial"/>
+                <a:cs typeface="Arial"/>
+              </a:rPr>
+              <a:t>Ví dụ: một nghiên cứu bệnh-chứng ở ICU</a:t>
             </a:r>
           </a:p>
         </p:txBody>
@@ -9047,8 +9047,8 @@
                 <a:solidFill>
                   <a:srgbClr val="595959"/>
                 </a:solidFill>
-                <a:latin typeface="Segoe UI"/>
-                <a:cs typeface="Segoe UI"/>
+                <a:latin typeface="Arial"/>
+                <a:cs typeface="Arial"/>
               </a:rPr>
               <a:t>Câu hỏi: nuôi ăn tĩnh mạch có phải yếu tố nguy cơ của nhiễm Candida máu ở ICU?</a:t>
             </a:r>
@@ -9092,10 +9092,10 @@
                 <a:solidFill>
                   <a:srgbClr val="FFFFFF"/>
                 </a:solidFill>
-                <a:latin typeface="Segoe UI"/>
-                <a:cs typeface="Segoe UI"/>
-              </a:rPr>
-              <a:t>1. Tìm ca bệnh</a:t>
+                <a:latin typeface="Arial"/>
+                <a:cs typeface="Arial"/>
+              </a:rPr>
+              <a:t>Tìm ca bệnh</a:t>
             </a:r>
           </a:p>
         </p:txBody>
@@ -9141,8 +9141,8 @@
                 <a:solidFill>
                   <a:srgbClr val="000000"/>
                 </a:solidFill>
-                <a:latin typeface="Segoe UI"/>
-                <a:cs typeface="Segoe UI"/>
+                <a:latin typeface="Arial"/>
+                <a:cs typeface="Arial"/>
               </a:rPr>
               <a:t>40 BN ICU nhiễm Candida máu (hồ sơ xét nghiệm)</a:t>
             </a:r>
@@ -9186,10 +9186,10 @@
                 <a:solidFill>
                   <a:srgbClr val="FFFFFF"/>
                 </a:solidFill>
-                <a:latin typeface="Segoe UI"/>
-                <a:cs typeface="Segoe UI"/>
-              </a:rPr>
-              <a:t>2. Tìm ca chứng</a:t>
+                <a:latin typeface="Arial"/>
+                <a:cs typeface="Arial"/>
+              </a:rPr>
+              <a:t>Tìm ca chứng</a:t>
             </a:r>
           </a:p>
         </p:txBody>
@@ -9235,8 +9235,8 @@
                 <a:solidFill>
                   <a:srgbClr val="000000"/>
                 </a:solidFill>
-                <a:latin typeface="Segoe UI"/>
-                <a:cs typeface="Segoe UI"/>
+                <a:latin typeface="Arial"/>
+                <a:cs typeface="Arial"/>
               </a:rPr>
               <a:t>80 BN ICU không bị, cùng khoa và cùng tháng</a:t>
             </a:r>
@@ -9280,10 +9280,10 @@
                 <a:solidFill>
                   <a:srgbClr val="FFFFFF"/>
                 </a:solidFill>
-                <a:latin typeface="Segoe UI"/>
-                <a:cs typeface="Segoe UI"/>
-              </a:rPr>
-              <a:t>3. Nhìn lại</a:t>
+                <a:latin typeface="Arial"/>
+                <a:cs typeface="Arial"/>
+              </a:rPr>
+              <a:t>Nhìn lại</a:t>
             </a:r>
           </a:p>
         </p:txBody>
@@ -9329,8 +9329,8 @@
                 <a:solidFill>
                   <a:srgbClr val="000000"/>
                 </a:solidFill>
-                <a:latin typeface="Segoe UI"/>
-                <a:cs typeface="Segoe UI"/>
+                <a:latin typeface="Arial"/>
+                <a:cs typeface="Arial"/>
               </a:rPr>
               <a:t>Có nuôi ăn tĩnh mạch trong 14 ngày trước?</a:t>
             </a:r>
@@ -9374,10 +9374,10 @@
                 <a:solidFill>
                   <a:srgbClr val="FFFFFF"/>
                 </a:solidFill>
-                <a:latin typeface="Segoe UI"/>
-                <a:cs typeface="Segoe UI"/>
-              </a:rPr>
-              <a:t>4. So sánh</a:t>
+                <a:latin typeface="Arial"/>
+                <a:cs typeface="Arial"/>
+              </a:rPr>
+              <a:t>So sánh</a:t>
             </a:r>
           </a:p>
         </p:txBody>
@@ -9423,8 +9423,8 @@
                 <a:solidFill>
                   <a:srgbClr val="000000"/>
                 </a:solidFill>
-                <a:latin typeface="Segoe UI"/>
-                <a:cs typeface="Segoe UI"/>
+                <a:latin typeface="Arial"/>
+                <a:cs typeface="Arial"/>
               </a:rPr>
               <a:t>Phơi nhiễm: 24/40 ca bệnh vs 16/80 ca chứng</a:t>
             </a:r>
@@ -9468,10 +9468,10 @@
                 <a:solidFill>
                   <a:srgbClr val="FFFFFF"/>
                 </a:solidFill>
-                <a:latin typeface="Segoe UI"/>
-                <a:cs typeface="Segoe UI"/>
-              </a:rPr>
-              <a:t>5. Báo cáo</a:t>
+                <a:latin typeface="Arial"/>
+                <a:cs typeface="Arial"/>
+              </a:rPr>
+              <a:t>Báo cáo</a:t>
             </a:r>
           </a:p>
         </p:txBody>
@@ -9517,8 +9517,8 @@
                 <a:solidFill>
                   <a:srgbClr val="000000"/>
                 </a:solidFill>
-                <a:latin typeface="Segoe UI"/>
-                <a:cs typeface="Segoe UI"/>
+                <a:latin typeface="Arial"/>
+                <a:cs typeface="Arial"/>
               </a:rPr>
               <a:t>Tỷ số chênh (tính ở Buổi 4)</a:t>
             </a:r>
@@ -9562,8 +9562,8 @@
                 <a:solidFill>
                   <a:srgbClr val="FFFFFF"/>
                 </a:solidFill>
-                <a:latin typeface="Segoe UI"/>
-                <a:cs typeface="Segoe UI"/>
+                <a:latin typeface="Arial"/>
+                <a:cs typeface="Arial"/>
               </a:rPr>
               <a:t>THÔNG ĐIỆP CHÍNH   </a:t>
             </a:r>
@@ -9572,8 +9572,8 @@
                 <a:solidFill>
                   <a:srgbClr val="FFFFFF"/>
                 </a:solidFill>
-                <a:latin typeface="Segoe UI"/>
-                <a:cs typeface="Segoe UI"/>
+                <a:latin typeface="Arial"/>
+                <a:cs typeface="Arial"/>
               </a:rPr>
               <a:t>Ca bệnh và ca chứng được chọn theo KẾT CỤC; phơi nhiễm đo bằng cách nhìn lại.</a:t>
             </a:r>
@@ -9610,7 +9610,7 @@
                     <a:lumMod val="50000"/>
                   </a:schemeClr>
                 </a:solidFill>
-                <a:latin typeface="Verdana"/>
+                <a:latin typeface="Arial"/>
               </a:rPr>
               <a:t>Neudata | #ClearDataClearImpact</a:t>
             </a:r>
@@ -9740,8 +9740,8 @@
                 <a:solidFill>
                   <a:srgbClr val="0D7377"/>
                 </a:solidFill>
-                <a:latin typeface="Segoe UI"/>
-                <a:cs typeface="Segoe UI"/>
+                <a:latin typeface="Arial"/>
+                <a:cs typeface="Arial"/>
               </a:rPr>
               <a:t>Thuần tập: bắt đầu từ phơi nhiễm, theo dõi về sau</a:t>
             </a:r>
@@ -9837,8 +9837,8 @@
                 <a:solidFill>
                   <a:srgbClr val="FFFFFF"/>
                 </a:solidFill>
-                <a:latin typeface="Segoe UI"/>
-                <a:cs typeface="Segoe UI"/>
+                <a:latin typeface="Arial"/>
+                <a:cs typeface="Arial"/>
               </a:rPr>
               <a:t>THÔNG ĐIỆP CHÍNH   </a:t>
             </a:r>
@@ -9847,8 +9847,8 @@
                 <a:solidFill>
                   <a:srgbClr val="FFFFFF"/>
                 </a:solidFill>
-                <a:latin typeface="Segoe UI"/>
-                <a:cs typeface="Segoe UI"/>
+                <a:latin typeface="Arial"/>
+                <a:cs typeface="Arial"/>
               </a:rPr>
               <a:t>Thuần tập: phơi nhiễm trước, kết cục sau, nên thời gian chạy đúng chiều.</a:t>
             </a:r>
@@ -9885,7 +9885,7 @@
                     <a:lumMod val="50000"/>
                   </a:schemeClr>
                 </a:solidFill>
-                <a:latin typeface="Verdana"/>
+                <a:latin typeface="Arial"/>
               </a:rPr>
               <a:t>Neudata | #ClearDataClearImpact</a:t>
             </a:r>
@@ -10015,8 +10015,8 @@
                 <a:solidFill>
                   <a:srgbClr val="0D7377"/>
                 </a:solidFill>
-                <a:latin typeface="Segoe UI"/>
-                <a:cs typeface="Segoe UI"/>
+                <a:latin typeface="Arial"/>
+                <a:cs typeface="Arial"/>
               </a:rPr>
               <a:t>Ví dụ: nghiên cứu thuần tập Hyun, từng bước</a:t>
             </a:r>
@@ -10082,8 +10082,8 @@
                 <a:solidFill>
                   <a:srgbClr val="595959"/>
                 </a:solidFill>
-                <a:latin typeface="Segoe UI"/>
-                <a:cs typeface="Segoe UI"/>
+                <a:latin typeface="Arial"/>
+                <a:cs typeface="Arial"/>
               </a:rPr>
               <a:t>Câu hỏi: cân bằng dịch dương có liên quan với tử vong ngày 28?</a:t>
             </a:r>
@@ -10127,10 +10127,10 @@
                 <a:solidFill>
                   <a:srgbClr val="FFFFFF"/>
                 </a:solidFill>
-                <a:latin typeface="Segoe UI"/>
-                <a:cs typeface="Segoe UI"/>
-              </a:rPr>
-              <a:t>1. Xác định nhóm</a:t>
+                <a:latin typeface="Arial"/>
+                <a:cs typeface="Arial"/>
+              </a:rPr>
+              <a:t>Xác định nhóm</a:t>
             </a:r>
           </a:p>
         </p:txBody>
@@ -10176,8 +10176,8 @@
                 <a:solidFill>
                   <a:srgbClr val="000000"/>
                 </a:solidFill>
-                <a:latin typeface="Segoe UI"/>
-                <a:cs typeface="Segoe UI"/>
+                <a:latin typeface="Arial"/>
+                <a:cs typeface="Arial"/>
               </a:rPr>
               <a:t>Người lớn nhiễm khuẩn huyết ở 20 bệnh viện, nằm ICU từ 3 ngày</a:t>
             </a:r>
@@ -10221,10 +10221,10 @@
                 <a:solidFill>
                   <a:srgbClr val="FFFFFF"/>
                 </a:solidFill>
-                <a:latin typeface="Segoe UI"/>
-                <a:cs typeface="Segoe UI"/>
-              </a:rPr>
-              <a:t>2. Đo phơi nhiễm</a:t>
+                <a:latin typeface="Arial"/>
+                <a:cs typeface="Arial"/>
+              </a:rPr>
+              <a:t>Đo phơi nhiễm</a:t>
             </a:r>
           </a:p>
         </p:txBody>
@@ -10270,8 +10270,8 @@
                 <a:solidFill>
                   <a:srgbClr val="000000"/>
                 </a:solidFill>
-                <a:latin typeface="Segoe UI"/>
-                <a:cs typeface="Segoe UI"/>
+                <a:latin typeface="Arial"/>
+                <a:cs typeface="Arial"/>
               </a:rPr>
               <a:t>Cân bằng dịch tích lũy ngày 1-3: dương hay âm</a:t>
             </a:r>
@@ -10315,10 +10315,10 @@
                 <a:solidFill>
                   <a:srgbClr val="FFFFFF"/>
                 </a:solidFill>
-                <a:latin typeface="Segoe UI"/>
-                <a:cs typeface="Segoe UI"/>
-              </a:rPr>
-              <a:t>3. Theo dõi</a:t>
+                <a:latin typeface="Arial"/>
+                <a:cs typeface="Arial"/>
+              </a:rPr>
+              <a:t>Theo dõi</a:t>
             </a:r>
           </a:p>
         </p:txBody>
@@ -10364,8 +10364,8 @@
                 <a:solidFill>
                   <a:srgbClr val="000000"/>
                 </a:solidFill>
-                <a:latin typeface="Segoe UI"/>
-                <a:cs typeface="Segoe UI"/>
+                <a:latin typeface="Arial"/>
+                <a:cs typeface="Arial"/>
               </a:rPr>
               <a:t>Ghi nhận ai tử vong đến ngày 28</a:t>
             </a:r>
@@ -10409,10 +10409,10 @@
                 <a:solidFill>
                   <a:srgbClr val="FFFFFF"/>
                 </a:solidFill>
-                <a:latin typeface="Segoe UI"/>
-                <a:cs typeface="Segoe UI"/>
-              </a:rPr>
-              <a:t>4. So sánh</a:t>
+                <a:latin typeface="Arial"/>
+                <a:cs typeface="Arial"/>
+              </a:rPr>
+              <a:t>So sánh</a:t>
             </a:r>
           </a:p>
         </p:txBody>
@@ -10458,8 +10458,8 @@
                 <a:solidFill>
                   <a:srgbClr val="000000"/>
                 </a:solidFill>
-                <a:latin typeface="Segoe UI"/>
-                <a:cs typeface="Segoe UI"/>
+                <a:latin typeface="Arial"/>
+                <a:cs typeface="Arial"/>
               </a:rPr>
               <a:t>Các cặp đã ghép; HR 2,13 ở ngày 2</a:t>
             </a:r>
@@ -10503,8 +10503,8 @@
                 <a:solidFill>
                   <a:srgbClr val="FFFFFF"/>
                 </a:solidFill>
-                <a:latin typeface="Segoe UI"/>
-                <a:cs typeface="Segoe UI"/>
+                <a:latin typeface="Arial"/>
+                <a:cs typeface="Arial"/>
               </a:rPr>
               <a:t>THÔNG ĐIỆP CHÍNH   </a:t>
             </a:r>
@@ -10513,8 +10513,8 @@
                 <a:solidFill>
                   <a:srgbClr val="FFFFFF"/>
                 </a:solidFill>
-                <a:latin typeface="Segoe UI"/>
-                <a:cs typeface="Segoe UI"/>
+                <a:latin typeface="Arial"/>
+                <a:cs typeface="Arial"/>
               </a:rPr>
               <a:t>Thuần tập chia người theo PHƠI NHIỄM rồi theo dõi đến KẾT CỤC.</a:t>
             </a:r>
@@ -10551,7 +10551,7 @@
                     <a:lumMod val="50000"/>
                   </a:schemeClr>
                 </a:solidFill>
-                <a:latin typeface="Verdana"/>
+                <a:latin typeface="Arial"/>
               </a:rPr>
               <a:t>Neudata | #ClearDataClearImpact</a:t>
             </a:r>
@@ -10681,8 +10681,8 @@
                 <a:solidFill>
                   <a:srgbClr val="0D7377"/>
                 </a:solidFill>
-                <a:latin typeface="Segoe UI"/>
-                <a:cs typeface="Segoe UI"/>
+                <a:latin typeface="Arial"/>
+                <a:cs typeface="Arial"/>
               </a:rPr>
               <a:t>RCT: phân nhóm ngẫu nhiên, rồi theo dõi về sau</a:t>
             </a:r>
@@ -10778,8 +10778,8 @@
                 <a:solidFill>
                   <a:srgbClr val="FFFFFF"/>
                 </a:solidFill>
-                <a:latin typeface="Segoe UI"/>
-                <a:cs typeface="Segoe UI"/>
+                <a:latin typeface="Arial"/>
+                <a:cs typeface="Arial"/>
               </a:rPr>
               <a:t>THÔNG ĐIỆP CHÍNH   </a:t>
             </a:r>
@@ -10788,8 +10788,8 @@
                 <a:solidFill>
                   <a:srgbClr val="FFFFFF"/>
                 </a:solidFill>
-                <a:latin typeface="Segoe UI"/>
-                <a:cs typeface="Segoe UI"/>
+                <a:latin typeface="Arial"/>
+                <a:cs typeface="Arial"/>
               </a:rPr>
               <a:t>Trong RCT, may rủi (không phải bác sĩ) quyết định ai nhận gì.</a:t>
             </a:r>
@@ -10826,7 +10826,7 @@
                     <a:lumMod val="50000"/>
                   </a:schemeClr>
                 </a:solidFill>
-                <a:latin typeface="Verdana"/>
+                <a:latin typeface="Arial"/>
               </a:rPr>
               <a:t>Neudata | #ClearDataClearImpact</a:t>
             </a:r>
@@ -10956,8 +10956,8 @@
                 <a:solidFill>
                   <a:srgbClr val="0D7377"/>
                 </a:solidFill>
-                <a:latin typeface="Segoe UI"/>
-                <a:cs typeface="Segoe UI"/>
+                <a:latin typeface="Arial"/>
+                <a:cs typeface="Arial"/>
               </a:rPr>
               <a:t>Ví dụ: thử nghiệm Boulet, từng bước</a:t>
             </a:r>
@@ -11023,8 +11023,8 @@
                 <a:solidFill>
                   <a:srgbClr val="595959"/>
                 </a:solidFill>
-                <a:latin typeface="Segoe UI"/>
-                <a:cs typeface="Segoe UI"/>
+                <a:latin typeface="Arial"/>
+                <a:cs typeface="Arial"/>
               </a:rPr>
               <a:t>Câu hỏi: hạn chế dịch không phải hồi sức có giảm cân bằng dịch ngày 5?</a:t>
             </a:r>
@@ -11068,10 +11068,10 @@
                 <a:solidFill>
                   <a:srgbClr val="FFFFFF"/>
                 </a:solidFill>
-                <a:latin typeface="Segoe UI"/>
-                <a:cs typeface="Segoe UI"/>
-              </a:rPr>
-              <a:t>1. Tiêu chuẩn</a:t>
+                <a:latin typeface="Arial"/>
+                <a:cs typeface="Arial"/>
+              </a:rPr>
+              <a:t>Tiêu chuẩn</a:t>
             </a:r>
           </a:p>
         </p:txBody>
@@ -11117,8 +11117,8 @@
                 <a:solidFill>
                   <a:srgbClr val="000000"/>
                 </a:solidFill>
-                <a:latin typeface="Segoe UI"/>
-                <a:cs typeface="Segoe UI"/>
+                <a:latin typeface="Arial"/>
+                <a:cs typeface="Arial"/>
               </a:rPr>
               <a:t>Sốc nhiễm khuẩn, 18-85 tuổi, vận mạch &lt; 24 giờ</a:t>
             </a:r>
@@ -11162,10 +11162,10 @@
                 <a:solidFill>
                   <a:srgbClr val="FFFFFF"/>
                 </a:solidFill>
-                <a:latin typeface="Segoe UI"/>
-                <a:cs typeface="Segoe UI"/>
-              </a:rPr>
-              <a:t>2. Đồng ý</a:t>
+                <a:latin typeface="Arial"/>
+                <a:cs typeface="Arial"/>
+              </a:rPr>
+              <a:t>Đồng ý</a:t>
             </a:r>
           </a:p>
         </p:txBody>
@@ -11211,8 +11211,8 @@
                 <a:solidFill>
                   <a:srgbClr val="000000"/>
                 </a:solidFill>
-                <a:latin typeface="Segoe UI"/>
-                <a:cs typeface="Segoe UI"/>
+                <a:latin typeface="Arial"/>
+                <a:cs typeface="Arial"/>
               </a:rPr>
               <a:t>Bệnh nhân hoặc người đại diện hợp pháp</a:t>
             </a:r>
@@ -11256,10 +11256,10 @@
                 <a:solidFill>
                   <a:srgbClr val="FFFFFF"/>
                 </a:solidFill>
-                <a:latin typeface="Segoe UI"/>
-                <a:cs typeface="Segoe UI"/>
-              </a:rPr>
-              <a:t>3. Ngẫu nhiên</a:t>
+                <a:latin typeface="Arial"/>
+                <a:cs typeface="Arial"/>
+              </a:rPr>
+              <a:t>Ngẫu nhiên</a:t>
             </a:r>
           </a:p>
         </p:txBody>
@@ -11305,8 +11305,8 @@
                 <a:solidFill>
                   <a:srgbClr val="000000"/>
                 </a:solidFill>
-                <a:latin typeface="Segoe UI"/>
-                <a:cs typeface="Segoe UI"/>
+                <a:latin typeface="Arial"/>
+                <a:cs typeface="Arial"/>
               </a:rPr>
               <a:t>Máy tính trung tâm, 1:1, nên không ai đoán được</a:t>
             </a:r>
@@ -11350,10 +11350,10 @@
                 <a:solidFill>
                   <a:srgbClr val="FFFFFF"/>
                 </a:solidFill>
-                <a:latin typeface="Segoe UI"/>
-                <a:cs typeface="Segoe UI"/>
-              </a:rPr>
-              <a:t>4. Điều trị</a:t>
+                <a:latin typeface="Arial"/>
+                <a:cs typeface="Arial"/>
+              </a:rPr>
+              <a:t>Điều trị</a:t>
             </a:r>
           </a:p>
         </p:txBody>
@@ -11399,8 +11399,8 @@
                 <a:solidFill>
                   <a:srgbClr val="000000"/>
                 </a:solidFill>
-                <a:latin typeface="Segoe UI"/>
-                <a:cs typeface="Segoe UI"/>
+                <a:latin typeface="Arial"/>
+                <a:cs typeface="Arial"/>
               </a:rPr>
               <a:t>Hạn chế dịch vs thường quy trong 7 ngày</a:t>
             </a:r>
@@ -11444,10 +11444,10 @@
                 <a:solidFill>
                   <a:srgbClr val="FFFFFF"/>
                 </a:solidFill>
-                <a:latin typeface="Segoe UI"/>
-                <a:cs typeface="Segoe UI"/>
-              </a:rPr>
-              <a:t>5. Đo</a:t>
+                <a:latin typeface="Arial"/>
+                <a:cs typeface="Arial"/>
+              </a:rPr>
+              <a:t>Đo</a:t>
             </a:r>
           </a:p>
         </p:txBody>
@@ -11493,8 +11493,8 @@
                 <a:solidFill>
                   <a:srgbClr val="000000"/>
                 </a:solidFill>
-                <a:latin typeface="Segoe UI"/>
-                <a:cs typeface="Segoe UI"/>
+                <a:latin typeface="Arial"/>
+                <a:cs typeface="Arial"/>
               </a:rPr>
               <a:t>Cân bằng dịch ngày 5; tử vong ngày 28</a:t>
             </a:r>
@@ -11538,8 +11538,8 @@
                 <a:solidFill>
                   <a:srgbClr val="FFFFFF"/>
                 </a:solidFill>
-                <a:latin typeface="Segoe UI"/>
-                <a:cs typeface="Segoe UI"/>
+                <a:latin typeface="Arial"/>
+                <a:cs typeface="Arial"/>
               </a:rPr>
               <a:t>THÔNG ĐIỆP CHÍNH   </a:t>
             </a:r>
@@ -11548,8 +11548,8 @@
                 <a:solidFill>
                   <a:srgbClr val="FFFFFF"/>
                 </a:solidFill>
-                <a:latin typeface="Segoe UI"/>
-                <a:cs typeface="Segoe UI"/>
+                <a:latin typeface="Arial"/>
+                <a:cs typeface="Arial"/>
               </a:rPr>
               <a:t>Trong thử nghiệm, nhà nghiên cứu chỉ định phơi nhiễm bằng may rủi.</a:t>
             </a:r>
@@ -11586,7 +11586,7 @@
                     <a:lumMod val="50000"/>
                   </a:schemeClr>
                 </a:solidFill>
-                <a:latin typeface="Verdana"/>
+                <a:latin typeface="Arial"/>
               </a:rPr>
               <a:t>Neudata | #ClearDataClearImpact</a:t>
             </a:r>
@@ -11716,8 +11716,8 @@
                 <a:solidFill>
                   <a:srgbClr val="0D7377"/>
                 </a:solidFill>
-                <a:latin typeface="Segoe UI"/>
-                <a:cs typeface="Segoe UI"/>
+                <a:latin typeface="Arial"/>
+                <a:cs typeface="Arial"/>
               </a:rPr>
               <a:t>Kiểm tra nhanh: gọi tên thiết kế</a:t>
             </a:r>
@@ -11787,8 +11787,8 @@
                 <a:solidFill>
                   <a:srgbClr val="FFFFFF"/>
                 </a:solidFill>
-                <a:latin typeface="Segoe UI"/>
-                <a:cs typeface="Segoe UI"/>
+                <a:latin typeface="Arial"/>
+                <a:cs typeface="Arial"/>
               </a:rPr>
               <a:t>CÂU HỎI NHANH   |   3 phút</a:t>
             </a:r>
@@ -11825,25 +11825,19 @@
               <a:spcBef>
                 <a:spcPts val="450"/>
               </a:spcBef>
-              <a:buNone/>
-            </a:pPr>
-            <a:r>
-              <a:rPr lang="en-US" sz="1650" b="1" dirty="0">
-                <a:solidFill>
-                  <a:srgbClr val="6C3483"/>
-                </a:solidFill>
-                <a:latin typeface="Segoe UI"/>
-                <a:cs typeface="Segoe UI"/>
-              </a:rPr>
-              <a:t>1.  </a:t>
-            </a:r>
+              <a:buClr>
+                <a:srgbClr val="6C3483"/>
+              </a:buClr>
+              <a:buFont typeface="Arial"/>
+              <a:buChar char="•"/>
+            </a:pPr>
             <a:r>
               <a:rPr lang="en-US" sz="1650" dirty="0">
                 <a:solidFill>
                   <a:srgbClr val="000000"/>
                 </a:solidFill>
-                <a:latin typeface="Segoe UI"/>
-                <a:cs typeface="Segoe UI"/>
+                <a:latin typeface="Arial"/>
+                <a:cs typeface="Arial"/>
               </a:rPr>
               <a:t>A. Hôm nay kiểm tra cả 300 BN nội trú: có ống thông tiểu không, có nhiễm khuẩn tiết niệu không</a:t>
             </a:r>
@@ -11856,25 +11850,19 @@
               <a:spcBef>
                 <a:spcPts val="450"/>
               </a:spcBef>
-              <a:buNone/>
-            </a:pPr>
-            <a:r>
-              <a:rPr lang="en-US" sz="1650" b="1" dirty="0">
-                <a:solidFill>
-                  <a:srgbClr val="6C3483"/>
-                </a:solidFill>
-                <a:latin typeface="Segoe UI"/>
-                <a:cs typeface="Segoe UI"/>
-              </a:rPr>
-              <a:t>2.  </a:t>
-            </a:r>
+              <a:buClr>
+                <a:srgbClr val="6C3483"/>
+              </a:buClr>
+              <a:buFont typeface="Arial"/>
+              <a:buChar char="•"/>
+            </a:pPr>
             <a:r>
               <a:rPr lang="en-US" sz="1650" dirty="0">
                 <a:solidFill>
                   <a:srgbClr val="000000"/>
                 </a:solidFill>
-                <a:latin typeface="Segoe UI"/>
-                <a:cs typeface="Segoe UI"/>
+                <a:latin typeface="Arial"/>
+                <a:cs typeface="Arial"/>
               </a:rPr>
               <a:t>B. BN viêm phổi thở máy được so sánh với BN không viêm phổi về việc dùng an thần trước đó</a:t>
             </a:r>
@@ -11887,25 +11875,19 @@
               <a:spcBef>
                 <a:spcPts val="450"/>
               </a:spcBef>
-              <a:buNone/>
-            </a:pPr>
-            <a:r>
-              <a:rPr lang="en-US" sz="1650" b="1" dirty="0">
-                <a:solidFill>
-                  <a:srgbClr val="6C3483"/>
-                </a:solidFill>
-                <a:latin typeface="Segoe UI"/>
-                <a:cs typeface="Segoe UI"/>
-              </a:rPr>
-              <a:t>3.  </a:t>
-            </a:r>
+              <a:buClr>
+                <a:srgbClr val="6C3483"/>
+              </a:buClr>
+              <a:buFont typeface="Arial"/>
+              <a:buChar char="•"/>
+            </a:pPr>
             <a:r>
               <a:rPr lang="en-US" sz="1650" dirty="0">
                 <a:solidFill>
                   <a:srgbClr val="000000"/>
                 </a:solidFill>
-                <a:latin typeface="Segoe UI"/>
-                <a:cs typeface="Segoe UI"/>
+                <a:latin typeface="Arial"/>
+                <a:cs typeface="Arial"/>
               </a:rPr>
               <a:t>C. BN được vận động sớm (do chuyên viên vật lý trị liệu quyết định) và BN không được, theo dõi đến khi ra viện</a:t>
             </a:r>
@@ -11949,8 +11931,8 @@
                 <a:solidFill>
                   <a:srgbClr val="6C3483"/>
                 </a:solidFill>
-                <a:latin typeface="Segoe UI"/>
-                <a:cs typeface="Segoe UI"/>
+                <a:latin typeface="Arial"/>
+                <a:cs typeface="Arial"/>
               </a:rPr>
               <a:t>Chọn</a:t>
             </a:r>
@@ -11971,8 +11953,8 @@
                 <a:solidFill>
                   <a:srgbClr val="000000"/>
                 </a:solidFill>
-                <a:latin typeface="Segoe UI"/>
-                <a:cs typeface="Segoe UI"/>
+                <a:latin typeface="Arial"/>
+                <a:cs typeface="Arial"/>
               </a:rPr>
               <a:t>Cắt ngang</a:t>
             </a:r>
@@ -11993,10 +11975,10 @@
                 <a:solidFill>
                   <a:srgbClr val="000000"/>
                 </a:solidFill>
-                <a:latin typeface="Segoe UI"/>
-                <a:cs typeface="Segoe UI"/>
-              </a:rPr>
-              <a:t>Bệnh - chứng</a:t>
+                <a:latin typeface="Arial"/>
+                <a:cs typeface="Arial"/>
+              </a:rPr>
+              <a:t>Bệnh-chứng</a:t>
             </a:r>
           </a:p>
           <a:p>
@@ -12015,8 +11997,8 @@
                 <a:solidFill>
                   <a:srgbClr val="000000"/>
                 </a:solidFill>
-                <a:latin typeface="Segoe UI"/>
-                <a:cs typeface="Segoe UI"/>
+                <a:latin typeface="Arial"/>
+                <a:cs typeface="Arial"/>
               </a:rPr>
               <a:t>Thuần tập</a:t>
             </a:r>
@@ -12037,8 +12019,8 @@
                 <a:solidFill>
                   <a:srgbClr val="000000"/>
                 </a:solidFill>
-                <a:latin typeface="Segoe UI"/>
-                <a:cs typeface="Segoe UI"/>
+                <a:latin typeface="Arial"/>
+                <a:cs typeface="Arial"/>
               </a:rPr>
               <a:t>RCT</a:t>
             </a:r>
@@ -12084,8 +12066,8 @@
                 <a:solidFill>
                   <a:srgbClr val="6C3483"/>
                 </a:solidFill>
-                <a:latin typeface="Segoe UI"/>
-                <a:cs typeface="Segoe UI"/>
+                <a:latin typeface="Arial"/>
+                <a:cs typeface="Arial"/>
               </a:rPr>
               <a:t>SẢN PHẨM   </a:t>
             </a:r>
@@ -12094,8 +12076,8 @@
                 <a:solidFill>
                   <a:srgbClr val="000000"/>
                 </a:solidFill>
-                <a:latin typeface="Segoe UI"/>
-                <a:cs typeface="Segoe UI"/>
+                <a:latin typeface="Arial"/>
+                <a:cs typeface="Arial"/>
               </a:rPr>
               <a:t>Mỗi tình huống một thiết kế (đáp án ở slide sau)</a:t>
             </a:r>
@@ -12132,7 +12114,7 @@
                     <a:lumMod val="50000"/>
                   </a:schemeClr>
                 </a:solidFill>
-                <a:latin typeface="Verdana"/>
+                <a:latin typeface="Arial"/>
               </a:rPr>
               <a:t>Neudata | #ClearDataClearImpact</a:t>
             </a:r>
@@ -12262,8 +12244,8 @@
                 <a:solidFill>
                   <a:srgbClr val="0D7377"/>
                 </a:solidFill>
-                <a:latin typeface="Segoe UI"/>
-                <a:cs typeface="Segoe UI"/>
+                <a:latin typeface="Arial"/>
+                <a:cs typeface="Arial"/>
               </a:rPr>
               <a:t>Đáp án: gọi tên thiết kế</a:t>
             </a:r>
@@ -12333,8 +12315,8 @@
                 <a:solidFill>
                   <a:srgbClr val="FFFFFF"/>
                 </a:solidFill>
-                <a:latin typeface="Segoe UI"/>
-                <a:cs typeface="Segoe UI"/>
+                <a:latin typeface="Arial"/>
+                <a:cs typeface="Arial"/>
               </a:rPr>
               <a:t>A. Cắt ngang</a:t>
             </a:r>
@@ -12382,8 +12364,8 @@
                 <a:solidFill>
                   <a:srgbClr val="000000"/>
                 </a:solidFill>
-                <a:latin typeface="Segoe UI"/>
-                <a:cs typeface="Segoe UI"/>
+                <a:latin typeface="Arial"/>
+                <a:cs typeface="Arial"/>
               </a:rPr>
               <a:t>Một ngày, tất cả mọi người</a:t>
             </a:r>
@@ -12403,8 +12385,8 @@
                 <a:solidFill>
                   <a:srgbClr val="000000"/>
                 </a:solidFill>
-                <a:latin typeface="Segoe UI"/>
-                <a:cs typeface="Segoe UI"/>
+                <a:latin typeface="Arial"/>
+                <a:cs typeface="Arial"/>
               </a:rPr>
               <a:t>Phơi nhiễm và kết cục đo cùng lúc</a:t>
             </a:r>
@@ -12424,8 +12406,8 @@
                 <a:solidFill>
                   <a:srgbClr val="000000"/>
                 </a:solidFill>
-                <a:latin typeface="Segoe UI"/>
-                <a:cs typeface="Segoe UI"/>
+                <a:latin typeface="Arial"/>
+                <a:cs typeface="Arial"/>
               </a:rPr>
               <a:t>Cho tỷ lệ hiện mắc</a:t>
             </a:r>
@@ -12467,10 +12449,10 @@
                 <a:solidFill>
                   <a:srgbClr val="FFFFFF"/>
                 </a:solidFill>
-                <a:latin typeface="Segoe UI"/>
-                <a:cs typeface="Segoe UI"/>
-              </a:rPr>
-              <a:t>B. Bệnh - chứng</a:t>
+                <a:latin typeface="Arial"/>
+                <a:cs typeface="Arial"/>
+              </a:rPr>
+              <a:t>B. Bệnh-chứng</a:t>
             </a:r>
           </a:p>
         </p:txBody>
@@ -12516,8 +12498,8 @@
                 <a:solidFill>
                   <a:srgbClr val="000000"/>
                 </a:solidFill>
-                <a:latin typeface="Segoe UI"/>
-                <a:cs typeface="Segoe UI"/>
+                <a:latin typeface="Arial"/>
+                <a:cs typeface="Arial"/>
               </a:rPr>
               <a:t>Chọn theo KẾT CỤC (viêm phổi)</a:t>
             </a:r>
@@ -12537,8 +12519,8 @@
                 <a:solidFill>
                   <a:srgbClr val="000000"/>
                 </a:solidFill>
-                <a:latin typeface="Segoe UI"/>
-                <a:cs typeface="Segoe UI"/>
+                <a:latin typeface="Arial"/>
+                <a:cs typeface="Arial"/>
               </a:rPr>
               <a:t>Nhìn lại phơi nhiễm (an thần)</a:t>
             </a:r>
@@ -12558,8 +12540,8 @@
                 <a:solidFill>
                   <a:srgbClr val="000000"/>
                 </a:solidFill>
-                <a:latin typeface="Segoe UI"/>
-                <a:cs typeface="Segoe UI"/>
+                <a:latin typeface="Arial"/>
+                <a:cs typeface="Arial"/>
               </a:rPr>
               <a:t>Cho tỷ số chênh</a:t>
             </a:r>
@@ -12601,8 +12583,8 @@
                 <a:solidFill>
                   <a:srgbClr val="FFFFFF"/>
                 </a:solidFill>
-                <a:latin typeface="Segoe UI"/>
-                <a:cs typeface="Segoe UI"/>
+                <a:latin typeface="Arial"/>
+                <a:cs typeface="Arial"/>
               </a:rPr>
               <a:t>C. Thuần tập</a:t>
             </a:r>
@@ -12650,8 +12632,8 @@
                 <a:solidFill>
                   <a:srgbClr val="000000"/>
                 </a:solidFill>
-                <a:latin typeface="Segoe UI"/>
-                <a:cs typeface="Segoe UI"/>
+                <a:latin typeface="Arial"/>
+                <a:cs typeface="Arial"/>
               </a:rPr>
               <a:t>Chia theo PHƠI NHIỄM (vận động)</a:t>
             </a:r>
@@ -12671,8 +12653,8 @@
                 <a:solidFill>
                   <a:srgbClr val="000000"/>
                 </a:solidFill>
-                <a:latin typeface="Segoe UI"/>
-                <a:cs typeface="Segoe UI"/>
+                <a:latin typeface="Arial"/>
+                <a:cs typeface="Arial"/>
               </a:rPr>
               <a:t>Theo dõi đến khi ra viện</a:t>
             </a:r>
@@ -12692,8 +12674,8 @@
                 <a:solidFill>
                   <a:srgbClr val="000000"/>
                 </a:solidFill>
-                <a:latin typeface="Segoe UI"/>
-                <a:cs typeface="Segoe UI"/>
+                <a:latin typeface="Arial"/>
+                <a:cs typeface="Arial"/>
               </a:rPr>
               <a:t>Không phải RCT: không ngẫu nhiên</a:t>
             </a:r>
@@ -12737,8 +12719,8 @@
                 <a:solidFill>
                   <a:srgbClr val="FFFFFF"/>
                 </a:solidFill>
-                <a:latin typeface="Segoe UI"/>
-                <a:cs typeface="Segoe UI"/>
+                <a:latin typeface="Arial"/>
+                <a:cs typeface="Arial"/>
               </a:rPr>
               <a:t>THÔNG ĐIỆP CHÍNH   </a:t>
             </a:r>
@@ -12747,8 +12729,8 @@
                 <a:solidFill>
                   <a:srgbClr val="FFFFFF"/>
                 </a:solidFill>
-                <a:latin typeface="Segoe UI"/>
-                <a:cs typeface="Segoe UI"/>
+                <a:latin typeface="Arial"/>
+                <a:cs typeface="Arial"/>
               </a:rPr>
               <a:t>Hỏi: chọn theo phơi nhiễm hay theo kết cục? Có do may rủi chỉ định không?</a:t>
             </a:r>
@@ -12785,7 +12767,7 @@
                     <a:lumMod val="50000"/>
                   </a:schemeClr>
                 </a:solidFill>
-                <a:latin typeface="Verdana"/>
+                <a:latin typeface="Arial"/>
               </a:rPr>
               <a:t>Neudata | #ClearDataClearImpact</a:t>
             </a:r>
@@ -12915,8 +12897,8 @@
                 <a:solidFill>
                   <a:srgbClr val="0D7377"/>
                 </a:solidFill>
-                <a:latin typeface="Segoe UI"/>
-                <a:cs typeface="Segoe UI"/>
+                <a:latin typeface="Arial"/>
+                <a:cs typeface="Arial"/>
               </a:rPr>
               <a:t>Tổng quan hệ thống và phân tích gộp</a:t>
             </a:r>
@@ -13012,8 +12994,8 @@
                 <a:solidFill>
                   <a:srgbClr val="FFFFFF"/>
                 </a:solidFill>
-                <a:latin typeface="Segoe UI"/>
-                <a:cs typeface="Segoe UI"/>
+                <a:latin typeface="Arial"/>
+                <a:cs typeface="Arial"/>
               </a:rPr>
               <a:t>THÔNG ĐIỆP CHÍNH   </a:t>
             </a:r>
@@ -13022,8 +13004,8 @@
                 <a:solidFill>
                   <a:srgbClr val="FFFFFF"/>
                 </a:solidFill>
-                <a:latin typeface="Segoe UI"/>
-                <a:cs typeface="Segoe UI"/>
+                <a:latin typeface="Arial"/>
+                <a:cs typeface="Arial"/>
               </a:rPr>
               <a:t>Tổng quan hệ thống tìm kiếm và thẩm định; phân tích gộp gộp các con số.</a:t>
             </a:r>
@@ -13060,7 +13042,7 @@
                     <a:lumMod val="50000"/>
                   </a:schemeClr>
                 </a:solidFill>
-                <a:latin typeface="Verdana"/>
+                <a:latin typeface="Arial"/>
               </a:rPr>
               <a:t>Neudata | #ClearDataClearImpact</a:t>
             </a:r>
@@ -13190,8 +13172,8 @@
                 <a:solidFill>
                   <a:srgbClr val="0D7377"/>
                 </a:solidFill>
-                <a:latin typeface="Segoe UI"/>
-                <a:cs typeface="Segoe UI"/>
+                <a:latin typeface="Arial"/>
+                <a:cs typeface="Arial"/>
               </a:rPr>
               <a:t>Hai bài báo nằm ở đâu trên tháp bằng chứng</a:t>
             </a:r>
@@ -13257,8 +13239,8 @@
                 <a:solidFill>
                   <a:srgbClr val="0D7377"/>
                 </a:solidFill>
-                <a:latin typeface="Segoe UI"/>
-                <a:cs typeface="Segoe UI"/>
+                <a:latin typeface="Arial"/>
+                <a:cs typeface="Arial"/>
               </a:rPr>
               <a:t>Đọc một cách thận trọng</a:t>
             </a:r>
@@ -13276,8 +13258,8 @@
                 <a:solidFill>
                   <a:srgbClr val="000000"/>
                 </a:solidFill>
-                <a:latin typeface="Segoe UI"/>
-                <a:cs typeface="Segoe UI"/>
+                <a:latin typeface="Arial"/>
+                <a:cs typeface="Arial"/>
               </a:rPr>
               <a:t>Càng cao = trung bình càng ít sai lệch</a:t>
             </a:r>
@@ -13295,8 +13277,8 @@
                 <a:solidFill>
                   <a:srgbClr val="000000"/>
                 </a:solidFill>
-                <a:latin typeface="Segoe UI"/>
-                <a:cs typeface="Segoe UI"/>
+                <a:latin typeface="Arial"/>
+                <a:cs typeface="Arial"/>
               </a:rPr>
               <a:t>Quy tắc kinh nghiệm, không phải định luật</a:t>
             </a:r>
@@ -13314,8 +13296,8 @@
                 <a:solidFill>
                   <a:srgbClr val="000000"/>
                 </a:solidFill>
-                <a:latin typeface="Segoe UI"/>
-                <a:cs typeface="Segoe UI"/>
+                <a:latin typeface="Arial"/>
+                <a:cs typeface="Arial"/>
               </a:rPr>
               <a:t>Thuần tập tốt có thể hơn RCT kém</a:t>
             </a:r>
@@ -13333,8 +13315,8 @@
                 <a:solidFill>
                   <a:srgbClr val="000000"/>
                 </a:solidFill>
-                <a:latin typeface="Segoe UI"/>
-                <a:cs typeface="Segoe UI"/>
+                <a:latin typeface="Arial"/>
+                <a:cs typeface="Arial"/>
               </a:rPr>
               <a:t>Thiết kế tốt nhất là thiết kế hợp với câu hỏi</a:t>
             </a:r>
@@ -13395,7 +13377,7 @@
                     <a:lumMod val="50000"/>
                   </a:schemeClr>
                 </a:solidFill>
-                <a:latin typeface="Verdana"/>
+                <a:latin typeface="Arial"/>
               </a:rPr>
               <a:t>Neudata | #ClearDataClearImpact</a:t>
             </a:r>
@@ -13525,8 +13507,8 @@
                 <a:solidFill>
                   <a:srgbClr val="0D7377"/>
                 </a:solidFill>
-                <a:latin typeface="Segoe UI"/>
-                <a:cs typeface="Segoe UI"/>
+                <a:latin typeface="Arial"/>
+                <a:cs typeface="Arial"/>
               </a:rPr>
               <a:t>Ôn tập: ba câu hỏi về Buổi 2</a:t>
             </a:r>
@@ -13596,8 +13578,8 @@
                 <a:solidFill>
                   <a:srgbClr val="FFFFFF"/>
                 </a:solidFill>
-                <a:latin typeface="Segoe UI"/>
-                <a:cs typeface="Segoe UI"/>
+                <a:latin typeface="Arial"/>
+                <a:cs typeface="Arial"/>
               </a:rPr>
               <a:t>CÂU HỎI NHANH   |   10 phút</a:t>
             </a:r>
@@ -13634,25 +13616,19 @@
               <a:spcBef>
                 <a:spcPts val="450"/>
               </a:spcBef>
-              <a:buNone/>
-            </a:pPr>
-            <a:r>
-              <a:rPr lang="en-US" sz="1650" b="1" dirty="0">
-                <a:solidFill>
-                  <a:srgbClr val="6C3483"/>
-                </a:solidFill>
-                <a:latin typeface="Segoe UI"/>
-                <a:cs typeface="Segoe UI"/>
-              </a:rPr>
-              <a:t>1.  </a:t>
-            </a:r>
+              <a:buClr>
+                <a:srgbClr val="6C3483"/>
+              </a:buClr>
+              <a:buFont typeface="Arial"/>
+              <a:buChar char="•"/>
+            </a:pPr>
             <a:r>
               <a:rPr lang="en-US" sz="1650" dirty="0">
                 <a:solidFill>
                   <a:srgbClr val="000000"/>
                 </a:solidFill>
-                <a:latin typeface="Segoe UI"/>
-                <a:cs typeface="Segoe UI"/>
+                <a:latin typeface="Arial"/>
+                <a:cs typeface="Arial"/>
               </a:rPr>
               <a:t>C1. Tìm kiếm PubMed ra 3.000 bài. Thêm một khái niệm bằng AND, hay một từ đồng nghĩa bằng OR?</a:t>
             </a:r>
@@ -13665,25 +13641,19 @@
               <a:spcBef>
                 <a:spcPts val="450"/>
               </a:spcBef>
-              <a:buNone/>
-            </a:pPr>
-            <a:r>
-              <a:rPr lang="en-US" sz="1650" b="1" dirty="0">
-                <a:solidFill>
-                  <a:srgbClr val="6C3483"/>
-                </a:solidFill>
-                <a:latin typeface="Segoe UI"/>
-                <a:cs typeface="Segoe UI"/>
-              </a:rPr>
-              <a:t>2.  </a:t>
-            </a:r>
+              <a:buClr>
+                <a:srgbClr val="6C3483"/>
+              </a:buClr>
+              <a:buFont typeface="Arial"/>
+              <a:buChar char="•"/>
+            </a:pPr>
             <a:r>
               <a:rPr lang="en-US" sz="1650" dirty="0">
                 <a:solidFill>
                   <a:srgbClr val="000000"/>
                 </a:solidFill>
-                <a:latin typeface="Segoe UI"/>
-                <a:cs typeface="Segoe UI"/>
+                <a:latin typeface="Arial"/>
+                <a:cs typeface="Arial"/>
               </a:rPr>
               <a:t>C2. Sau tiêu đề và tóm tắt, đọc phần nào tiếp theo trong bài báo?</a:t>
             </a:r>
@@ -13696,25 +13666,19 @@
               <a:spcBef>
                 <a:spcPts val="450"/>
               </a:spcBef>
-              <a:buNone/>
-            </a:pPr>
-            <a:r>
-              <a:rPr lang="en-US" sz="1650" b="1" dirty="0">
-                <a:solidFill>
-                  <a:srgbClr val="6C3483"/>
-                </a:solidFill>
-                <a:latin typeface="Segoe UI"/>
-                <a:cs typeface="Segoe UI"/>
-              </a:rPr>
-              <a:t>3.  </a:t>
-            </a:r>
+              <a:buClr>
+                <a:srgbClr val="6C3483"/>
+              </a:buClr>
+              <a:buFont typeface="Arial"/>
+              <a:buChar char="•"/>
+            </a:pPr>
             <a:r>
               <a:rPr lang="en-US" sz="1650" dirty="0">
                 <a:solidFill>
                   <a:srgbClr val="000000"/>
                 </a:solidFill>
-                <a:latin typeface="Segoe UI"/>
-                <a:cs typeface="Segoe UI"/>
+                <a:latin typeface="Arial"/>
+                <a:cs typeface="Arial"/>
               </a:rPr>
               <a:t>C3. Một tóm tắt viết 'có xu hướng giảm tử vong (p = 0,42)'. Điều này gọi là gì?</a:t>
             </a:r>
@@ -13727,25 +13691,19 @@
               <a:spcBef>
                 <a:spcPts val="450"/>
               </a:spcBef>
-              <a:buNone/>
-            </a:pPr>
-            <a:r>
-              <a:rPr lang="en-US" sz="1650" b="1" dirty="0">
-                <a:solidFill>
-                  <a:srgbClr val="6C3483"/>
-                </a:solidFill>
-                <a:latin typeface="Segoe UI"/>
-                <a:cs typeface="Segoe UI"/>
-              </a:rPr>
-              <a:t>4.  </a:t>
-            </a:r>
+              <a:buClr>
+                <a:srgbClr val="6C3483"/>
+              </a:buClr>
+              <a:buFont typeface="Arial"/>
+              <a:buChar char="•"/>
+            </a:pPr>
             <a:r>
               <a:rPr lang="en-US" sz="1650" dirty="0">
                 <a:solidFill>
                   <a:srgbClr val="000000"/>
                 </a:solidFill>
-                <a:latin typeface="Segoe UI"/>
-                <a:cs typeface="Segoe UI"/>
+                <a:latin typeface="Arial"/>
+                <a:cs typeface="Arial"/>
               </a:rPr>
               <a:t>Các nhóm: đọc lại câu hỏi nghiên cứu và phần đặt vấn đề (2 phút)</a:t>
             </a:r>
@@ -13789,8 +13747,8 @@
                 <a:solidFill>
                   <a:srgbClr val="6C3483"/>
                 </a:solidFill>
-                <a:latin typeface="Segoe UI"/>
-                <a:cs typeface="Segoe UI"/>
+                <a:latin typeface="Arial"/>
+                <a:cs typeface="Arial"/>
               </a:rPr>
               <a:t>Cách thực hiện</a:t>
             </a:r>
@@ -13811,8 +13769,8 @@
                 <a:solidFill>
                   <a:srgbClr val="000000"/>
                 </a:solidFill>
-                <a:latin typeface="Segoe UI"/>
-                <a:cs typeface="Segoe UI"/>
+                <a:latin typeface="Arial"/>
+                <a:cs typeface="Arial"/>
               </a:rPr>
               <a:t>Tự trả lời trước (30 giây/câu)</a:t>
             </a:r>
@@ -13833,8 +13791,8 @@
                 <a:solidFill>
                   <a:srgbClr val="000000"/>
                 </a:solidFill>
-                <a:latin typeface="Segoe UI"/>
-                <a:cs typeface="Segoe UI"/>
+                <a:latin typeface="Arial"/>
+                <a:cs typeface="Arial"/>
               </a:rPr>
               <a:t>Giơ tay, rồi công bố đáp án</a:t>
             </a:r>
@@ -13855,8 +13813,8 @@
                 <a:solidFill>
                   <a:srgbClr val="000000"/>
                 </a:solidFill>
-                <a:latin typeface="Segoe UI"/>
-                <a:cs typeface="Segoe UI"/>
+                <a:latin typeface="Arial"/>
+                <a:cs typeface="Arial"/>
               </a:rPr>
               <a:t>Không chấm điểm, chỉ khởi động</a:t>
             </a:r>
@@ -13902,8 +13860,8 @@
                 <a:solidFill>
                   <a:srgbClr val="6C3483"/>
                 </a:solidFill>
-                <a:latin typeface="Segoe UI"/>
-                <a:cs typeface="Segoe UI"/>
+                <a:latin typeface="Arial"/>
+                <a:cs typeface="Arial"/>
               </a:rPr>
               <a:t>SẢN PHẨM   </a:t>
             </a:r>
@@ -13912,8 +13870,8 @@
                 <a:solidFill>
                   <a:srgbClr val="000000"/>
                 </a:solidFill>
-                <a:latin typeface="Segoe UI"/>
-                <a:cs typeface="Segoe UI"/>
+                <a:latin typeface="Arial"/>
+                <a:cs typeface="Arial"/>
               </a:rPr>
               <a:t>Câu hỏi của mỗi nhóm được đọc lại và xác nhận</a:t>
             </a:r>
@@ -13950,7 +13908,7 @@
                     <a:lumMod val="50000"/>
                   </a:schemeClr>
                 </a:solidFill>
-                <a:latin typeface="Verdana"/>
+                <a:latin typeface="Arial"/>
               </a:rPr>
               <a:t>Neudata | #ClearDataClearImpact</a:t>
             </a:r>
@@ -14080,8 +14038,8 @@
                 <a:solidFill>
                   <a:srgbClr val="0D7377"/>
                 </a:solidFill>
-                <a:latin typeface="Segoe UI"/>
-                <a:cs typeface="Segoe UI"/>
+                <a:latin typeface="Arial"/>
+                <a:cs typeface="Arial"/>
               </a:rPr>
               <a:t>Gọi tên thiết kế bằng ba câu hỏi</a:t>
             </a:r>
@@ -14177,8 +14135,8 @@
                 <a:solidFill>
                   <a:srgbClr val="FFFFFF"/>
                 </a:solidFill>
-                <a:latin typeface="Segoe UI"/>
-                <a:cs typeface="Segoe UI"/>
+                <a:latin typeface="Arial"/>
+                <a:cs typeface="Arial"/>
               </a:rPr>
               <a:t>THÔNG ĐIỆP CHÍNH   </a:t>
             </a:r>
@@ -14187,8 +14145,8 @@
                 <a:solidFill>
                   <a:srgbClr val="FFFFFF"/>
                 </a:solidFill>
-                <a:latin typeface="Segoe UI"/>
-                <a:cs typeface="Segoe UI"/>
+                <a:latin typeface="Arial"/>
+                <a:cs typeface="Arial"/>
               </a:rPr>
               <a:t>Có chỉ định? Có ngẫu nhiên? Thời gian chạy chiều nào? Ba câu gọi tên thiết kế.</a:t>
             </a:r>
@@ -14225,7 +14183,7 @@
                     <a:lumMod val="50000"/>
                   </a:schemeClr>
                 </a:solidFill>
-                <a:latin typeface="Verdana"/>
+                <a:latin typeface="Arial"/>
               </a:rPr>
               <a:t>Neudata | #ClearDataClearImpact</a:t>
             </a:r>
@@ -14355,8 +14313,8 @@
                 <a:solidFill>
                   <a:srgbClr val="0D7377"/>
                 </a:solidFill>
-                <a:latin typeface="Segoe UI"/>
-                <a:cs typeface="Segoe UI"/>
+                <a:latin typeface="Arial"/>
+                <a:cs typeface="Arial"/>
               </a:rPr>
               <a:t>Thiết kế nào cũng phải đánh đổi một điều gì đó</a:t>
             </a:r>
@@ -14422,8 +14380,8 @@
                 <a:solidFill>
                   <a:srgbClr val="595959"/>
                 </a:solidFill>
-                <a:latin typeface="Segoe UI"/>
-                <a:cs typeface="Segoe UI"/>
+                <a:latin typeface="Arial"/>
+                <a:cs typeface="Arial"/>
               </a:rPr>
               <a:t>Điểm mạnh và điểm yếu trong nháy mắt</a:t>
             </a:r>
@@ -14465,8 +14423,8 @@
                 <a:solidFill>
                   <a:srgbClr val="FFFFFF"/>
                 </a:solidFill>
-                <a:latin typeface="Segoe UI"/>
-                <a:cs typeface="Segoe UI"/>
+                <a:latin typeface="Arial"/>
+                <a:cs typeface="Arial"/>
               </a:rPr>
               <a:t>Cắt ngang</a:t>
             </a:r>
@@ -14514,8 +14472,8 @@
                 <a:solidFill>
                   <a:srgbClr val="2E8B57"/>
                 </a:solidFill>
-                <a:latin typeface="Segoe UI"/>
-                <a:cs typeface="Segoe UI"/>
+                <a:latin typeface="Arial"/>
+                <a:cs typeface="Arial"/>
               </a:rPr>
               <a:t>+ nhanh, rẻ</a:t>
             </a:r>
@@ -14535,8 +14493,8 @@
                 <a:solidFill>
                   <a:srgbClr val="2E8B57"/>
                 </a:solidFill>
-                <a:latin typeface="Segoe UI"/>
-                <a:cs typeface="Segoe UI"/>
+                <a:latin typeface="Arial"/>
+                <a:cs typeface="Arial"/>
               </a:rPr>
               <a:t>+ cho tỷ lệ hiện mắc</a:t>
             </a:r>
@@ -14556,8 +14514,8 @@
                 <a:solidFill>
                   <a:srgbClr val="B23B2E"/>
                 </a:solidFill>
-                <a:latin typeface="Segoe UI"/>
-                <a:cs typeface="Segoe UI"/>
+                <a:latin typeface="Arial"/>
+                <a:cs typeface="Arial"/>
               </a:rPr>
               <a:t>- cái nào có trước?</a:t>
             </a:r>
@@ -14599,10 +14557,10 @@
                 <a:solidFill>
                   <a:srgbClr val="FFFFFF"/>
                 </a:solidFill>
-                <a:latin typeface="Segoe UI"/>
-                <a:cs typeface="Segoe UI"/>
-              </a:rPr>
-              <a:t>Bệnh - chứng</a:t>
+                <a:latin typeface="Arial"/>
+                <a:cs typeface="Arial"/>
+              </a:rPr>
+              <a:t>Bệnh-chứng</a:t>
             </a:r>
           </a:p>
         </p:txBody>
@@ -14648,8 +14606,8 @@
                 <a:solidFill>
                   <a:srgbClr val="2E8B57"/>
                 </a:solidFill>
-                <a:latin typeface="Segoe UI"/>
-                <a:cs typeface="Segoe UI"/>
+                <a:latin typeface="Arial"/>
+                <a:cs typeface="Arial"/>
               </a:rPr>
               <a:t>+ kết cục hiếm</a:t>
             </a:r>
@@ -14669,8 +14627,8 @@
                 <a:solidFill>
                   <a:srgbClr val="2E8B57"/>
                 </a:solidFill>
-                <a:latin typeface="Segoe UI"/>
-                <a:cs typeface="Segoe UI"/>
+                <a:latin typeface="Arial"/>
+                <a:cs typeface="Arial"/>
               </a:rPr>
               <a:t>+ ít BN, nhanh</a:t>
             </a:r>
@@ -14690,8 +14648,8 @@
                 <a:solidFill>
                   <a:srgbClr val="B23B2E"/>
                 </a:solidFill>
-                <a:latin typeface="Segoe UI"/>
-                <a:cs typeface="Segoe UI"/>
+                <a:latin typeface="Arial"/>
+                <a:cs typeface="Arial"/>
               </a:rPr>
               <a:t>- sai lệch nhớ lại</a:t>
             </a:r>
@@ -14711,8 +14669,8 @@
                 <a:solidFill>
                   <a:srgbClr val="B23B2E"/>
                 </a:solidFill>
-                <a:latin typeface="Segoe UI"/>
-                <a:cs typeface="Segoe UI"/>
+                <a:latin typeface="Arial"/>
+                <a:cs typeface="Arial"/>
               </a:rPr>
               <a:t>- chỉ có OR</a:t>
             </a:r>
@@ -14754,8 +14712,8 @@
                 <a:solidFill>
                   <a:srgbClr val="FFFFFF"/>
                 </a:solidFill>
-                <a:latin typeface="Segoe UI"/>
-                <a:cs typeface="Segoe UI"/>
+                <a:latin typeface="Arial"/>
+                <a:cs typeface="Arial"/>
               </a:rPr>
               <a:t>Thuần tập</a:t>
             </a:r>
@@ -14803,8 +14761,8 @@
                 <a:solidFill>
                   <a:srgbClr val="2E8B57"/>
                 </a:solidFill>
-                <a:latin typeface="Segoe UI"/>
-                <a:cs typeface="Segoe UI"/>
+                <a:latin typeface="Arial"/>
+                <a:cs typeface="Arial"/>
               </a:rPr>
               <a:t>+ trình tự thời gian rõ</a:t>
             </a:r>
@@ -14824,8 +14782,8 @@
                 <a:solidFill>
                   <a:srgbClr val="2E8B57"/>
                 </a:solidFill>
-                <a:latin typeface="Segoe UI"/>
-                <a:cs typeface="Segoe UI"/>
+                <a:latin typeface="Arial"/>
+                <a:cs typeface="Arial"/>
               </a:rPr>
               <a:t>+ nguy cơ, nhiều kết cục</a:t>
             </a:r>
@@ -14845,8 +14803,8 @@
                 <a:solidFill>
                   <a:srgbClr val="B23B2E"/>
                 </a:solidFill>
-                <a:latin typeface="Segoe UI"/>
-                <a:cs typeface="Segoe UI"/>
+                <a:latin typeface="Arial"/>
+                <a:cs typeface="Arial"/>
               </a:rPr>
               <a:t>- chậm nếu tiến cứu</a:t>
             </a:r>
@@ -14866,8 +14824,8 @@
                 <a:solidFill>
                   <a:srgbClr val="B23B2E"/>
                 </a:solidFill>
-                <a:latin typeface="Segoe UI"/>
-                <a:cs typeface="Segoe UI"/>
+                <a:latin typeface="Arial"/>
+                <a:cs typeface="Arial"/>
               </a:rPr>
               <a:t>- yếu tố nhiễu</a:t>
             </a:r>
@@ -14909,8 +14867,8 @@
                 <a:solidFill>
                   <a:srgbClr val="FFFFFF"/>
                 </a:solidFill>
-                <a:latin typeface="Segoe UI"/>
-                <a:cs typeface="Segoe UI"/>
+                <a:latin typeface="Arial"/>
+                <a:cs typeface="Arial"/>
               </a:rPr>
               <a:t>RCT</a:t>
             </a:r>
@@ -14958,8 +14916,8 @@
                 <a:solidFill>
                   <a:srgbClr val="2E8B57"/>
                 </a:solidFill>
-                <a:latin typeface="Segoe UI"/>
-                <a:cs typeface="Segoe UI"/>
+                <a:latin typeface="Arial"/>
+                <a:cs typeface="Arial"/>
               </a:rPr>
               <a:t>+ cân bằng cả yếu tố chưa biết</a:t>
             </a:r>
@@ -14979,8 +14937,8 @@
                 <a:solidFill>
                   <a:srgbClr val="2E8B57"/>
                 </a:solidFill>
-                <a:latin typeface="Segoe UI"/>
-                <a:cs typeface="Segoe UI"/>
+                <a:latin typeface="Arial"/>
+                <a:cs typeface="Arial"/>
               </a:rPr>
               <a:t>+ mạnh nhất cho nhân quả</a:t>
             </a:r>
@@ -15000,8 +14958,8 @@
                 <a:solidFill>
                   <a:srgbClr val="B23B2E"/>
                 </a:solidFill>
-                <a:latin typeface="Segoe UI"/>
-                <a:cs typeface="Segoe UI"/>
+                <a:latin typeface="Arial"/>
+                <a:cs typeface="Arial"/>
               </a:rPr>
               <a:t>- tốn kém, giới hạn đạo đức</a:t>
             </a:r>
@@ -15021,8 +14979,8 @@
                 <a:solidFill>
                   <a:srgbClr val="B23B2E"/>
                 </a:solidFill>
-                <a:latin typeface="Segoe UI"/>
-                <a:cs typeface="Segoe UI"/>
+                <a:latin typeface="Arial"/>
+                <a:cs typeface="Arial"/>
               </a:rPr>
               <a:t>- BN được chọn lọc</a:t>
             </a:r>
@@ -15066,8 +15024,8 @@
                 <a:solidFill>
                   <a:srgbClr val="FFFFFF"/>
                 </a:solidFill>
-                <a:latin typeface="Segoe UI"/>
-                <a:cs typeface="Segoe UI"/>
+                <a:latin typeface="Arial"/>
+                <a:cs typeface="Arial"/>
               </a:rPr>
               <a:t>THÔNG ĐIỆP CHÍNH   </a:t>
             </a:r>
@@ -15076,8 +15034,8 @@
                 <a:solidFill>
                   <a:srgbClr val="FFFFFF"/>
                 </a:solidFill>
-                <a:latin typeface="Segoe UI"/>
-                <a:cs typeface="Segoe UI"/>
+                <a:latin typeface="Arial"/>
+                <a:cs typeface="Arial"/>
               </a:rPr>
               <a:t>Không thiết kế nào hoàn hảo: chọn thiết kế có điểm yếu ít hại câu hỏi nhất.</a:t>
             </a:r>
@@ -15114,7 +15072,7 @@
                     <a:lumMod val="50000"/>
                   </a:schemeClr>
                 </a:solidFill>
-                <a:latin typeface="Verdana"/>
+                <a:latin typeface="Arial"/>
               </a:rPr>
               <a:t>Neudata | #ClearDataClearImpact</a:t>
             </a:r>
@@ -15244,8 +15202,8 @@
                 <a:solidFill>
                   <a:srgbClr val="0D7377"/>
                 </a:solidFill>
-                <a:latin typeface="Segoe UI"/>
-                <a:cs typeface="Segoe UI"/>
+                <a:latin typeface="Arial"/>
+                <a:cs typeface="Arial"/>
               </a:rPr>
               <a:t>Mỗi thiết kế được kết luận điều gì?</a:t>
             </a:r>
@@ -15341,8 +15299,8 @@
                 <a:solidFill>
                   <a:srgbClr val="FFFFFF"/>
                 </a:solidFill>
-                <a:latin typeface="Segoe UI"/>
-                <a:cs typeface="Segoe UI"/>
+                <a:latin typeface="Arial"/>
+                <a:cs typeface="Arial"/>
               </a:rPr>
               <a:t>THÔNG ĐIỆP CHÍNH   </a:t>
             </a:r>
@@ -15351,8 +15309,8 @@
                 <a:solidFill>
                   <a:srgbClr val="FFFFFF"/>
                 </a:solidFill>
-                <a:latin typeface="Segoe UI"/>
-                <a:cs typeface="Segoe UI"/>
+                <a:latin typeface="Arial"/>
+                <a:cs typeface="Arial"/>
               </a:rPr>
               <a:t>RCT có thể nói 'gây ra'; thuần tập nên nói 'có liên quan'.</a:t>
             </a:r>
@@ -15389,7 +15347,7 @@
                     <a:lumMod val="50000"/>
                   </a:schemeClr>
                 </a:solidFill>
-                <a:latin typeface="Verdana"/>
+                <a:latin typeface="Arial"/>
               </a:rPr>
               <a:t>Neudata | #ClearDataClearImpact</a:t>
             </a:r>
@@ -15519,8 +15477,8 @@
                 <a:solidFill>
                   <a:srgbClr val="0D7377"/>
                 </a:solidFill>
-                <a:latin typeface="Segoe UI"/>
-                <a:cs typeface="Segoe UI"/>
+                <a:latin typeface="Arial"/>
+                <a:cs typeface="Arial"/>
               </a:rPr>
               <a:t>Kiểm tra nhanh: gây ra hay có liên quan?</a:t>
             </a:r>
@@ -15590,8 +15548,8 @@
                 <a:solidFill>
                   <a:srgbClr val="FFFFFF"/>
                 </a:solidFill>
-                <a:latin typeface="Segoe UI"/>
-                <a:cs typeface="Segoe UI"/>
+                <a:latin typeface="Arial"/>
+                <a:cs typeface="Arial"/>
               </a:rPr>
               <a:t>CÂU HỎI NHANH   |   2 phút</a:t>
             </a:r>
@@ -15628,25 +15586,19 @@
               <a:spcBef>
                 <a:spcPts val="450"/>
               </a:spcBef>
-              <a:buNone/>
-            </a:pPr>
-            <a:r>
-              <a:rPr lang="en-US" sz="1650" b="1" dirty="0">
-                <a:solidFill>
-                  <a:srgbClr val="6C3483"/>
-                </a:solidFill>
-                <a:latin typeface="Segoe UI"/>
-                <a:cs typeface="Segoe UI"/>
-              </a:rPr>
-              <a:t>1.  </a:t>
-            </a:r>
+              <a:buClr>
+                <a:srgbClr val="6C3483"/>
+              </a:buClr>
+              <a:buFont typeface="Arial"/>
+              <a:buChar char="•"/>
+            </a:pPr>
             <a:r>
               <a:rPr lang="en-US" sz="1650" dirty="0">
                 <a:solidFill>
                   <a:srgbClr val="000000"/>
                 </a:solidFill>
-                <a:latin typeface="Segoe UI"/>
-                <a:cs typeface="Segoe UI"/>
+                <a:latin typeface="Arial"/>
+                <a:cs typeface="Arial"/>
               </a:rPr>
               <a:t>A. Boulet (RCT): 'Chiến lược hạn chế không làm giảm cân bằng dịch ngày 5'</a:t>
             </a:r>
@@ -15659,25 +15611,19 @@
               <a:spcBef>
                 <a:spcPts val="450"/>
               </a:spcBef>
-              <a:buNone/>
-            </a:pPr>
-            <a:r>
-              <a:rPr lang="en-US" sz="1650" b="1" dirty="0">
-                <a:solidFill>
-                  <a:srgbClr val="6C3483"/>
-                </a:solidFill>
-                <a:latin typeface="Segoe UI"/>
-                <a:cs typeface="Segoe UI"/>
-              </a:rPr>
-              <a:t>2.  </a:t>
-            </a:r>
+              <a:buClr>
+                <a:srgbClr val="6C3483"/>
+              </a:buClr>
+              <a:buFont typeface="Arial"/>
+              <a:buChar char="•"/>
+            </a:pPr>
             <a:r>
               <a:rPr lang="en-US" sz="1650" dirty="0">
                 <a:solidFill>
                   <a:srgbClr val="000000"/>
                 </a:solidFill>
-                <a:latin typeface="Segoe UI"/>
-                <a:cs typeface="Segoe UI"/>
+                <a:latin typeface="Arial"/>
+                <a:cs typeface="Arial"/>
               </a:rPr>
               <a:t>B. Hyun (thuần tập): 'Cân bằng dịch dương GÂY RA tử vong ngày 28 cao hơn'</a:t>
             </a:r>
@@ -15690,25 +15636,19 @@
               <a:spcBef>
                 <a:spcPts val="450"/>
               </a:spcBef>
-              <a:buNone/>
-            </a:pPr>
-            <a:r>
-              <a:rPr lang="en-US" sz="1650" b="1" dirty="0">
-                <a:solidFill>
-                  <a:srgbClr val="6C3483"/>
-                </a:solidFill>
-                <a:latin typeface="Segoe UI"/>
-                <a:cs typeface="Segoe UI"/>
-              </a:rPr>
-              <a:t>3.  </a:t>
-            </a:r>
+              <a:buClr>
+                <a:srgbClr val="6C3483"/>
+              </a:buClr>
+              <a:buFont typeface="Arial"/>
+              <a:buChar char="•"/>
+            </a:pPr>
             <a:r>
               <a:rPr lang="en-US" sz="1650" dirty="0">
                 <a:solidFill>
                   <a:srgbClr val="000000"/>
                 </a:solidFill>
-                <a:latin typeface="Segoe UI"/>
-                <a:cs typeface="Segoe UI"/>
+                <a:latin typeface="Arial"/>
+                <a:cs typeface="Arial"/>
               </a:rPr>
               <a:t>C. Khảo sát một ngày: 'Ống thông tiểu có liên quan với nhiễm khuẩn tiết niệu'</a:t>
             </a:r>
@@ -15752,8 +15692,8 @@
                 <a:solidFill>
                   <a:srgbClr val="6C3483"/>
                 </a:solidFill>
-                <a:latin typeface="Segoe UI"/>
-                <a:cs typeface="Segoe UI"/>
+                <a:latin typeface="Arial"/>
+                <a:cs typeface="Arial"/>
               </a:rPr>
               <a:t>Với mỗi câu</a:t>
             </a:r>
@@ -15774,8 +15714,8 @@
                 <a:solidFill>
                   <a:srgbClr val="000000"/>
                 </a:solidFill>
-                <a:latin typeface="Segoe UI"/>
-                <a:cs typeface="Segoe UI"/>
+                <a:latin typeface="Arial"/>
+                <a:cs typeface="Arial"/>
               </a:rPr>
               <a:t>Lời lẽ có hợp với thiết kế?</a:t>
             </a:r>
@@ -15796,8 +15736,8 @@
                 <a:solidFill>
                   <a:srgbClr val="000000"/>
                 </a:solidFill>
-                <a:latin typeface="Segoe UI"/>
-                <a:cs typeface="Segoe UI"/>
+                <a:latin typeface="Arial"/>
+                <a:cs typeface="Arial"/>
               </a:rPr>
               <a:t>Giơ ngón cái lên hoặc xuống</a:t>
             </a:r>
@@ -15843,8 +15783,8 @@
                 <a:solidFill>
                   <a:srgbClr val="6C3483"/>
                 </a:solidFill>
-                <a:latin typeface="Segoe UI"/>
-                <a:cs typeface="Segoe UI"/>
+                <a:latin typeface="Arial"/>
+                <a:cs typeface="Arial"/>
               </a:rPr>
               <a:t>SẢN PHẨM   </a:t>
             </a:r>
@@ -15853,8 +15793,8 @@
                 <a:solidFill>
                   <a:srgbClr val="000000"/>
                 </a:solidFill>
-                <a:latin typeface="Segoe UI"/>
-                <a:cs typeface="Segoe UI"/>
+                <a:latin typeface="Arial"/>
+                <a:cs typeface="Arial"/>
               </a:rPr>
               <a:t>Ngón cái lên / xuống cho mỗi câu</a:t>
             </a:r>
@@ -15891,7 +15831,7 @@
                     <a:lumMod val="50000"/>
                   </a:schemeClr>
                 </a:solidFill>
-                <a:latin typeface="Verdana"/>
+                <a:latin typeface="Arial"/>
               </a:rPr>
               <a:t>Neudata | #ClearDataClearImpact</a:t>
             </a:r>
@@ -16021,8 +15961,8 @@
                 <a:solidFill>
                   <a:srgbClr val="0D7377"/>
                 </a:solidFill>
-                <a:latin typeface="Segoe UI"/>
-                <a:cs typeface="Segoe UI"/>
+                <a:latin typeface="Arial"/>
+                <a:cs typeface="Arial"/>
               </a:rPr>
               <a:t>Bài tập: Gọi tên thiết kế</a:t>
             </a:r>
@@ -16092,8 +16032,8 @@
                 <a:solidFill>
                   <a:srgbClr val="FFFFFF"/>
                 </a:solidFill>
-                <a:latin typeface="Segoe UI"/>
-                <a:cs typeface="Segoe UI"/>
+                <a:latin typeface="Arial"/>
+                <a:cs typeface="Arial"/>
               </a:rPr>
               <a:t>LÀM VIỆC NHÓM   |   15 phút</a:t>
             </a:r>
@@ -16130,25 +16070,19 @@
               <a:spcBef>
                 <a:spcPts val="450"/>
               </a:spcBef>
-              <a:buNone/>
-            </a:pPr>
-            <a:r>
-              <a:rPr lang="en-US" sz="1650" b="1" dirty="0">
-                <a:solidFill>
-                  <a:srgbClr val="0D7377"/>
-                </a:solidFill>
-                <a:latin typeface="Segoe UI"/>
-                <a:cs typeface="Segoe UI"/>
-              </a:rPr>
-              <a:t>1.  </a:t>
-            </a:r>
+              <a:buClr>
+                <a:srgbClr val="0D7377"/>
+              </a:buClr>
+              <a:buFont typeface="Arial"/>
+              <a:buChar char="•"/>
+            </a:pPr>
             <a:r>
               <a:rPr lang="en-US" sz="1650" dirty="0">
                 <a:solidFill>
                   <a:srgbClr val="000000"/>
                 </a:solidFill>
-                <a:latin typeface="Segoe UI"/>
-                <a:cs typeface="Segoe UI"/>
+                <a:latin typeface="Arial"/>
+                <a:cs typeface="Arial"/>
               </a:rPr>
               <a:t>Làm theo cặp với tài liệu phát tay: 8 tóm tắt lâm sàng ngắn</a:t>
             </a:r>
@@ -16161,25 +16095,19 @@
               <a:spcBef>
                 <a:spcPts val="450"/>
               </a:spcBef>
-              <a:buNone/>
-            </a:pPr>
-            <a:r>
-              <a:rPr lang="en-US" sz="1650" b="1" dirty="0">
-                <a:solidFill>
-                  <a:srgbClr val="0D7377"/>
-                </a:solidFill>
-                <a:latin typeface="Segoe UI"/>
-                <a:cs typeface="Segoe UI"/>
-              </a:rPr>
-              <a:t>2.  </a:t>
-            </a:r>
+              <a:buClr>
+                <a:srgbClr val="0D7377"/>
+              </a:buClr>
+              <a:buFont typeface="Arial"/>
+              <a:buChar char="•"/>
+            </a:pPr>
             <a:r>
               <a:rPr lang="en-US" sz="1650" dirty="0">
                 <a:solidFill>
                   <a:srgbClr val="000000"/>
                 </a:solidFill>
-                <a:latin typeface="Segoe UI"/>
-                <a:cs typeface="Segoe UI"/>
+                <a:latin typeface="Arial"/>
+                <a:cs typeface="Arial"/>
               </a:rPr>
               <a:t>Với mỗi tóm tắt: có chỉ định? có ngẫu nhiên? thời gian chạy chiều nào?</a:t>
             </a:r>
@@ -16192,25 +16120,19 @@
               <a:spcBef>
                 <a:spcPts val="450"/>
               </a:spcBef>
-              <a:buNone/>
-            </a:pPr>
-            <a:r>
-              <a:rPr lang="en-US" sz="1650" b="1" dirty="0">
-                <a:solidFill>
-                  <a:srgbClr val="0D7377"/>
-                </a:solidFill>
-                <a:latin typeface="Segoe UI"/>
-                <a:cs typeface="Segoe UI"/>
-              </a:rPr>
-              <a:t>3.  </a:t>
-            </a:r>
+              <a:buClr>
+                <a:srgbClr val="0D7377"/>
+              </a:buClr>
+              <a:buFont typeface="Arial"/>
+              <a:buChar char="•"/>
+            </a:pPr>
             <a:r>
               <a:rPr lang="en-US" sz="1650" dirty="0">
                 <a:solidFill>
                   <a:srgbClr val="000000"/>
                 </a:solidFill>
-                <a:latin typeface="Segoe UI"/>
-                <a:cs typeface="Segoe UI"/>
+                <a:latin typeface="Arial"/>
+                <a:cs typeface="Arial"/>
               </a:rPr>
               <a:t>Ghi thiết kế và một cụm từ làm bằng chứng trong tóm tắt</a:t>
             </a:r>
@@ -16223,25 +16145,19 @@
               <a:spcBef>
                 <a:spcPts val="450"/>
               </a:spcBef>
-              <a:buNone/>
-            </a:pPr>
-            <a:r>
-              <a:rPr lang="en-US" sz="1650" b="1" dirty="0">
-                <a:solidFill>
-                  <a:srgbClr val="0D7377"/>
-                </a:solidFill>
-                <a:latin typeface="Segoe UI"/>
-                <a:cs typeface="Segoe UI"/>
-              </a:rPr>
-              <a:t>4.  </a:t>
-            </a:r>
+              <a:buClr>
+                <a:srgbClr val="0D7377"/>
+              </a:buClr>
+              <a:buFont typeface="Arial"/>
+              <a:buChar char="•"/>
+            </a:pPr>
             <a:r>
               <a:rPr lang="en-US" sz="1650" dirty="0">
                 <a:solidFill>
                   <a:srgbClr val="000000"/>
                 </a:solidFill>
-                <a:latin typeface="Segoe UI"/>
-                <a:cs typeface="Segoe UI"/>
+                <a:latin typeface="Arial"/>
+                <a:cs typeface="Arial"/>
               </a:rPr>
               <a:t>Đánh dấu sao câu khó nhất: cả lớp sẽ cùng thảo luận</a:t>
             </a:r>
@@ -16285,8 +16201,8 @@
                 <a:solidFill>
                   <a:srgbClr val="0D7377"/>
                 </a:solidFill>
-                <a:latin typeface="Segoe UI"/>
-                <a:cs typeface="Segoe UI"/>
+                <a:latin typeface="Arial"/>
+                <a:cs typeface="Arial"/>
               </a:rPr>
               <a:t>Dùng cây quyết định</a:t>
             </a:r>
@@ -16307,8 +16223,8 @@
                 <a:solidFill>
                   <a:srgbClr val="000000"/>
                 </a:solidFill>
-                <a:latin typeface="Segoe UI"/>
-                <a:cs typeface="Segoe UI"/>
+                <a:latin typeface="Arial"/>
+                <a:cs typeface="Arial"/>
               </a:rPr>
               <a:t>Chỉ định + ngẫu nhiên = RCT</a:t>
             </a:r>
@@ -16329,10 +16245,10 @@
                 <a:solidFill>
                   <a:srgbClr val="000000"/>
                 </a:solidFill>
-                <a:latin typeface="Segoe UI"/>
-                <a:cs typeface="Segoe UI"/>
-              </a:rPr>
-              <a:t>Kết cục trước, nhìn lại = bệnh - chứng</a:t>
+                <a:latin typeface="Arial"/>
+                <a:cs typeface="Arial"/>
+              </a:rPr>
+              <a:t>Kết cục trước, nhìn lại = bệnh-chứng</a:t>
             </a:r>
           </a:p>
           <a:p>
@@ -16351,8 +16267,8 @@
                 <a:solidFill>
                   <a:srgbClr val="000000"/>
                 </a:solidFill>
-                <a:latin typeface="Segoe UI"/>
-                <a:cs typeface="Segoe UI"/>
+                <a:latin typeface="Arial"/>
+                <a:cs typeface="Arial"/>
               </a:rPr>
               <a:t>Phơi nhiễm trước, theo dõi = thuần tập</a:t>
             </a:r>
@@ -16373,8 +16289,8 @@
                 <a:solidFill>
                   <a:srgbClr val="000000"/>
                 </a:solidFill>
-                <a:latin typeface="Segoe UI"/>
-                <a:cs typeface="Segoe UI"/>
+                <a:latin typeface="Arial"/>
+                <a:cs typeface="Arial"/>
               </a:rPr>
               <a:t>Cùng thời điểm = cắt ngang</a:t>
             </a:r>
@@ -16420,8 +16336,8 @@
                 <a:solidFill>
                   <a:srgbClr val="0D7377"/>
                 </a:solidFill>
-                <a:latin typeface="Segoe UI"/>
-                <a:cs typeface="Segoe UI"/>
+                <a:latin typeface="Arial"/>
+                <a:cs typeface="Arial"/>
               </a:rPr>
               <a:t>SẢN PHẨM   </a:t>
             </a:r>
@@ -16430,8 +16346,8 @@
                 <a:solidFill>
                   <a:srgbClr val="000000"/>
                 </a:solidFill>
-                <a:latin typeface="Segoe UI"/>
-                <a:cs typeface="Segoe UI"/>
+                <a:latin typeface="Arial"/>
+                <a:cs typeface="Arial"/>
               </a:rPr>
               <a:t>8 thiết kế được gọi tên, mỗi thiết kế có một bằng chứng</a:t>
             </a:r>
@@ -16468,7 +16384,7 @@
                     <a:lumMod val="50000"/>
                   </a:schemeClr>
                 </a:solidFill>
-                <a:latin typeface="Verdana"/>
+                <a:latin typeface="Arial"/>
               </a:rPr>
               <a:t>Neudata | #ClearDataClearImpact</a:t>
             </a:r>
@@ -16598,8 +16514,8 @@
                 <a:solidFill>
                   <a:srgbClr val="0D7377"/>
                 </a:solidFill>
-                <a:latin typeface="Segoe UI"/>
-                <a:cs typeface="Segoe UI"/>
+                <a:latin typeface="Arial"/>
+                <a:cs typeface="Arial"/>
               </a:rPr>
               <a:t>Giải lao</a:t>
             </a:r>
@@ -16669,8 +16585,8 @@
                 <a:solidFill>
                   <a:srgbClr val="FFFFFF"/>
                 </a:solidFill>
-                <a:latin typeface="Segoe UI"/>
-                <a:cs typeface="Segoe UI"/>
+                <a:latin typeface="Arial"/>
+                <a:cs typeface="Arial"/>
               </a:rPr>
               <a:t>GIẢI LAO   |   15 phút</a:t>
             </a:r>
@@ -16707,25 +16623,19 @@
               <a:spcBef>
                 <a:spcPts val="450"/>
               </a:spcBef>
-              <a:buNone/>
-            </a:pPr>
-            <a:r>
-              <a:rPr lang="en-US" sz="1650" b="1" dirty="0">
-                <a:solidFill>
-                  <a:srgbClr val="8A99A3"/>
-                </a:solidFill>
-                <a:latin typeface="Segoe UI"/>
-                <a:cs typeface="Segoe UI"/>
-              </a:rPr>
-              <a:t>1.  </a:t>
-            </a:r>
+              <a:buClr>
+                <a:srgbClr val="8A99A3"/>
+              </a:buClr>
+              <a:buFont typeface="Arial"/>
+              <a:buChar char="•"/>
+            </a:pPr>
             <a:r>
               <a:rPr lang="en-US" sz="1650" dirty="0">
                 <a:solidFill>
                   <a:srgbClr val="000000"/>
                 </a:solidFill>
-                <a:latin typeface="Segoe UI"/>
-                <a:cs typeface="Segoe UI"/>
+                <a:latin typeface="Arial"/>
+                <a:cs typeface="Arial"/>
               </a:rPr>
               <a:t>Vận động, uống cà phê, hít thở không khí</a:t>
             </a:r>
@@ -16738,25 +16648,19 @@
               <a:spcBef>
                 <a:spcPts val="450"/>
               </a:spcBef>
-              <a:buNone/>
-            </a:pPr>
-            <a:r>
-              <a:rPr lang="en-US" sz="1650" b="1" dirty="0">
-                <a:solidFill>
-                  <a:srgbClr val="8A99A3"/>
-                </a:solidFill>
-                <a:latin typeface="Segoe UI"/>
-                <a:cs typeface="Segoe UI"/>
-              </a:rPr>
-              <a:t>2.  </a:t>
-            </a:r>
+              <a:buClr>
+                <a:srgbClr val="8A99A3"/>
+              </a:buClr>
+              <a:buFont typeface="Arial"/>
+              <a:buChar char="•"/>
+            </a:pPr>
             <a:r>
               <a:rPr lang="en-US" sz="1650" dirty="0">
                 <a:solidFill>
                   <a:srgbClr val="000000"/>
                 </a:solidFill>
-                <a:latin typeface="Segoe UI"/>
-                <a:cs typeface="Segoe UI"/>
+                <a:latin typeface="Arial"/>
+                <a:cs typeface="Arial"/>
               </a:rPr>
               <a:t>Tùy chọn: thiết kế nào hợp nhất với câu hỏi của nhóm?</a:t>
             </a:r>
@@ -16769,25 +16673,19 @@
               <a:spcBef>
                 <a:spcPts val="450"/>
               </a:spcBef>
-              <a:buNone/>
-            </a:pPr>
-            <a:r>
-              <a:rPr lang="en-US" sz="1650" b="1" dirty="0">
-                <a:solidFill>
-                  <a:srgbClr val="8A99A3"/>
-                </a:solidFill>
-                <a:latin typeface="Segoe UI"/>
-                <a:cs typeface="Segoe UI"/>
-              </a:rPr>
-              <a:t>3.  </a:t>
-            </a:r>
+              <a:buClr>
+                <a:srgbClr val="8A99A3"/>
+              </a:buClr>
+              <a:buFont typeface="Arial"/>
+              <a:buChar char="•"/>
+            </a:pPr>
             <a:r>
               <a:rPr lang="en-US" sz="1650" dirty="0">
                 <a:solidFill>
                   <a:srgbClr val="000000"/>
                 </a:solidFill>
-                <a:latin typeface="Segoe UI"/>
-                <a:cs typeface="Segoe UI"/>
+                <a:latin typeface="Arial"/>
+                <a:cs typeface="Arial"/>
               </a:rPr>
               <a:t>Chúng ta tiếp tục với các thiết kế khác</a:t>
             </a:r>
@@ -16824,7 +16722,7 @@
                     <a:lumMod val="50000"/>
                   </a:schemeClr>
                 </a:solidFill>
-                <a:latin typeface="Verdana"/>
+                <a:latin typeface="Arial"/>
               </a:rPr>
               <a:t>Neudata | #ClearDataClearImpact</a:t>
             </a:r>
@@ -16954,8 +16852,8 @@
                 <a:solidFill>
                   <a:srgbClr val="0D7377"/>
                 </a:solidFill>
-                <a:latin typeface="Segoe UI"/>
-                <a:cs typeface="Segoe UI"/>
+                <a:latin typeface="Arial"/>
+                <a:cs typeface="Arial"/>
               </a:rPr>
               <a:t>3.2  Các thiết kế khác</a:t>
             </a:r>
@@ -17024,8 +16922,8 @@
                 <a:solidFill>
                   <a:srgbClr val="0D7377"/>
                 </a:solidFill>
-                <a:latin typeface="Segoe UI"/>
-                <a:cs typeface="Segoe UI"/>
+                <a:latin typeface="Arial"/>
+                <a:cs typeface="Arial"/>
               </a:rPr>
               <a:t>Dự án thực tế uốn các thiết kế cơ bản.</a:t>
             </a:r>
@@ -17042,8 +16940,8 @@
                 <a:solidFill>
                   <a:srgbClr val="595959"/>
                 </a:solidFill>
-                <a:latin typeface="Segoe UI"/>
-                <a:cs typeface="Segoe UI"/>
+                <a:latin typeface="Arial"/>
+                <a:cs typeface="Arial"/>
               </a:rPr>
               <a:t>Biến thể thử nghiệm, không kém hơn, thí điểm, thiết kế cải tiến chất lượng và nghiên cứu định tính. (35 phút)</a:t>
             </a:r>
@@ -17080,7 +16978,7 @@
                     <a:lumMod val="50000"/>
                   </a:schemeClr>
                 </a:solidFill>
-                <a:latin typeface="Verdana"/>
+                <a:latin typeface="Arial"/>
               </a:rPr>
               <a:t>Neudata | #ClearDataClearImpact</a:t>
             </a:r>
@@ -17210,8 +17108,8 @@
                 <a:solidFill>
                   <a:srgbClr val="0D7377"/>
                 </a:solidFill>
-                <a:latin typeface="Segoe UI"/>
-                <a:cs typeface="Segoe UI"/>
+                <a:latin typeface="Arial"/>
+                <a:cs typeface="Arial"/>
               </a:rPr>
               <a:t>Không phải thử nghiệm nào cũng song song: bốn cách bố trí</a:t>
             </a:r>
@@ -17307,8 +17205,8 @@
                 <a:solidFill>
                   <a:srgbClr val="FFFFFF"/>
                 </a:solidFill>
-                <a:latin typeface="Segoe UI"/>
-                <a:cs typeface="Segoe UI"/>
+                <a:latin typeface="Arial"/>
+                <a:cs typeface="Arial"/>
               </a:rPr>
               <a:t>THÔNG ĐIỆP CHÍNH   </a:t>
             </a:r>
@@ -17317,8 +17215,8 @@
                 <a:solidFill>
                   <a:srgbClr val="FFFFFF"/>
                 </a:solidFill>
-                <a:latin typeface="Segoe UI"/>
-                <a:cs typeface="Segoe UI"/>
+                <a:latin typeface="Arial"/>
+                <a:cs typeface="Arial"/>
               </a:rPr>
               <a:t>Chọn cách bố trí thử nghiệm phù hợp với can thiệp và đơn vị chăm sóc.</a:t>
             </a:r>
@@ -17355,7 +17253,7 @@
                     <a:lumMod val="50000"/>
                   </a:schemeClr>
                 </a:solidFill>
-                <a:latin typeface="Verdana"/>
+                <a:latin typeface="Arial"/>
               </a:rPr>
               <a:t>Neudata | #ClearDataClearImpact</a:t>
             </a:r>
@@ -17485,8 +17383,8 @@
                 <a:solidFill>
                   <a:srgbClr val="0D7377"/>
                 </a:solidFill>
-                <a:latin typeface="Segoe UI"/>
-                <a:cs typeface="Segoe UI"/>
+                <a:latin typeface="Arial"/>
+                <a:cs typeface="Arial"/>
               </a:rPr>
               <a:t>Vượt trội hay không kém hơn? Hình ảnh ngưỡng</a:t>
             </a:r>
@@ -17582,8 +17480,8 @@
                 <a:solidFill>
                   <a:srgbClr val="FFFFFF"/>
                 </a:solidFill>
-                <a:latin typeface="Segoe UI"/>
-                <a:cs typeface="Segoe UI"/>
+                <a:latin typeface="Arial"/>
+                <a:cs typeface="Arial"/>
               </a:rPr>
               <a:t>THÔNG ĐIỆP CHÍNH   </a:t>
             </a:r>
@@ -17592,8 +17490,8 @@
                 <a:solidFill>
                   <a:srgbClr val="FFFFFF"/>
                 </a:solidFill>
-                <a:latin typeface="Segoe UI"/>
-                <a:cs typeface="Segoe UI"/>
+                <a:latin typeface="Arial"/>
+                <a:cs typeface="Arial"/>
               </a:rPr>
               <a:t>Không kém hơn: toàn bộ KTC phải nằm dưới ngưỡng định trước.</a:t>
             </a:r>
@@ -17630,7 +17528,7 @@
                     <a:lumMod val="50000"/>
                   </a:schemeClr>
                 </a:solidFill>
-                <a:latin typeface="Verdana"/>
+                <a:latin typeface="Arial"/>
               </a:rPr>
               <a:t>Neudata | #ClearDataClearImpact</a:t>
             </a:r>
@@ -17760,8 +17658,8 @@
                 <a:solidFill>
                   <a:srgbClr val="0D7377"/>
                 </a:solidFill>
-                <a:latin typeface="Segoe UI"/>
-                <a:cs typeface="Segoe UI"/>
+                <a:latin typeface="Arial"/>
+                <a:cs typeface="Arial"/>
               </a:rPr>
               <a:t>Nghiên cứu thí điểm và tính khả thi: buổi tổng duyệt</a:t>
             </a:r>
@@ -17857,8 +17755,8 @@
                 <a:solidFill>
                   <a:srgbClr val="FFFFFF"/>
                 </a:solidFill>
-                <a:latin typeface="Segoe UI"/>
-                <a:cs typeface="Segoe UI"/>
+                <a:latin typeface="Arial"/>
+                <a:cs typeface="Arial"/>
               </a:rPr>
               <a:t>THÔNG ĐIỆP CHÍNH   </a:t>
             </a:r>
@@ -17867,8 +17765,8 @@
                 <a:solidFill>
                   <a:srgbClr val="FFFFFF"/>
                 </a:solidFill>
-                <a:latin typeface="Segoe UI"/>
-                <a:cs typeface="Segoe UI"/>
+                <a:latin typeface="Arial"/>
+                <a:cs typeface="Arial"/>
               </a:rPr>
               <a:t>Thí điểm hỏi 'có làm được không?', không phải 'có hiệu quả không?'</a:t>
             </a:r>
@@ -17905,7 +17803,7 @@
                     <a:lumMod val="50000"/>
                   </a:schemeClr>
                 </a:solidFill>
-                <a:latin typeface="Verdana"/>
+                <a:latin typeface="Arial"/>
               </a:rPr>
               <a:t>Neudata | #ClearDataClearImpact</a:t>
             </a:r>
@@ -18035,8 +17933,8 @@
                 <a:solidFill>
                   <a:srgbClr val="0D7377"/>
                 </a:solidFill>
-                <a:latin typeface="Segoe UI"/>
-                <a:cs typeface="Segoe UI"/>
+                <a:latin typeface="Arial"/>
+                <a:cs typeface="Arial"/>
               </a:rPr>
               <a:t>Từ khóa của ngày hôm nay</a:t>
             </a:r>
@@ -18102,8 +18000,8 @@
                 <a:solidFill>
                   <a:srgbClr val="595959"/>
                 </a:solidFill>
-                <a:latin typeface="Segoe UI"/>
-                <a:cs typeface="Segoe UI"/>
+                <a:latin typeface="Arial"/>
+                <a:cs typeface="Arial"/>
               </a:rPr>
               <a:t>Mười từ dùng suốt buổi (không cần học thuộc định nghĩa)</a:t>
             </a:r>
@@ -18145,8 +18043,8 @@
                 <a:solidFill>
                   <a:srgbClr val="FFFFFF"/>
                 </a:solidFill>
-                <a:latin typeface="Segoe UI"/>
-                <a:cs typeface="Segoe UI"/>
+                <a:latin typeface="Arial"/>
+                <a:cs typeface="Arial"/>
               </a:rPr>
               <a:t>Các thành phần</a:t>
             </a:r>
@@ -18194,8 +18092,8 @@
                 <a:solidFill>
                   <a:srgbClr val="000000"/>
                 </a:solidFill>
-                <a:latin typeface="Segoe UI"/>
-                <a:cs typeface="Segoe UI"/>
+                <a:latin typeface="Arial"/>
+                <a:cs typeface="Arial"/>
               </a:rPr>
               <a:t>Phơi nhiễm: điều có trước</a:t>
             </a:r>
@@ -18215,8 +18113,8 @@
                 <a:solidFill>
                   <a:srgbClr val="000000"/>
                 </a:solidFill>
-                <a:latin typeface="Segoe UI"/>
-                <a:cs typeface="Segoe UI"/>
+                <a:latin typeface="Arial"/>
+                <a:cs typeface="Arial"/>
               </a:rPr>
               <a:t>Kết cục: điều đếm sau đó</a:t>
             </a:r>
@@ -18236,8 +18134,8 @@
                 <a:solidFill>
                   <a:srgbClr val="000000"/>
                 </a:solidFill>
-                <a:latin typeface="Segoe UI"/>
-                <a:cs typeface="Segoe UI"/>
+                <a:latin typeface="Arial"/>
+                <a:cs typeface="Arial"/>
               </a:rPr>
               <a:t>Nhóm so sánh</a:t>
             </a:r>
@@ -18279,8 +18177,8 @@
                 <a:solidFill>
                   <a:srgbClr val="FFFFFF"/>
                 </a:solidFill>
-                <a:latin typeface="Segoe UI"/>
-                <a:cs typeface="Segoe UI"/>
+                <a:latin typeface="Arial"/>
+                <a:cs typeface="Arial"/>
               </a:rPr>
               <a:t>Ai quyết định?</a:t>
             </a:r>
@@ -18328,8 +18226,8 @@
                 <a:solidFill>
                   <a:srgbClr val="000000"/>
                 </a:solidFill>
-                <a:latin typeface="Segoe UI"/>
-                <a:cs typeface="Segoe UI"/>
+                <a:latin typeface="Arial"/>
+                <a:cs typeface="Arial"/>
               </a:rPr>
               <a:t>Quan sát: ta theo dõi</a:t>
             </a:r>
@@ -18349,8 +18247,8 @@
                 <a:solidFill>
                   <a:srgbClr val="000000"/>
                 </a:solidFill>
-                <a:latin typeface="Segoe UI"/>
-                <a:cs typeface="Segoe UI"/>
+                <a:latin typeface="Arial"/>
+                <a:cs typeface="Arial"/>
               </a:rPr>
               <a:t>Thực nghiệm: ta chỉ định</a:t>
             </a:r>
@@ -18370,8 +18268,8 @@
                 <a:solidFill>
                   <a:srgbClr val="000000"/>
                 </a:solidFill>
-                <a:latin typeface="Segoe UI"/>
-                <a:cs typeface="Segoe UI"/>
+                <a:latin typeface="Arial"/>
+                <a:cs typeface="Arial"/>
               </a:rPr>
               <a:t>Ngẫu nhiên: may rủi chỉ định</a:t>
             </a:r>
@@ -18413,8 +18311,8 @@
                 <a:solidFill>
                   <a:srgbClr val="FFFFFF"/>
                 </a:solidFill>
-                <a:latin typeface="Segoe UI"/>
-                <a:cs typeface="Segoe UI"/>
+                <a:latin typeface="Arial"/>
+                <a:cs typeface="Arial"/>
               </a:rPr>
               <a:t>Thời gian chiều nào?</a:t>
             </a:r>
@@ -18462,8 +18360,8 @@
                 <a:solidFill>
                   <a:srgbClr val="000000"/>
                 </a:solidFill>
-                <a:latin typeface="Segoe UI"/>
-                <a:cs typeface="Segoe UI"/>
+                <a:latin typeface="Arial"/>
+                <a:cs typeface="Arial"/>
               </a:rPr>
               <a:t>Cắt ngang: ảnh chụp</a:t>
             </a:r>
@@ -18483,10 +18381,10 @@
                 <a:solidFill>
                   <a:srgbClr val="000000"/>
                 </a:solidFill>
-                <a:latin typeface="Segoe UI"/>
-                <a:cs typeface="Segoe UI"/>
-              </a:rPr>
-              <a:t>Bệnh - chứng: nhìn lại</a:t>
+                <a:latin typeface="Arial"/>
+                <a:cs typeface="Arial"/>
+              </a:rPr>
+              <a:t>Bệnh-chứng: nhìn lại</a:t>
             </a:r>
           </a:p>
           <a:p>
@@ -18504,8 +18402,8 @@
                 <a:solidFill>
                   <a:srgbClr val="000000"/>
                 </a:solidFill>
-                <a:latin typeface="Segoe UI"/>
-                <a:cs typeface="Segoe UI"/>
+                <a:latin typeface="Arial"/>
+                <a:cs typeface="Arial"/>
               </a:rPr>
               <a:t>Thuần tập: theo dõi về sau</a:t>
             </a:r>
@@ -18547,8 +18445,8 @@
                 <a:solidFill>
                   <a:srgbClr val="FFFFFF"/>
                 </a:solidFill>
-                <a:latin typeface="Segoe UI"/>
-                <a:cs typeface="Segoe UI"/>
+                <a:latin typeface="Arial"/>
+                <a:cs typeface="Arial"/>
               </a:rPr>
               <a:t>Sau giải lao</a:t>
             </a:r>
@@ -18596,8 +18494,8 @@
                 <a:solidFill>
                   <a:srgbClr val="000000"/>
                 </a:solidFill>
-                <a:latin typeface="Segoe UI"/>
-                <a:cs typeface="Segoe UI"/>
+                <a:latin typeface="Arial"/>
+                <a:cs typeface="Arial"/>
               </a:rPr>
               <a:t>Thử nghiệm cụm, bắt chéo</a:t>
             </a:r>
@@ -18617,8 +18515,8 @@
                 <a:solidFill>
                   <a:srgbClr val="000000"/>
                 </a:solidFill>
-                <a:latin typeface="Segoe UI"/>
-                <a:cs typeface="Segoe UI"/>
+                <a:latin typeface="Arial"/>
+                <a:cs typeface="Arial"/>
               </a:rPr>
               <a:t>Không kém hơn, thí điểm</a:t>
             </a:r>
@@ -18638,8 +18536,8 @@
                 <a:solidFill>
                   <a:srgbClr val="000000"/>
                 </a:solidFill>
-                <a:latin typeface="Segoe UI"/>
-                <a:cs typeface="Segoe UI"/>
+                <a:latin typeface="Arial"/>
+                <a:cs typeface="Arial"/>
               </a:rPr>
               <a:t>Chuỗi thời gian, định tính</a:t>
             </a:r>
@@ -18683,8 +18581,8 @@
                 <a:solidFill>
                   <a:srgbClr val="FFFFFF"/>
                 </a:solidFill>
-                <a:latin typeface="Segoe UI"/>
-                <a:cs typeface="Segoe UI"/>
+                <a:latin typeface="Arial"/>
+                <a:cs typeface="Arial"/>
               </a:rPr>
               <a:t>THÔNG ĐIỆP CHÍNH   </a:t>
             </a:r>
@@ -18693,8 +18591,8 @@
                 <a:solidFill>
                   <a:srgbClr val="FFFFFF"/>
                 </a:solidFill>
-                <a:latin typeface="Segoe UI"/>
-                <a:cs typeface="Segoe UI"/>
+                <a:latin typeface="Arial"/>
+                <a:cs typeface="Arial"/>
               </a:rPr>
               <a:t>Hai câu hỏi gọi tên hầu hết thiết kế: ai quyết định phơi nhiễm, và thời gian chạy chiều nào?</a:t>
             </a:r>
@@ -18731,7 +18629,7 @@
                     <a:lumMod val="50000"/>
                   </a:schemeClr>
                 </a:solidFill>
-                <a:latin typeface="Verdana"/>
+                <a:latin typeface="Arial"/>
               </a:rPr>
               <a:t>Neudata | #ClearDataClearImpact</a:t>
             </a:r>
@@ -18861,8 +18759,8 @@
                 <a:solidFill>
                   <a:srgbClr val="0D7377"/>
                 </a:solidFill>
-                <a:latin typeface="Segoe UI"/>
-                <a:cs typeface="Segoe UI"/>
+                <a:latin typeface="Arial"/>
+                <a:cs typeface="Arial"/>
               </a:rPr>
               <a:t>Thiết kế bán thực nghiệm: trước-sau và chuỗi thời gian ngắt quãng</a:t>
             </a:r>
@@ -18952,8 +18850,8 @@
                 <a:solidFill>
                   <a:srgbClr val="595959"/>
                 </a:solidFill>
-                <a:latin typeface="Segoe UI"/>
-                <a:cs typeface="Segoe UI"/>
+                <a:latin typeface="Arial"/>
+                <a:cs typeface="Arial"/>
               </a:rPr>
               <a:t>Dữ liệu mô phỏng dùng cho giảng dạy</a:t>
             </a:r>
@@ -18997,8 +18895,8 @@
                 <a:solidFill>
                   <a:srgbClr val="FFFFFF"/>
                 </a:solidFill>
-                <a:latin typeface="Segoe UI"/>
-                <a:cs typeface="Segoe UI"/>
+                <a:latin typeface="Arial"/>
+                <a:cs typeface="Arial"/>
               </a:rPr>
               <a:t>THÔNG ĐIỆP CHÍNH   </a:t>
             </a:r>
@@ -19007,8 +18905,8 @@
                 <a:solidFill>
                   <a:srgbClr val="FFFFFF"/>
                 </a:solidFill>
-                <a:latin typeface="Segoe UI"/>
-                <a:cs typeface="Segoe UI"/>
+                <a:latin typeface="Arial"/>
+                <a:cs typeface="Arial"/>
               </a:rPr>
               <a:t>So sánh với xu hướng dự kiến, không phải với một giá trị trung bình 'trước'.</a:t>
             </a:r>
@@ -19045,7 +18943,7 @@
                     <a:lumMod val="50000"/>
                   </a:schemeClr>
                 </a:solidFill>
-                <a:latin typeface="Verdana"/>
+                <a:latin typeface="Arial"/>
               </a:rPr>
               <a:t>Neudata | #ClearDataClearImpact</a:t>
             </a:r>
@@ -19175,8 +19073,8 @@
                 <a:solidFill>
                   <a:srgbClr val="0D7377"/>
                 </a:solidFill>
-                <a:latin typeface="Segoe UI"/>
-                <a:cs typeface="Segoe UI"/>
+                <a:latin typeface="Arial"/>
+                <a:cs typeface="Arial"/>
               </a:rPr>
               <a:t>Thiết kế định tính: khi con số không trả lời được</a:t>
             </a:r>
@@ -19272,8 +19170,8 @@
                 <a:solidFill>
                   <a:srgbClr val="FFFFFF"/>
                 </a:solidFill>
-                <a:latin typeface="Segoe UI"/>
-                <a:cs typeface="Segoe UI"/>
+                <a:latin typeface="Arial"/>
+                <a:cs typeface="Arial"/>
               </a:rPr>
               <a:t>THÔNG ĐIỆP CHÍNH   </a:t>
             </a:r>
@@ -19282,8 +19180,8 @@
                 <a:solidFill>
                   <a:srgbClr val="FFFFFF"/>
                 </a:solidFill>
-                <a:latin typeface="Segoe UI"/>
-                <a:cs typeface="Segoe UI"/>
+                <a:latin typeface="Arial"/>
+                <a:cs typeface="Arial"/>
               </a:rPr>
               <a:t>Nghiên cứu định tính giải thích VÌ SAO và NHƯ THẾ NÀO; nó bổ sung cho con số.</a:t>
             </a:r>
@@ -19320,7 +19218,7 @@
                     <a:lumMod val="50000"/>
                   </a:schemeClr>
                 </a:solidFill>
-                <a:latin typeface="Verdana"/>
+                <a:latin typeface="Arial"/>
               </a:rPr>
               <a:t>Neudata | #ClearDataClearImpact</a:t>
             </a:r>
@@ -19450,8 +19348,8 @@
                 <a:solidFill>
                   <a:srgbClr val="0D7377"/>
                 </a:solidFill>
-                <a:latin typeface="Segoe UI"/>
-                <a:cs typeface="Segoe UI"/>
+                <a:latin typeface="Arial"/>
+                <a:cs typeface="Arial"/>
               </a:rPr>
               <a:t>Chọn thiết kế phù hợp với câu hỏi</a:t>
             </a:r>
@@ -19547,8 +19445,8 @@
                 <a:solidFill>
                   <a:srgbClr val="FFFFFF"/>
                 </a:solidFill>
-                <a:latin typeface="Segoe UI"/>
-                <a:cs typeface="Segoe UI"/>
+                <a:latin typeface="Arial"/>
+                <a:cs typeface="Arial"/>
               </a:rPr>
               <a:t>THÔNG ĐIỆP CHÍNH   </a:t>
             </a:r>
@@ -19557,8 +19455,8 @@
                 <a:solidFill>
                   <a:srgbClr val="FFFFFF"/>
                 </a:solidFill>
-                <a:latin typeface="Segoe UI"/>
-                <a:cs typeface="Segoe UI"/>
+                <a:latin typeface="Arial"/>
+                <a:cs typeface="Arial"/>
               </a:rPr>
               <a:t>Bắt đầu từ câu hỏi, thiết kế sẽ theo sau.</a:t>
             </a:r>
@@ -19595,7 +19493,7 @@
                     <a:lumMod val="50000"/>
                   </a:schemeClr>
                 </a:solidFill>
-                <a:latin typeface="Verdana"/>
+                <a:latin typeface="Arial"/>
               </a:rPr>
               <a:t>Neudata | #ClearDataClearImpact</a:t>
             </a:r>
@@ -19725,8 +19623,8 @@
                 <a:solidFill>
                   <a:srgbClr val="0D7377"/>
                 </a:solidFill>
-                <a:latin typeface="Segoe UI"/>
-                <a:cs typeface="Segoe UI"/>
+                <a:latin typeface="Arial"/>
+                <a:cs typeface="Arial"/>
               </a:rPr>
               <a:t>Kiểm tra nhanh: thiết kế nào?</a:t>
             </a:r>
@@ -19796,8 +19694,8 @@
                 <a:solidFill>
                   <a:srgbClr val="FFFFFF"/>
                 </a:solidFill>
-                <a:latin typeface="Segoe UI"/>
-                <a:cs typeface="Segoe UI"/>
+                <a:latin typeface="Arial"/>
+                <a:cs typeface="Arial"/>
               </a:rPr>
               <a:t>CÂU HỎI NHANH   |   3 phút</a:t>
             </a:r>
@@ -19834,25 +19732,19 @@
               <a:spcBef>
                 <a:spcPts val="450"/>
               </a:spcBef>
-              <a:buNone/>
-            </a:pPr>
-            <a:r>
-              <a:rPr lang="en-US" sz="1650" b="1" dirty="0">
-                <a:solidFill>
-                  <a:srgbClr val="6C3483"/>
-                </a:solidFill>
-                <a:latin typeface="Segoe UI"/>
-                <a:cs typeface="Segoe UI"/>
-              </a:rPr>
-              <a:t>1.  </a:t>
-            </a:r>
+              <a:buClr>
+                <a:srgbClr val="6C3483"/>
+              </a:buClr>
+              <a:buFont typeface="Arial"/>
+              <a:buChar char="•"/>
+            </a:pPr>
             <a:r>
               <a:rPr lang="en-US" sz="1650" dirty="0">
                 <a:solidFill>
                   <a:srgbClr val="000000"/>
                 </a:solidFill>
-                <a:latin typeface="Segoe UI"/>
-                <a:cs typeface="Segoe UI"/>
+                <a:latin typeface="Arial"/>
+                <a:cs typeface="Arial"/>
               </a:rPr>
               <a:t>A. Một phác đồ kháng sinh rẻ hơn; chỉ cần chứng minh nó không kém hơn</a:t>
             </a:r>
@@ -19865,25 +19757,19 @@
               <a:spcBef>
                 <a:spcPts val="450"/>
               </a:spcBef>
-              <a:buNone/>
-            </a:pPr>
-            <a:r>
-              <a:rPr lang="en-US" sz="1650" b="1" dirty="0">
-                <a:solidFill>
-                  <a:srgbClr val="6C3483"/>
-                </a:solidFill>
-                <a:latin typeface="Segoe UI"/>
-                <a:cs typeface="Segoe UI"/>
-              </a:rPr>
-              <a:t>2.  </a:t>
-            </a:r>
+              <a:buClr>
+                <a:srgbClr val="6C3483"/>
+              </a:buClr>
+              <a:buFont typeface="Arial"/>
+              <a:buChar char="•"/>
+            </a:pPr>
             <a:r>
               <a:rPr lang="en-US" sz="1650" dirty="0">
                 <a:solidFill>
                   <a:srgbClr val="000000"/>
                 </a:solidFill>
-                <a:latin typeface="Segoe UI"/>
-                <a:cs typeface="Segoe UI"/>
+                <a:latin typeface="Arial"/>
+                <a:cs typeface="Arial"/>
               </a:rPr>
               <a:t>B. Chương trình vệ sinh tay áp dụng cho cả khoa</a:t>
             </a:r>
@@ -19896,25 +19782,19 @@
               <a:spcBef>
                 <a:spcPts val="450"/>
               </a:spcBef>
-              <a:buNone/>
-            </a:pPr>
-            <a:r>
-              <a:rPr lang="en-US" sz="1650" b="1" dirty="0">
-                <a:solidFill>
-                  <a:srgbClr val="6C3483"/>
-                </a:solidFill>
-                <a:latin typeface="Segoe UI"/>
-                <a:cs typeface="Segoe UI"/>
-              </a:rPr>
-              <a:t>3.  </a:t>
-            </a:r>
+              <a:buClr>
+                <a:srgbClr val="6C3483"/>
+              </a:buClr>
+              <a:buFont typeface="Arial"/>
+              <a:buChar char="•"/>
+            </a:pPr>
             <a:r>
               <a:rPr lang="en-US" sz="1650" dirty="0">
                 <a:solidFill>
                   <a:srgbClr val="000000"/>
                 </a:solidFill>
-                <a:latin typeface="Segoe UI"/>
-                <a:cs typeface="Segoe UI"/>
+                <a:latin typeface="Arial"/>
+                <a:cs typeface="Arial"/>
               </a:rPr>
               <a:t>C. Gói xử trí nhiễm khuẩn huyết bắt đầu năm 2023; có 3 năm số liệu tử vong theo tháng</a:t>
             </a:r>
@@ -19927,25 +19807,19 @@
               <a:spcBef>
                 <a:spcPts val="450"/>
               </a:spcBef>
-              <a:buNone/>
-            </a:pPr>
-            <a:r>
-              <a:rPr lang="en-US" sz="1650" b="1" dirty="0">
-                <a:solidFill>
-                  <a:srgbClr val="6C3483"/>
-                </a:solidFill>
-                <a:latin typeface="Segoe UI"/>
-                <a:cs typeface="Segoe UI"/>
-              </a:rPr>
-              <a:t>4.  </a:t>
-            </a:r>
+              <a:buClr>
+                <a:srgbClr val="6C3483"/>
+              </a:buClr>
+              <a:buFont typeface="Arial"/>
+              <a:buChar char="•"/>
+            </a:pPr>
             <a:r>
               <a:rPr lang="en-US" sz="1650" dirty="0">
                 <a:solidFill>
                   <a:srgbClr val="000000"/>
                 </a:solidFill>
-                <a:latin typeface="Segoe UI"/>
-                <a:cs typeface="Segoe UI"/>
+                <a:latin typeface="Arial"/>
+                <a:cs typeface="Arial"/>
               </a:rPr>
               <a:t>D. Vì sao gia đình từ chối đồng ý tham gia nghiên cứu ở ICU?</a:t>
             </a:r>
@@ -19989,8 +19863,8 @@
                 <a:solidFill>
                   <a:srgbClr val="6C3483"/>
                 </a:solidFill>
-                <a:latin typeface="Segoe UI"/>
-                <a:cs typeface="Segoe UI"/>
+                <a:latin typeface="Arial"/>
+                <a:cs typeface="Arial"/>
               </a:rPr>
               <a:t>Chọn</a:t>
             </a:r>
@@ -20011,8 +19885,8 @@
                 <a:solidFill>
                   <a:srgbClr val="000000"/>
                 </a:solidFill>
-                <a:latin typeface="Segoe UI"/>
-                <a:cs typeface="Segoe UI"/>
+                <a:latin typeface="Arial"/>
+                <a:cs typeface="Arial"/>
               </a:rPr>
               <a:t>Thử nghiệm theo cụm</a:t>
             </a:r>
@@ -20033,8 +19907,8 @@
                 <a:solidFill>
                   <a:srgbClr val="000000"/>
                 </a:solidFill>
-                <a:latin typeface="Segoe UI"/>
-                <a:cs typeface="Segoe UI"/>
+                <a:latin typeface="Arial"/>
+                <a:cs typeface="Arial"/>
               </a:rPr>
               <a:t>Thử nghiệm không kém hơn</a:t>
             </a:r>
@@ -20055,8 +19929,8 @@
                 <a:solidFill>
                   <a:srgbClr val="000000"/>
                 </a:solidFill>
-                <a:latin typeface="Segoe UI"/>
-                <a:cs typeface="Segoe UI"/>
+                <a:latin typeface="Arial"/>
+                <a:cs typeface="Arial"/>
               </a:rPr>
               <a:t>Chuỗi thời gian ngắt quãng</a:t>
             </a:r>
@@ -20077,8 +19951,8 @@
                 <a:solidFill>
                   <a:srgbClr val="000000"/>
                 </a:solidFill>
-                <a:latin typeface="Segoe UI"/>
-                <a:cs typeface="Segoe UI"/>
+                <a:latin typeface="Arial"/>
+                <a:cs typeface="Arial"/>
               </a:rPr>
               <a:t>Phỏng vấn định tính</a:t>
             </a:r>
@@ -20124,8 +19998,8 @@
                 <a:solidFill>
                   <a:srgbClr val="6C3483"/>
                 </a:solidFill>
-                <a:latin typeface="Segoe UI"/>
-                <a:cs typeface="Segoe UI"/>
+                <a:latin typeface="Arial"/>
+                <a:cs typeface="Arial"/>
               </a:rPr>
               <a:t>SẢN PHẨM   </a:t>
             </a:r>
@@ -20134,8 +20008,8 @@
                 <a:solidFill>
                   <a:srgbClr val="000000"/>
                 </a:solidFill>
-                <a:latin typeface="Segoe UI"/>
-                <a:cs typeface="Segoe UI"/>
+                <a:latin typeface="Arial"/>
+                <a:cs typeface="Arial"/>
               </a:rPr>
               <a:t>Mỗi câu một thiết kế (đáp án trong ghi chú)</a:t>
             </a:r>
@@ -20172,7 +20046,7 @@
                     <a:lumMod val="50000"/>
                   </a:schemeClr>
                 </a:solidFill>
-                <a:latin typeface="Verdana"/>
+                <a:latin typeface="Arial"/>
               </a:rPr>
               <a:t>Neudata | #ClearDataClearImpact</a:t>
             </a:r>
@@ -20302,8 +20176,8 @@
                 <a:solidFill>
                   <a:srgbClr val="0D7377"/>
                 </a:solidFill>
-                <a:latin typeface="Segoe UI"/>
-                <a:cs typeface="Segoe UI"/>
+                <a:latin typeface="Arial"/>
+                <a:cs typeface="Arial"/>
               </a:rPr>
               <a:t>Bài tập: chọn thiết kế cho 5 câu hỏi</a:t>
             </a:r>
@@ -20373,8 +20247,8 @@
                 <a:solidFill>
                   <a:srgbClr val="FFFFFF"/>
                 </a:solidFill>
-                <a:latin typeface="Segoe UI"/>
-                <a:cs typeface="Segoe UI"/>
+                <a:latin typeface="Arial"/>
+                <a:cs typeface="Arial"/>
               </a:rPr>
               <a:t>LÀM VIỆC NHÓM   |   20 phút</a:t>
             </a:r>
@@ -20411,25 +20285,19 @@
               <a:spcBef>
                 <a:spcPts val="450"/>
               </a:spcBef>
-              <a:buNone/>
-            </a:pPr>
-            <a:r>
-              <a:rPr lang="en-US" sz="1650" b="1" dirty="0">
-                <a:solidFill>
-                  <a:srgbClr val="0D7377"/>
-                </a:solidFill>
-                <a:latin typeface="Segoe UI"/>
-                <a:cs typeface="Segoe UI"/>
-              </a:rPr>
-              <a:t>1.  </a:t>
-            </a:r>
+              <a:buClr>
+                <a:srgbClr val="0D7377"/>
+              </a:buClr>
+              <a:buFont typeface="Arial"/>
+              <a:buChar char="•"/>
+            </a:pPr>
             <a:r>
               <a:rPr lang="en-US" sz="1650" dirty="0">
                 <a:solidFill>
                   <a:srgbClr val="000000"/>
                 </a:solidFill>
-                <a:latin typeface="Segoe UI"/>
-                <a:cs typeface="Segoe UI"/>
+                <a:latin typeface="Arial"/>
+                <a:cs typeface="Arial"/>
               </a:rPr>
               <a:t>Tài liệu Phần B: bốn câu hỏi lâm sàng + câu hỏi của nhóm bạn</a:t>
             </a:r>
@@ -20442,25 +20310,19 @@
               <a:spcBef>
                 <a:spcPts val="450"/>
               </a:spcBef>
-              <a:buNone/>
-            </a:pPr>
-            <a:r>
-              <a:rPr lang="en-US" sz="1650" b="1" dirty="0">
-                <a:solidFill>
-                  <a:srgbClr val="0D7377"/>
-                </a:solidFill>
-                <a:latin typeface="Segoe UI"/>
-                <a:cs typeface="Segoe UI"/>
-              </a:rPr>
-              <a:t>2.  </a:t>
-            </a:r>
+              <a:buClr>
+                <a:srgbClr val="0D7377"/>
+              </a:buClr>
+              <a:buFont typeface="Arial"/>
+              <a:buChar char="•"/>
+            </a:pPr>
             <a:r>
               <a:rPr lang="en-US" sz="1650" dirty="0">
                 <a:solidFill>
                   <a:srgbClr val="000000"/>
                 </a:solidFill>
-                <a:latin typeface="Segoe UI"/>
-                <a:cs typeface="Segoe UI"/>
+                <a:latin typeface="Arial"/>
+                <a:cs typeface="Arial"/>
               </a:rPr>
               <a:t>Với mỗi câu: chọn thiết kế KHẢ THI tốt nhất (dùng cây quyết định)</a:t>
             </a:r>
@@ -20473,25 +20335,19 @@
               <a:spcBef>
                 <a:spcPts val="450"/>
               </a:spcBef>
-              <a:buNone/>
-            </a:pPr>
-            <a:r>
-              <a:rPr lang="en-US" sz="1650" b="1" dirty="0">
-                <a:solidFill>
-                  <a:srgbClr val="0D7377"/>
-                </a:solidFill>
-                <a:latin typeface="Segoe UI"/>
-                <a:cs typeface="Segoe UI"/>
-              </a:rPr>
-              <a:t>3.  </a:t>
-            </a:r>
+              <a:buClr>
+                <a:srgbClr val="0D7377"/>
+              </a:buClr>
+              <a:buFont typeface="Arial"/>
+              <a:buChar char="•"/>
+            </a:pPr>
             <a:r>
               <a:rPr lang="en-US" sz="1650" dirty="0">
                 <a:solidFill>
                   <a:srgbClr val="000000"/>
                 </a:solidFill>
-                <a:latin typeface="Segoe UI"/>
-                <a:cs typeface="Segoe UI"/>
+                <a:latin typeface="Arial"/>
+                <a:cs typeface="Arial"/>
               </a:rPr>
               <a:t>Ghi một lý do và điểm yếu chính của thiết kế</a:t>
             </a:r>
@@ -20504,25 +20360,19 @@
               <a:spcBef>
                 <a:spcPts val="450"/>
               </a:spcBef>
-              <a:buNone/>
-            </a:pPr>
-            <a:r>
-              <a:rPr lang="en-US" sz="1650" b="1" dirty="0">
-                <a:solidFill>
-                  <a:srgbClr val="0D7377"/>
-                </a:solidFill>
-                <a:latin typeface="Segoe UI"/>
-                <a:cs typeface="Segoe UI"/>
-              </a:rPr>
-              <a:t>4.  </a:t>
-            </a:r>
+              <a:buClr>
+                <a:srgbClr val="0D7377"/>
+              </a:buClr>
+              <a:buFont typeface="Arial"/>
+              <a:buChar char="•"/>
+            </a:pPr>
             <a:r>
               <a:rPr lang="en-US" sz="1650" dirty="0">
                 <a:solidFill>
                   <a:srgbClr val="000000"/>
                 </a:solidFill>
-                <a:latin typeface="Segoe UI"/>
-                <a:cs typeface="Segoe UI"/>
+                <a:latin typeface="Arial"/>
+                <a:cs typeface="Arial"/>
               </a:rPr>
               <a:t>Câu hỏi của nhóm: được nói 'gây ra' hay chỉ 'có liên quan'?</a:t>
             </a:r>
@@ -20535,25 +20385,19 @@
               <a:spcBef>
                 <a:spcPts val="450"/>
               </a:spcBef>
-              <a:buNone/>
-            </a:pPr>
-            <a:r>
-              <a:rPr lang="en-US" sz="1650" b="1" dirty="0">
-                <a:solidFill>
-                  <a:srgbClr val="0D7377"/>
-                </a:solidFill>
-                <a:latin typeface="Segoe UI"/>
-                <a:cs typeface="Segoe UI"/>
-              </a:rPr>
-              <a:t>5.  </a:t>
-            </a:r>
+              <a:buClr>
+                <a:srgbClr val="0D7377"/>
+              </a:buClr>
+              <a:buFont typeface="Arial"/>
+              <a:buChar char="•"/>
+            </a:pPr>
             <a:r>
               <a:rPr lang="en-US" sz="1650" dirty="0">
                 <a:solidFill>
                   <a:srgbClr val="000000"/>
                 </a:solidFill>
-                <a:latin typeface="Segoe UI"/>
-                <a:cs typeface="Segoe UI"/>
+                <a:latin typeface="Arial"/>
+                <a:cs typeface="Arial"/>
               </a:rPr>
               <a:t>Hai nhóm chia sẻ câu hỏi và thiết kế của mình (mỗi nhóm 1 phút)</a:t>
             </a:r>
@@ -20597,8 +20441,8 @@
                 <a:solidFill>
                   <a:srgbClr val="0D7377"/>
                 </a:solidFill>
-                <a:latin typeface="Segoe UI"/>
-                <a:cs typeface="Segoe UI"/>
+                <a:latin typeface="Arial"/>
+                <a:cs typeface="Arial"/>
               </a:rPr>
               <a:t>Ghi nhớ</a:t>
             </a:r>
@@ -20619,8 +20463,8 @@
                 <a:solidFill>
                   <a:srgbClr val="000000"/>
                 </a:solidFill>
-                <a:latin typeface="Segoe UI"/>
-                <a:cs typeface="Segoe UI"/>
+                <a:latin typeface="Arial"/>
+                <a:cs typeface="Arial"/>
               </a:rPr>
               <a:t>Phổ biến hiện nay? Cắt ngang</a:t>
             </a:r>
@@ -20641,10 +20485,10 @@
                 <a:solidFill>
                   <a:srgbClr val="000000"/>
                 </a:solidFill>
-                <a:latin typeface="Segoe UI"/>
-                <a:cs typeface="Segoe UI"/>
-              </a:rPr>
-              <a:t>Kết cục hiếm? Bệnh - chứng</a:t>
+                <a:latin typeface="Arial"/>
+                <a:cs typeface="Arial"/>
+              </a:rPr>
+              <a:t>Kết cục hiếm? Bệnh-chứng</a:t>
             </a:r>
           </a:p>
           <a:p>
@@ -20663,8 +20507,8 @@
                 <a:solidFill>
                   <a:srgbClr val="000000"/>
                 </a:solidFill>
-                <a:latin typeface="Segoe UI"/>
-                <a:cs typeface="Segoe UI"/>
+                <a:latin typeface="Arial"/>
+                <a:cs typeface="Arial"/>
               </a:rPr>
               <a:t>Điều gì xảy ra sau? Thuần tập</a:t>
             </a:r>
@@ -20685,8 +20529,8 @@
                 <a:solidFill>
                   <a:srgbClr val="000000"/>
                 </a:solidFill>
-                <a:latin typeface="Segoe UI"/>
-                <a:cs typeface="Segoe UI"/>
+                <a:latin typeface="Arial"/>
+                <a:cs typeface="Arial"/>
               </a:rPr>
               <a:t>Có hiệu quả? RCT / theo cụm</a:t>
             </a:r>
@@ -20707,8 +20551,8 @@
                 <a:solidFill>
                   <a:srgbClr val="000000"/>
                 </a:solidFill>
-                <a:latin typeface="Segoe UI"/>
-                <a:cs typeface="Segoe UI"/>
+                <a:latin typeface="Arial"/>
+                <a:cs typeface="Arial"/>
               </a:rPr>
               <a:t>Đã thay đổi rồi? Chuỗi thời gian</a:t>
             </a:r>
@@ -20729,8 +20573,8 @@
                 <a:solidFill>
                   <a:srgbClr val="000000"/>
                 </a:solidFill>
-                <a:latin typeface="Segoe UI"/>
-                <a:cs typeface="Segoe UI"/>
+                <a:latin typeface="Arial"/>
+                <a:cs typeface="Arial"/>
               </a:rPr>
               <a:t>Vì sao / thế nào? Định tính</a:t>
             </a:r>
@@ -20776,8 +20620,8 @@
                 <a:solidFill>
                   <a:srgbClr val="0D7377"/>
                 </a:solidFill>
-                <a:latin typeface="Segoe UI"/>
-                <a:cs typeface="Segoe UI"/>
+                <a:latin typeface="Arial"/>
+                <a:cs typeface="Arial"/>
               </a:rPr>
               <a:t>SẢN PHẨM   </a:t>
             </a:r>
@@ -20786,8 +20630,8 @@
                 <a:solidFill>
                   <a:srgbClr val="000000"/>
                 </a:solidFill>
-                <a:latin typeface="Segoe UI"/>
-                <a:cs typeface="Segoe UI"/>
+                <a:latin typeface="Arial"/>
+                <a:cs typeface="Arial"/>
               </a:rPr>
               <a:t>5 thiết kế kèm lý do và điểm yếu, gồm cả câu hỏi của nhóm</a:t>
             </a:r>
@@ -20824,7 +20668,7 @@
                     <a:lumMod val="50000"/>
                   </a:schemeClr>
                 </a:solidFill>
-                <a:latin typeface="Verdana"/>
+                <a:latin typeface="Arial"/>
               </a:rPr>
               <a:t>Neudata | #ClearDataClearImpact</a:t>
             </a:r>
@@ -20954,8 +20798,8 @@
                 <a:solidFill>
                   <a:srgbClr val="0D7377"/>
                 </a:solidFill>
-                <a:latin typeface="Segoe UI"/>
-                <a:cs typeface="Segoe UI"/>
+                <a:latin typeface="Arial"/>
+                <a:cs typeface="Arial"/>
               </a:rPr>
               <a:t>Ai trong nghiên cứu của bạn? Tiêu chuẩn chọn và loại trừ</a:t>
             </a:r>
@@ -21051,8 +20895,8 @@
                 <a:solidFill>
                   <a:srgbClr val="FFFFFF"/>
                 </a:solidFill>
-                <a:latin typeface="Segoe UI"/>
-                <a:cs typeface="Segoe UI"/>
+                <a:latin typeface="Arial"/>
+                <a:cs typeface="Arial"/>
               </a:rPr>
               <a:t>THÔNG ĐIỆP CHÍNH   </a:t>
             </a:r>
@@ -21061,8 +20905,8 @@
                 <a:solidFill>
                   <a:srgbClr val="FFFFFF"/>
                 </a:solidFill>
-                <a:latin typeface="Segoe UI"/>
-                <a:cs typeface="Segoe UI"/>
+                <a:latin typeface="Arial"/>
+                <a:cs typeface="Arial"/>
               </a:rPr>
               <a:t>Tiêu chuẩn chọn mô tả chữ P; tiêu chuẩn loại trừ loại người đủ tiêu chuẩn vì một lý do nêu rõ.</a:t>
             </a:r>
@@ -21099,7 +20943,7 @@
                     <a:lumMod val="50000"/>
                   </a:schemeClr>
                 </a:solidFill>
-                <a:latin typeface="Verdana"/>
+                <a:latin typeface="Arial"/>
               </a:rPr>
               <a:t>Neudata | #ClearDataClearImpact</a:t>
             </a:r>
@@ -21229,8 +21073,8 @@
                 <a:solidFill>
                   <a:srgbClr val="0D7377"/>
                 </a:solidFill>
-                <a:latin typeface="Segoe UI"/>
-                <a:cs typeface="Segoe UI"/>
+                <a:latin typeface="Arial"/>
+                <a:cs typeface="Arial"/>
               </a:rPr>
               <a:t>Xây dựng đề cương 3: thiết kế, bối cảnh và đối tượng</a:t>
             </a:r>
@@ -21300,8 +21144,8 @@
                 <a:solidFill>
                   <a:srgbClr val="FFFFFF"/>
                 </a:solidFill>
-                <a:latin typeface="Segoe UI"/>
-                <a:cs typeface="Segoe UI"/>
+                <a:latin typeface="Arial"/>
+                <a:cs typeface="Arial"/>
               </a:rPr>
               <a:t>XÂY DỰNG ĐỀ CƯƠNG   |   35 phút</a:t>
             </a:r>
@@ -21338,25 +21182,19 @@
               <a:spcBef>
                 <a:spcPts val="450"/>
               </a:spcBef>
-              <a:buNone/>
-            </a:pPr>
-            <a:r>
-              <a:rPr lang="en-US" sz="1650" b="1" dirty="0">
-                <a:solidFill>
-                  <a:srgbClr val="055F56"/>
-                </a:solidFill>
-                <a:latin typeface="Segoe UI"/>
-                <a:cs typeface="Segoe UI"/>
-              </a:rPr>
-              <a:t>1.  </a:t>
-            </a:r>
+              <a:buClr>
+                <a:srgbClr val="055F56"/>
+              </a:buClr>
+              <a:buFont typeface="Arial"/>
+              <a:buChar char="•"/>
+            </a:pPr>
             <a:r>
               <a:rPr lang="en-US" sz="1650" dirty="0">
                 <a:solidFill>
                   <a:srgbClr val="000000"/>
                 </a:solidFill>
-                <a:latin typeface="Segoe UI"/>
-                <a:cs typeface="Segoe UI"/>
+                <a:latin typeface="Arial"/>
+                <a:cs typeface="Arial"/>
               </a:rPr>
               <a:t>Đọc lại câu hỏi nghiên cứu ở Phần 1</a:t>
             </a:r>
@@ -21369,25 +21207,19 @@
               <a:spcBef>
                 <a:spcPts val="450"/>
               </a:spcBef>
-              <a:buNone/>
-            </a:pPr>
-            <a:r>
-              <a:rPr lang="en-US" sz="1650" b="1" dirty="0">
-                <a:solidFill>
-                  <a:srgbClr val="055F56"/>
-                </a:solidFill>
-                <a:latin typeface="Segoe UI"/>
-                <a:cs typeface="Segoe UI"/>
-              </a:rPr>
-              <a:t>2.  </a:t>
-            </a:r>
+              <a:buClr>
+                <a:srgbClr val="055F56"/>
+              </a:buClr>
+              <a:buFont typeface="Arial"/>
+              <a:buChar char="•"/>
+            </a:pPr>
             <a:r>
               <a:rPr lang="en-US" sz="1650" dirty="0">
                 <a:solidFill>
                   <a:srgbClr val="000000"/>
                 </a:solidFill>
-                <a:latin typeface="Segoe UI"/>
-                <a:cs typeface="Segoe UI"/>
+                <a:latin typeface="Arial"/>
+                <a:cs typeface="Arial"/>
               </a:rPr>
               <a:t>Chọn thiết kế bằng cây quyết định; biện luận trong 3-5 câu</a:t>
             </a:r>
@@ -21400,25 +21232,19 @@
               <a:spcBef>
                 <a:spcPts val="450"/>
               </a:spcBef>
-              <a:buNone/>
-            </a:pPr>
-            <a:r>
-              <a:rPr lang="en-US" sz="1650" b="1" dirty="0">
-                <a:solidFill>
-                  <a:srgbClr val="055F56"/>
-                </a:solidFill>
-                <a:latin typeface="Segoe UI"/>
-                <a:cs typeface="Segoe UI"/>
-              </a:rPr>
-              <a:t>3.  </a:t>
-            </a:r>
+              <a:buClr>
+                <a:srgbClr val="055F56"/>
+              </a:buClr>
+              <a:buFont typeface="Arial"/>
+              <a:buChar char="•"/>
+            </a:pPr>
             <a:r>
               <a:rPr lang="en-US" sz="1650" dirty="0">
                 <a:solidFill>
                   <a:srgbClr val="000000"/>
                 </a:solidFill>
-                <a:latin typeface="Segoe UI"/>
-                <a:cs typeface="Segoe UI"/>
+                <a:latin typeface="Arial"/>
+                <a:cs typeface="Arial"/>
               </a:rPr>
               <a:t>Bối cảnh: ở đâu, khi nào, những khoa nào, nguồn dữ liệu nào</a:t>
             </a:r>
@@ -21431,25 +21257,19 @@
               <a:spcBef>
                 <a:spcPts val="450"/>
               </a:spcBef>
-              <a:buNone/>
-            </a:pPr>
-            <a:r>
-              <a:rPr lang="en-US" sz="1650" b="1" dirty="0">
-                <a:solidFill>
-                  <a:srgbClr val="055F56"/>
-                </a:solidFill>
-                <a:latin typeface="Segoe UI"/>
-                <a:cs typeface="Segoe UI"/>
-              </a:rPr>
-              <a:t>4.  </a:t>
-            </a:r>
+              <a:buClr>
+                <a:srgbClr val="055F56"/>
+              </a:buClr>
+              <a:buFont typeface="Arial"/>
+              <a:buChar char="•"/>
+            </a:pPr>
             <a:r>
               <a:rPr lang="en-US" sz="1650" dirty="0">
                 <a:solidFill>
                   <a:srgbClr val="000000"/>
                 </a:solidFill>
-                <a:latin typeface="Segoe UI"/>
-                <a:cs typeface="Segoe UI"/>
+                <a:latin typeface="Arial"/>
+                <a:cs typeface="Arial"/>
               </a:rPr>
               <a:t>Đối tượng: 3-5 tiêu chuẩn chọn và 3-5 tiêu chuẩn loại trừ (kèm lý do)</a:t>
             </a:r>
@@ -21462,25 +21282,19 @@
               <a:spcBef>
                 <a:spcPts val="450"/>
               </a:spcBef>
-              <a:buNone/>
-            </a:pPr>
-            <a:r>
-              <a:rPr lang="en-US" sz="1650" b="1" dirty="0">
-                <a:solidFill>
-                  <a:srgbClr val="055F56"/>
-                </a:solidFill>
-                <a:latin typeface="Segoe UI"/>
-                <a:cs typeface="Segoe UI"/>
-              </a:rPr>
-              <a:t>5.  </a:t>
-            </a:r>
+              <a:buClr>
+                <a:srgbClr val="055F56"/>
+              </a:buClr>
+              <a:buFont typeface="Arial"/>
+              <a:buChar char="•"/>
+            </a:pPr>
             <a:r>
               <a:rPr lang="en-US" sz="1650" dirty="0">
                 <a:solidFill>
                   <a:srgbClr val="000000"/>
                 </a:solidFill>
-                <a:latin typeface="Segoe UI"/>
-                <a:cs typeface="Segoe UI"/>
+                <a:latin typeface="Arial"/>
+                <a:cs typeface="Arial"/>
               </a:rPr>
               <a:t>Vẽ nghiên cứu trên trục thời gian: phơi nhiễm, rồi kết cục</a:t>
             </a:r>
@@ -21493,25 +21307,19 @@
               <a:spcBef>
                 <a:spcPts val="450"/>
               </a:spcBef>
-              <a:buNone/>
-            </a:pPr>
-            <a:r>
-              <a:rPr lang="en-US" sz="1650" b="1" dirty="0">
-                <a:solidFill>
-                  <a:srgbClr val="055F56"/>
-                </a:solidFill>
-                <a:latin typeface="Segoe UI"/>
-                <a:cs typeface="Segoe UI"/>
-              </a:rPr>
-              <a:t>6.  </a:t>
-            </a:r>
+              <a:buClr>
+                <a:srgbClr val="055F56"/>
+              </a:buClr>
+              <a:buFont typeface="Arial"/>
+              <a:buChar char="•"/>
+            </a:pPr>
             <a:r>
               <a:rPr lang="en-US" sz="1650" dirty="0">
                 <a:solidFill>
                   <a:srgbClr val="000000"/>
                 </a:solidFill>
-                <a:latin typeface="Segoe UI"/>
-                <a:cs typeface="Segoe UI"/>
+                <a:latin typeface="Arial"/>
+                <a:cs typeface="Arial"/>
               </a:rPr>
               <a:t>Mời người hướng dẫn kiểm tra trước khi kết thúc</a:t>
             </a:r>
@@ -21555,8 +21363,8 @@
                 <a:solidFill>
                   <a:srgbClr val="055F56"/>
                 </a:solidFill>
-                <a:latin typeface="Segoe UI"/>
-                <a:cs typeface="Segoe UI"/>
+                <a:latin typeface="Arial"/>
+                <a:cs typeface="Arial"/>
               </a:rPr>
               <a:t>Người hướng dẫn kiểm tra</a:t>
             </a:r>
@@ -21577,8 +21385,8 @@
                 <a:solidFill>
                   <a:srgbClr val="000000"/>
                 </a:solidFill>
-                <a:latin typeface="Segoe UI"/>
-                <a:cs typeface="Segoe UI"/>
+                <a:latin typeface="Arial"/>
+                <a:cs typeface="Arial"/>
               </a:rPr>
               <a:t>Thiết kế hợp với câu hỏi?</a:t>
             </a:r>
@@ -21599,8 +21407,8 @@
                 <a:solidFill>
                   <a:srgbClr val="000000"/>
                 </a:solidFill>
-                <a:latin typeface="Segoe UI"/>
-                <a:cs typeface="Segoe UI"/>
+                <a:latin typeface="Arial"/>
+                <a:cs typeface="Arial"/>
               </a:rPr>
               <a:t>Khả thi ở khoa bạn?</a:t>
             </a:r>
@@ -21621,8 +21429,8 @@
                 <a:solidFill>
                   <a:srgbClr val="000000"/>
                 </a:solidFill>
-                <a:latin typeface="Segoe UI"/>
-                <a:cs typeface="Segoe UI"/>
+                <a:latin typeface="Arial"/>
+                <a:cs typeface="Arial"/>
               </a:rPr>
               <a:t>Tiêu chuẩn chọn = chữ P?</a:t>
             </a:r>
@@ -21643,8 +21451,8 @@
                 <a:solidFill>
                   <a:srgbClr val="000000"/>
                 </a:solidFill>
-                <a:latin typeface="Segoe UI"/>
-                <a:cs typeface="Segoe UI"/>
+                <a:latin typeface="Arial"/>
+                <a:cs typeface="Arial"/>
               </a:rPr>
               <a:t>Mỗi loại trừ có lý do?</a:t>
             </a:r>
@@ -21665,8 +21473,8 @@
                 <a:solidFill>
                   <a:srgbClr val="000000"/>
                 </a:solidFill>
-                <a:latin typeface="Segoe UI"/>
-                <a:cs typeface="Segoe UI"/>
+                <a:latin typeface="Arial"/>
+                <a:cs typeface="Arial"/>
               </a:rPr>
               <a:t>Gây ra hay có liên quan?</a:t>
             </a:r>
@@ -21712,8 +21520,8 @@
                 <a:solidFill>
                   <a:srgbClr val="055F56"/>
                 </a:solidFill>
-                <a:latin typeface="Segoe UI"/>
-                <a:cs typeface="Segoe UI"/>
+                <a:latin typeface="Arial"/>
+                <a:cs typeface="Arial"/>
               </a:rPr>
               <a:t>SẢN PHẨM   </a:t>
             </a:r>
@@ -21722,8 +21530,8 @@
                 <a:solidFill>
                   <a:srgbClr val="000000"/>
                 </a:solidFill>
-                <a:latin typeface="Segoe UI"/>
-                <a:cs typeface="Segoe UI"/>
+                <a:latin typeface="Arial"/>
+                <a:cs typeface="Arial"/>
               </a:rPr>
               <a:t>Phần 2a của đề cương: thiết kế + biện luận, bối cảnh, đối tượng</a:t>
             </a:r>
@@ -21760,7 +21568,7 @@
                     <a:lumMod val="50000"/>
                   </a:schemeClr>
                 </a:solidFill>
-                <a:latin typeface="Verdana"/>
+                <a:latin typeface="Arial"/>
               </a:rPr>
               <a:t>Neudata | #ClearDataClearImpact</a:t>
             </a:r>
@@ -21890,8 +21698,8 @@
                 <a:solidFill>
                   <a:srgbClr val="0D7377"/>
                 </a:solidFill>
-                <a:latin typeface="Segoe UI"/>
-                <a:cs typeface="Segoe UI"/>
+                <a:latin typeface="Arial"/>
+                <a:cs typeface="Arial"/>
               </a:rPr>
               <a:t>Buổi 3 trong một slide</a:t>
             </a:r>
@@ -21961,8 +21769,8 @@
                 <a:solidFill>
                   <a:srgbClr val="FFFFFF"/>
                 </a:solidFill>
-                <a:latin typeface="Segoe UI"/>
-                <a:cs typeface="Segoe UI"/>
+                <a:latin typeface="Arial"/>
+                <a:cs typeface="Arial"/>
               </a:rPr>
               <a:t>3.1 Thiết kế cơ bản</a:t>
             </a:r>
@@ -22010,8 +21818,8 @@
                 <a:solidFill>
                   <a:srgbClr val="000000"/>
                 </a:solidFill>
-                <a:latin typeface="Segoe UI"/>
-                <a:cs typeface="Segoe UI"/>
+                <a:latin typeface="Arial"/>
+                <a:cs typeface="Arial"/>
               </a:rPr>
               <a:t>Ảnh chụp, nhìn lại, theo dõi về sau</a:t>
             </a:r>
@@ -22031,8 +21839,8 @@
                 <a:solidFill>
                   <a:srgbClr val="000000"/>
                 </a:solidFill>
-                <a:latin typeface="Segoe UI"/>
-                <a:cs typeface="Segoe UI"/>
+                <a:latin typeface="Arial"/>
+                <a:cs typeface="Arial"/>
               </a:rPr>
               <a:t>RCT = may rủi chỉ định phơi nhiễm</a:t>
             </a:r>
@@ -22052,8 +21860,8 @@
                 <a:solidFill>
                   <a:srgbClr val="000000"/>
                 </a:solidFill>
-                <a:latin typeface="Segoe UI"/>
-                <a:cs typeface="Segoe UI"/>
+                <a:latin typeface="Arial"/>
+                <a:cs typeface="Arial"/>
               </a:rPr>
               <a:t>RCT nói 'gây ra'; thuần tập nói 'có liên quan'</a:t>
             </a:r>
@@ -22095,8 +21903,8 @@
                 <a:solidFill>
                   <a:srgbClr val="FFFFFF"/>
                 </a:solidFill>
-                <a:latin typeface="Segoe UI"/>
-                <a:cs typeface="Segoe UI"/>
+                <a:latin typeface="Arial"/>
+                <a:cs typeface="Arial"/>
               </a:rPr>
               <a:t>3.2 Thiết kế khác</a:t>
             </a:r>
@@ -22144,8 +21952,8 @@
                 <a:solidFill>
                   <a:srgbClr val="000000"/>
                 </a:solidFill>
-                <a:latin typeface="Segoe UI"/>
-                <a:cs typeface="Segoe UI"/>
+                <a:latin typeface="Arial"/>
+                <a:cs typeface="Arial"/>
               </a:rPr>
               <a:t>Theo cụm, bắt chéo, giai thừa</a:t>
             </a:r>
@@ -22165,8 +21973,8 @@
                 <a:solidFill>
                   <a:srgbClr val="000000"/>
                 </a:solidFill>
-                <a:latin typeface="Segoe UI"/>
-                <a:cs typeface="Segoe UI"/>
+                <a:latin typeface="Arial"/>
+                <a:cs typeface="Arial"/>
               </a:rPr>
               <a:t>Không kém hơn cần ngưỡng</a:t>
             </a:r>
@@ -22186,8 +21994,8 @@
                 <a:solidFill>
                   <a:srgbClr val="000000"/>
                 </a:solidFill>
-                <a:latin typeface="Segoe UI"/>
-                <a:cs typeface="Segoe UI"/>
+                <a:latin typeface="Arial"/>
+                <a:cs typeface="Arial"/>
               </a:rPr>
               <a:t>Thí điểm, chuỗi thời gian, định tính</a:t>
             </a:r>
@@ -22229,8 +22037,8 @@
                 <a:solidFill>
                   <a:srgbClr val="FFFFFF"/>
                 </a:solidFill>
-                <a:latin typeface="Segoe UI"/>
-                <a:cs typeface="Segoe UI"/>
+                <a:latin typeface="Arial"/>
+                <a:cs typeface="Arial"/>
               </a:rPr>
               <a:t>Đề cương của bạn</a:t>
             </a:r>
@@ -22278,8 +22086,8 @@
                 <a:solidFill>
                   <a:srgbClr val="000000"/>
                 </a:solidFill>
-                <a:latin typeface="Segoe UI"/>
-                <a:cs typeface="Segoe UI"/>
+                <a:latin typeface="Arial"/>
+                <a:cs typeface="Arial"/>
               </a:rPr>
               <a:t>Thiết kế + biện luận</a:t>
             </a:r>
@@ -22299,8 +22107,8 @@
                 <a:solidFill>
                   <a:srgbClr val="000000"/>
                 </a:solidFill>
-                <a:latin typeface="Segoe UI"/>
-                <a:cs typeface="Segoe UI"/>
+                <a:latin typeface="Arial"/>
+                <a:cs typeface="Arial"/>
               </a:rPr>
               <a:t>Bối cảnh</a:t>
             </a:r>
@@ -22320,8 +22128,8 @@
                 <a:solidFill>
                   <a:srgbClr val="000000"/>
                 </a:solidFill>
-                <a:latin typeface="Segoe UI"/>
-                <a:cs typeface="Segoe UI"/>
+                <a:latin typeface="Arial"/>
+                <a:cs typeface="Arial"/>
               </a:rPr>
               <a:t>Tiêu chuẩn chọn và loại trừ</a:t>
             </a:r>
@@ -22365,8 +22173,8 @@
                 <a:solidFill>
                   <a:srgbClr val="FFFFFF"/>
                 </a:solidFill>
-                <a:latin typeface="Segoe UI"/>
-                <a:cs typeface="Segoe UI"/>
+                <a:latin typeface="Arial"/>
+                <a:cs typeface="Arial"/>
               </a:rPr>
               <a:t>THÔNG ĐIỆP CHÍNH   </a:t>
             </a:r>
@@ -22375,8 +22183,8 @@
                 <a:solidFill>
                   <a:srgbClr val="FFFFFF"/>
                 </a:solidFill>
-                <a:latin typeface="Segoe UI"/>
-                <a:cs typeface="Segoe UI"/>
+                <a:latin typeface="Arial"/>
+                <a:cs typeface="Arial"/>
               </a:rPr>
               <a:t>Câu hỏi chọn thiết kế; thiết kế quyết định điều được phép kết luận.</a:t>
             </a:r>
@@ -22413,7 +22221,7 @@
                     <a:lumMod val="50000"/>
                   </a:schemeClr>
                 </a:solidFill>
-                <a:latin typeface="Verdana"/>
+                <a:latin typeface="Arial"/>
               </a:rPr>
               <a:t>Neudata | #ClearDataClearImpact</a:t>
             </a:r>
@@ -22543,8 +22351,8 @@
                 <a:solidFill>
                   <a:srgbClr val="0D7377"/>
                 </a:solidFill>
-                <a:latin typeface="Segoe UI"/>
-                <a:cs typeface="Segoe UI"/>
+                <a:latin typeface="Arial"/>
+                <a:cs typeface="Arial"/>
               </a:rPr>
               <a:t>Tổng kết và bài về nhà</a:t>
             </a:r>
@@ -22614,8 +22422,8 @@
                 <a:solidFill>
                   <a:srgbClr val="FFFFFF"/>
                 </a:solidFill>
-                <a:latin typeface="Segoe UI"/>
-                <a:cs typeface="Segoe UI"/>
+                <a:latin typeface="Arial"/>
+                <a:cs typeface="Arial"/>
               </a:rPr>
               <a:t>THẢO LUẬN   |   5 phút</a:t>
             </a:r>
@@ -22652,25 +22460,19 @@
               <a:spcBef>
                 <a:spcPts val="450"/>
               </a:spcBef>
-              <a:buNone/>
-            </a:pPr>
-            <a:r>
-              <a:rPr lang="en-US" sz="1650" b="1" dirty="0">
-                <a:solidFill>
-                  <a:srgbClr val="1F5C7A"/>
-                </a:solidFill>
-                <a:latin typeface="Segoe UI"/>
-                <a:cs typeface="Segoe UI"/>
-              </a:rPr>
-              <a:t>1.  </a:t>
-            </a:r>
+              <a:buClr>
+                <a:srgbClr val="1F5C7A"/>
+              </a:buClr>
+              <a:buFont typeface="Arial"/>
+              <a:buChar char="•"/>
+            </a:pPr>
             <a:r>
               <a:rPr lang="en-US" sz="1650" dirty="0">
                 <a:solidFill>
                   <a:srgbClr val="000000"/>
                 </a:solidFill>
-                <a:latin typeface="Segoe UI"/>
-                <a:cs typeface="Segoe UI"/>
+                <a:latin typeface="Arial"/>
+                <a:cs typeface="Arial"/>
               </a:rPr>
               <a:t>Câu hỏi cuối buổi: so sánh người tự chọn tiêm vắc xin cúm với người không tiêm. Thiết kế gì? Gây ra hay có liên quan?</a:t>
             </a:r>
@@ -22683,25 +22485,19 @@
               <a:spcBef>
                 <a:spcPts val="450"/>
               </a:spcBef>
-              <a:buNone/>
-            </a:pPr>
-            <a:r>
-              <a:rPr lang="en-US" sz="1650" b="1" dirty="0">
-                <a:solidFill>
-                  <a:srgbClr val="1F5C7A"/>
-                </a:solidFill>
-                <a:latin typeface="Segoe UI"/>
-                <a:cs typeface="Segoe UI"/>
-              </a:rPr>
-              <a:t>2.  </a:t>
-            </a:r>
+              <a:buClr>
+                <a:srgbClr val="1F5C7A"/>
+              </a:buClr>
+              <a:buFont typeface="Arial"/>
+              <a:buChar char="•"/>
+            </a:pPr>
             <a:r>
               <a:rPr lang="en-US" sz="1650" dirty="0">
                 <a:solidFill>
                   <a:srgbClr val="000000"/>
                 </a:solidFill>
-                <a:latin typeface="Segoe UI"/>
-                <a:cs typeface="Segoe UI"/>
+                <a:latin typeface="Arial"/>
+                <a:cs typeface="Arial"/>
               </a:rPr>
               <a:t>Bài về nhà: hoàn thành Phần 2a của đề cương (thiết kế, bối cảnh, đối tượng)</a:t>
             </a:r>
@@ -22714,25 +22510,19 @@
               <a:spcBef>
                 <a:spcPts val="450"/>
               </a:spcBef>
-              <a:buNone/>
-            </a:pPr>
-            <a:r>
-              <a:rPr lang="en-US" sz="1650" b="1" dirty="0">
-                <a:solidFill>
-                  <a:srgbClr val="1F5C7A"/>
-                </a:solidFill>
-                <a:latin typeface="Segoe UI"/>
-                <a:cs typeface="Segoe UI"/>
-              </a:rPr>
-              <a:t>3.  </a:t>
-            </a:r>
+              <a:buClr>
+                <a:srgbClr val="1F5C7A"/>
+              </a:buClr>
+              <a:buFont typeface="Arial"/>
+              <a:buChar char="•"/>
+            </a:pPr>
             <a:r>
               <a:rPr lang="en-US" sz="1650" dirty="0">
                 <a:solidFill>
                   <a:srgbClr val="000000"/>
                 </a:solidFill>
-                <a:latin typeface="Segoe UI"/>
-                <a:cs typeface="Segoe UI"/>
+                <a:latin typeface="Arial"/>
+                <a:cs typeface="Arial"/>
               </a:rPr>
               <a:t>Bài về nhà: đọc đoạn 'Patients' của Boulet và đoạn 'Data source' của Hyun</a:t>
             </a:r>
@@ -22745,25 +22535,19 @@
               <a:spcBef>
                 <a:spcPts val="450"/>
               </a:spcBef>
-              <a:buNone/>
-            </a:pPr>
-            <a:r>
-              <a:rPr lang="en-US" sz="1650" b="1" dirty="0">
-                <a:solidFill>
-                  <a:srgbClr val="1F5C7A"/>
-                </a:solidFill>
-                <a:latin typeface="Segoe UI"/>
-                <a:cs typeface="Segoe UI"/>
-              </a:rPr>
-              <a:t>4.  </a:t>
-            </a:r>
+              <a:buClr>
+                <a:srgbClr val="1F5C7A"/>
+              </a:buClr>
+              <a:buFont typeface="Arial"/>
+              <a:buChar char="•"/>
+            </a:pPr>
             <a:r>
               <a:rPr lang="en-US" sz="1650" dirty="0">
                 <a:solidFill>
                   <a:srgbClr val="000000"/>
                 </a:solidFill>
-                <a:latin typeface="Segoe UI"/>
-                <a:cs typeface="Segoe UI"/>
+                <a:latin typeface="Arial"/>
+                <a:cs typeface="Arial"/>
               </a:rPr>
               <a:t>Thứ Bảy tuần sau (Buổi 4): có tin được kết quả không, và tác động lớn đến đâu?</a:t>
             </a:r>
@@ -22809,8 +22593,8 @@
                 <a:solidFill>
                   <a:srgbClr val="1F5C7A"/>
                 </a:solidFill>
-                <a:latin typeface="Segoe UI"/>
-                <a:cs typeface="Segoe UI"/>
+                <a:latin typeface="Arial"/>
+                <a:cs typeface="Arial"/>
               </a:rPr>
               <a:t>SẢN PHẨM   </a:t>
             </a:r>
@@ -22819,8 +22603,8 @@
                 <a:solidFill>
                   <a:srgbClr val="000000"/>
                 </a:solidFill>
-                <a:latin typeface="Segoe UI"/>
-                <a:cs typeface="Segoe UI"/>
+                <a:latin typeface="Arial"/>
+                <a:cs typeface="Arial"/>
               </a:rPr>
               <a:t>Câu trả lời cuối buổi trên giấy dán</a:t>
             </a:r>
@@ -22857,7 +22641,7 @@
                     <a:lumMod val="50000"/>
                   </a:schemeClr>
                 </a:solidFill>
-                <a:latin typeface="Verdana"/>
+                <a:latin typeface="Arial"/>
               </a:rPr>
               <a:t>Neudata | #ClearDataClearImpact</a:t>
             </a:r>
@@ -22987,8 +22771,8 @@
                 <a:solidFill>
                   <a:srgbClr val="0D7377"/>
                 </a:solidFill>
-                <a:latin typeface="Segoe UI"/>
-                <a:cs typeface="Segoe UI"/>
+                <a:latin typeface="Arial"/>
+                <a:cs typeface="Arial"/>
               </a:rPr>
               <a:t>Slide bổ sung: Buổi 3</a:t>
             </a:r>
@@ -23057,8 +22841,8 @@
                 <a:solidFill>
                   <a:srgbClr val="0D7377"/>
                 </a:solidFill>
-                <a:latin typeface="Segoe UI"/>
-                <a:cs typeface="Segoe UI"/>
+                <a:latin typeface="Arial"/>
+                <a:cs typeface="Arial"/>
               </a:rPr>
               <a:t>Slide bổ sung: Buổi 3</a:t>
             </a:r>
@@ -23075,8 +22859,8 @@
                 <a:solidFill>
                   <a:srgbClr val="595959"/>
                 </a:solidFill>
-                <a:latin typeface="Segoe UI"/>
-                <a:cs typeface="Segoe UI"/>
+                <a:latin typeface="Arial"/>
+                <a:cs typeface="Arial"/>
               </a:rPr>
               <a:t>Dùng nếu còn thời gian, hoặc để tự học</a:t>
             </a:r>
@@ -23113,7 +22897,7 @@
                     <a:lumMod val="50000"/>
                   </a:schemeClr>
                 </a:solidFill>
-                <a:latin typeface="Verdana"/>
+                <a:latin typeface="Arial"/>
               </a:rPr>
               <a:t>Neudata | #ClearDataClearImpact</a:t>
             </a:r>
@@ -23243,8 +23027,8 @@
                 <a:solidFill>
                   <a:srgbClr val="0D7377"/>
                 </a:solidFill>
-                <a:latin typeface="Segoe UI"/>
-                <a:cs typeface="Segoe UI"/>
+                <a:latin typeface="Arial"/>
+                <a:cs typeface="Arial"/>
               </a:rPr>
               <a:t>Một câu hỏi, hai thiết kế</a:t>
             </a:r>
@@ -23340,8 +23124,8 @@
                 <a:solidFill>
                   <a:srgbClr val="FFFFFF"/>
                 </a:solidFill>
-                <a:latin typeface="Segoe UI"/>
-                <a:cs typeface="Segoe UI"/>
+                <a:latin typeface="Arial"/>
+                <a:cs typeface="Arial"/>
               </a:rPr>
               <a:t>THÔNG ĐIỆP CHÍNH   </a:t>
             </a:r>
@@ -23350,8 +23134,8 @@
                 <a:solidFill>
                   <a:srgbClr val="FFFFFF"/>
                 </a:solidFill>
-                <a:latin typeface="Segoe UI"/>
-                <a:cs typeface="Segoe UI"/>
+                <a:latin typeface="Arial"/>
+                <a:cs typeface="Arial"/>
               </a:rPr>
               <a:t>Cùng câu hỏi, hai thiết kế: thiết kế quyết định điều được phép kết luận.</a:t>
             </a:r>
@@ -23388,7 +23172,7 @@
                     <a:lumMod val="50000"/>
                   </a:schemeClr>
                 </a:solidFill>
-                <a:latin typeface="Verdana"/>
+                <a:latin typeface="Arial"/>
               </a:rPr>
               <a:t>Neudata | #ClearDataClearImpact</a:t>
             </a:r>
@@ -23518,8 +23302,8 @@
                 <a:solidFill>
                   <a:srgbClr val="0D7377"/>
                 </a:solidFill>
-                <a:latin typeface="Segoe UI"/>
-                <a:cs typeface="Segoe UI"/>
+                <a:latin typeface="Arial"/>
+                <a:cs typeface="Arial"/>
               </a:rPr>
               <a:t>Cây quyết định trong thực tế: Boulet và Hyun</a:t>
             </a:r>
@@ -23591,8 +23375,8 @@
                 <a:solidFill>
                   <a:srgbClr val="FFFFFF"/>
                 </a:solidFill>
-                <a:latin typeface="Segoe UI"/>
-                <a:cs typeface="Segoe UI"/>
+                <a:latin typeface="Arial"/>
+                <a:cs typeface="Arial"/>
               </a:rPr>
               <a:t>Chỉ định?</a:t>
             </a:r>
@@ -23640,8 +23424,8 @@
                 <a:solidFill>
                   <a:srgbClr val="000000"/>
                 </a:solidFill>
-                <a:latin typeface="Segoe UI"/>
-                <a:cs typeface="Segoe UI"/>
+                <a:latin typeface="Arial"/>
+                <a:cs typeface="Arial"/>
               </a:rPr>
               <a:t>Boulet: có, thử nghiệm chỉ định chiến lược</a:t>
             </a:r>
@@ -23661,8 +23445,8 @@
                 <a:solidFill>
                   <a:srgbClr val="000000"/>
                 </a:solidFill>
-                <a:latin typeface="Segoe UI"/>
-                <a:cs typeface="Segoe UI"/>
+                <a:latin typeface="Arial"/>
+                <a:cs typeface="Arial"/>
               </a:rPr>
               <a:t>Hyun: không, bác sĩ quyết định</a:t>
             </a:r>
@@ -23706,8 +23490,8 @@
                 <a:solidFill>
                   <a:srgbClr val="FFFFFF"/>
                 </a:solidFill>
-                <a:latin typeface="Segoe UI"/>
-                <a:cs typeface="Segoe UI"/>
+                <a:latin typeface="Arial"/>
+                <a:cs typeface="Arial"/>
               </a:rPr>
               <a:t>Ngẫu nhiên?</a:t>
             </a:r>
@@ -23755,8 +23539,8 @@
                 <a:solidFill>
                   <a:srgbClr val="000000"/>
                 </a:solidFill>
-                <a:latin typeface="Segoe UI"/>
-                <a:cs typeface="Segoe UI"/>
+                <a:latin typeface="Arial"/>
+                <a:cs typeface="Arial"/>
               </a:rPr>
               <a:t>Boulet: có, máy tính trung tâm</a:t>
             </a:r>
@@ -23800,8 +23584,8 @@
                 <a:solidFill>
                   <a:srgbClr val="FFFFFF"/>
                 </a:solidFill>
-                <a:latin typeface="Segoe UI"/>
-                <a:cs typeface="Segoe UI"/>
+                <a:latin typeface="Arial"/>
+                <a:cs typeface="Arial"/>
               </a:rPr>
               <a:t>So sánh?</a:t>
             </a:r>
@@ -23849,8 +23633,8 @@
                 <a:solidFill>
                   <a:srgbClr val="000000"/>
                 </a:solidFill>
-                <a:latin typeface="Segoe UI"/>
-                <a:cs typeface="Segoe UI"/>
+                <a:latin typeface="Arial"/>
+                <a:cs typeface="Arial"/>
               </a:rPr>
               <a:t>Hyun: có, cân bằng dương vs âm</a:t>
             </a:r>
@@ -23894,8 +23678,8 @@
                 <a:solidFill>
                   <a:srgbClr val="FFFFFF"/>
                 </a:solidFill>
-                <a:latin typeface="Segoe UI"/>
-                <a:cs typeface="Segoe UI"/>
+                <a:latin typeface="Arial"/>
+                <a:cs typeface="Arial"/>
               </a:rPr>
               <a:t>Thứ tự?</a:t>
             </a:r>
@@ -23943,8 +23727,8 @@
                 <a:solidFill>
                   <a:srgbClr val="000000"/>
                 </a:solidFill>
-                <a:latin typeface="Segoe UI"/>
-                <a:cs typeface="Segoe UI"/>
+                <a:latin typeface="Arial"/>
+                <a:cs typeface="Arial"/>
               </a:rPr>
               <a:t>Hyun: phơi nhiễm ngày 1-3, rồi tử vong ngày 28</a:t>
             </a:r>
@@ -23988,8 +23772,8 @@
                 <a:solidFill>
                   <a:srgbClr val="FFFFFF"/>
                 </a:solidFill>
-                <a:latin typeface="Segoe UI"/>
-                <a:cs typeface="Segoe UI"/>
+                <a:latin typeface="Arial"/>
+                <a:cs typeface="Arial"/>
               </a:rPr>
               <a:t>Thiết kế</a:t>
             </a:r>
@@ -24037,8 +23821,8 @@
                 <a:solidFill>
                   <a:srgbClr val="000000"/>
                 </a:solidFill>
-                <a:latin typeface="Segoe UI"/>
-                <a:cs typeface="Segoe UI"/>
+                <a:latin typeface="Arial"/>
+                <a:cs typeface="Arial"/>
               </a:rPr>
               <a:t>Boulet: RCT</a:t>
             </a:r>
@@ -24058,8 +23842,8 @@
                 <a:solidFill>
                   <a:srgbClr val="000000"/>
                 </a:solidFill>
-                <a:latin typeface="Segoe UI"/>
-                <a:cs typeface="Segoe UI"/>
+                <a:latin typeface="Arial"/>
+                <a:cs typeface="Arial"/>
               </a:rPr>
               <a:t>Hyun: thuần tập</a:t>
             </a:r>
@@ -24103,8 +23887,8 @@
                 <a:solidFill>
                   <a:srgbClr val="FFFFFF"/>
                 </a:solidFill>
-                <a:latin typeface="Segoe UI"/>
-                <a:cs typeface="Segoe UI"/>
+                <a:latin typeface="Arial"/>
+                <a:cs typeface="Arial"/>
               </a:rPr>
               <a:t>THÔNG ĐIỆP CHÍNH   </a:t>
             </a:r>
@@ -24113,8 +23897,8 @@
                 <a:solidFill>
                   <a:srgbClr val="FFFFFF"/>
                 </a:solidFill>
-                <a:latin typeface="Segoe UI"/>
-                <a:cs typeface="Segoe UI"/>
+                <a:latin typeface="Arial"/>
+                <a:cs typeface="Arial"/>
               </a:rPr>
               <a:t>Cho mọi bài báo đi qua cùng các câu hỏi trước khi đọc kết quả.</a:t>
             </a:r>
@@ -24151,7 +23935,7 @@
                     <a:lumMod val="50000"/>
                   </a:schemeClr>
                 </a:solidFill>
-                <a:latin typeface="Verdana"/>
+                <a:latin typeface="Arial"/>
               </a:rPr>
               <a:t>Neudata | #ClearDataClearImpact</a:t>
             </a:r>
@@ -24281,10 +24065,10 @@
                 <a:solidFill>
                   <a:srgbClr val="0D7377"/>
                 </a:solidFill>
-                <a:latin typeface="Segoe UI"/>
-                <a:cs typeface="Segoe UI"/>
-              </a:rPr>
-              <a:t>Chọn ca chứng tốt trong nghiên cứu bệnh - chứng</a:t>
+                <a:latin typeface="Arial"/>
+                <a:cs typeface="Arial"/>
+              </a:rPr>
+              <a:t>Chọn ca chứng tốt trong nghiên cứu bệnh-chứng</a:t>
             </a:r>
           </a:p>
         </p:txBody>
@@ -24352,8 +24136,8 @@
                 <a:solidFill>
                   <a:srgbClr val="FFFFFF"/>
                 </a:solidFill>
-                <a:latin typeface="Segoe UI"/>
-                <a:cs typeface="Segoe UI"/>
+                <a:latin typeface="Arial"/>
+                <a:cs typeface="Arial"/>
               </a:rPr>
               <a:t>Cùng nguồn</a:t>
             </a:r>
@@ -24401,8 +24185,8 @@
                 <a:solidFill>
                   <a:srgbClr val="000000"/>
                 </a:solidFill>
-                <a:latin typeface="Segoe UI"/>
-                <a:cs typeface="Segoe UI"/>
+                <a:latin typeface="Arial"/>
+                <a:cs typeface="Arial"/>
               </a:rPr>
               <a:t>Cùng bệnh viện, khoa và thời gian với ca bệnh</a:t>
             </a:r>
@@ -24422,8 +24206,8 @@
                 <a:solidFill>
                   <a:srgbClr val="000000"/>
                 </a:solidFill>
-                <a:latin typeface="Segoe UI"/>
-                <a:cs typeface="Segoe UI"/>
+                <a:latin typeface="Arial"/>
+                <a:cs typeface="Arial"/>
               </a:rPr>
               <a:t>Sẽ thành ca bệnh nếu có kết cục</a:t>
             </a:r>
@@ -24465,8 +24249,8 @@
                 <a:solidFill>
                   <a:srgbClr val="FFFFFF"/>
                 </a:solidFill>
-                <a:latin typeface="Segoe UI"/>
-                <a:cs typeface="Segoe UI"/>
+                <a:latin typeface="Arial"/>
+                <a:cs typeface="Arial"/>
               </a:rPr>
               <a:t>Cùng cách đo</a:t>
             </a:r>
@@ -24514,8 +24298,8 @@
                 <a:solidFill>
                   <a:srgbClr val="000000"/>
                 </a:solidFill>
-                <a:latin typeface="Segoe UI"/>
-                <a:cs typeface="Segoe UI"/>
+                <a:latin typeface="Arial"/>
+                <a:cs typeface="Arial"/>
               </a:rPr>
               <a:t>Cùng hồ sơ, cùng câu hỏi</a:t>
             </a:r>
@@ -24535,8 +24319,8 @@
                 <a:solidFill>
                   <a:srgbClr val="000000"/>
                 </a:solidFill>
-                <a:latin typeface="Segoe UI"/>
-                <a:cs typeface="Segoe UI"/>
+                <a:latin typeface="Arial"/>
+                <a:cs typeface="Arial"/>
               </a:rPr>
               <a:t>Tốt nhất người đánh giá không biết ca bệnh hay ca chứng</a:t>
             </a:r>
@@ -24578,8 +24362,8 @@
                 <a:solidFill>
                   <a:srgbClr val="FFFFFF"/>
                 </a:solidFill>
-                <a:latin typeface="Segoe UI"/>
-                <a:cs typeface="Segoe UI"/>
+                <a:latin typeface="Arial"/>
+                <a:cs typeface="Arial"/>
               </a:rPr>
               <a:t>Ghép cặp (tùy chọn)</a:t>
             </a:r>
@@ -24627,8 +24411,8 @@
                 <a:solidFill>
                   <a:srgbClr val="000000"/>
                 </a:solidFill>
-                <a:latin typeface="Segoe UI"/>
-                <a:cs typeface="Segoe UI"/>
+                <a:latin typeface="Arial"/>
+                <a:cs typeface="Arial"/>
               </a:rPr>
               <a:t>vd. tuổi, tháng nhập viện</a:t>
             </a:r>
@@ -24648,8 +24432,8 @@
                 <a:solidFill>
                   <a:srgbClr val="000000"/>
                 </a:solidFill>
-                <a:latin typeface="Segoe UI"/>
-                <a:cs typeface="Segoe UI"/>
+                <a:latin typeface="Arial"/>
+                <a:cs typeface="Arial"/>
               </a:rPr>
               <a:t>Không ghép theo chính phơi nhiễm</a:t>
             </a:r>
@@ -24693,8 +24477,8 @@
                 <a:solidFill>
                   <a:srgbClr val="FFFFFF"/>
                 </a:solidFill>
-                <a:latin typeface="Segoe UI"/>
-                <a:cs typeface="Segoe UI"/>
+                <a:latin typeface="Arial"/>
+                <a:cs typeface="Arial"/>
               </a:rPr>
               <a:t>THÔNG ĐIỆP CHÍNH   </a:t>
             </a:r>
@@ -24703,10 +24487,10 @@
                 <a:solidFill>
                   <a:srgbClr val="FFFFFF"/>
                 </a:solidFill>
-                <a:latin typeface="Segoe UI"/>
-                <a:cs typeface="Segoe UI"/>
-              </a:rPr>
-              <a:t>Ca chứng kém làm mọi nghiên cứu bệnh - chứng trở nên vô nghĩa.</a:t>
+                <a:latin typeface="Arial"/>
+                <a:cs typeface="Arial"/>
+              </a:rPr>
+              <a:t>Ca chứng kém làm mọi nghiên cứu bệnh-chứng trở nên vô nghĩa.</a:t>
             </a:r>
           </a:p>
         </p:txBody>
@@ -24741,7 +24525,7 @@
                     <a:lumMod val="50000"/>
                   </a:schemeClr>
                 </a:solidFill>
-                <a:latin typeface="Verdana"/>
+                <a:latin typeface="Arial"/>
               </a:rPr>
               <a:t>Neudata | #ClearDataClearImpact</a:t>
             </a:r>
@@ -24871,8 +24655,8 @@
                 <a:solidFill>
                   <a:srgbClr val="0D7377"/>
                 </a:solidFill>
-                <a:latin typeface="Segoe UI"/>
-                <a:cs typeface="Segoe UI"/>
+                <a:latin typeface="Arial"/>
+                <a:cs typeface="Arial"/>
               </a:rPr>
               <a:t>Vượt trội, tương đương và không kém hơn</a:t>
             </a:r>
@@ -24942,8 +24726,8 @@
                 <a:solidFill>
                   <a:srgbClr val="FFFFFF"/>
                 </a:solidFill>
-                <a:latin typeface="Segoe UI"/>
-                <a:cs typeface="Segoe UI"/>
+                <a:latin typeface="Arial"/>
+                <a:cs typeface="Arial"/>
               </a:rPr>
               <a:t>Vượt trội</a:t>
             </a:r>
@@ -24991,8 +24775,8 @@
                 <a:solidFill>
                   <a:srgbClr val="000000"/>
                 </a:solidFill>
-                <a:latin typeface="Segoe UI"/>
-                <a:cs typeface="Segoe UI"/>
+                <a:latin typeface="Arial"/>
+                <a:cs typeface="Arial"/>
               </a:rPr>
               <a:t>Điều trị mới có TỐT HƠN?</a:t>
             </a:r>
@@ -25012,8 +24796,8 @@
                 <a:solidFill>
                   <a:srgbClr val="000000"/>
                 </a:solidFill>
-                <a:latin typeface="Segoe UI"/>
-                <a:cs typeface="Segoe UI"/>
+                <a:latin typeface="Arial"/>
+                <a:cs typeface="Arial"/>
               </a:rPr>
               <a:t>Toàn bộ KTC ở phía 'tốt hơn' của 0</a:t>
             </a:r>
@@ -25055,8 +24839,8 @@
                 <a:solidFill>
                   <a:srgbClr val="FFFFFF"/>
                 </a:solidFill>
-                <a:latin typeface="Segoe UI"/>
-                <a:cs typeface="Segoe UI"/>
+                <a:latin typeface="Arial"/>
+                <a:cs typeface="Arial"/>
               </a:rPr>
               <a:t>Tương đương</a:t>
             </a:r>
@@ -25104,8 +24888,8 @@
                 <a:solidFill>
                   <a:srgbClr val="000000"/>
                 </a:solidFill>
-                <a:latin typeface="Segoe UI"/>
-                <a:cs typeface="Segoe UI"/>
+                <a:latin typeface="Arial"/>
+                <a:cs typeface="Arial"/>
               </a:rPr>
               <a:t>Có NHƯ NHAU không?</a:t>
             </a:r>
@@ -25125,8 +24909,8 @@
                 <a:solidFill>
                   <a:srgbClr val="000000"/>
                 </a:solidFill>
-                <a:latin typeface="Segoe UI"/>
-                <a:cs typeface="Segoe UI"/>
+                <a:latin typeface="Arial"/>
+                <a:cs typeface="Arial"/>
               </a:rPr>
               <a:t>Toàn bộ KTC nằm trong -ngưỡng đến +ngưỡng</a:t>
             </a:r>
@@ -25168,8 +24952,8 @@
                 <a:solidFill>
                   <a:srgbClr val="FFFFFF"/>
                 </a:solidFill>
-                <a:latin typeface="Segoe UI"/>
-                <a:cs typeface="Segoe UI"/>
+                <a:latin typeface="Arial"/>
+                <a:cs typeface="Arial"/>
               </a:rPr>
               <a:t>Không kém hơn</a:t>
             </a:r>
@@ -25217,8 +25001,8 @@
                 <a:solidFill>
                   <a:srgbClr val="000000"/>
                 </a:solidFill>
-                <a:latin typeface="Segoe UI"/>
-                <a:cs typeface="Segoe UI"/>
+                <a:latin typeface="Arial"/>
+                <a:cs typeface="Arial"/>
               </a:rPr>
               <a:t>Có KHÔNG kém đến mức không chấp nhận được?</a:t>
             </a:r>
@@ -25238,8 +25022,8 @@
                 <a:solidFill>
                   <a:srgbClr val="000000"/>
                 </a:solidFill>
-                <a:latin typeface="Segoe UI"/>
-                <a:cs typeface="Segoe UI"/>
+                <a:latin typeface="Arial"/>
+                <a:cs typeface="Arial"/>
               </a:rPr>
               <a:t>Toàn bộ KTC dưới +ngưỡng</a:t>
             </a:r>
@@ -25283,8 +25067,8 @@
                 <a:solidFill>
                   <a:srgbClr val="FFFFFF"/>
                 </a:solidFill>
-                <a:latin typeface="Segoe UI"/>
-                <a:cs typeface="Segoe UI"/>
+                <a:latin typeface="Arial"/>
+                <a:cs typeface="Arial"/>
               </a:rPr>
               <a:t>THÔNG ĐIỆP CHÍNH   </a:t>
             </a:r>
@@ -25293,8 +25077,8 @@
                 <a:solidFill>
                   <a:srgbClr val="FFFFFF"/>
                 </a:solidFill>
-                <a:latin typeface="Segoe UI"/>
-                <a:cs typeface="Segoe UI"/>
+                <a:latin typeface="Arial"/>
+                <a:cs typeface="Arial"/>
               </a:rPr>
               <a:t>Câu hỏi (tốt hơn, như nhau, không kém) được định trong đề cương, trước khi có dữ liệu.</a:t>
             </a:r>
@@ -25331,7 +25115,7 @@
                     <a:lumMod val="50000"/>
                   </a:schemeClr>
                 </a:solidFill>
-                <a:latin typeface="Verdana"/>
+                <a:latin typeface="Arial"/>
               </a:rPr>
               <a:t>Neudata | #ClearDataClearImpact</a:t>
             </a:r>
@@ -25461,8 +25245,8 @@
                 <a:solidFill>
                   <a:srgbClr val="0D7377"/>
                 </a:solidFill>
-                <a:latin typeface="Segoe UI"/>
-                <a:cs typeface="Segoe UI"/>
+                <a:latin typeface="Arial"/>
+                <a:cs typeface="Arial"/>
               </a:rPr>
               <a:t>Làm đánh giá cải tiến chất lượng mạnh hơn</a:t>
             </a:r>
@@ -25532,8 +25316,8 @@
                 <a:solidFill>
                   <a:srgbClr val="FFFFFF"/>
                 </a:solidFill>
-                <a:latin typeface="Segoe UI"/>
-                <a:cs typeface="Segoe UI"/>
+                <a:latin typeface="Arial"/>
+                <a:cs typeface="Arial"/>
               </a:rPr>
               <a:t>Nhiều điểm thời gian</a:t>
             </a:r>
@@ -25581,8 +25365,8 @@
                 <a:solidFill>
                   <a:srgbClr val="000000"/>
                 </a:solidFill>
-                <a:latin typeface="Segoe UI"/>
-                <a:cs typeface="Segoe UI"/>
+                <a:latin typeface="Arial"/>
+                <a:cs typeface="Arial"/>
               </a:rPr>
               <a:t>Ít nhất 8-12 điểm trước và sau</a:t>
             </a:r>
@@ -25602,8 +25386,8 @@
                 <a:solidFill>
                   <a:srgbClr val="000000"/>
                 </a:solidFill>
-                <a:latin typeface="Segoe UI"/>
-                <a:cs typeface="Segoe UI"/>
+                <a:latin typeface="Arial"/>
+                <a:cs typeface="Arial"/>
               </a:rPr>
               <a:t>Cùng một định nghĩa mỗi tháng</a:t>
             </a:r>
@@ -25645,8 +25429,8 @@
                 <a:solidFill>
                   <a:srgbClr val="FFFFFF"/>
                 </a:solidFill>
-                <a:latin typeface="Segoe UI"/>
-                <a:cs typeface="Segoe UI"/>
+                <a:latin typeface="Arial"/>
+                <a:cs typeface="Arial"/>
               </a:rPr>
               <a:t>Chuỗi đối chứng</a:t>
             </a:r>
@@ -25694,8 +25478,8 @@
                 <a:solidFill>
                   <a:srgbClr val="000000"/>
                 </a:solidFill>
-                <a:latin typeface="Segoe UI"/>
-                <a:cs typeface="Segoe UI"/>
+                <a:latin typeface="Arial"/>
+                <a:cs typeface="Arial"/>
               </a:rPr>
               <a:t>Một khoa hay bệnh viện không thay đổi</a:t>
             </a:r>
@@ -25715,8 +25499,8 @@
                 <a:solidFill>
                   <a:srgbClr val="000000"/>
                 </a:solidFill>
-                <a:latin typeface="Segoe UI"/>
-                <a:cs typeface="Segoe UI"/>
+                <a:latin typeface="Arial"/>
+                <a:cs typeface="Arial"/>
               </a:rPr>
               <a:t>Cùng tháng, cùng cách đo</a:t>
             </a:r>
@@ -25758,8 +25542,8 @@
                 <a:solidFill>
                   <a:srgbClr val="FFFFFF"/>
                 </a:solidFill>
-                <a:latin typeface="Segoe UI"/>
-                <a:cs typeface="Segoe UI"/>
+                <a:latin typeface="Arial"/>
+                <a:cs typeface="Arial"/>
               </a:rPr>
               <a:t>Ghi các can thiệp khác</a:t>
             </a:r>
@@ -25807,8 +25591,8 @@
                 <a:solidFill>
                   <a:srgbClr val="000000"/>
                 </a:solidFill>
-                <a:latin typeface="Segoe UI"/>
-                <a:cs typeface="Segoe UI"/>
+                <a:latin typeface="Arial"/>
+                <a:cs typeface="Arial"/>
               </a:rPr>
               <a:t>Thay đổi nhân sự, chính sách mới, kiểm tra</a:t>
             </a:r>
@@ -25828,8 +25612,8 @@
                 <a:solidFill>
                   <a:srgbClr val="000000"/>
                 </a:solidFill>
-                <a:latin typeface="Segoe UI"/>
-                <a:cs typeface="Segoe UI"/>
+                <a:latin typeface="Arial"/>
+                <a:cs typeface="Arial"/>
               </a:rPr>
               <a:t>Ghi lại ngay khi xảy ra</a:t>
             </a:r>
@@ -25873,8 +25657,8 @@
                 <a:solidFill>
                   <a:srgbClr val="FFFFFF"/>
                 </a:solidFill>
-                <a:latin typeface="Segoe UI"/>
-                <a:cs typeface="Segoe UI"/>
+                <a:latin typeface="Arial"/>
+                <a:cs typeface="Arial"/>
               </a:rPr>
               <a:t>THÔNG ĐIỆP CHÍNH   </a:t>
             </a:r>
@@ -25883,8 +25667,8 @@
                 <a:solidFill>
                   <a:srgbClr val="FFFFFF"/>
                 </a:solidFill>
-                <a:latin typeface="Segoe UI"/>
-                <a:cs typeface="Segoe UI"/>
+                <a:latin typeface="Arial"/>
+                <a:cs typeface="Arial"/>
               </a:rPr>
               <a:t>Trung bình trước-sau là yếu; chuỗi thời gian dài có đối chứng mạnh hơn nhiều.</a:t>
             </a:r>
@@ -25921,7 +25705,7 @@
                     <a:lumMod val="50000"/>
                   </a:schemeClr>
                 </a:solidFill>
-                <a:latin typeface="Verdana"/>
+                <a:latin typeface="Arial"/>
               </a:rPr>
               <a:t>Neudata | #ClearDataClearImpact</a:t>
             </a:r>
@@ -26075,8 +25859,8 @@
                 <a:solidFill>
                   <a:srgbClr val="4472C4"/>
                 </a:solidFill>
-                <a:latin typeface="Segoe UI"/>
-                <a:cs typeface="Segoe UI"/>
+                <a:latin typeface="Arial"/>
+                <a:cs typeface="Arial"/>
               </a:rPr>
               <a:t>Copyright © Neudata, 2026</a:t>
             </a:r>
@@ -26221,7 +26005,7 @@
                     <a:lumMod val="50000"/>
                   </a:schemeClr>
                 </a:solidFill>
-                <a:latin typeface="Verdana"/>
+                <a:latin typeface="Arial"/>
               </a:rPr>
               <a:t>Neudata | #ClearDataClearImpact</a:t>
             </a:r>
@@ -26327,8 +26111,8 @@
                 <a:solidFill>
                   <a:srgbClr val="0D7377"/>
                 </a:solidFill>
-                <a:latin typeface="Segoe UI"/>
-                <a:cs typeface="Segoe UI"/>
+                <a:latin typeface="Arial"/>
+                <a:cs typeface="Arial"/>
               </a:rPr>
               <a:t>3.1  Thiết kế nghiên cứu qua hình ảnh</a:t>
             </a:r>
@@ -26397,8 +26181,8 @@
                 <a:solidFill>
                   <a:srgbClr val="0D7377"/>
                 </a:solidFill>
-                <a:latin typeface="Segoe UI"/>
-                <a:cs typeface="Segoe UI"/>
+                <a:latin typeface="Arial"/>
+                <a:cs typeface="Arial"/>
               </a:rPr>
               <a:t>Nhà nghiên cứu chỉ định phơi nhiễm, hay chỉ quan sát?</a:t>
             </a:r>
@@ -26415,8 +26199,8 @@
                 <a:solidFill>
                   <a:srgbClr val="595959"/>
                 </a:solidFill>
-                <a:latin typeface="Segoe UI"/>
-                <a:cs typeface="Segoe UI"/>
+                <a:latin typeface="Arial"/>
+                <a:cs typeface="Arial"/>
               </a:rPr>
               <a:t>Một câu hỏi đó phân loại được gần như mọi thiết kế. (45 phút)</a:t>
             </a:r>
@@ -26453,7 +26237,7 @@
                     <a:lumMod val="50000"/>
                   </a:schemeClr>
                 </a:solidFill>
-                <a:latin typeface="Verdana"/>
+                <a:latin typeface="Arial"/>
               </a:rPr>
               <a:t>Neudata | #ClearDataClearImpact</a:t>
             </a:r>
@@ -26583,8 +26367,8 @@
                 <a:solidFill>
                   <a:srgbClr val="0D7377"/>
                 </a:solidFill>
-                <a:latin typeface="Segoe UI"/>
-                <a:cs typeface="Segoe UI"/>
+                <a:latin typeface="Arial"/>
+                <a:cs typeface="Arial"/>
               </a:rPr>
               <a:t>Cây gia phả các thiết kế nghiên cứu</a:t>
             </a:r>
@@ -26680,8 +26464,8 @@
                 <a:solidFill>
                   <a:srgbClr val="FFFFFF"/>
                 </a:solidFill>
-                <a:latin typeface="Segoe UI"/>
-                <a:cs typeface="Segoe UI"/>
+                <a:latin typeface="Arial"/>
+                <a:cs typeface="Arial"/>
               </a:rPr>
               <a:t>THÔNG ĐIỆP CHÍNH   </a:t>
             </a:r>
@@ -26690,8 +26474,8 @@
                 <a:solidFill>
                   <a:srgbClr val="FFFFFF"/>
                 </a:solidFill>
-                <a:latin typeface="Segoe UI"/>
-                <a:cs typeface="Segoe UI"/>
+                <a:latin typeface="Arial"/>
+                <a:cs typeface="Arial"/>
               </a:rPr>
               <a:t>Thiết kế mô tả thì mô tả; thiết kế phân tích thì so sánh các nhóm.</a:t>
             </a:r>
@@ -26728,7 +26512,7 @@
                     <a:lumMod val="50000"/>
                   </a:schemeClr>
                 </a:solidFill>
-                <a:latin typeface="Verdana"/>
+                <a:latin typeface="Arial"/>
               </a:rPr>
               <a:t>Neudata | #ClearDataClearImpact</a:t>
             </a:r>
@@ -26858,8 +26642,8 @@
                 <a:solidFill>
                   <a:srgbClr val="0D7377"/>
                 </a:solidFill>
-                <a:latin typeface="Segoe UI"/>
-                <a:cs typeface="Segoe UI"/>
+                <a:latin typeface="Arial"/>
+                <a:cs typeface="Arial"/>
               </a:rPr>
               <a:t>Phơi nhiễm và kết cục: hai từ bạn cần</a:t>
             </a:r>
@@ -26955,8 +26739,8 @@
                 <a:solidFill>
                   <a:srgbClr val="FFFFFF"/>
                 </a:solidFill>
-                <a:latin typeface="Segoe UI"/>
-                <a:cs typeface="Segoe UI"/>
+                <a:latin typeface="Arial"/>
+                <a:cs typeface="Arial"/>
               </a:rPr>
               <a:t>THÔNG ĐIỆP CHÍNH   </a:t>
             </a:r>
@@ -26965,8 +26749,8 @@
                 <a:solidFill>
                   <a:srgbClr val="FFFFFF"/>
                 </a:solidFill>
-                <a:latin typeface="Segoe UI"/>
-                <a:cs typeface="Segoe UI"/>
+                <a:latin typeface="Arial"/>
+                <a:cs typeface="Arial"/>
               </a:rPr>
               <a:t>Gọi tên phơi nhiễm và kết cục trước, thiết kế sẽ theo sau.</a:t>
             </a:r>
@@ -27003,7 +26787,7 @@
                     <a:lumMod val="50000"/>
                   </a:schemeClr>
                 </a:solidFill>
-                <a:latin typeface="Verdana"/>
+                <a:latin typeface="Arial"/>
               </a:rPr>
               <a:t>Neudata | #ClearDataClearImpact</a:t>
             </a:r>
@@ -27133,8 +26917,8 @@
                 <a:solidFill>
                   <a:srgbClr val="0D7377"/>
                 </a:solidFill>
-                <a:latin typeface="Segoe UI"/>
-                <a:cs typeface="Segoe UI"/>
+                <a:latin typeface="Arial"/>
+                <a:cs typeface="Arial"/>
               </a:rPr>
               <a:t>Thiết kế mô tả: mô tả, không so sánh</a:t>
             </a:r>
@@ -27230,8 +27014,8 @@
                 <a:solidFill>
                   <a:srgbClr val="FFFFFF"/>
                 </a:solidFill>
-                <a:latin typeface="Segoe UI"/>
-                <a:cs typeface="Segoe UI"/>
+                <a:latin typeface="Arial"/>
+                <a:cs typeface="Arial"/>
               </a:rPr>
               <a:t>THÔNG ĐIỆP CHÍNH   </a:t>
             </a:r>
@@ -27240,8 +27024,8 @@
                 <a:solidFill>
                   <a:srgbClr val="FFFFFF"/>
                 </a:solidFill>
-                <a:latin typeface="Segoe UI"/>
-                <a:cs typeface="Segoe UI"/>
+                <a:latin typeface="Arial"/>
+                <a:cs typeface="Arial"/>
               </a:rPr>
               <a:t>Nghiên cứu mô tả gợi câu hỏi; không trả lời được 'X có gây ra Y không?'</a:t>
             </a:r>
@@ -27278,7 +27062,7 @@
                     <a:lumMod val="50000"/>
                   </a:schemeClr>
                 </a:solidFill>
-                <a:latin typeface="Verdana"/>
+                <a:latin typeface="Arial"/>
               </a:rPr>
               <a:t>Neudata | #ClearDataClearImpact</a:t>
             </a:r>
@@ -27408,8 +27192,8 @@
                 <a:solidFill>
                   <a:srgbClr val="0D7377"/>
                 </a:solidFill>
-                <a:latin typeface="Segoe UI"/>
-                <a:cs typeface="Segoe UI"/>
+                <a:latin typeface="Arial"/>
+                <a:cs typeface="Arial"/>
               </a:rPr>
               <a:t>Ví dụ: khảo sát hiện mắc trong một ngày</a:t>
             </a:r>
@@ -27475,8 +27259,8 @@
                 <a:solidFill>
                   <a:srgbClr val="595959"/>
                 </a:solidFill>
-                <a:latin typeface="Segoe UI"/>
-                <a:cs typeface="Segoe UI"/>
+                <a:latin typeface="Arial"/>
+                <a:cs typeface="Arial"/>
               </a:rPr>
               <a:t>Một nghiên cứu cắt ngang có thể làm ngay tuần tới</a:t>
             </a:r>
@@ -27520,10 +27304,10 @@
                 <a:solidFill>
                   <a:srgbClr val="FFFFFF"/>
                 </a:solidFill>
-                <a:latin typeface="Segoe UI"/>
-                <a:cs typeface="Segoe UI"/>
-              </a:rPr>
-              <a:t>1. Chọn ngày</a:t>
+                <a:latin typeface="Arial"/>
+                <a:cs typeface="Arial"/>
+              </a:rPr>
+              <a:t>Chọn ngày</a:t>
             </a:r>
           </a:p>
         </p:txBody>
@@ -27569,8 +27353,8 @@
                 <a:solidFill>
                   <a:srgbClr val="000000"/>
                 </a:solidFill>
-                <a:latin typeface="Segoe UI"/>
-                <a:cs typeface="Segoe UI"/>
+                <a:latin typeface="Arial"/>
+                <a:cs typeface="Arial"/>
               </a:rPr>
               <a:t>Mọi BN nội trú ở mọi khoa, một ngày trong tuần</a:t>
             </a:r>
@@ -27614,10 +27398,10 @@
                 <a:solidFill>
                   <a:srgbClr val="FFFFFF"/>
                 </a:solidFill>
-                <a:latin typeface="Segoe UI"/>
-                <a:cs typeface="Segoe UI"/>
-              </a:rPr>
-              <a:t>2. Khám tất cả</a:t>
+                <a:latin typeface="Arial"/>
+                <a:cs typeface="Arial"/>
+              </a:rPr>
+              <a:t>Khám tất cả</a:t>
             </a:r>
           </a:p>
         </p:txBody>
@@ -27663,8 +27447,8 @@
                 <a:solidFill>
                   <a:srgbClr val="000000"/>
                 </a:solidFill>
-                <a:latin typeface="Segoe UI"/>
-                <a:cs typeface="Segoe UI"/>
+                <a:latin typeface="Arial"/>
+                <a:cs typeface="Arial"/>
               </a:rPr>
               <a:t>Hai điều dưỡng được tập huấn, một phiếu chuẩn</a:t>
             </a:r>
@@ -27708,10 +27492,10 @@
                 <a:solidFill>
                   <a:srgbClr val="FFFFFF"/>
                 </a:solidFill>
-                <a:latin typeface="Segoe UI"/>
-                <a:cs typeface="Segoe UI"/>
-              </a:rPr>
-              <a:t>3. Ghi cả hai</a:t>
+                <a:latin typeface="Arial"/>
+                <a:cs typeface="Arial"/>
+              </a:rPr>
+              <a:t>Ghi cả hai</a:t>
             </a:r>
           </a:p>
         </p:txBody>
@@ -27757,8 +27541,8 @@
                 <a:solidFill>
                   <a:srgbClr val="000000"/>
                 </a:solidFill>
-                <a:latin typeface="Segoe UI"/>
-                <a:cs typeface="Segoe UI"/>
+                <a:latin typeface="Arial"/>
+                <a:cs typeface="Arial"/>
               </a:rPr>
               <a:t>Loét tì đè (có/không) VÀ loại đệm, cùng một lần khám</a:t>
             </a:r>
@@ -27802,10 +27586,10 @@
                 <a:solidFill>
                   <a:srgbClr val="FFFFFF"/>
                 </a:solidFill>
-                <a:latin typeface="Segoe UI"/>
-                <a:cs typeface="Segoe UI"/>
-              </a:rPr>
-              <a:t>4. Đếm</a:t>
+                <a:latin typeface="Arial"/>
+                <a:cs typeface="Arial"/>
+              </a:rPr>
+              <a:t>Đếm</a:t>
             </a:r>
           </a:p>
         </p:txBody>
@@ -27851,8 +27635,8 @@
                 <a:solidFill>
                   <a:srgbClr val="000000"/>
                 </a:solidFill>
-                <a:latin typeface="Segoe UI"/>
-                <a:cs typeface="Segoe UI"/>
+                <a:latin typeface="Arial"/>
+                <a:cs typeface="Arial"/>
               </a:rPr>
               <a:t>vd. 37/412 = 9% hiện mắc hôm nay</a:t>
             </a:r>
@@ -27896,8 +27680,8 @@
                 <a:solidFill>
                   <a:srgbClr val="FFFFFF"/>
                 </a:solidFill>
-                <a:latin typeface="Segoe UI"/>
-                <a:cs typeface="Segoe UI"/>
+                <a:latin typeface="Arial"/>
+                <a:cs typeface="Arial"/>
               </a:rPr>
               <a:t>THÔNG ĐIỆP CHÍNH   </a:t>
             </a:r>
@@ -27906,8 +27690,8 @@
                 <a:solidFill>
                   <a:srgbClr val="FFFFFF"/>
                 </a:solidFill>
-                <a:latin typeface="Segoe UI"/>
-                <a:cs typeface="Segoe UI"/>
+                <a:latin typeface="Arial"/>
+                <a:cs typeface="Arial"/>
               </a:rPr>
               <a:t>Một bức ảnh chụp cho tỷ lệ hiện mắc; không cho biết cái nào có trước.</a:t>
             </a:r>
@@ -27944,7 +27728,7 @@
                     <a:lumMod val="50000"/>
                   </a:schemeClr>
                 </a:solidFill>
-                <a:latin typeface="Verdana"/>
+                <a:latin typeface="Arial"/>
               </a:rPr>
               <a:t>Neudata | #ClearDataClearImpact</a:t>
             </a:r>
@@ -28061,7 +27845,7 @@
     </a:clrScheme>
     <a:fontScheme name="Office">
       <a:majorFont>
-        <a:latin typeface="Calibri"/>
+        <a:latin typeface="Arial"/>
         <a:ea typeface=""/>
         <a:cs typeface=""/>
         <a:font script="Jpan" typeface="ＭＳ Ｐゴシック"/>
@@ -28096,7 +27880,7 @@
         <a:font script="Geor" typeface="Sylfaen"/>
       </a:majorFont>
       <a:minorFont>
-        <a:latin typeface="Calibri"/>
+        <a:latin typeface="Arial"/>
         <a:ea typeface=""/>
         <a:cs typeface=""/>
         <a:font script="Jpan" typeface="ＭＳ Ｐゴシック"/>
@@ -28381,7 +28165,7 @@
     </a:clrScheme>
     <a:fontScheme name="Office">
       <a:majorFont>
-        <a:latin typeface="Calibri Light" panose="020F0302020204030204"/>
+        <a:latin typeface="Arial" panose="020F0302020204030204"/>
         <a:ea typeface=""/>
         <a:cs typeface=""/>
         <a:font script="Jpan" typeface="游ゴシック Light"/>
@@ -28416,7 +28200,7 @@
         <a:font script="Geor" typeface="Sylfaen"/>
       </a:majorFont>
       <a:minorFont>
-        <a:latin typeface="Calibri" panose="020F0502020204030204"/>
+        <a:latin typeface="Arial" panose="020F0502020204030204"/>
         <a:ea typeface=""/>
         <a:cs typeface=""/>
         <a:font script="Jpan" typeface="游ゴシック"/>
@@ -28642,7 +28426,7 @@
     </a:clrScheme>
     <a:fontScheme name="Office">
       <a:majorFont>
-        <a:latin typeface="Calibri Light" panose="020F0302020204030204"/>
+        <a:latin typeface="Arial" panose="020F0302020204030204"/>
         <a:ea typeface=""/>
         <a:cs typeface=""/>
         <a:font script="Jpan" typeface="游ゴシック Light"/>
@@ -28677,7 +28461,7 @@
         <a:font script="Geor" typeface="Sylfaen"/>
       </a:majorFont>
       <a:minorFont>
-        <a:latin typeface="Calibri" panose="020F0502020204030204"/>
+        <a:latin typeface="Arial" panose="020F0502020204030204"/>
         <a:ea typeface=""/>
         <a:cs typeface=""/>
         <a:font script="Jpan" typeface="游ゴシック"/>

--- a/vi/files/slides/Session_3_VN.pptx
+++ b/vi/files/slides/Session_3_VN.pptx
@@ -732,7 +732,7 @@
           <a:p>
             <a:r>
               <a:rPr lang="en-US" sz="1400" b="0" dirty="0"/>
-              <a:t>Mở đầu Buổi 3 (19:30). Chào mừng đến Tuần 3. Ở Buổi 1 và 2 chúng ta đặt câu hỏi và tìm bằng chứng. Hôm nay chọn cách một nghiên cứu trả lời câu hỏi. Thứ Bảy tuần sau (Buổi 4) đánh giá có tin được câu trả lời không và tác động lớn đến đâu.</a:t>
+              <a:t>Mở đầu Buổi 3 (19:30). Chào mừng đến Tuần 3. Ở Buổi 1 và 2 cả lớp đã đặt câu hỏi và tìm bằng chứng. Hôm nay chọn cách một nghiên cứu trả lời câu hỏi. Thứ Bảy tuần sau (Buổi 4) đánh giá có tin được câu trả lời không và tác động lớn đến đâu.</a:t>
             </a:r>
           </a:p>
           <a:p>
@@ -849,7 +849,7 @@
           <a:p>
             <a:r>
               <a:rPr lang="en-US" sz="1400" b="0" dirty="0"/>
-              <a:t>Dùng con trỏ chuột vẽ theo mũi tên từ phải sang trái. Ta bắt đầu hôm nay với những người đã có kết cục (nhóm bệnh) và những người tương tự không có (nhóm chứng). Rồi nhìn ngược lại tìm phơi nhiễm.</a:t>
+              <a:t>Dùng con trỏ chuột vẽ theo mũi tên từ phải sang trái. Bắt đầu từ hôm nay, với những người đã có kết cục (nhóm bệnh) và những người tương tự không có (nhóm chứng). Rồi nhìn ngược lại tìm phơi nhiễm.</a:t>
             </a:r>
           </a:p>
           <a:p>
@@ -861,7 +861,7 @@
           <a:p>
             <a:r>
               <a:rPr lang="en-US" sz="1400" b="0" dirty="0"/>
-              <a:t>Điểm mạnh: hiệu quả với kết cục hiếm hoặc thời gian ủ bệnh dài, vì không cần theo dõi hàng nghìn người. Điểm yếu: sai lệch nhớ lại, khó chọn nhóm chứng tốt, và chỉ tính được tỷ số chênh (OR), không tính được nguy cơ.</a:t>
+              <a:t>Điểm mạnh: hiệu quả với kết cục hiếm hoặc thời gian ủ bệnh dài, vì không cần theo dõi hàng nghìn người. Điểm yếu: sai lệch nhớ lại (recall bias), khó chọn nhóm chứng tốt, và chỉ tính được tỷ số chênh (OR), không tính được nguy cơ.</a:t>
             </a:r>
           </a:p>
           <a:p>
@@ -978,7 +978,7 @@
           <a:p>
             <a:r>
               <a:rPr lang="en-US" sz="1400" b="0" dirty="0"/>
-              <a:t>Hỏi cả lớp (mời hai ba người trả lời, bật micro): vì sao không báo cáo được nguy cơ nhiễm Candida máu từ nghiên cứu này? Dự kiến: ta tự chọn số ca bệnh và ca chứng (1:2), nên tỷ lệ mắc do ta quyết định.</a:t>
+              <a:t>Hỏi cả lớp (mời hai ba người trả lời, bật micro): vì sao không báo cáo được nguy cơ nhiễm Candida máu từ nghiên cứu này? Dự kiến: nhà nghiên cứu tự chọn số ca bệnh và ca chứng (1:2), nên tỷ lệ mắc do thiết kế quyết định.</a:t>
             </a:r>
           </a:p>
           <a:p>
@@ -1182,7 +1182,7 @@
           <a:p>
             <a:r>
               <a:rPr lang="en-US" sz="1400" b="0" dirty="0"/>
-              <a:t>Bước 1: nhóm thuần tập: ai được theo dõi (và ai bị loại: người bệnh rời ICU trước ngày 3). Bước 2: phơi nhiễm được đo trước kết cục. Bước 3: kết cục được đếm sau đó. Bước 4: so sánh các nhóm. Hyun ghép cặp theo điểm xu hướng để các nhóm tương đồng (483, 373 và 392 cặp cho ngày 1, 2 và 3). Kết quả ngày 2: tỷ số nguy cơ tức thời (HR) 2.13 (khoảng tin cậy, KTC, 95% 1.48-3.06). Ngày 1 không khác biệt rõ. HR được giải thích kỹ ở Buổi 6. Lúc này hiểu là 'tốc độ tử vong khoảng gấp đôi'.</a:t>
+              <a:t>Bước 1: nhóm thuần tập: ai được theo dõi (và ai bị loại: người bệnh rời ICU trước ngày 3). Bước 2: phơi nhiễm được đo trước kết cục. Bước 3: kết cục được đếm sau đó. Bước 4: so sánh các nhóm. Hyun ghép cặp theo điểm xu hướng (propensity score) để các nhóm tương đồng (483, 373 và 392 cặp cho ngày 1, 2 và 3). Kết quả ngày 2: tỷ số nguy cơ tức thời (HR) 2.13 (khoảng tin cậy, KTC, 95% 1.48-3.06). Ngày 1 không khác biệt rõ. HR được giải thích kỹ ở Buổi 6. Lúc này hiểu là 'tốc độ tử vong khoảng gấp đôi'.</a:t>
             </a:r>
           </a:p>
           <a:p>
@@ -1194,7 +1194,7 @@
           <a:p>
             <a:r>
               <a:rPr lang="en-US" sz="1400" b="0" dirty="0"/>
-              <a:t>Hỏi cả lớp (mời hai ba người trả lời, bật micro): ai quyết định người bệnh nào được truyền nhiều dịch hơn? Dự kiến: bác sĩ điều trị, thường vì người bệnh nặng hơn. Ta quay lại ở Buổi 4 (yếu tố nhiễu).</a:t>
+              <a:t>Hỏi cả lớp (mời hai ba người trả lời, bật micro): ai quyết định người bệnh nào được truyền nhiều dịch hơn? Dự kiến: bác sĩ điều trị, thường vì người bệnh nặng hơn. Sẽ quay lại ở Buổi 4 (yếu tố nhiễu).</a:t>
             </a:r>
           </a:p>
           <a:p>
@@ -1398,7 +1398,7 @@
           <a:p>
             <a:r>
               <a:rPr lang="en-US" sz="1400" b="0" dirty="0"/>
-              <a:t>Bước 1: tiêu chuẩn chọn chặt chẽ (ta quay lại khi xây dựng đề cương). Bước 2: đồng ý tham gia (ở ICU thường từ người đại diện), trước hoặc ngay sau phân nhóm. Bước 3: phân nhóm bằng máy tính trung tâm giữ kín lần phân bổ tiếp theo (che giấu phân bổ, Buổi 4). Bước 4: thực hiện hai chiến lược. Bước 5: kết cục chính là cân bằng dịch ngày 5. Tử vong ngày 28 là 6/24 ở mỗi nhóm.</a:t>
+              <a:t>Bước 1: tiêu chuẩn chọn chặt chẽ (sẽ quay lại khi xây dựng đề cương). Bước 2: đồng ý tham gia (ở ICU thường từ người đại diện), trước hoặc ngay sau phân nhóm. Bước 3: phân nhóm bằng máy tính trung tâm giữ kín lần phân bổ tiếp theo (che giấu phân bổ, allocation concealment, Buổi 4). Bước 4: thực hiện hai chiến lược. Bước 5: kết cục chính là cân bằng dịch ngày 5. Tử vong ngày 28 là 6/24 ở mỗi nhóm.</a:t>
             </a:r>
           </a:p>
           <a:p>
@@ -1929,7 +1929,7 @@
           <a:p>
             <a:r>
               <a:rPr lang="en-US" sz="1400" b="0" dirty="0"/>
-              <a:t>Chạy thành ba câu bình chọn (poll trên Zoom hoặc Teams, hoặc một biểu mẫu). Chiếu kết quả, rồi công bố đáp án.</a:t>
+              <a:t>Chạy thành ba câu bình chọn (poll trên Zoom hoặc Teams). Chiếu kết quả, rồi công bố đáp án.</a:t>
             </a:r>
           </a:p>
           <a:p>
@@ -2046,7 +2046,7 @@
           <a:p>
             <a:r>
               <a:rPr lang="en-US" sz="1400" b="0" dirty="0"/>
-              <a:t>Hyun (thuần tập): hàng nghìn người bệnh và đúng kết cục ta quan tâm. Cân bằng dịch dương ở ngày 2-3 có liên quan với tử vong ngày 28 cao hơn (tỷ số nguy cơ tức thời, HR, 2.13 ở ngày 2 và 1.56 ở ngày 3, ngày 1 không khác biệt rõ). Nhưng không chứng minh được dịch gây tử vong, vì người bệnh nặng hơn được truyền nhiều dịch hơn.</a:t>
+              <a:t>Hyun (thuần tập): hàng nghìn người bệnh và đúng kết cục cần quan tâm. Cân bằng dịch dương ở ngày 2-3 có liên quan với tử vong ngày 28 cao hơn (tỷ số nguy cơ tức thời, HR, 2.13 ở ngày 2 và 1.56 ở ngày 3, ngày 1 không khác biệt rõ). Nhưng không chứng minh được dịch gây tử vong, vì người bệnh nặng hơn được truyền nhiều dịch hơn.</a:t>
             </a:r>
           </a:p>
           <a:p>
@@ -2355,7 +2355,7 @@
           <a:p>
             <a:r>
               <a:rPr lang="en-US" sz="1400" b="0" dirty="0"/>
-              <a:t>Slide chỉ có hình, có chủ ý. Trước giờ giải lao, nói: đứng dậy, vươn vai, uống nước. Gợi ý (tùy chọn): thiết kế nào có thể hợp với câu hỏi của bạn? Sau giải lao ta tiếp tục với các thiết kế khác.</a:t>
+              <a:t>Slide chỉ có hình, có chủ ý. Trước giờ giải lao, nói: đứng dậy, vươn vai, uống nước. Gợi ý (tùy chọn): thiết kế nào có thể hợp với câu hỏi của bạn? Sau giải lao sẽ học tiếp các thiết kế khác.</a:t>
             </a:r>
           </a:p>
           <a:p>
@@ -2664,7 +2664,7 @@
           <a:p>
             <a:r>
               <a:rPr lang="en-US" sz="1400" b="0" dirty="0"/>
-              <a:t>Ngưỡng (ở đây +5 điểm phần trăm tử vong, giả định) là mức thiệt hại lớn nhất ta chấp nhận. Ngưỡng được định trong đề cương, trước khi có dữ liệu, dựa trên lập luận lâm sàng.</a:t>
+              <a:t>Ngưỡng (ở đây +5 điểm phần trăm tử vong, giả định) là mức thiệt hại lớn nhất có thể chấp nhận. Ngưỡng được định trong đề cương, trước khi có dữ liệu, dựa trên lập luận lâm sàng.</a:t>
             </a:r>
           </a:p>
           <a:p>
@@ -2769,13 +2769,13 @@
           <a:p>
             <a:r>
               <a:rPr lang="en-US" sz="1400" b="0" dirty="0"/>
-              <a:t>Boulet 2024 tự gọi là thử nghiệm thí điểm (pilot). Giá trị thực sự nằm ở các con số bên trái: 1 201 người bệnh được sàng lọc để có 50 người bệnh được phân nhóm (khoảng 4%), khoảng 3 người bệnh mỗi tháng tại 3 ICU, 48/50 được phân tích.</a:t>
+              <a:t>Boulet 2024 tự gọi là thử nghiệm thí điểm (pilot). Giá trị thực sự nằm ở các con số bên trái: 1201 người bệnh được sàng lọc để có 50 người bệnh được phân nhóm (khoảng 4%), khoảng 3 người bệnh mỗi tháng tại 3 ICU, 48/50 được phân tích.</a:t>
             </a:r>
           </a:p>
           <a:p>
             <a:r>
               <a:rPr lang="en-US" sz="1400" b="0" dirty="0"/>
-              <a:t>Nghiên cứu thí điểm hay khả thi kiểm tra bộ máy của thử nghiệm lớn: tuyển chọn, đồng ý tham gia, nhân viên có thực hiện được can thiệp không, kết cục có đo đầy đủ không, và các con số cần để tính cỡ mẫu.</a:t>
+              <a:t>Nghiên cứu thí điểm hay khả thi kiểm tra các khâu vận hành của thử nghiệm lớn: tuyển chọn, đồng ý tham gia, nhân viên có thực hiện được can thiệp không, kết cục có đo đầy đủ không, và các con số cần để tính cỡ mẫu.</a:t>
             </a:r>
           </a:p>
           <a:p>
@@ -2793,7 +2793,7 @@
           <a:p>
             <a:r>
               <a:rPr lang="en-US" sz="1400" b="0" dirty="0"/>
-              <a:t>Hỏi cả lớp (bình chọn): với những con số này, có nên làm thử nghiệm 1 000 người bệnh tại đúng 3 ICU đó không? Dự kiến: không theo thiết kế này. Với 3 người bệnh mỗi tháng sẽ mất hàng chục năm. Cần nhiều điểm hơn hoặc tiêu chuẩn chọn rộng hơn.</a:t>
+              <a:t>Hỏi cả lớp (bình chọn): với những con số này, có nên làm thử nghiệm 1000 người bệnh tại đúng 3 ICU đó không? Dự kiến: không theo thiết kế này. Với 3 người bệnh mỗi tháng sẽ mất hàng chục năm. Cần nhiều điểm hơn hoặc tiêu chuẩn chọn rộng hơn.</a:t>
             </a:r>
           </a:p>
           <a:p>
@@ -2892,7 +2892,7 @@
           <a:p>
             <a:r>
               <a:rPr lang="en-US" sz="1400" b="0" dirty="0"/>
-              <a:t>Chuỗi thời gian ngắt quãng (interrupted time series, ITS) mạnh hơn nhiều: nhiều lần đo trước và sau (ở đây mỗi bên 24 điểm theo tháng). Ta so sánh điều đã xảy ra với điều mà xu hướng trước thay đổi dự báo (đường nét đứt). Tìm sự thay đổi về mức (sụt giảm) và về độ dốc (giảm nhanh hơn).</a:t>
+              <a:t>Chuỗi thời gian ngắt quãng (interrupted time series, ITS) mạnh hơn nhiều: nhiều lần đo trước và sau (ở đây mỗi bên 24 điểm theo tháng). So sánh điều đã xảy ra với điều mà xu hướng trước thay đổi dự báo (đường nét đứt). Tìm sự thay đổi về mức (sụt giảm) và về độ dốc (giảm nhanh hơn).</a:t>
             </a:r>
           </a:p>
           <a:p>
@@ -3126,7 +3126,7 @@
           <a:p>
             <a:r>
               <a:rPr lang="en-US" sz="1400" b="0" dirty="0"/>
-              <a:t>Ý chính: gần như mọi câu hỏi về thiết kế trở nên dễ khi gọi tên được phơi nhiễm và kết cục. Ta luyện điều đó trước.</a:t>
+              <a:t>Ý chính: gần như mọi câu hỏi về thiết kế trở nên dễ khi gọi tên được phơi nhiễm và kết cục. Vì vậy luyện điều đó trước.</a:t>
             </a:r>
           </a:p>
           <a:p>
@@ -3348,7 +3348,7 @@
           <a:p>
             <a:r>
               <a:rPr lang="en-US" sz="1400" b="0" dirty="0"/>
-              <a:t>Đáp án cho năm câu: 1 một chiến lược rẻ hơn, chỉ cần chứng minh tử vong ngày 28 không kém hơn (RCT không kém hơn, ngưỡng định trước), 2 quy trình ghi cân bằng dịch do điều dưỡng thực hiện cho cả ICU (thử nghiệm ngẫu nhiên theo cụm), 3 gói xử trí nhiễm khuẩn huyết có giới hạn dịch đã áp dụng từ năm 2023, có số liệu theo tháng (chuỗi thời gian ngắt quãng), 4 vì sao điều dưỡng ca đêm khó ghi lượng nước tiểu (phỏng vấn định tính hoặc thảo luận nhóm), 5 hai ICU của chúng ta có tuyển được người bệnh và thực hiện được hạn chế dịch trước khi làm thử nghiệm lớn không (nghiên cứu thí điểm hoặc khả thi).</a:t>
+              <a:t>Đáp án cho năm câu: 1 một chiến lược rẻ hơn, chỉ cần chứng minh tử vong ngày 28 không kém hơn (RCT không kém hơn, ngưỡng định trước), 2 quy trình ghi cân bằng dịch do điều dưỡng thực hiện cho cả ICU (thử nghiệm ngẫu nhiên theo cụm), 3 gói xử trí nhiễm khuẩn huyết có giới hạn dịch đã áp dụng từ năm 2023, có số liệu theo tháng (chuỗi thời gian ngắt quãng), 4 vì sao điều dưỡng ca đêm khó ghi lượng nước tiểu (phỏng vấn định tính hoặc thảo luận nhóm), 5 hai ICU của mình có tuyển được người bệnh và thực hiện được hạn chế dịch trước khi làm thử nghiệm lớn không (nghiên cứu thí điểm hoặc khả thi).</a:t>
             </a:r>
           </a:p>
           <a:p>
@@ -3483,7 +3483,7 @@
           <a:p>
             <a:r>
               <a:rPr lang="en-US" sz="1400" b="0" dirty="0"/>
-              <a:t>Hỏi cả lớp (mời hai ba người trả lời, bật micro): nêu một tiêu chuẩn loại trừ tốt cho nghiên cứu dịch truyền của chúng ta. Dự kiến: lọc máu mạn (không diễn giải được cân bằng dịch), chỉ chăm sóc giảm nhẹ.</a:t>
+              <a:t>Hỏi cả lớp (mời hai ba người trả lời, bật micro): nêu một tiêu chuẩn loại trừ tốt cho nghiên cứu dịch truyền của lớp. Dự kiến: lọc máu mạn (không diễn giải được cân bằng dịch), chỉ chăm sóc giảm nhẹ.</a:t>
             </a:r>
           </a:p>
           <a:p>
@@ -3582,7 +3582,7 @@
           <a:p>
             <a:r>
               <a:rPr lang="en-US" sz="1400" b="0" dirty="0"/>
-              <a:t>Đáp án mẫu cho ví dụ xuyên suốt (phiên bản quan sát), để viết trực tiếp: thuần tập hồi cứu người lớn sốc nhiễm khuẩn tại ICU của chúng ta trong 3 năm. Biện luận: RCT là lý tưởng nhưng không khả thi với một ICU không có kinh phí. Hồ sơ sẵn có ghi dịch vào và ra cùng kết cục. Sẽ kết luận 'có liên quan với'. Bối cảnh: một ICU hỗn hợp người lớn, 3 năm, hồ sơ điện tử và sổ ICU. Tiêu chuẩn chọn và loại trừ như slide phễu. Mẫu đầy đủ ở Course/Solutions/s3_solutions.md, Phần C.</a:t>
+              <a:t>Đáp án mẫu cho ví dụ xuyên suốt (phiên bản quan sát), để viết trực tiếp: thuần tập hồi cứu người lớn sốc nhiễm khuẩn tại ICU của mình trong 3 năm. Biện luận: RCT là lý tưởng nhưng không khả thi với một ICU không có kinh phí. Hồ sơ sẵn có ghi dịch vào và ra cùng kết cục. Sẽ kết luận 'có liên quan với'. Bối cảnh: một ICU hỗn hợp người lớn, 3 năm, hồ sơ điện tử và sổ ICU. Tiêu chuẩn chọn và loại trừ như slide phễu. Mẫu đầy đủ ở Course/Solutions/s3_solutions.md, Phần C.</a:t>
             </a:r>
           </a:p>
           <a:p>
@@ -4245,7 +4245,7 @@
           <a:p>
             <a:r>
               <a:rPr lang="en-US" sz="1400" b="0" dirty="0"/>
-              <a:t>Đây là sợi chỉ xuyên suốt cả buổi. Đọc to câu hỏi: đó là PICO (Đối tượng, Can thiệp, So sánh, Kết cục) cả lớp đã xây dựng ở Buổi 1.</a:t>
+              <a:t>Đây là ví dụ xuyên suốt cả buổi. Đọc to câu hỏi: đó là PICO (Đối tượng, Can thiệp, So sánh, Kết cục) cả lớp đã xây dựng ở Buổi 1.</a:t>
             </a:r>
           </a:p>
           <a:p>
@@ -4263,13 +4263,13 @@
           <a:p>
             <a:r>
               <a:rPr lang="en-US" sz="1400" b="0" dirty="0"/>
-              <a:t>Chi tiết hay bị bỏ qua: kết cục chính của Boulet là cân bằng dịch ngày 5, không phải tử vong. Đây là thử nghiệm thí điểm. Hyun xét tử vong ngày 28 (đúng câu hỏi của chúng ta) nhưng không chỉ định được gì.</a:t>
+              <a:t>Chi tiết hay bị bỏ qua: kết cục chính của Boulet là cân bằng dịch ngày 5, không phải tử vong. Đây là thử nghiệm thí điểm (pilot RCT). Hyun xét tử vong ngày 28 (đúng câu hỏi của lớp) nhưng không chỉ định được gì.</a:t>
             </a:r>
           </a:p>
           <a:p>
             <a:r>
               <a:rPr lang="en-US" sz="1400" b="0" dirty="0"/>
-              <a:t>Quan niệm sai: 'nghiên cứu lớn hơn luôn tốt hơn'. Cỡ mẫu làm giảm sai số ngẫu nhiên, không loại bỏ sai lệch. Ta quay lại ở Buổi 4.</a:t>
+              <a:t>Quan niệm sai: 'nghiên cứu lớn hơn luôn tốt hơn'. Cỡ mẫu làm giảm sai số ngẫu nhiên, không loại bỏ sai lệch. Sẽ quay lại ở Buổi 4.</a:t>
             </a:r>
           </a:p>
           <a:p>
@@ -4560,7 +4560,7 @@
           <a:p>
             <a:r>
               <a:rPr lang="en-US" sz="1400" b="0" dirty="0"/>
-              <a:t>Extra (slide bổ sung): hoàn chỉnh hình ảnh ngưỡng ở phần 3.2.</a:t>
+              <a:t>Extra (slide bổ sung): bổ sung cho slide về ngưỡng ở phần 3.2.</a:t>
             </a:r>
           </a:p>
           <a:p>
@@ -4845,7 +4845,7 @@
           <a:p>
             <a:r>
               <a:rPr lang="en-US" sz="1400" b="0" dirty="0"/>
-              <a:t>Ý chính: học thiết kế như những hình vẽ trên trục thời gian, không phải định nghĩa. Với mỗi thiết kế hỏi: ai quyết định phơi nhiễm, và thời gian chạy chiều nào? Sau mỗi hình là một ví dụ từng bước.</a:t>
+              <a:t>Ý chính: học thiết kế như những hình vẽ trên trục thời gian, không phải định nghĩa. Với mỗi thiết kế hỏi: ai quyết định phơi nhiễm, và theo chiều thời gian nào? Sau mỗi hình là một ví dụ từng bước.</a:t>
             </a:r>
           </a:p>
           <a:p>
@@ -5160,7 +5160,7 @@
           <a:p>
             <a:r>
               <a:rPr lang="en-US" sz="1400" b="0" dirty="0"/>
-              <a:t>Nghiên cứu cắt ngang: một bức ảnh chụp quần thể tại một thời điểm, ví dụ khảo sát mọi người bệnh trong ICU vào một ngày. Nó đo tỷ lệ hiện mắc (bao nhiêu người đang mắc ngay lúc này).</a:t>
+              <a:t>Nghiên cứu cắt ngang: khảo sát quần thể tại một thời điểm, ví dụ khảo sát mọi người bệnh trong ICU vào một ngày. Nó đo tỷ lệ hiện mắc (bao nhiêu người đang mắc ngay lúc này).</a:t>
             </a:r>
           </a:p>
           <a:p>
@@ -5289,7 +5289,7 @@
           <a:p>
             <a:r>
               <a:rPr lang="en-US" sz="1400" b="0" dirty="0"/>
-              <a:t>Hỏi cả lớp (mời hai ba người trả lời, bật micro): với câu hỏi về dịch truyền, ta có thể đo gì ở ICU trong một ngày? Dự kiến: cân bằng dịch và chức năng thận hôm đó của mọi người bệnh có mặt.</a:t>
+              <a:t>Hỏi cả lớp (mời hai ba người trả lời, bật micro): với câu hỏi về dịch truyền, có thể đo gì ở ICU trong một ngày? Dự kiến: cân bằng dịch và chức năng thận hôm đó của mọi người bệnh có mặt.</a:t>
             </a:r>
           </a:p>
           <a:p>
@@ -9204,12 +9204,12 @@
           </a:ln>
         </p:spPr>
         <p:txBody>
-          <a:bodyPr wrap="square" lIns="110000" tIns="91440" rIns="110000" bIns="91440" rtlCol="0" anchor="t">
+          <a:bodyPr wrap="square" lIns="110000" tIns="91440" rIns="110000" bIns="91440" rtlCol="0" anchor="ctr">
             <a:normAutofit/>
           </a:bodyPr>
           <a:lstStyle/>
           <a:p>
-            <a:pPr marL="0" indent="0" algn="l">
+            <a:pPr marL="0" indent="0" algn="ctr">
               <a:lnSpc>
                 <a:spcPct val="104000"/>
               </a:lnSpc>
@@ -9298,12 +9298,12 @@
           </a:ln>
         </p:spPr>
         <p:txBody>
-          <a:bodyPr wrap="square" lIns="110000" tIns="91440" rIns="110000" bIns="91440" rtlCol="0" anchor="t">
+          <a:bodyPr wrap="square" lIns="110000" tIns="91440" rIns="110000" bIns="91440" rtlCol="0" anchor="ctr">
             <a:normAutofit/>
           </a:bodyPr>
           <a:lstStyle/>
           <a:p>
-            <a:pPr marL="0" indent="0" algn="l">
+            <a:pPr marL="0" indent="0" algn="ctr">
               <a:lnSpc>
                 <a:spcPct val="104000"/>
               </a:lnSpc>
@@ -9392,12 +9392,12 @@
           </a:ln>
         </p:spPr>
         <p:txBody>
-          <a:bodyPr wrap="square" lIns="110000" tIns="91440" rIns="110000" bIns="91440" rtlCol="0" anchor="t">
+          <a:bodyPr wrap="square" lIns="110000" tIns="91440" rIns="110000" bIns="91440" rtlCol="0" anchor="ctr">
             <a:normAutofit/>
           </a:bodyPr>
           <a:lstStyle/>
           <a:p>
-            <a:pPr marL="0" indent="0" algn="l">
+            <a:pPr marL="0" indent="0" algn="ctr">
               <a:lnSpc>
                 <a:spcPct val="104000"/>
               </a:lnSpc>
@@ -9486,12 +9486,12 @@
           </a:ln>
         </p:spPr>
         <p:txBody>
-          <a:bodyPr wrap="square" lIns="110000" tIns="91440" rIns="110000" bIns="91440" rtlCol="0" anchor="t">
+          <a:bodyPr wrap="square" lIns="110000" tIns="91440" rIns="110000" bIns="91440" rtlCol="0" anchor="ctr">
             <a:normAutofit/>
           </a:bodyPr>
           <a:lstStyle/>
           <a:p>
-            <a:pPr marL="0" indent="0" algn="l">
+            <a:pPr marL="0" indent="0" algn="ctr">
               <a:lnSpc>
                 <a:spcPct val="104000"/>
               </a:lnSpc>
@@ -9580,12 +9580,12 @@
           </a:ln>
         </p:spPr>
         <p:txBody>
-          <a:bodyPr wrap="square" lIns="110000" tIns="91440" rIns="110000" bIns="91440" rtlCol="0" anchor="t">
+          <a:bodyPr wrap="square" lIns="110000" tIns="91440" rIns="110000" bIns="91440" rtlCol="0" anchor="ctr">
             <a:normAutofit/>
           </a:bodyPr>
           <a:lstStyle/>
           <a:p>
-            <a:pPr marL="0" indent="0" algn="l">
+            <a:pPr marL="0" indent="0" algn="ctr">
               <a:lnSpc>
                 <a:spcPct val="104000"/>
               </a:lnSpc>
@@ -9932,7 +9932,7 @@
                 <a:latin typeface="Arial"/>
                 <a:cs typeface="Arial"/>
               </a:rPr>
-              <a:t>Thuần tập: phơi nhiễm trước, kết cục sau, nên thời gian chạy đúng chiều.</a:t>
+              <a:t>Thuần tập: phơi nhiễm trước, kết cục sau, nên trình tự thời gian đúng.</a:t>
             </a:r>
           </a:p>
         </p:txBody>
@@ -10239,12 +10239,12 @@
           </a:ln>
         </p:spPr>
         <p:txBody>
-          <a:bodyPr wrap="square" lIns="110000" tIns="91440" rIns="110000" bIns="91440" rtlCol="0" anchor="t">
+          <a:bodyPr wrap="square" lIns="110000" tIns="91440" rIns="110000" bIns="91440" rtlCol="0" anchor="ctr">
             <a:normAutofit/>
           </a:bodyPr>
           <a:lstStyle/>
           <a:p>
-            <a:pPr marL="0" indent="0" algn="l">
+            <a:pPr marL="0" indent="0" algn="ctr">
               <a:lnSpc>
                 <a:spcPct val="104000"/>
               </a:lnSpc>
@@ -10333,12 +10333,12 @@
           </a:ln>
         </p:spPr>
         <p:txBody>
-          <a:bodyPr wrap="square" lIns="110000" tIns="91440" rIns="110000" bIns="91440" rtlCol="0" anchor="t">
+          <a:bodyPr wrap="square" lIns="110000" tIns="91440" rIns="110000" bIns="91440" rtlCol="0" anchor="ctr">
             <a:normAutofit/>
           </a:bodyPr>
           <a:lstStyle/>
           <a:p>
-            <a:pPr marL="0" indent="0" algn="l">
+            <a:pPr marL="0" indent="0" algn="ctr">
               <a:lnSpc>
                 <a:spcPct val="104000"/>
               </a:lnSpc>
@@ -10427,12 +10427,12 @@
           </a:ln>
         </p:spPr>
         <p:txBody>
-          <a:bodyPr wrap="square" lIns="110000" tIns="91440" rIns="110000" bIns="91440" rtlCol="0" anchor="t">
+          <a:bodyPr wrap="square" lIns="110000" tIns="91440" rIns="110000" bIns="91440" rtlCol="0" anchor="ctr">
             <a:normAutofit/>
           </a:bodyPr>
           <a:lstStyle/>
           <a:p>
-            <a:pPr marL="0" indent="0" algn="l">
+            <a:pPr marL="0" indent="0" algn="ctr">
               <a:lnSpc>
                 <a:spcPct val="104000"/>
               </a:lnSpc>
@@ -10521,12 +10521,12 @@
           </a:ln>
         </p:spPr>
         <p:txBody>
-          <a:bodyPr wrap="square" lIns="110000" tIns="91440" rIns="110000" bIns="91440" rtlCol="0" anchor="t">
+          <a:bodyPr wrap="square" lIns="110000" tIns="91440" rIns="110000" bIns="91440" rtlCol="0" anchor="ctr">
             <a:normAutofit/>
           </a:bodyPr>
           <a:lstStyle/>
           <a:p>
-            <a:pPr marL="0" indent="0" algn="l">
+            <a:pPr marL="0" indent="0" algn="ctr">
               <a:lnSpc>
                 <a:spcPct val="104000"/>
               </a:lnSpc>
@@ -10766,7 +10766,7 @@
                 <a:latin typeface="Arial"/>
                 <a:cs typeface="Arial"/>
               </a:rPr>
-              <a:t>RCT (thử nghiệm ngẫu nhiên có đối chứng): phân nhóm ngẫu nhiên, rồi theo dõi</a:t>
+              <a:t>RCT (thử nghiệm ngẫu nhiên có đối chứng): phân nhóm ngẫu nhiên, rồi theo dõi</a:t>
             </a:r>
           </a:p>
         </p:txBody>
@@ -11219,12 +11219,12 @@
           </a:ln>
         </p:spPr>
         <p:txBody>
-          <a:bodyPr wrap="square" lIns="110000" tIns="91440" rIns="110000" bIns="91440" rtlCol="0" anchor="t">
+          <a:bodyPr wrap="square" lIns="110000" tIns="91440" rIns="110000" bIns="91440" rtlCol="0" anchor="ctr">
             <a:normAutofit/>
           </a:bodyPr>
           <a:lstStyle/>
           <a:p>
-            <a:pPr marL="0" indent="0" algn="l">
+            <a:pPr marL="0" indent="0" algn="ctr">
               <a:lnSpc>
                 <a:spcPct val="104000"/>
               </a:lnSpc>
@@ -11313,12 +11313,12 @@
           </a:ln>
         </p:spPr>
         <p:txBody>
-          <a:bodyPr wrap="square" lIns="110000" tIns="91440" rIns="110000" bIns="91440" rtlCol="0" anchor="t">
+          <a:bodyPr wrap="square" lIns="110000" tIns="91440" rIns="110000" bIns="91440" rtlCol="0" anchor="ctr">
             <a:normAutofit/>
           </a:bodyPr>
           <a:lstStyle/>
           <a:p>
-            <a:pPr marL="0" indent="0" algn="l">
+            <a:pPr marL="0" indent="0" algn="ctr">
               <a:lnSpc>
                 <a:spcPct val="104000"/>
               </a:lnSpc>
@@ -11407,12 +11407,12 @@
           </a:ln>
         </p:spPr>
         <p:txBody>
-          <a:bodyPr wrap="square" lIns="110000" tIns="91440" rIns="110000" bIns="91440" rtlCol="0" anchor="t">
+          <a:bodyPr wrap="square" lIns="110000" tIns="91440" rIns="110000" bIns="91440" rtlCol="0" anchor="ctr">
             <a:normAutofit/>
           </a:bodyPr>
           <a:lstStyle/>
           <a:p>
-            <a:pPr marL="0" indent="0" algn="l">
+            <a:pPr marL="0" indent="0" algn="ctr">
               <a:lnSpc>
                 <a:spcPct val="104000"/>
               </a:lnSpc>
@@ -11501,12 +11501,12 @@
           </a:ln>
         </p:spPr>
         <p:txBody>
-          <a:bodyPr wrap="square" lIns="110000" tIns="91440" rIns="110000" bIns="91440" rtlCol="0" anchor="t">
+          <a:bodyPr wrap="square" lIns="110000" tIns="91440" rIns="110000" bIns="91440" rtlCol="0" anchor="ctr">
             <a:normAutofit/>
           </a:bodyPr>
           <a:lstStyle/>
           <a:p>
-            <a:pPr marL="0" indent="0" algn="l">
+            <a:pPr marL="0" indent="0" algn="ctr">
               <a:lnSpc>
                 <a:spcPct val="104000"/>
               </a:lnSpc>
@@ -11595,12 +11595,12 @@
           </a:ln>
         </p:spPr>
         <p:txBody>
-          <a:bodyPr wrap="square" lIns="110000" tIns="91440" rIns="110000" bIns="91440" rtlCol="0" anchor="t">
+          <a:bodyPr wrap="square" lIns="110000" tIns="91440" rIns="110000" bIns="91440" rtlCol="0" anchor="ctr">
             <a:normAutofit/>
           </a:bodyPr>
           <a:lstStyle/>
           <a:p>
-            <a:pPr marL="0" indent="0" algn="l">
+            <a:pPr marL="0" indent="0" algn="ctr">
               <a:lnSpc>
                 <a:spcPct val="104000"/>
               </a:lnSpc>
@@ -12576,7 +12576,7 @@
                 <a:latin typeface="Arial"/>
                 <a:cs typeface="Arial"/>
               </a:rPr>
-              <a:t>Có chỉ định? Có ngẫu nhiên? Thời gian chạy chiều nào? Ba câu gọi tên thiết kế.</a:t>
+              <a:t>Có chỉ định? Có ngẫu nhiên? Theo chiều thời gian nào? Ba câu gọi tên thiết kế.</a:t>
             </a:r>
           </a:p>
         </p:txBody>
@@ -12744,7 +12744,7 @@
                 <a:latin typeface="Arial"/>
                 <a:cs typeface="Arial"/>
               </a:rPr>
-              <a:t>Thiết kế nào cũng phải đánh đổi một điều gì đó</a:t>
+              <a:t>Thiết kế nào cũng có đánh đổi</a:t>
             </a:r>
           </a:p>
         </p:txBody>
@@ -12811,7 +12811,7 @@
                 <a:latin typeface="Arial"/>
                 <a:cs typeface="Arial"/>
               </a:rPr>
-              <a:t>Điểm mạnh và điểm yếu trong nháy mắt</a:t>
+              <a:t>Tóm tắt điểm mạnh và điểm yếu</a:t>
             </a:r>
           </a:p>
         </p:txBody>
@@ -12881,12 +12881,12 @@
           </a:ln>
         </p:spPr>
         <p:txBody>
-          <a:bodyPr wrap="square" lIns="137160" tIns="91440" rIns="137160" bIns="91440" rtlCol="0" anchor="t">
+          <a:bodyPr wrap="square" lIns="137160" tIns="91440" rIns="137160" bIns="91440" rtlCol="0" anchor="ctr">
             <a:normAutofit/>
           </a:bodyPr>
           <a:lstStyle/>
           <a:p>
-            <a:pPr marL="0" indent="0" algn="l">
+            <a:pPr marL="0" indent="0" algn="ctr">
               <a:lnSpc>
                 <a:spcPct val="104000"/>
               </a:lnSpc>
@@ -12907,7 +12907,7 @@
             </a:r>
           </a:p>
           <a:p>
-            <a:pPr marL="0" indent="0" algn="l">
+            <a:pPr marL="0" indent="0" algn="ctr">
               <a:lnSpc>
                 <a:spcPct val="104000"/>
               </a:lnSpc>
@@ -12928,7 +12928,7 @@
             </a:r>
           </a:p>
           <a:p>
-            <a:pPr marL="0" indent="0" algn="l">
+            <a:pPr marL="0" indent="0" algn="ctr">
               <a:lnSpc>
                 <a:spcPct val="104000"/>
               </a:lnSpc>
@@ -13015,12 +13015,12 @@
           </a:ln>
         </p:spPr>
         <p:txBody>
-          <a:bodyPr wrap="square" lIns="137160" tIns="91440" rIns="137160" bIns="91440" rtlCol="0" anchor="t">
+          <a:bodyPr wrap="square" lIns="137160" tIns="91440" rIns="137160" bIns="91440" rtlCol="0" anchor="ctr">
             <a:normAutofit/>
           </a:bodyPr>
           <a:lstStyle/>
           <a:p>
-            <a:pPr marL="0" indent="0" algn="l">
+            <a:pPr marL="0" indent="0" algn="ctr">
               <a:lnSpc>
                 <a:spcPct val="104000"/>
               </a:lnSpc>
@@ -13041,7 +13041,7 @@
             </a:r>
           </a:p>
           <a:p>
-            <a:pPr marL="0" indent="0" algn="l">
+            <a:pPr marL="0" indent="0" algn="ctr">
               <a:lnSpc>
                 <a:spcPct val="104000"/>
               </a:lnSpc>
@@ -13062,7 +13062,7 @@
             </a:r>
           </a:p>
           <a:p>
-            <a:pPr marL="0" indent="0" algn="l">
+            <a:pPr marL="0" indent="0" algn="ctr">
               <a:lnSpc>
                 <a:spcPct val="104000"/>
               </a:lnSpc>
@@ -13083,7 +13083,7 @@
             </a:r>
           </a:p>
           <a:p>
-            <a:pPr marL="0" indent="0" algn="l">
+            <a:pPr marL="0" indent="0" algn="ctr">
               <a:lnSpc>
                 <a:spcPct val="104000"/>
               </a:lnSpc>
@@ -13170,12 +13170,12 @@
           </a:ln>
         </p:spPr>
         <p:txBody>
-          <a:bodyPr wrap="square" lIns="137160" tIns="91440" rIns="137160" bIns="91440" rtlCol="0" anchor="t">
+          <a:bodyPr wrap="square" lIns="137160" tIns="91440" rIns="137160" bIns="91440" rtlCol="0" anchor="ctr">
             <a:normAutofit/>
           </a:bodyPr>
           <a:lstStyle/>
           <a:p>
-            <a:pPr marL="0" indent="0" algn="l">
+            <a:pPr marL="0" indent="0" algn="ctr">
               <a:lnSpc>
                 <a:spcPct val="104000"/>
               </a:lnSpc>
@@ -13196,7 +13196,7 @@
             </a:r>
           </a:p>
           <a:p>
-            <a:pPr marL="0" indent="0" algn="l">
+            <a:pPr marL="0" indent="0" algn="ctr">
               <a:lnSpc>
                 <a:spcPct val="104000"/>
               </a:lnSpc>
@@ -13217,7 +13217,7 @@
             </a:r>
           </a:p>
           <a:p>
-            <a:pPr marL="0" indent="0" algn="l">
+            <a:pPr marL="0" indent="0" algn="ctr">
               <a:lnSpc>
                 <a:spcPct val="104000"/>
               </a:lnSpc>
@@ -13238,7 +13238,7 @@
             </a:r>
           </a:p>
           <a:p>
-            <a:pPr marL="0" indent="0" algn="l">
+            <a:pPr marL="0" indent="0" algn="ctr">
               <a:lnSpc>
                 <a:spcPct val="104000"/>
               </a:lnSpc>
@@ -13325,12 +13325,12 @@
           </a:ln>
         </p:spPr>
         <p:txBody>
-          <a:bodyPr wrap="square" lIns="137160" tIns="91440" rIns="137160" bIns="91440" rtlCol="0" anchor="t">
+          <a:bodyPr wrap="square" lIns="137160" tIns="91440" rIns="137160" bIns="91440" rtlCol="0" anchor="ctr">
             <a:normAutofit/>
           </a:bodyPr>
           <a:lstStyle/>
           <a:p>
-            <a:pPr marL="0" indent="0" algn="l">
+            <a:pPr marL="0" indent="0" algn="ctr">
               <a:lnSpc>
                 <a:spcPct val="104000"/>
               </a:lnSpc>
@@ -13351,7 +13351,7 @@
             </a:r>
           </a:p>
           <a:p>
-            <a:pPr marL="0" indent="0" algn="l">
+            <a:pPr marL="0" indent="0" algn="ctr">
               <a:lnSpc>
                 <a:spcPct val="104000"/>
               </a:lnSpc>
@@ -13372,7 +13372,7 @@
             </a:r>
           </a:p>
           <a:p>
-            <a:pPr marL="0" indent="0" algn="l">
+            <a:pPr marL="0" indent="0" algn="ctr">
               <a:lnSpc>
                 <a:spcPct val="104000"/>
               </a:lnSpc>
@@ -13393,7 +13393,7 @@
             </a:r>
           </a:p>
           <a:p>
-            <a:pPr marL="0" indent="0" algn="l">
+            <a:pPr marL="0" indent="0" algn="ctr">
               <a:lnSpc>
                 <a:spcPct val="104000"/>
               </a:lnSpc>
@@ -13753,7 +13753,7 @@
                 <a:latin typeface="Arial"/>
                 <a:cs typeface="Arial"/>
               </a:rPr>
-              <a:t>C1. Tìm kiếm PubMed ra 3 000 bài. Thêm một khái niệm bằng AND, hay một từ đồng nghĩa bằng OR?</a:t>
+              <a:t>C1. Tìm kiếm PubMed ra 3000 bài. Thêm một khái niệm bằng AND, hay một từ đồng nghĩa bằng OR?</a:t>
             </a:r>
           </a:p>
           <a:p>
@@ -13857,12 +13857,12 @@
           </a:ln>
         </p:spPr>
         <p:txBody>
-          <a:bodyPr wrap="square" lIns="137160" tIns="91440" rIns="137160" bIns="91440" rtlCol="0" anchor="t">
+          <a:bodyPr wrap="square" lIns="137160" tIns="91440" rIns="137160" bIns="91440" rtlCol="0" anchor="ctr">
             <a:normAutofit/>
           </a:bodyPr>
           <a:lstStyle/>
           <a:p>
-            <a:pPr marL="0" indent="0" algn="l">
+            <a:pPr marL="0" indent="0" algn="ctr">
               <a:buNone/>
             </a:pPr>
             <a:r>
@@ -13877,15 +13877,14 @@
             </a:r>
           </a:p>
           <a:p>
-            <a:pPr marL="274320" indent="-274320" algn="l">
+            <a:pPr marL="0" indent="0" algn="ctr">
               <a:lnSpc>
                 <a:spcPct val="104000"/>
               </a:lnSpc>
               <a:spcBef>
                 <a:spcPts val="300"/>
               </a:spcBef>
-              <a:buFont typeface="Arial"/>
-              <a:buChar char="•"/>
+              <a:buNone/>
             </a:pPr>
             <a:r>
               <a:rPr lang="en-US" sz="1500" dirty="0">
@@ -13899,15 +13898,14 @@
             </a:r>
           </a:p>
           <a:p>
-            <a:pPr marL="274320" indent="-274320" algn="l">
+            <a:pPr marL="0" indent="0" algn="ctr">
               <a:lnSpc>
                 <a:spcPct val="104000"/>
               </a:lnSpc>
               <a:spcBef>
                 <a:spcPts val="300"/>
               </a:spcBef>
-              <a:buFont typeface="Arial"/>
-              <a:buChar char="•"/>
+              <a:buNone/>
             </a:pPr>
             <a:r>
               <a:rPr lang="en-US" sz="1500" dirty="0">
@@ -13921,15 +13919,14 @@
             </a:r>
           </a:p>
           <a:p>
-            <a:pPr marL="274320" indent="-274320" algn="l">
+            <a:pPr marL="0" indent="0" algn="ctr">
               <a:lnSpc>
                 <a:spcPct val="104000"/>
               </a:lnSpc>
               <a:spcBef>
                 <a:spcPts val="300"/>
               </a:spcBef>
-              <a:buFont typeface="Arial"/>
-              <a:buChar char="•"/>
+              <a:buNone/>
             </a:pPr>
             <a:r>
               <a:rPr lang="en-US" sz="1500" dirty="0">
@@ -14262,12 +14259,12 @@
           </a:ln>
         </p:spPr>
         <p:txBody>
-          <a:bodyPr wrap="square" lIns="137160" tIns="91440" rIns="137160" bIns="91440" rtlCol="0" anchor="t">
+          <a:bodyPr wrap="square" lIns="137160" tIns="91440" rIns="137160" bIns="91440" rtlCol="0" anchor="ctr">
             <a:normAutofit/>
           </a:bodyPr>
           <a:lstStyle/>
           <a:p>
-            <a:pPr marL="0" indent="0" algn="l">
+            <a:pPr marL="0" indent="0" algn="ctr">
               <a:lnSpc>
                 <a:spcPct val="104000"/>
               </a:lnSpc>
@@ -14288,7 +14285,7 @@
             </a:r>
           </a:p>
           <a:p>
-            <a:pPr marL="0" indent="0" algn="l">
+            <a:pPr marL="0" indent="0" algn="ctr">
               <a:lnSpc>
                 <a:spcPct val="104000"/>
               </a:lnSpc>
@@ -14309,7 +14306,7 @@
             </a:r>
           </a:p>
           <a:p>
-            <a:pPr marL="0" indent="0" algn="l">
+            <a:pPr marL="0" indent="0" algn="ctr">
               <a:lnSpc>
                 <a:spcPct val="104000"/>
               </a:lnSpc>
@@ -14330,7 +14327,7 @@
             </a:r>
           </a:p>
           <a:p>
-            <a:pPr marL="0" indent="0" algn="l">
+            <a:pPr marL="0" indent="0" algn="ctr">
               <a:lnSpc>
                 <a:spcPct val="104000"/>
               </a:lnSpc>
@@ -14351,7 +14348,7 @@
             </a:r>
           </a:p>
           <a:p>
-            <a:pPr marL="0" indent="0" algn="l">
+            <a:pPr marL="0" indent="0" algn="ctr">
               <a:lnSpc>
                 <a:spcPct val="104000"/>
               </a:lnSpc>
@@ -14372,7 +14369,7 @@
             </a:r>
           </a:p>
           <a:p>
-            <a:pPr marL="0" indent="0" algn="l">
+            <a:pPr marL="0" indent="0" algn="ctr">
               <a:lnSpc>
                 <a:spcPct val="104000"/>
               </a:lnSpc>
@@ -14459,12 +14456,12 @@
           </a:ln>
         </p:spPr>
         <p:txBody>
-          <a:bodyPr wrap="square" lIns="137160" tIns="91440" rIns="137160" bIns="91440" rtlCol="0" anchor="t">
+          <a:bodyPr wrap="square" lIns="137160" tIns="91440" rIns="137160" bIns="91440" rtlCol="0" anchor="ctr">
             <a:normAutofit/>
           </a:bodyPr>
           <a:lstStyle/>
           <a:p>
-            <a:pPr marL="0" indent="0" algn="l">
+            <a:pPr marL="0" indent="0" algn="ctr">
               <a:lnSpc>
                 <a:spcPct val="104000"/>
               </a:lnSpc>
@@ -14485,7 +14482,7 @@
             </a:r>
           </a:p>
           <a:p>
-            <a:pPr marL="0" indent="0" algn="l">
+            <a:pPr marL="0" indent="0" algn="ctr">
               <a:lnSpc>
                 <a:spcPct val="104000"/>
               </a:lnSpc>
@@ -14506,7 +14503,7 @@
             </a:r>
           </a:p>
           <a:p>
-            <a:pPr marL="0" indent="0" algn="l">
+            <a:pPr marL="0" indent="0" algn="ctr">
               <a:lnSpc>
                 <a:spcPct val="104000"/>
               </a:lnSpc>
@@ -14527,7 +14524,7 @@
             </a:r>
           </a:p>
           <a:p>
-            <a:pPr marL="0" indent="0" algn="l">
+            <a:pPr marL="0" indent="0" algn="ctr">
               <a:lnSpc>
                 <a:spcPct val="104000"/>
               </a:lnSpc>
@@ -14548,7 +14545,7 @@
             </a:r>
           </a:p>
           <a:p>
-            <a:pPr marL="0" indent="0" algn="l">
+            <a:pPr marL="0" indent="0" algn="ctr">
               <a:lnSpc>
                 <a:spcPct val="104000"/>
               </a:lnSpc>
@@ -14569,7 +14566,7 @@
             </a:r>
           </a:p>
           <a:p>
-            <a:pPr marL="0" indent="0" algn="l">
+            <a:pPr marL="0" indent="0" algn="ctr">
               <a:lnSpc>
                 <a:spcPct val="104000"/>
               </a:lnSpc>
@@ -15008,12 +15005,12 @@
           </a:ln>
         </p:spPr>
         <p:txBody>
-          <a:bodyPr wrap="square" lIns="137160" tIns="91440" rIns="137160" bIns="91440" rtlCol="0" anchor="t">
+          <a:bodyPr wrap="square" lIns="137160" tIns="91440" rIns="137160" bIns="91440" rtlCol="0" anchor="ctr">
             <a:normAutofit/>
           </a:bodyPr>
           <a:lstStyle/>
           <a:p>
-            <a:pPr marL="0" indent="0" algn="l">
+            <a:pPr marL="0" indent="0" algn="ctr">
               <a:buNone/>
             </a:pPr>
             <a:r>
@@ -15028,15 +15025,14 @@
             </a:r>
           </a:p>
           <a:p>
-            <a:pPr marL="274320" indent="-274320" algn="l">
+            <a:pPr marL="0" indent="0" algn="ctr">
               <a:lnSpc>
                 <a:spcPct val="104000"/>
               </a:lnSpc>
               <a:spcBef>
                 <a:spcPts val="300"/>
               </a:spcBef>
-              <a:buFont typeface="Arial"/>
-              <a:buChar char="•"/>
+              <a:buNone/>
             </a:pPr>
             <a:r>
               <a:rPr lang="en-US" sz="1500" dirty="0">
@@ -15050,15 +15046,14 @@
             </a:r>
           </a:p>
           <a:p>
-            <a:pPr marL="274320" indent="-274320" algn="l">
+            <a:pPr marL="0" indent="0" algn="ctr">
               <a:lnSpc>
                 <a:spcPct val="104000"/>
               </a:lnSpc>
               <a:spcBef>
                 <a:spcPts val="300"/>
               </a:spcBef>
-              <a:buFont typeface="Arial"/>
-              <a:buChar char="•"/>
+              <a:buNone/>
             </a:pPr>
             <a:r>
               <a:rPr lang="en-US" sz="1500" dirty="0">
@@ -15513,7 +15508,7 @@
                 <a:latin typeface="Arial"/>
                 <a:cs typeface="Arial"/>
               </a:rPr>
-              <a:t>Dùng ba câu hỏi: có chỉ định? có ngẫu nhiên? thời gian chạy chiều nào?</a:t>
+              <a:t>Dùng ba câu hỏi: có chỉ định? có ngẫu nhiên? theo chiều thời gian nào?</a:t>
             </a:r>
           </a:p>
         </p:txBody>
@@ -15542,12 +15537,12 @@
           </a:ln>
         </p:spPr>
         <p:txBody>
-          <a:bodyPr wrap="square" lIns="137160" tIns="91440" rIns="137160" bIns="91440" rtlCol="0" anchor="t">
+          <a:bodyPr wrap="square" lIns="137160" tIns="91440" rIns="137160" bIns="91440" rtlCol="0" anchor="ctr">
             <a:normAutofit/>
           </a:bodyPr>
           <a:lstStyle/>
           <a:p>
-            <a:pPr marL="0" indent="0" algn="l">
+            <a:pPr marL="0" indent="0" algn="ctr">
               <a:buNone/>
             </a:pPr>
             <a:r>
@@ -15562,15 +15557,14 @@
             </a:r>
           </a:p>
           <a:p>
-            <a:pPr marL="274320" indent="-274320" algn="l">
+            <a:pPr marL="0" indent="0" algn="ctr">
               <a:lnSpc>
                 <a:spcPct val="104000"/>
               </a:lnSpc>
               <a:spcBef>
                 <a:spcPts val="300"/>
               </a:spcBef>
-              <a:buFont typeface="Arial"/>
-              <a:buChar char="•"/>
+              <a:buNone/>
             </a:pPr>
             <a:r>
               <a:rPr lang="en-US" sz="1500" dirty="0">
@@ -15584,15 +15578,14 @@
             </a:r>
           </a:p>
           <a:p>
-            <a:pPr marL="274320" indent="-274320" algn="l">
+            <a:pPr marL="0" indent="0" algn="ctr">
               <a:lnSpc>
                 <a:spcPct val="104000"/>
               </a:lnSpc>
               <a:spcBef>
                 <a:spcPts val="300"/>
               </a:spcBef>
-              <a:buFont typeface="Arial"/>
-              <a:buChar char="•"/>
+              <a:buNone/>
             </a:pPr>
             <a:r>
               <a:rPr lang="en-US" sz="1500" dirty="0">
@@ -15606,15 +15599,14 @@
             </a:r>
           </a:p>
           <a:p>
-            <a:pPr marL="274320" indent="-274320" algn="l">
+            <a:pPr marL="0" indent="0" algn="ctr">
               <a:lnSpc>
                 <a:spcPct val="104000"/>
               </a:lnSpc>
               <a:spcBef>
                 <a:spcPts val="300"/>
               </a:spcBef>
-              <a:buFont typeface="Arial"/>
-              <a:buChar char="•"/>
+              <a:buNone/>
             </a:pPr>
             <a:r>
               <a:rPr lang="en-US" sz="1500" dirty="0">
@@ -15628,15 +15620,14 @@
             </a:r>
           </a:p>
           <a:p>
-            <a:pPr marL="274320" indent="-274320" algn="l">
+            <a:pPr marL="0" indent="0" algn="ctr">
               <a:lnSpc>
                 <a:spcPct val="104000"/>
               </a:lnSpc>
               <a:spcBef>
                 <a:spcPts val="300"/>
               </a:spcBef>
-              <a:buFont typeface="Arial"/>
-              <a:buChar char="•"/>
+              <a:buNone/>
             </a:pPr>
             <a:r>
               <a:rPr lang="en-US" sz="1500" dirty="0">
@@ -16411,7 +16402,7 @@
                 <a:latin typeface="Arial"/>
                 <a:cs typeface="Arial"/>
               </a:rPr>
-              <a:t>Dự án thực tế uốn các thiết kế cơ bản.</a:t>
+              <a:t>Dự án thực tế thường biến đổi các thiết kế cơ bản.</a:t>
             </a:r>
           </a:p>
           <a:p>
@@ -16904,14 +16895,14 @@
               <a:buNone/>
             </a:pPr>
             <a:r>
-              <a:rPr lang="en-US" sz="2800" b="1" dirty="0">
+              <a:rPr lang="en-US" sz="2400" b="1" dirty="0">
                 <a:solidFill>
                   <a:srgbClr val="0D7377"/>
                 </a:solidFill>
                 <a:latin typeface="Arial"/>
                 <a:cs typeface="Arial"/>
               </a:rPr>
-              <a:t>Vượt trội hay không kém hơn? Hình ảnh ngưỡng</a:t>
+              <a:t>Vượt trội hay không kém hơn (non-inferiority)? Đọc theo ngưỡng</a:t>
             </a:r>
           </a:p>
         </p:txBody>
@@ -17218,14 +17209,14 @@
               <a:buNone/>
             </a:pPr>
             <a:r>
-              <a:rPr lang="en-US" sz="2800" b="1" dirty="0">
+              <a:rPr lang="en-US" sz="2400" b="1" dirty="0">
                 <a:solidFill>
                   <a:srgbClr val="0D7377"/>
                 </a:solidFill>
                 <a:latin typeface="Arial"/>
                 <a:cs typeface="Arial"/>
               </a:rPr>
-              <a:t>Nghiên cứu thí điểm và tính khả thi: buổi tổng duyệt</a:t>
+              <a:t>Nghiên cứu thí điểm và khả thi: chạy thử trước thử nghiệm lớn</a:t>
             </a:r>
           </a:p>
         </p:txBody>
@@ -17323,12 +17314,12 @@
           </a:ln>
         </p:spPr>
         <p:txBody>
-          <a:bodyPr wrap="square" lIns="137160" tIns="91440" rIns="137160" bIns="91440" rtlCol="0" anchor="t">
+          <a:bodyPr wrap="square" lIns="137160" tIns="91440" rIns="137160" bIns="91440" rtlCol="0" anchor="ctr">
             <a:normAutofit/>
           </a:bodyPr>
           <a:lstStyle/>
           <a:p>
-            <a:pPr marL="0" indent="0" algn="l">
+            <a:pPr marL="0" indent="0" algn="ctr">
               <a:lnSpc>
                 <a:spcPct val="104000"/>
               </a:lnSpc>
@@ -17345,11 +17336,11 @@
                 <a:latin typeface="Arial"/>
                 <a:cs typeface="Arial"/>
               </a:rPr>
-              <a:t>1 201 người bệnh được sàng lọc</a:t>
-            </a:r>
-          </a:p>
-          <a:p>
-            <a:pPr marL="0" indent="0" algn="l">
+              <a:t>1201 người bệnh được sàng lọc</a:t>
+            </a:r>
+          </a:p>
+          <a:p>
+            <a:pPr marL="0" indent="0" algn="ctr">
               <a:lnSpc>
                 <a:spcPct val="104000"/>
               </a:lnSpc>
@@ -17370,7 +17361,7 @@
             </a:r>
           </a:p>
           <a:p>
-            <a:pPr marL="0" indent="0" algn="l">
+            <a:pPr marL="0" indent="0" algn="ctr">
               <a:lnSpc>
                 <a:spcPct val="104000"/>
               </a:lnSpc>
@@ -17391,7 +17382,7 @@
             </a:r>
           </a:p>
           <a:p>
-            <a:pPr marL="0" indent="0" algn="l">
+            <a:pPr marL="0" indent="0" algn="ctr">
               <a:lnSpc>
                 <a:spcPct val="104000"/>
               </a:lnSpc>
@@ -17478,12 +17469,12 @@
           </a:ln>
         </p:spPr>
         <p:txBody>
-          <a:bodyPr wrap="square" lIns="137160" tIns="91440" rIns="137160" bIns="91440" rtlCol="0" anchor="t">
+          <a:bodyPr wrap="square" lIns="137160" tIns="91440" rIns="137160" bIns="91440" rtlCol="0" anchor="ctr">
             <a:normAutofit/>
           </a:bodyPr>
           <a:lstStyle/>
           <a:p>
-            <a:pPr marL="0" indent="0" algn="l">
+            <a:pPr marL="0" indent="0" algn="ctr">
               <a:lnSpc>
                 <a:spcPct val="104000"/>
               </a:lnSpc>
@@ -17504,7 +17495,7 @@
             </a:r>
           </a:p>
           <a:p>
-            <a:pPr marL="0" indent="0" algn="l">
+            <a:pPr marL="0" indent="0" algn="ctr">
               <a:lnSpc>
                 <a:spcPct val="104000"/>
               </a:lnSpc>
@@ -17525,7 +17516,7 @@
             </a:r>
           </a:p>
           <a:p>
-            <a:pPr marL="0" indent="0" algn="l">
+            <a:pPr marL="0" indent="0" algn="ctr">
               <a:lnSpc>
                 <a:spcPct val="104000"/>
               </a:lnSpc>
@@ -17546,7 +17537,7 @@
             </a:r>
           </a:p>
           <a:p>
-            <a:pPr marL="0" indent="0" algn="l">
+            <a:pPr marL="0" indent="0" algn="ctr">
               <a:lnSpc>
                 <a:spcPct val="104000"/>
               </a:lnSpc>
@@ -17567,7 +17558,7 @@
             </a:r>
           </a:p>
           <a:p>
-            <a:pPr marL="0" indent="0" algn="l">
+            <a:pPr marL="0" indent="0" algn="ctr">
               <a:lnSpc>
                 <a:spcPct val="104000"/>
               </a:lnSpc>
@@ -18258,12 +18249,12 @@
           </a:ln>
         </p:spPr>
         <p:txBody>
-          <a:bodyPr wrap="square" lIns="137160" tIns="91440" rIns="137160" bIns="91440" rtlCol="0" anchor="t">
+          <a:bodyPr wrap="square" lIns="137160" tIns="91440" rIns="137160" bIns="91440" rtlCol="0" anchor="ctr">
             <a:normAutofit/>
           </a:bodyPr>
           <a:lstStyle/>
           <a:p>
-            <a:pPr marL="0" indent="0" algn="l">
+            <a:pPr marL="0" indent="0" algn="ctr">
               <a:lnSpc>
                 <a:spcPct val="104000"/>
               </a:lnSpc>
@@ -18284,7 +18275,7 @@
             </a:r>
           </a:p>
           <a:p>
-            <a:pPr marL="0" indent="0" algn="l">
+            <a:pPr marL="0" indent="0" algn="ctr">
               <a:lnSpc>
                 <a:spcPct val="104000"/>
               </a:lnSpc>
@@ -18305,7 +18296,7 @@
             </a:r>
           </a:p>
           <a:p>
-            <a:pPr marL="0" indent="0" algn="l">
+            <a:pPr marL="0" indent="0" algn="ctr">
               <a:lnSpc>
                 <a:spcPct val="104000"/>
               </a:lnSpc>
@@ -18392,12 +18383,12 @@
           </a:ln>
         </p:spPr>
         <p:txBody>
-          <a:bodyPr wrap="square" lIns="137160" tIns="91440" rIns="137160" bIns="91440" rtlCol="0" anchor="t">
+          <a:bodyPr wrap="square" lIns="137160" tIns="91440" rIns="137160" bIns="91440" rtlCol="0" anchor="ctr">
             <a:normAutofit/>
           </a:bodyPr>
           <a:lstStyle/>
           <a:p>
-            <a:pPr marL="0" indent="0" algn="l">
+            <a:pPr marL="0" indent="0" algn="ctr">
               <a:lnSpc>
                 <a:spcPct val="104000"/>
               </a:lnSpc>
@@ -18418,7 +18409,7 @@
             </a:r>
           </a:p>
           <a:p>
-            <a:pPr marL="0" indent="0" algn="l">
+            <a:pPr marL="0" indent="0" algn="ctr">
               <a:lnSpc>
                 <a:spcPct val="104000"/>
               </a:lnSpc>
@@ -18439,7 +18430,7 @@
             </a:r>
           </a:p>
           <a:p>
-            <a:pPr marL="0" indent="0" algn="l">
+            <a:pPr marL="0" indent="0" algn="ctr">
               <a:lnSpc>
                 <a:spcPct val="104000"/>
               </a:lnSpc>
@@ -18526,12 +18517,12 @@
           </a:ln>
         </p:spPr>
         <p:txBody>
-          <a:bodyPr wrap="square" lIns="137160" tIns="91440" rIns="137160" bIns="91440" rtlCol="0" anchor="t">
+          <a:bodyPr wrap="square" lIns="137160" tIns="91440" rIns="137160" bIns="91440" rtlCol="0" anchor="ctr">
             <a:normAutofit/>
           </a:bodyPr>
           <a:lstStyle/>
           <a:p>
-            <a:pPr marL="0" indent="0" algn="l">
+            <a:pPr marL="0" indent="0" algn="ctr">
               <a:lnSpc>
                 <a:spcPct val="104000"/>
               </a:lnSpc>
@@ -18552,7 +18543,7 @@
             </a:r>
           </a:p>
           <a:p>
-            <a:pPr marL="0" indent="0" algn="l">
+            <a:pPr marL="0" indent="0" algn="ctr">
               <a:lnSpc>
                 <a:spcPct val="104000"/>
               </a:lnSpc>
@@ -18573,7 +18564,7 @@
             </a:r>
           </a:p>
           <a:p>
-            <a:pPr marL="0" indent="0" algn="l">
+            <a:pPr marL="0" indent="0" algn="ctr">
               <a:lnSpc>
                 <a:spcPct val="104000"/>
               </a:lnSpc>
@@ -18950,12 +18941,12 @@
           </a:ln>
         </p:spPr>
         <p:txBody>
-          <a:bodyPr wrap="square" lIns="137160" tIns="91440" rIns="137160" bIns="91440" rtlCol="0" anchor="t">
+          <a:bodyPr wrap="square" lIns="137160" tIns="91440" rIns="137160" bIns="91440" rtlCol="0" anchor="ctr">
             <a:normAutofit/>
           </a:bodyPr>
           <a:lstStyle/>
           <a:p>
-            <a:pPr marL="0" indent="0" algn="l">
+            <a:pPr marL="0" indent="0" algn="ctr">
               <a:lnSpc>
                 <a:spcPct val="104000"/>
               </a:lnSpc>
@@ -18976,7 +18967,7 @@
             </a:r>
           </a:p>
           <a:p>
-            <a:pPr marL="0" indent="0" algn="l">
+            <a:pPr marL="0" indent="0" algn="ctr">
               <a:lnSpc>
                 <a:spcPct val="104000"/>
               </a:lnSpc>
@@ -18997,7 +18988,7 @@
             </a:r>
           </a:p>
           <a:p>
-            <a:pPr marL="0" indent="0" algn="l">
+            <a:pPr marL="0" indent="0" algn="ctr">
               <a:lnSpc>
                 <a:spcPct val="104000"/>
               </a:lnSpc>
@@ -19084,12 +19075,12 @@
           </a:ln>
         </p:spPr>
         <p:txBody>
-          <a:bodyPr wrap="square" lIns="137160" tIns="91440" rIns="137160" bIns="91440" rtlCol="0" anchor="t">
+          <a:bodyPr wrap="square" lIns="137160" tIns="91440" rIns="137160" bIns="91440" rtlCol="0" anchor="ctr">
             <a:normAutofit/>
           </a:bodyPr>
           <a:lstStyle/>
           <a:p>
-            <a:pPr marL="0" indent="0" algn="l">
+            <a:pPr marL="0" indent="0" algn="ctr">
               <a:lnSpc>
                 <a:spcPct val="104000"/>
               </a:lnSpc>
@@ -19106,11 +19097,11 @@
                 <a:latin typeface="Arial"/>
                 <a:cs typeface="Arial"/>
               </a:rPr>
-              <a:t>Quan sát: ta theo dõi</a:t>
-            </a:r>
-          </a:p>
-          <a:p>
-            <a:pPr marL="0" indent="0" algn="l">
+              <a:t>Quan sát: chỉ theo dõi</a:t>
+            </a:r>
+          </a:p>
+          <a:p>
+            <a:pPr marL="0" indent="0" algn="ctr">
               <a:lnSpc>
                 <a:spcPct val="104000"/>
               </a:lnSpc>
@@ -19127,11 +19118,11 @@
                 <a:latin typeface="Arial"/>
                 <a:cs typeface="Arial"/>
               </a:rPr>
-              <a:t>Thực nghiệm: ta chỉ định</a:t>
-            </a:r>
-          </a:p>
-          <a:p>
-            <a:pPr marL="0" indent="0" algn="l">
+              <a:t>Thực nghiệm: nhà nghiên cứu chỉ định</a:t>
+            </a:r>
+          </a:p>
+          <a:p>
+            <a:pPr marL="0" indent="0" algn="ctr">
               <a:lnSpc>
                 <a:spcPct val="104000"/>
               </a:lnSpc>
@@ -19191,7 +19182,7 @@
                 <a:latin typeface="Arial"/>
                 <a:cs typeface="Arial"/>
               </a:rPr>
-              <a:t>Thời gian chiều nào?</a:t>
+              <a:t>Theo chiều thời gian nào?</a:t>
             </a:r>
           </a:p>
         </p:txBody>
@@ -19218,12 +19209,12 @@
           </a:ln>
         </p:spPr>
         <p:txBody>
-          <a:bodyPr wrap="square" lIns="137160" tIns="91440" rIns="137160" bIns="91440" rtlCol="0" anchor="t">
+          <a:bodyPr wrap="square" lIns="137160" tIns="91440" rIns="137160" bIns="91440" rtlCol="0" anchor="ctr">
             <a:normAutofit/>
           </a:bodyPr>
           <a:lstStyle/>
           <a:p>
-            <a:pPr marL="0" indent="0" algn="l">
+            <a:pPr marL="0" indent="0" algn="ctr">
               <a:lnSpc>
                 <a:spcPct val="104000"/>
               </a:lnSpc>
@@ -19240,11 +19231,11 @@
                 <a:latin typeface="Arial"/>
                 <a:cs typeface="Arial"/>
               </a:rPr>
-              <a:t>Cắt ngang: ảnh chụp một lúc</a:t>
-            </a:r>
-          </a:p>
-          <a:p>
-            <a:pPr marL="0" indent="0" algn="l">
+              <a:t>Cắt ngang: đo tại một thời điểm</a:t>
+            </a:r>
+          </a:p>
+          <a:p>
+            <a:pPr marL="0" indent="0" algn="ctr">
               <a:lnSpc>
                 <a:spcPct val="104000"/>
               </a:lnSpc>
@@ -19265,7 +19256,7 @@
             </a:r>
           </a:p>
           <a:p>
-            <a:pPr marL="0" indent="0" algn="l">
+            <a:pPr marL="0" indent="0" algn="ctr">
               <a:lnSpc>
                 <a:spcPct val="104000"/>
               </a:lnSpc>
@@ -19352,12 +19343,12 @@
           </a:ln>
         </p:spPr>
         <p:txBody>
-          <a:bodyPr wrap="square" lIns="137160" tIns="91440" rIns="137160" bIns="91440" rtlCol="0" anchor="t">
+          <a:bodyPr wrap="square" lIns="137160" tIns="91440" rIns="137160" bIns="91440" rtlCol="0" anchor="ctr">
             <a:normAutofit/>
           </a:bodyPr>
           <a:lstStyle/>
           <a:p>
-            <a:pPr marL="0" indent="0" algn="l">
+            <a:pPr marL="0" indent="0" algn="ctr">
               <a:lnSpc>
                 <a:spcPct val="104000"/>
               </a:lnSpc>
@@ -19378,7 +19369,7 @@
             </a:r>
           </a:p>
           <a:p>
-            <a:pPr marL="0" indent="0" algn="l">
+            <a:pPr marL="0" indent="0" algn="ctr">
               <a:lnSpc>
                 <a:spcPct val="104000"/>
               </a:lnSpc>
@@ -19399,7 +19390,7 @@
             </a:r>
           </a:p>
           <a:p>
-            <a:pPr marL="0" indent="0" algn="l">
+            <a:pPr marL="0" indent="0" algn="ctr">
               <a:lnSpc>
                 <a:spcPct val="104000"/>
               </a:lnSpc>
@@ -19471,7 +19462,7 @@
                 <a:latin typeface="Arial"/>
                 <a:cs typeface="Arial"/>
               </a:rPr>
-              <a:t>Hai câu hỏi gọi tên hầu hết thiết kế: ai quyết định phơi nhiễm, và thời gian chạy chiều nào?</a:t>
+              <a:t>Hai câu hỏi gọi tên hầu hết thiết kế: ai quyết định phơi nhiễm, và theo chiều thời gian nào?</a:t>
             </a:r>
           </a:p>
         </p:txBody>
@@ -20175,7 +20166,7 @@
                 <a:latin typeface="Arial"/>
                 <a:cs typeface="Arial"/>
               </a:rPr>
-              <a:t>Bắt đầu từ câu hỏi, thiết kế sẽ theo sau. Rồi kiểm tra xem thiết kế đó có khả thi ở nơi bạn làm việc không.</a:t>
+              <a:t>Bắt đầu từ câu hỏi, thiết kế sẽ theo sau. Rồi kiểm tra xem thiết kế đó có khả thi ở nơi bạn làm việc không.</a:t>
             </a:r>
           </a:p>
         </p:txBody>
@@ -20488,7 +20479,7 @@
                 <a:latin typeface="Arial"/>
                 <a:cs typeface="Arial"/>
               </a:rPr>
-              <a:t>Với mỗi câu: bình chọn thiết kế khả thi tốt nhất</a:t>
+              <a:t>Với mỗi câu: bình chọn thiết kế khả thi tốt nhất</a:t>
             </a:r>
           </a:p>
           <a:p>
@@ -20567,12 +20558,12 @@
           </a:ln>
         </p:spPr>
         <p:txBody>
-          <a:bodyPr wrap="square" lIns="137160" tIns="91440" rIns="137160" bIns="91440" rtlCol="0" anchor="t">
+          <a:bodyPr wrap="square" lIns="137160" tIns="91440" rIns="137160" bIns="91440" rtlCol="0" anchor="ctr">
             <a:normAutofit/>
           </a:bodyPr>
           <a:lstStyle/>
           <a:p>
-            <a:pPr marL="0" indent="0" algn="l">
+            <a:pPr marL="0" indent="0" algn="ctr">
               <a:buNone/>
             </a:pPr>
             <a:r>
@@ -20587,15 +20578,14 @@
             </a:r>
           </a:p>
           <a:p>
-            <a:pPr marL="274320" indent="-274320" algn="l">
+            <a:pPr marL="0" indent="0" algn="ctr">
               <a:lnSpc>
                 <a:spcPct val="104000"/>
               </a:lnSpc>
               <a:spcBef>
                 <a:spcPts val="300"/>
               </a:spcBef>
-              <a:buFont typeface="Arial"/>
-              <a:buChar char="•"/>
+              <a:buNone/>
             </a:pPr>
             <a:r>
               <a:rPr lang="en-US" sz="1500" dirty="0">
@@ -20609,15 +20599,14 @@
             </a:r>
           </a:p>
           <a:p>
-            <a:pPr marL="274320" indent="-274320" algn="l">
+            <a:pPr marL="0" indent="0" algn="ctr">
               <a:lnSpc>
                 <a:spcPct val="104000"/>
               </a:lnSpc>
               <a:spcBef>
                 <a:spcPts val="300"/>
               </a:spcBef>
-              <a:buFont typeface="Arial"/>
-              <a:buChar char="•"/>
+              <a:buNone/>
             </a:pPr>
             <a:r>
               <a:rPr lang="en-US" sz="1500" dirty="0">
@@ -20631,15 +20620,14 @@
             </a:r>
           </a:p>
           <a:p>
-            <a:pPr marL="274320" indent="-274320" algn="l">
+            <a:pPr marL="0" indent="0" algn="ctr">
               <a:lnSpc>
                 <a:spcPct val="104000"/>
               </a:lnSpc>
               <a:spcBef>
                 <a:spcPts val="300"/>
               </a:spcBef>
-              <a:buFont typeface="Arial"/>
-              <a:buChar char="•"/>
+              <a:buNone/>
             </a:pPr>
             <a:r>
               <a:rPr lang="en-US" sz="1500" dirty="0">
@@ -20653,15 +20641,14 @@
             </a:r>
           </a:p>
           <a:p>
-            <a:pPr marL="274320" indent="-274320" algn="l">
+            <a:pPr marL="0" indent="0" algn="ctr">
               <a:lnSpc>
                 <a:spcPct val="104000"/>
               </a:lnSpc>
               <a:spcBef>
                 <a:spcPts val="300"/>
               </a:spcBef>
-              <a:buFont typeface="Arial"/>
-              <a:buChar char="•"/>
+              <a:buNone/>
             </a:pPr>
             <a:r>
               <a:rPr lang="en-US" sz="1500" dirty="0">
@@ -20675,15 +20662,14 @@
             </a:r>
           </a:p>
           <a:p>
-            <a:pPr marL="274320" indent="-274320" algn="l">
+            <a:pPr marL="0" indent="0" algn="ctr">
               <a:lnSpc>
                 <a:spcPct val="104000"/>
               </a:lnSpc>
               <a:spcBef>
                 <a:spcPts val="300"/>
               </a:spcBef>
-              <a:buFont typeface="Arial"/>
-              <a:buChar char="•"/>
+              <a:buNone/>
             </a:pPr>
             <a:r>
               <a:rPr lang="en-US" sz="1500" dirty="0">
@@ -21467,12 +21453,12 @@
           </a:ln>
         </p:spPr>
         <p:txBody>
-          <a:bodyPr wrap="square" lIns="137160" tIns="91440" rIns="137160" bIns="91440" rtlCol="0" anchor="t">
+          <a:bodyPr wrap="square" lIns="137160" tIns="91440" rIns="137160" bIns="91440" rtlCol="0" anchor="ctr">
             <a:normAutofit/>
           </a:bodyPr>
           <a:lstStyle/>
           <a:p>
-            <a:pPr marL="0" indent="0" algn="l">
+            <a:pPr marL="0" indent="0" algn="ctr">
               <a:buNone/>
             </a:pPr>
             <a:r>
@@ -21487,15 +21473,14 @@
             </a:r>
           </a:p>
           <a:p>
-            <a:pPr marL="274320" indent="-274320" algn="l">
+            <a:pPr marL="0" indent="0" algn="ctr">
               <a:lnSpc>
                 <a:spcPct val="104000"/>
               </a:lnSpc>
               <a:spcBef>
                 <a:spcPts val="300"/>
               </a:spcBef>
-              <a:buFont typeface="Arial"/>
-              <a:buChar char="•"/>
+              <a:buNone/>
             </a:pPr>
             <a:r>
               <a:rPr lang="en-US" sz="1500" dirty="0">
@@ -21509,15 +21494,14 @@
             </a:r>
           </a:p>
           <a:p>
-            <a:pPr marL="274320" indent="-274320" algn="l">
+            <a:pPr marL="0" indent="0" algn="ctr">
               <a:lnSpc>
                 <a:spcPct val="104000"/>
               </a:lnSpc>
               <a:spcBef>
                 <a:spcPts val="300"/>
               </a:spcBef>
-              <a:buFont typeface="Arial"/>
-              <a:buChar char="•"/>
+              <a:buNone/>
             </a:pPr>
             <a:r>
               <a:rPr lang="en-US" sz="1500" dirty="0">
@@ -21527,19 +21511,18 @@
                 <a:latin typeface="Arial"/>
                 <a:cs typeface="Arial"/>
               </a:rPr>
-              <a:t>Khả thi ở khoa bạn?</a:t>
-            </a:r>
-          </a:p>
-          <a:p>
-            <a:pPr marL="274320" indent="-274320" algn="l">
+              <a:t>Khả thi ở khoa bạn?</a:t>
+            </a:r>
+          </a:p>
+          <a:p>
+            <a:pPr marL="0" indent="0" algn="ctr">
               <a:lnSpc>
                 <a:spcPct val="104000"/>
               </a:lnSpc>
               <a:spcBef>
                 <a:spcPts val="300"/>
               </a:spcBef>
-              <a:buFont typeface="Arial"/>
-              <a:buChar char="•"/>
+              <a:buNone/>
             </a:pPr>
             <a:r>
               <a:rPr lang="en-US" sz="1500" dirty="0">
@@ -21553,15 +21536,14 @@
             </a:r>
           </a:p>
           <a:p>
-            <a:pPr marL="274320" indent="-274320" algn="l">
+            <a:pPr marL="0" indent="0" algn="ctr">
               <a:lnSpc>
                 <a:spcPct val="104000"/>
               </a:lnSpc>
               <a:spcBef>
                 <a:spcPts val="300"/>
               </a:spcBef>
-              <a:buFont typeface="Arial"/>
-              <a:buChar char="•"/>
+              <a:buNone/>
             </a:pPr>
             <a:r>
               <a:rPr lang="en-US" sz="1500" dirty="0">
@@ -21575,15 +21557,14 @@
             </a:r>
           </a:p>
           <a:p>
-            <a:pPr marL="274320" indent="-274320" algn="l">
+            <a:pPr marL="0" indent="0" algn="ctr">
               <a:lnSpc>
                 <a:spcPct val="104000"/>
               </a:lnSpc>
               <a:spcBef>
                 <a:spcPts val="300"/>
               </a:spcBef>
-              <a:buFont typeface="Arial"/>
-              <a:buChar char="•"/>
+              <a:buNone/>
             </a:pPr>
             <a:r>
               <a:rPr lang="en-US" sz="1500" dirty="0">
@@ -21916,12 +21897,12 @@
           </a:ln>
         </p:spPr>
         <p:txBody>
-          <a:bodyPr wrap="square" lIns="137160" tIns="91440" rIns="137160" bIns="91440" rtlCol="0" anchor="t">
+          <a:bodyPr wrap="square" lIns="137160" tIns="91440" rIns="137160" bIns="91440" rtlCol="0" anchor="ctr">
             <a:normAutofit/>
           </a:bodyPr>
           <a:lstStyle/>
           <a:p>
-            <a:pPr marL="0" indent="0" algn="l">
+            <a:pPr marL="0" indent="0" algn="ctr">
               <a:lnSpc>
                 <a:spcPct val="104000"/>
               </a:lnSpc>
@@ -21938,11 +21919,11 @@
                 <a:latin typeface="Arial"/>
                 <a:cs typeface="Arial"/>
               </a:rPr>
-              <a:t>Ảnh chụp, nhìn lại, theo dõi về sau</a:t>
-            </a:r>
-          </a:p>
-          <a:p>
-            <a:pPr marL="0" indent="0" algn="l">
+              <a:t>Một thời điểm, nhìn lại, theo dõi về sau</a:t>
+            </a:r>
+          </a:p>
+          <a:p>
+            <a:pPr marL="0" indent="0" algn="ctr">
               <a:lnSpc>
                 <a:spcPct val="104000"/>
               </a:lnSpc>
@@ -21963,7 +21944,7 @@
             </a:r>
           </a:p>
           <a:p>
-            <a:pPr marL="0" indent="0" algn="l">
+            <a:pPr marL="0" indent="0" algn="ctr">
               <a:lnSpc>
                 <a:spcPct val="104000"/>
               </a:lnSpc>
@@ -22050,12 +22031,12 @@
           </a:ln>
         </p:spPr>
         <p:txBody>
-          <a:bodyPr wrap="square" lIns="137160" tIns="91440" rIns="137160" bIns="91440" rtlCol="0" anchor="t">
+          <a:bodyPr wrap="square" lIns="137160" tIns="91440" rIns="137160" bIns="91440" rtlCol="0" anchor="ctr">
             <a:normAutofit/>
           </a:bodyPr>
           <a:lstStyle/>
           <a:p>
-            <a:pPr marL="0" indent="0" algn="l">
+            <a:pPr marL="0" indent="0" algn="ctr">
               <a:lnSpc>
                 <a:spcPct val="104000"/>
               </a:lnSpc>
@@ -22076,7 +22057,7 @@
             </a:r>
           </a:p>
           <a:p>
-            <a:pPr marL="0" indent="0" algn="l">
+            <a:pPr marL="0" indent="0" algn="ctr">
               <a:lnSpc>
                 <a:spcPct val="104000"/>
               </a:lnSpc>
@@ -22097,7 +22078,7 @@
             </a:r>
           </a:p>
           <a:p>
-            <a:pPr marL="0" indent="0" algn="l">
+            <a:pPr marL="0" indent="0" algn="ctr">
               <a:lnSpc>
                 <a:spcPct val="104000"/>
               </a:lnSpc>
@@ -22184,12 +22165,12 @@
           </a:ln>
         </p:spPr>
         <p:txBody>
-          <a:bodyPr wrap="square" lIns="137160" tIns="91440" rIns="137160" bIns="91440" rtlCol="0" anchor="t">
+          <a:bodyPr wrap="square" lIns="137160" tIns="91440" rIns="137160" bIns="91440" rtlCol="0" anchor="ctr">
             <a:normAutofit/>
           </a:bodyPr>
           <a:lstStyle/>
           <a:p>
-            <a:pPr marL="0" indent="0" algn="l">
+            <a:pPr marL="0" indent="0" algn="ctr">
               <a:lnSpc>
                 <a:spcPct val="104000"/>
               </a:lnSpc>
@@ -22210,7 +22191,7 @@
             </a:r>
           </a:p>
           <a:p>
-            <a:pPr marL="0" indent="0" algn="l">
+            <a:pPr marL="0" indent="0" algn="ctr">
               <a:lnSpc>
                 <a:spcPct val="104000"/>
               </a:lnSpc>
@@ -22231,7 +22212,7 @@
             </a:r>
           </a:p>
           <a:p>
-            <a:pPr marL="0" indent="0" algn="l">
+            <a:pPr marL="0" indent="0" algn="ctr">
               <a:lnSpc>
                 <a:spcPct val="104000"/>
               </a:lnSpc>
@@ -22591,7 +22572,7 @@
                 <a:latin typeface="Arial"/>
                 <a:cs typeface="Arial"/>
               </a:rPr>
-              <a:t>Câu hỏi cuối buổi (chat hoặc biểu mẫu 1 câu): bác sĩ chọn hạn chế dịch cho một số người bệnh sốc nhiễm khuẩn và không cho số khác. Cả hai nhóm được theo dõi đến ngày 28. Thiết kế gì? 'Gây ra' hay 'có liên quan'?</a:t>
+              <a:t>Câu hỏi cuối buổi (trong chat): bác sĩ chọn hạn chế dịch cho một số người bệnh sốc nhiễm khuẩn và không cho số khác. Cả hai nhóm được theo dõi đến ngày 28. Thiết kế gì? 'Gây ra' hay 'có liên quan'?</a:t>
             </a:r>
           </a:p>
           <a:p>
@@ -22748,7 +22729,7 @@
                 <a:latin typeface="Arial"/>
                 <a:cs typeface="Arial"/>
               </a:rPr>
-              <a:t>Mỗi người một câu trả lời cuối buổi, trong khung chat hoặc biểu mẫu</a:t>
+              <a:t>Mỗi người một câu trả lời cuối buổi, trong khung chat</a:t>
             </a:r>
           </a:p>
         </p:txBody>
@@ -23272,12 +23253,12 @@
           </a:ln>
         </p:spPr>
         <p:txBody>
-          <a:bodyPr wrap="square" lIns="110000" tIns="91440" rIns="110000" bIns="91440" rtlCol="0" anchor="t">
+          <a:bodyPr wrap="square" lIns="110000" tIns="91440" rIns="110000" bIns="91440" rtlCol="0" anchor="ctr">
             <a:normAutofit/>
           </a:bodyPr>
           <a:lstStyle/>
           <a:p>
-            <a:pPr marL="0" indent="0" algn="l">
+            <a:pPr marL="0" indent="0" algn="ctr">
               <a:lnSpc>
                 <a:spcPct val="104000"/>
               </a:lnSpc>
@@ -23298,7 +23279,7 @@
             </a:r>
           </a:p>
           <a:p>
-            <a:pPr marL="0" indent="0" algn="l">
+            <a:pPr marL="0" indent="0" algn="ctr">
               <a:lnSpc>
                 <a:spcPct val="104000"/>
               </a:lnSpc>
@@ -23387,12 +23368,12 @@
           </a:ln>
         </p:spPr>
         <p:txBody>
-          <a:bodyPr wrap="square" lIns="110000" tIns="91440" rIns="110000" bIns="91440" rtlCol="0" anchor="t">
+          <a:bodyPr wrap="square" lIns="110000" tIns="91440" rIns="110000" bIns="91440" rtlCol="0" anchor="ctr">
             <a:normAutofit/>
           </a:bodyPr>
           <a:lstStyle/>
           <a:p>
-            <a:pPr marL="0" indent="0" algn="l">
+            <a:pPr marL="0" indent="0" algn="ctr">
               <a:lnSpc>
                 <a:spcPct val="104000"/>
               </a:lnSpc>
@@ -23481,12 +23462,12 @@
           </a:ln>
         </p:spPr>
         <p:txBody>
-          <a:bodyPr wrap="square" lIns="110000" tIns="91440" rIns="110000" bIns="91440" rtlCol="0" anchor="t">
+          <a:bodyPr wrap="square" lIns="110000" tIns="91440" rIns="110000" bIns="91440" rtlCol="0" anchor="ctr">
             <a:normAutofit/>
           </a:bodyPr>
           <a:lstStyle/>
           <a:p>
-            <a:pPr marL="0" indent="0" algn="l">
+            <a:pPr marL="0" indent="0" algn="ctr">
               <a:lnSpc>
                 <a:spcPct val="104000"/>
               </a:lnSpc>
@@ -23575,12 +23556,12 @@
           </a:ln>
         </p:spPr>
         <p:txBody>
-          <a:bodyPr wrap="square" lIns="110000" tIns="91440" rIns="110000" bIns="91440" rtlCol="0" anchor="t">
+          <a:bodyPr wrap="square" lIns="110000" tIns="91440" rIns="110000" bIns="91440" rtlCol="0" anchor="ctr">
             <a:normAutofit/>
           </a:bodyPr>
           <a:lstStyle/>
           <a:p>
-            <a:pPr marL="0" indent="0" algn="l">
+            <a:pPr marL="0" indent="0" algn="ctr">
               <a:lnSpc>
                 <a:spcPct val="104000"/>
               </a:lnSpc>
@@ -23669,12 +23650,12 @@
           </a:ln>
         </p:spPr>
         <p:txBody>
-          <a:bodyPr wrap="square" lIns="110000" tIns="91440" rIns="110000" bIns="91440" rtlCol="0" anchor="t">
+          <a:bodyPr wrap="square" lIns="110000" tIns="91440" rIns="110000" bIns="91440" rtlCol="0" anchor="ctr">
             <a:normAutofit/>
           </a:bodyPr>
           <a:lstStyle/>
           <a:p>
-            <a:pPr marL="0" indent="0" algn="l">
+            <a:pPr marL="0" indent="0" algn="ctr">
               <a:lnSpc>
                 <a:spcPct val="104000"/>
               </a:lnSpc>
@@ -23695,7 +23676,7 @@
             </a:r>
           </a:p>
           <a:p>
-            <a:pPr marL="0" indent="0" algn="l">
+            <a:pPr marL="0" indent="0" algn="ctr">
               <a:lnSpc>
                 <a:spcPct val="104000"/>
               </a:lnSpc>
@@ -23767,7 +23748,7 @@
                 <a:latin typeface="Arial"/>
                 <a:cs typeface="Arial"/>
               </a:rPr>
-              <a:t>Cho mọi bài báo đi qua cùng các câu hỏi trước khi đọc kết quả.</a:t>
+              <a:t>Hỏi các câu này với mọi bài báo trước khi đọc kết quả.</a:t>
             </a:r>
           </a:p>
         </p:txBody>
@@ -24134,12 +24115,12 @@
           </a:ln>
         </p:spPr>
         <p:txBody>
-          <a:bodyPr wrap="square" lIns="137160" tIns="91440" rIns="137160" bIns="91440" rtlCol="0" anchor="t">
+          <a:bodyPr wrap="square" lIns="137160" tIns="91440" rIns="137160" bIns="91440" rtlCol="0" anchor="ctr">
             <a:normAutofit/>
           </a:bodyPr>
           <a:lstStyle/>
           <a:p>
-            <a:pPr marL="0" indent="0" algn="l">
+            <a:pPr marL="0" indent="0" algn="ctr">
               <a:buNone/>
             </a:pPr>
             <a:r>
@@ -24154,15 +24135,14 @@
             </a:r>
           </a:p>
           <a:p>
-            <a:pPr marL="274320" indent="-274320" algn="l">
+            <a:pPr marL="0" indent="0" algn="ctr">
               <a:lnSpc>
                 <a:spcPct val="104000"/>
               </a:lnSpc>
               <a:spcBef>
                 <a:spcPts val="300"/>
               </a:spcBef>
-              <a:buFont typeface="Arial"/>
-              <a:buChar char="•"/>
+              <a:buNone/>
             </a:pPr>
             <a:r>
               <a:rPr lang="en-US" sz="1500" dirty="0">
@@ -24176,15 +24156,14 @@
             </a:r>
           </a:p>
           <a:p>
-            <a:pPr marL="274320" indent="-274320" algn="l">
+            <a:pPr marL="0" indent="0" algn="ctr">
               <a:lnSpc>
                 <a:spcPct val="104000"/>
               </a:lnSpc>
               <a:spcBef>
                 <a:spcPts val="300"/>
               </a:spcBef>
-              <a:buFont typeface="Arial"/>
-              <a:buChar char="•"/>
+              <a:buNone/>
             </a:pPr>
             <a:r>
               <a:rPr lang="en-US" sz="1500" dirty="0">
@@ -24198,15 +24177,14 @@
             </a:r>
           </a:p>
           <a:p>
-            <a:pPr marL="274320" indent="-274320" algn="l">
+            <a:pPr marL="0" indent="0" algn="ctr">
               <a:lnSpc>
                 <a:spcPct val="104000"/>
               </a:lnSpc>
               <a:spcBef>
                 <a:spcPts val="300"/>
               </a:spcBef>
-              <a:buFont typeface="Arial"/>
-              <a:buChar char="•"/>
+              <a:buNone/>
             </a:pPr>
             <a:r>
               <a:rPr lang="en-US" sz="1500" dirty="0">
@@ -24220,15 +24198,14 @@
             </a:r>
           </a:p>
           <a:p>
-            <a:pPr marL="274320" indent="-274320" algn="l">
+            <a:pPr marL="0" indent="0" algn="ctr">
               <a:lnSpc>
                 <a:spcPct val="104000"/>
               </a:lnSpc>
               <a:spcBef>
                 <a:spcPts val="300"/>
               </a:spcBef>
-              <a:buFont typeface="Arial"/>
-              <a:buChar char="•"/>
+              <a:buNone/>
             </a:pPr>
             <a:r>
               <a:rPr lang="en-US" sz="1500" dirty="0">
@@ -24561,12 +24538,12 @@
           </a:ln>
         </p:spPr>
         <p:txBody>
-          <a:bodyPr wrap="square" lIns="137160" tIns="91440" rIns="137160" bIns="91440" rtlCol="0" anchor="t">
+          <a:bodyPr wrap="square" lIns="137160" tIns="91440" rIns="137160" bIns="91440" rtlCol="0" anchor="ctr">
             <a:normAutofit/>
           </a:bodyPr>
           <a:lstStyle/>
           <a:p>
-            <a:pPr marL="0" indent="0" algn="l">
+            <a:pPr marL="0" indent="0" algn="ctr">
               <a:lnSpc>
                 <a:spcPct val="104000"/>
               </a:lnSpc>
@@ -24587,7 +24564,7 @@
             </a:r>
           </a:p>
           <a:p>
-            <a:pPr marL="0" indent="0" algn="l">
+            <a:pPr marL="0" indent="0" algn="ctr">
               <a:lnSpc>
                 <a:spcPct val="104000"/>
               </a:lnSpc>
@@ -24608,7 +24585,7 @@
             </a:r>
           </a:p>
           <a:p>
-            <a:pPr marL="0" indent="0" algn="l">
+            <a:pPr marL="0" indent="0" algn="ctr">
               <a:lnSpc>
                 <a:spcPct val="104000"/>
               </a:lnSpc>
@@ -24695,12 +24672,12 @@
           </a:ln>
         </p:spPr>
         <p:txBody>
-          <a:bodyPr wrap="square" lIns="137160" tIns="91440" rIns="137160" bIns="91440" rtlCol="0" anchor="t">
+          <a:bodyPr wrap="square" lIns="137160" tIns="91440" rIns="137160" bIns="91440" rtlCol="0" anchor="ctr">
             <a:normAutofit/>
           </a:bodyPr>
           <a:lstStyle/>
           <a:p>
-            <a:pPr marL="0" indent="0" algn="l">
+            <a:pPr marL="0" indent="0" algn="ctr">
               <a:lnSpc>
                 <a:spcPct val="104000"/>
               </a:lnSpc>
@@ -24721,7 +24698,7 @@
             </a:r>
           </a:p>
           <a:p>
-            <a:pPr marL="0" indent="0" algn="l">
+            <a:pPr marL="0" indent="0" algn="ctr">
               <a:lnSpc>
                 <a:spcPct val="104000"/>
               </a:lnSpc>
@@ -24742,7 +24719,7 @@
             </a:r>
           </a:p>
           <a:p>
-            <a:pPr marL="0" indent="0" algn="l">
+            <a:pPr marL="0" indent="0" algn="ctr">
               <a:lnSpc>
                 <a:spcPct val="104000"/>
               </a:lnSpc>
@@ -24829,12 +24806,12 @@
           </a:ln>
         </p:spPr>
         <p:txBody>
-          <a:bodyPr wrap="square" lIns="137160" tIns="91440" rIns="137160" bIns="91440" rtlCol="0" anchor="t">
+          <a:bodyPr wrap="square" lIns="137160" tIns="91440" rIns="137160" bIns="91440" rtlCol="0" anchor="ctr">
             <a:normAutofit/>
           </a:bodyPr>
           <a:lstStyle/>
           <a:p>
-            <a:pPr marL="0" indent="0" algn="l">
+            <a:pPr marL="0" indent="0" algn="ctr">
               <a:lnSpc>
                 <a:spcPct val="104000"/>
               </a:lnSpc>
@@ -24855,7 +24832,7 @@
             </a:r>
           </a:p>
           <a:p>
-            <a:pPr marL="0" indent="0" algn="l">
+            <a:pPr marL="0" indent="0" algn="ctr">
               <a:lnSpc>
                 <a:spcPct val="104000"/>
               </a:lnSpc>
@@ -24876,7 +24853,7 @@
             </a:r>
           </a:p>
           <a:p>
-            <a:pPr marL="0" indent="0" algn="l">
+            <a:pPr marL="0" indent="0" algn="ctr">
               <a:lnSpc>
                 <a:spcPct val="104000"/>
               </a:lnSpc>
@@ -25253,12 +25230,12 @@
           </a:ln>
         </p:spPr>
         <p:txBody>
-          <a:bodyPr wrap="square" lIns="137160" tIns="91440" rIns="137160" bIns="91440" rtlCol="0" anchor="t">
+          <a:bodyPr wrap="square" lIns="137160" tIns="91440" rIns="137160" bIns="91440" rtlCol="0" anchor="ctr">
             <a:normAutofit/>
           </a:bodyPr>
           <a:lstStyle/>
           <a:p>
-            <a:pPr marL="0" indent="0" algn="l">
+            <a:pPr marL="0" indent="0" algn="ctr">
               <a:lnSpc>
                 <a:spcPct val="104000"/>
               </a:lnSpc>
@@ -25279,7 +25256,7 @@
             </a:r>
           </a:p>
           <a:p>
-            <a:pPr marL="0" indent="0" algn="l">
+            <a:pPr marL="0" indent="0" algn="ctr">
               <a:lnSpc>
                 <a:spcPct val="104000"/>
               </a:lnSpc>
@@ -25300,7 +25277,7 @@
             </a:r>
           </a:p>
           <a:p>
-            <a:pPr marL="0" indent="0" algn="l">
+            <a:pPr marL="0" indent="0" algn="ctr">
               <a:lnSpc>
                 <a:spcPct val="104000"/>
               </a:lnSpc>
@@ -25321,7 +25298,7 @@
             </a:r>
           </a:p>
           <a:p>
-            <a:pPr marL="0" indent="0" algn="l">
+            <a:pPr marL="0" indent="0" algn="ctr">
               <a:lnSpc>
                 <a:spcPct val="104000"/>
               </a:lnSpc>
@@ -25408,12 +25385,12 @@
           </a:ln>
         </p:spPr>
         <p:txBody>
-          <a:bodyPr wrap="square" lIns="137160" tIns="91440" rIns="137160" bIns="91440" rtlCol="0" anchor="t">
+          <a:bodyPr wrap="square" lIns="137160" tIns="91440" rIns="137160" bIns="91440" rtlCol="0" anchor="ctr">
             <a:normAutofit/>
           </a:bodyPr>
           <a:lstStyle/>
           <a:p>
-            <a:pPr marL="0" indent="0" algn="l">
+            <a:pPr marL="0" indent="0" algn="ctr">
               <a:lnSpc>
                 <a:spcPct val="104000"/>
               </a:lnSpc>
@@ -25430,11 +25407,11 @@
                 <a:latin typeface="Arial"/>
                 <a:cs typeface="Arial"/>
               </a:rPr>
-              <a:t>Sổ bộ nhiễm khuẩn huyết: 11 981 người bệnh, 20 bệnh viện</a:t>
-            </a:r>
-          </a:p>
-          <a:p>
-            <a:pPr marL="0" indent="0" algn="l">
+              <a:t>Sổ bộ nhiễm khuẩn huyết: 11981 người bệnh, 20 bệnh viện</a:t>
+            </a:r>
+          </a:p>
+          <a:p>
+            <a:pPr marL="0" indent="0" algn="ctr">
               <a:lnSpc>
                 <a:spcPct val="104000"/>
               </a:lnSpc>
@@ -25455,7 +25432,7 @@
             </a:r>
           </a:p>
           <a:p>
-            <a:pPr marL="0" indent="0" algn="l">
+            <a:pPr marL="0" indent="0" algn="ctr">
               <a:lnSpc>
                 <a:spcPct val="104000"/>
               </a:lnSpc>
@@ -25476,7 +25453,7 @@
             </a:r>
           </a:p>
           <a:p>
-            <a:pPr marL="0" indent="0" algn="l">
+            <a:pPr marL="0" indent="0" algn="ctr">
               <a:lnSpc>
                 <a:spcPct val="104000"/>
               </a:lnSpc>
@@ -25915,12 +25892,12 @@
           </a:ln>
         </p:spPr>
         <p:txBody>
-          <a:bodyPr wrap="square" lIns="137160" tIns="91440" rIns="137160" bIns="91440" rtlCol="0" anchor="t">
+          <a:bodyPr wrap="square" lIns="137160" tIns="91440" rIns="137160" bIns="91440" rtlCol="0" anchor="ctr">
             <a:normAutofit/>
           </a:bodyPr>
           <a:lstStyle/>
           <a:p>
-            <a:pPr marL="0" indent="0" algn="l">
+            <a:pPr marL="0" indent="0" algn="ctr">
               <a:buNone/>
             </a:pPr>
             <a:r>
@@ -25935,15 +25912,14 @@
             </a:r>
           </a:p>
           <a:p>
-            <a:pPr marL="274320" indent="-274320" algn="l">
+            <a:pPr marL="0" indent="0" algn="ctr">
               <a:lnSpc>
                 <a:spcPct val="104000"/>
               </a:lnSpc>
               <a:spcBef>
                 <a:spcPts val="300"/>
               </a:spcBef>
-              <a:buFont typeface="Arial"/>
-              <a:buChar char="•"/>
+              <a:buNone/>
             </a:pPr>
             <a:r>
               <a:rPr lang="en-US" sz="1500" dirty="0">
@@ -25957,15 +25933,14 @@
             </a:r>
           </a:p>
           <a:p>
-            <a:pPr marL="274320" indent="-274320" algn="l">
+            <a:pPr marL="0" indent="0" algn="ctr">
               <a:lnSpc>
                 <a:spcPct val="104000"/>
               </a:lnSpc>
               <a:spcBef>
                 <a:spcPts val="300"/>
               </a:spcBef>
-              <a:buFont typeface="Arial"/>
-              <a:buChar char="•"/>
+              <a:buNone/>
             </a:pPr>
             <a:r>
               <a:rPr lang="en-US" sz="1500" dirty="0">
@@ -25979,15 +25954,14 @@
             </a:r>
           </a:p>
           <a:p>
-            <a:pPr marL="274320" indent="-274320" algn="l">
+            <a:pPr marL="0" indent="0" algn="ctr">
               <a:lnSpc>
                 <a:spcPct val="104000"/>
               </a:lnSpc>
               <a:spcBef>
                 <a:spcPts val="300"/>
               </a:spcBef>
-              <a:buFont typeface="Arial"/>
-              <a:buChar char="•"/>
+              <a:buNone/>
             </a:pPr>
             <a:r>
               <a:rPr lang="en-US" sz="1500" dirty="0">
@@ -26320,12 +26294,12 @@
           </a:ln>
         </p:spPr>
         <p:txBody>
-          <a:bodyPr wrap="square" lIns="137160" tIns="91440" rIns="137160" bIns="91440" rtlCol="0" anchor="t">
+          <a:bodyPr wrap="square" lIns="137160" tIns="91440" rIns="137160" bIns="91440" rtlCol="0" anchor="ctr">
             <a:normAutofit/>
           </a:bodyPr>
           <a:lstStyle/>
           <a:p>
-            <a:pPr marL="0" indent="0" algn="l">
+            <a:pPr marL="0" indent="0" algn="ctr">
               <a:lnSpc>
                 <a:spcPct val="104000"/>
               </a:lnSpc>
@@ -26346,7 +26320,7 @@
             </a:r>
           </a:p>
           <a:p>
-            <a:pPr marL="0" indent="0" algn="l">
+            <a:pPr marL="0" indent="0" algn="ctr">
               <a:lnSpc>
                 <a:spcPct val="104000"/>
               </a:lnSpc>
@@ -26433,12 +26407,12 @@
           </a:ln>
         </p:spPr>
         <p:txBody>
-          <a:bodyPr wrap="square" lIns="137160" tIns="91440" rIns="137160" bIns="91440" rtlCol="0" anchor="t">
+          <a:bodyPr wrap="square" lIns="137160" tIns="91440" rIns="137160" bIns="91440" rtlCol="0" anchor="ctr">
             <a:normAutofit/>
           </a:bodyPr>
           <a:lstStyle/>
           <a:p>
-            <a:pPr marL="0" indent="0" algn="l">
+            <a:pPr marL="0" indent="0" algn="ctr">
               <a:lnSpc>
                 <a:spcPct val="104000"/>
               </a:lnSpc>
@@ -26459,7 +26433,7 @@
             </a:r>
           </a:p>
           <a:p>
-            <a:pPr marL="0" indent="0" algn="l">
+            <a:pPr marL="0" indent="0" algn="ctr">
               <a:lnSpc>
                 <a:spcPct val="104000"/>
               </a:lnSpc>
@@ -26546,12 +26520,12 @@
           </a:ln>
         </p:spPr>
         <p:txBody>
-          <a:bodyPr wrap="square" lIns="137160" tIns="91440" rIns="137160" bIns="91440" rtlCol="0" anchor="t">
+          <a:bodyPr wrap="square" lIns="137160" tIns="91440" rIns="137160" bIns="91440" rtlCol="0" anchor="ctr">
             <a:normAutofit/>
           </a:bodyPr>
           <a:lstStyle/>
           <a:p>
-            <a:pPr marL="0" indent="0" algn="l">
+            <a:pPr marL="0" indent="0" algn="ctr">
               <a:lnSpc>
                 <a:spcPct val="104000"/>
               </a:lnSpc>
@@ -26572,7 +26546,7 @@
             </a:r>
           </a:p>
           <a:p>
-            <a:pPr marL="0" indent="0" algn="l">
+            <a:pPr marL="0" indent="0" algn="ctr">
               <a:lnSpc>
                 <a:spcPct val="104000"/>
               </a:lnSpc>
@@ -26879,7 +26853,7 @@
                 <a:latin typeface="Arial"/>
                 <a:cs typeface="Arial"/>
               </a:rPr>
-              <a:t>KTC: khoảng tin cậy. Ngưỡng: mức khác biệt lớn nhất ta chấp nhận, định trước</a:t>
+              <a:t>KTC: khoảng tin cậy. Ngưỡng: mức khác biệt lớn nhất chấp nhận được, định trước</a:t>
             </a:r>
           </a:p>
         </p:txBody>
@@ -26949,12 +26923,12 @@
           </a:ln>
         </p:spPr>
         <p:txBody>
-          <a:bodyPr wrap="square" lIns="137160" tIns="91440" rIns="137160" bIns="91440" rtlCol="0" anchor="t">
+          <a:bodyPr wrap="square" lIns="137160" tIns="91440" rIns="137160" bIns="91440" rtlCol="0" anchor="ctr">
             <a:normAutofit/>
           </a:bodyPr>
           <a:lstStyle/>
           <a:p>
-            <a:pPr marL="0" indent="0" algn="l">
+            <a:pPr marL="0" indent="0" algn="ctr">
               <a:lnSpc>
                 <a:spcPct val="104000"/>
               </a:lnSpc>
@@ -26975,7 +26949,7 @@
             </a:r>
           </a:p>
           <a:p>
-            <a:pPr marL="0" indent="0" algn="l">
+            <a:pPr marL="0" indent="0" algn="ctr">
               <a:lnSpc>
                 <a:spcPct val="104000"/>
               </a:lnSpc>
@@ -27062,12 +27036,12 @@
           </a:ln>
         </p:spPr>
         <p:txBody>
-          <a:bodyPr wrap="square" lIns="137160" tIns="91440" rIns="137160" bIns="91440" rtlCol="0" anchor="t">
+          <a:bodyPr wrap="square" lIns="137160" tIns="91440" rIns="137160" bIns="91440" rtlCol="0" anchor="ctr">
             <a:normAutofit/>
           </a:bodyPr>
           <a:lstStyle/>
           <a:p>
-            <a:pPr marL="0" indent="0" algn="l">
+            <a:pPr marL="0" indent="0" algn="ctr">
               <a:lnSpc>
                 <a:spcPct val="104000"/>
               </a:lnSpc>
@@ -27088,7 +27062,7 @@
             </a:r>
           </a:p>
           <a:p>
-            <a:pPr marL="0" indent="0" algn="l">
+            <a:pPr marL="0" indent="0" algn="ctr">
               <a:lnSpc>
                 <a:spcPct val="104000"/>
               </a:lnSpc>
@@ -27175,12 +27149,12 @@
           </a:ln>
         </p:spPr>
         <p:txBody>
-          <a:bodyPr wrap="square" lIns="137160" tIns="91440" rIns="137160" bIns="91440" rtlCol="0" anchor="t">
+          <a:bodyPr wrap="square" lIns="137160" tIns="91440" rIns="137160" bIns="91440" rtlCol="0" anchor="ctr">
             <a:normAutofit/>
           </a:bodyPr>
           <a:lstStyle/>
           <a:p>
-            <a:pPr marL="0" indent="0" algn="l">
+            <a:pPr marL="0" indent="0" algn="ctr">
               <a:lnSpc>
                 <a:spcPct val="104000"/>
               </a:lnSpc>
@@ -27201,7 +27175,7 @@
             </a:r>
           </a:p>
           <a:p>
-            <a:pPr marL="0" indent="0" algn="l">
+            <a:pPr marL="0" indent="0" algn="ctr">
               <a:lnSpc>
                 <a:spcPct val="104000"/>
               </a:lnSpc>
@@ -27539,12 +27513,12 @@
           </a:ln>
         </p:spPr>
         <p:txBody>
-          <a:bodyPr wrap="square" lIns="137160" tIns="91440" rIns="137160" bIns="91440" rtlCol="0" anchor="t">
+          <a:bodyPr wrap="square" lIns="137160" tIns="91440" rIns="137160" bIns="91440" rtlCol="0" anchor="ctr">
             <a:normAutofit/>
           </a:bodyPr>
           <a:lstStyle/>
           <a:p>
-            <a:pPr marL="0" indent="0" algn="l">
+            <a:pPr marL="0" indent="0" algn="ctr">
               <a:lnSpc>
                 <a:spcPct val="104000"/>
               </a:lnSpc>
@@ -27565,7 +27539,7 @@
             </a:r>
           </a:p>
           <a:p>
-            <a:pPr marL="0" indent="0" algn="l">
+            <a:pPr marL="0" indent="0" algn="ctr">
               <a:lnSpc>
                 <a:spcPct val="104000"/>
               </a:lnSpc>
@@ -27625,7 +27599,7 @@
                 <a:latin typeface="Arial"/>
                 <a:cs typeface="Arial"/>
               </a:rPr>
-              <a:t>Chuỗi đối chứng</a:t>
+              <a:t>Chuỗi đối chứng</a:t>
             </a:r>
           </a:p>
         </p:txBody>
@@ -27652,12 +27626,12 @@
           </a:ln>
         </p:spPr>
         <p:txBody>
-          <a:bodyPr wrap="square" lIns="137160" tIns="91440" rIns="137160" bIns="91440" rtlCol="0" anchor="t">
+          <a:bodyPr wrap="square" lIns="137160" tIns="91440" rIns="137160" bIns="91440" rtlCol="0" anchor="ctr">
             <a:normAutofit/>
           </a:bodyPr>
           <a:lstStyle/>
           <a:p>
-            <a:pPr marL="0" indent="0" algn="l">
+            <a:pPr marL="0" indent="0" algn="ctr">
               <a:lnSpc>
                 <a:spcPct val="104000"/>
               </a:lnSpc>
@@ -27678,7 +27652,7 @@
             </a:r>
           </a:p>
           <a:p>
-            <a:pPr marL="0" indent="0" algn="l">
+            <a:pPr marL="0" indent="0" algn="ctr">
               <a:lnSpc>
                 <a:spcPct val="104000"/>
               </a:lnSpc>
@@ -27765,12 +27739,12 @@
           </a:ln>
         </p:spPr>
         <p:txBody>
-          <a:bodyPr wrap="square" lIns="137160" tIns="91440" rIns="137160" bIns="91440" rtlCol="0" anchor="t">
+          <a:bodyPr wrap="square" lIns="137160" tIns="91440" rIns="137160" bIns="91440" rtlCol="0" anchor="ctr">
             <a:normAutofit/>
           </a:bodyPr>
           <a:lstStyle/>
           <a:p>
-            <a:pPr marL="0" indent="0" algn="l">
+            <a:pPr marL="0" indent="0" algn="ctr">
               <a:lnSpc>
                 <a:spcPct val="104000"/>
               </a:lnSpc>
@@ -27791,7 +27765,7 @@
             </a:r>
           </a:p>
           <a:p>
-            <a:pPr marL="0" indent="0" algn="l">
+            <a:pPr marL="0" indent="0" algn="ctr">
               <a:lnSpc>
                 <a:spcPct val="104000"/>
               </a:lnSpc>
@@ -27863,7 +27837,7 @@
                 <a:latin typeface="Arial"/>
                 <a:cs typeface="Arial"/>
               </a:rPr>
-              <a:t>Trung bình trước-sau là yếu. Chuỗi thời gian dài có đối chứng mạnh hơn nhiều.</a:t>
+              <a:t>Trung bình trước-sau là yếu. Chuỗi thời gian dài có đối chứng mạnh hơn nhiều.</a:t>
             </a:r>
           </a:p>
         </p:txBody>
@@ -28661,12 +28635,12 @@
           </a:ln>
         </p:spPr>
         <p:txBody>
-          <a:bodyPr wrap="square" lIns="137160" tIns="91440" rIns="137160" bIns="91440" rtlCol="0" anchor="t">
+          <a:bodyPr wrap="square" lIns="137160" tIns="91440" rIns="137160" bIns="91440" rtlCol="0" anchor="ctr">
             <a:normAutofit/>
           </a:bodyPr>
           <a:lstStyle/>
           <a:p>
-            <a:pPr marL="0" indent="0" algn="l">
+            <a:pPr marL="0" indent="0" algn="ctr">
               <a:lnSpc>
                 <a:spcPct val="104000"/>
               </a:lnSpc>
@@ -28687,7 +28661,7 @@
             </a:r>
           </a:p>
           <a:p>
-            <a:pPr marL="0" indent="0" algn="l">
+            <a:pPr marL="0" indent="0" algn="ctr">
               <a:lnSpc>
                 <a:spcPct val="104000"/>
               </a:lnSpc>
@@ -28708,7 +28682,7 @@
             </a:r>
           </a:p>
           <a:p>
-            <a:pPr marL="0" indent="0" algn="l">
+            <a:pPr marL="0" indent="0" algn="ctr">
               <a:lnSpc>
                 <a:spcPct val="104000"/>
               </a:lnSpc>
@@ -28795,12 +28769,12 @@
           </a:ln>
         </p:spPr>
         <p:txBody>
-          <a:bodyPr wrap="square" lIns="137160" tIns="91440" rIns="137160" bIns="91440" rtlCol="0" anchor="t">
+          <a:bodyPr wrap="square" lIns="137160" tIns="91440" rIns="137160" bIns="91440" rtlCol="0" anchor="ctr">
             <a:normAutofit/>
           </a:bodyPr>
           <a:lstStyle/>
           <a:p>
-            <a:pPr marL="0" indent="0" algn="l">
+            <a:pPr marL="0" indent="0" algn="ctr">
               <a:lnSpc>
                 <a:spcPct val="104000"/>
               </a:lnSpc>
@@ -28817,11 +28791,11 @@
                 <a:latin typeface="Arial"/>
                 <a:cs typeface="Arial"/>
               </a:rPr>
-              <a:t>So sánh các nhóm, ta theo dõi</a:t>
-            </a:r>
-          </a:p>
-          <a:p>
-            <a:pPr marL="0" indent="0" algn="l">
+              <a:t>So sánh các nhóm, chỉ theo dõi</a:t>
+            </a:r>
+          </a:p>
+          <a:p>
+            <a:pPr marL="0" indent="0" algn="ctr">
               <a:lnSpc>
                 <a:spcPct val="104000"/>
               </a:lnSpc>
@@ -28842,7 +28816,7 @@
             </a:r>
           </a:p>
           <a:p>
-            <a:pPr marL="0" indent="0" algn="l">
+            <a:pPr marL="0" indent="0" algn="ctr">
               <a:lnSpc>
                 <a:spcPct val="104000"/>
               </a:lnSpc>
@@ -28929,12 +28903,12 @@
           </a:ln>
         </p:spPr>
         <p:txBody>
-          <a:bodyPr wrap="square" lIns="137160" tIns="91440" rIns="137160" bIns="91440" rtlCol="0" anchor="t">
+          <a:bodyPr wrap="square" lIns="137160" tIns="91440" rIns="137160" bIns="91440" rtlCol="0" anchor="ctr">
             <a:normAutofit/>
           </a:bodyPr>
           <a:lstStyle/>
           <a:p>
-            <a:pPr marL="0" indent="0" algn="l">
+            <a:pPr marL="0" indent="0" algn="ctr">
               <a:lnSpc>
                 <a:spcPct val="104000"/>
               </a:lnSpc>
@@ -28951,11 +28925,11 @@
                 <a:latin typeface="Arial"/>
                 <a:cs typeface="Arial"/>
               </a:rPr>
-              <a:t>So sánh các nhóm, ta chỉ định</a:t>
-            </a:r>
-          </a:p>
-          <a:p>
-            <a:pPr marL="0" indent="0" algn="l">
+              <a:t>So sánh các nhóm, nhà nghiên cứu chỉ định</a:t>
+            </a:r>
+          </a:p>
+          <a:p>
+            <a:pPr marL="0" indent="0" algn="ctr">
               <a:lnSpc>
                 <a:spcPct val="104000"/>
               </a:lnSpc>
@@ -28972,11 +28946,11 @@
                 <a:latin typeface="Arial"/>
                 <a:cs typeface="Arial"/>
               </a:rPr>
-              <a:t>Thử nghiệm ngẫu nhiên có đối chứng (RCT)</a:t>
-            </a:r>
-          </a:p>
-          <a:p>
-            <a:pPr marL="0" indent="0" algn="l">
+              <a:t>Thử nghiệm ngẫu nhiên có đối chứng (RCT)</a:t>
+            </a:r>
+          </a:p>
+          <a:p>
+            <a:pPr marL="0" indent="0" algn="ctr">
               <a:lnSpc>
                 <a:spcPct val="104000"/>
               </a:lnSpc>
@@ -29063,12 +29037,12 @@
           </a:ln>
         </p:spPr>
         <p:txBody>
-          <a:bodyPr wrap="square" lIns="137160" tIns="91440" rIns="137160" bIns="91440" rtlCol="0" anchor="t">
+          <a:bodyPr wrap="square" lIns="137160" tIns="91440" rIns="137160" bIns="91440" rtlCol="0" anchor="ctr">
             <a:normAutofit/>
           </a:bodyPr>
           <a:lstStyle/>
           <a:p>
-            <a:pPr marL="0" indent="0" algn="l">
+            <a:pPr marL="0" indent="0" algn="ctr">
               <a:lnSpc>
                 <a:spcPct val="104000"/>
               </a:lnSpc>
@@ -29089,7 +29063,7 @@
             </a:r>
           </a:p>
           <a:p>
-            <a:pPr marL="0" indent="0" algn="l">
+            <a:pPr marL="0" indent="0" algn="ctr">
               <a:lnSpc>
                 <a:spcPct val="104000"/>
               </a:lnSpc>
@@ -29110,7 +29084,7 @@
             </a:r>
           </a:p>
           <a:p>
-            <a:pPr marL="0" indent="0" algn="l">
+            <a:pPr marL="0" indent="0" algn="ctr">
               <a:lnSpc>
                 <a:spcPct val="104000"/>
               </a:lnSpc>
@@ -30078,12 +30052,12 @@
           </a:ln>
         </p:spPr>
         <p:txBody>
-          <a:bodyPr wrap="square" lIns="137160" tIns="91440" rIns="137160" bIns="91440" rtlCol="0" anchor="t">
+          <a:bodyPr wrap="square" lIns="137160" tIns="91440" rIns="137160" bIns="91440" rtlCol="0" anchor="ctr">
             <a:normAutofit/>
           </a:bodyPr>
           <a:lstStyle/>
           <a:p>
-            <a:pPr marL="0" indent="0" algn="l">
+            <a:pPr marL="0" indent="0" algn="ctr">
               <a:lnSpc>
                 <a:spcPct val="104000"/>
               </a:lnSpc>
@@ -30104,7 +30078,7 @@
             </a:r>
           </a:p>
           <a:p>
-            <a:pPr marL="0" indent="0" algn="l">
+            <a:pPr marL="0" indent="0" algn="ctr">
               <a:lnSpc>
                 <a:spcPct val="104000"/>
               </a:lnSpc>
@@ -30125,7 +30099,7 @@
             </a:r>
           </a:p>
           <a:p>
-            <a:pPr marL="0" indent="0" algn="l">
+            <a:pPr marL="0" indent="0" algn="ctr">
               <a:lnSpc>
                 <a:spcPct val="104000"/>
               </a:lnSpc>
@@ -30146,7 +30120,7 @@
             </a:r>
           </a:p>
           <a:p>
-            <a:pPr marL="0" indent="0" algn="l">
+            <a:pPr marL="0" indent="0" algn="ctr">
               <a:lnSpc>
                 <a:spcPct val="104000"/>
               </a:lnSpc>
@@ -30233,12 +30207,12 @@
           </a:ln>
         </p:spPr>
         <p:txBody>
-          <a:bodyPr wrap="square" lIns="137160" tIns="91440" rIns="137160" bIns="91440" rtlCol="0" anchor="t">
+          <a:bodyPr wrap="square" lIns="137160" tIns="91440" rIns="137160" bIns="91440" rtlCol="0" anchor="ctr">
             <a:normAutofit/>
           </a:bodyPr>
           <a:lstStyle/>
           <a:p>
-            <a:pPr marL="0" indent="0" algn="l">
+            <a:pPr marL="0" indent="0" algn="ctr">
               <a:lnSpc>
                 <a:spcPct val="104000"/>
               </a:lnSpc>
@@ -30255,11 +30229,11 @@
                 <a:latin typeface="Arial"/>
                 <a:cs typeface="Arial"/>
               </a:rPr>
-              <a:t>Một bức ảnh chụp cả khoa, trong một ngày</a:t>
-            </a:r>
-          </a:p>
-          <a:p>
-            <a:pPr marL="0" indent="0" algn="l">
+              <a:t>Khảo sát cả khoa trong một ngày</a:t>
+            </a:r>
+          </a:p>
+          <a:p>
+            <a:pPr marL="0" indent="0" algn="ctr">
               <a:lnSpc>
                 <a:spcPct val="104000"/>
               </a:lnSpc>
@@ -30280,7 +30254,7 @@
             </a:r>
           </a:p>
           <a:p>
-            <a:pPr marL="0" indent="0" algn="l">
+            <a:pPr marL="0" indent="0" algn="ctr">
               <a:lnSpc>
                 <a:spcPct val="104000"/>
               </a:lnSpc>
@@ -30301,7 +30275,7 @@
             </a:r>
           </a:p>
           <a:p>
-            <a:pPr marL="0" indent="0" algn="l">
+            <a:pPr marL="0" indent="0" algn="ctr">
               <a:lnSpc>
                 <a:spcPct val="104000"/>
               </a:lnSpc>
@@ -30680,12 +30654,12 @@
           </a:ln>
         </p:spPr>
         <p:txBody>
-          <a:bodyPr wrap="square" lIns="110000" tIns="91440" rIns="110000" bIns="91440" rtlCol="0" anchor="t">
+          <a:bodyPr wrap="square" lIns="110000" tIns="91440" rIns="110000" bIns="91440" rtlCol="0" anchor="ctr">
             <a:normAutofit/>
           </a:bodyPr>
           <a:lstStyle/>
           <a:p>
-            <a:pPr marL="0" indent="0" algn="l">
+            <a:pPr marL="0" indent="0" algn="ctr">
               <a:lnSpc>
                 <a:spcPct val="104000"/>
               </a:lnSpc>
@@ -30774,12 +30748,12 @@
           </a:ln>
         </p:spPr>
         <p:txBody>
-          <a:bodyPr wrap="square" lIns="110000" tIns="91440" rIns="110000" bIns="91440" rtlCol="0" anchor="t">
+          <a:bodyPr wrap="square" lIns="110000" tIns="91440" rIns="110000" bIns="91440" rtlCol="0" anchor="ctr">
             <a:normAutofit/>
           </a:bodyPr>
           <a:lstStyle/>
           <a:p>
-            <a:pPr marL="0" indent="0" algn="l">
+            <a:pPr marL="0" indent="0" algn="ctr">
               <a:lnSpc>
                 <a:spcPct val="104000"/>
               </a:lnSpc>
@@ -30868,12 +30842,12 @@
           </a:ln>
         </p:spPr>
         <p:txBody>
-          <a:bodyPr wrap="square" lIns="110000" tIns="91440" rIns="110000" bIns="91440" rtlCol="0" anchor="t">
+          <a:bodyPr wrap="square" lIns="110000" tIns="91440" rIns="110000" bIns="91440" rtlCol="0" anchor="ctr">
             <a:normAutofit/>
           </a:bodyPr>
           <a:lstStyle/>
           <a:p>
-            <a:pPr marL="0" indent="0" algn="l">
+            <a:pPr marL="0" indent="0" algn="ctr">
               <a:lnSpc>
                 <a:spcPct val="104000"/>
               </a:lnSpc>
@@ -30962,12 +30936,12 @@
           </a:ln>
         </p:spPr>
         <p:txBody>
-          <a:bodyPr wrap="square" lIns="110000" tIns="91440" rIns="110000" bIns="91440" rtlCol="0" anchor="t">
+          <a:bodyPr wrap="square" lIns="110000" tIns="91440" rIns="110000" bIns="91440" rtlCol="0" anchor="ctr">
             <a:normAutofit/>
           </a:bodyPr>
           <a:lstStyle/>
           <a:p>
-            <a:pPr marL="0" indent="0" algn="l">
+            <a:pPr marL="0" indent="0" algn="ctr">
               <a:lnSpc>
                 <a:spcPct val="104000"/>
               </a:lnSpc>
@@ -31039,7 +31013,7 @@
                 <a:latin typeface="Arial"/>
                 <a:cs typeface="Arial"/>
               </a:rPr>
-              <a:t>Một bức ảnh chụp cho tỷ lệ hiện mắc. Không cho biết cái nào có trước.</a:t>
+              <a:t>Đo tại một thời điểm cho tỷ lệ hiện mắc. Không cho biết cái nào có trước.</a:t>
             </a:r>
           </a:p>
         </p:txBody>

--- a/vi/files/slides/Session_3_VN.pptx
+++ b/vi/files/slides/Session_3_VN.pptx
@@ -1182,7 +1182,7 @@
           <a:p>
             <a:r>
               <a:rPr lang="en-US" sz="1400" b="0" dirty="0"/>
-              <a:t>Bước 1: nhóm thuần tập: ai được theo dõi (và ai bị loại: người bệnh rời ICU trước ngày 3). Bước 2: phơi nhiễm được đo trước kết cục. Bước 3: kết cục được đếm sau đó. Bước 4: so sánh các nhóm. Hyun ghép cặp theo điểm xu hướng (propensity score) để các nhóm tương đồng (483, 373 và 392 cặp cho ngày 1, 2 và 3). Kết quả ngày 2: tỷ số nguy cơ tức thời (HR) 2.13 (khoảng tin cậy, KTC, 95% 1.48-3.06). Ngày 1 không khác biệt rõ. HR được giải thích kỹ ở Buổi 6. Lúc này hiểu là 'tốc độ tử vong khoảng gấp đôi'.</a:t>
+              <a:t>Bước 1: nhóm thuần tập: ai được theo dõi (và ai bị loại: người bệnh rời ICU trước ngày 3). Bước 2: phơi nhiễm được đo trước kết cục. Bước 3: kết cục được đếm sau đó. Bước 4: so sánh các nhóm. Hyun ghép cặp theo điểm xu hướng (propensity score) để các nhóm tương đồng (483, 373 và 392 cặp cho ngày 1, 2 và 3). Kết quả ngày 2: tỷ số nguy cơ tức thời (HR) 2.13 (khoảng tin cậy, KTC, 95% 1.48-3.06). Ngày 1 không khác biệt rõ. HR được giải thích kỹ ở Buổi 6. Học viên đã học cách đọc một bài báo ở Buổi 2 (2.3): câu hỏi, thiết kế, kết quả chính. Slide này áp dụng điều đó. Bài báo báo cáo tỷ số nguy cơ tức thời (hazard ratio, HR); slide diễn đạt bằng lời thường. Tỷ số nguy cơ (RR) và tỷ số chênh (OR) học ở Buổi 4, HR ở Buổi 6, kèm một slide tóm tắt khi nào dùng tỷ số nào. Lúc này hiểu là 'tốc độ tử vong khoảng gấp đôi'.</a:t>
             </a:r>
           </a:p>
           <a:p>
@@ -10167,7 +10167,7 @@
                 <a:latin typeface="Arial"/>
                 <a:cs typeface="Arial"/>
               </a:rPr>
-              <a:t>Câu hỏi: cân bằng dịch dương có liên quan với tử vong ngày 28 không?</a:t>
+              <a:t>Đọc như ở Buổi 2. Câu hỏi: cân bằng dịch dương có liên quan với tử vong ngày 28 không?</a:t>
             </a:r>
           </a:p>
         </p:txBody>
@@ -10543,7 +10543,7 @@
                 <a:latin typeface="Arial"/>
                 <a:cs typeface="Arial"/>
               </a:rPr>
-              <a:t>Các cặp đã ghép. Tỷ số nguy cơ tức thời (HR) 2.13 ở ngày 2</a:t>
+              <a:t>Các cặp đã ghép. Ngày 2: tử vong gấp khoảng 2 lần</a:t>
             </a:r>
           </a:p>
         </p:txBody>
@@ -14202,7 +14202,7 @@
         </p:nvSpPr>
         <p:spPr>
           <a:xfrm>
-            <a:off x="457200" y="1396607"/>
+            <a:off x="457200" y="1304003"/>
             <a:ext cx="5538800" cy="640000"/>
           </a:xfrm>
           <a:prstGeom prst="rect">
@@ -14245,8 +14245,8 @@
         </p:nvSpPr>
         <p:spPr>
           <a:xfrm>
-            <a:off x="457200" y="2036607"/>
-            <a:ext cx="5538800" cy="2860178"/>
+            <a:off x="457200" y="1944003"/>
+            <a:ext cx="5538800" cy="3137991"/>
           </a:xfrm>
           <a:prstGeom prst="rect">
             <a:avLst/>
@@ -14399,7 +14399,7 @@
         </p:nvSpPr>
         <p:spPr>
           <a:xfrm>
-            <a:off x="6196000" y="1396607"/>
+            <a:off x="6196000" y="1304003"/>
             <a:ext cx="5538800" cy="640000"/>
           </a:xfrm>
           <a:prstGeom prst="rect">
@@ -14442,8 +14442,8 @@
         </p:nvSpPr>
         <p:spPr>
           <a:xfrm>
-            <a:off x="6196000" y="2036607"/>
-            <a:ext cx="5538800" cy="2860178"/>
+            <a:off x="6196000" y="1944003"/>
+            <a:ext cx="5538800" cy="3137991"/>
           </a:xfrm>
           <a:prstGeom prst="rect">
             <a:avLst/>
@@ -14520,7 +14520,7 @@
                 <a:latin typeface="Arial"/>
                 <a:cs typeface="Arial"/>
               </a:rPr>
-              <a:t>'Có liên quan' (HR 2.13 ở ngày 2)</a:t>
+              <a:t>'Có liên quan' (ngày 2: tử vong gấp khoảng 2 lần)</a:t>
             </a:r>
           </a:p>
           <a:p>

--- a/vi/files/slides/Session_3_VN.pptx
+++ b/vi/files/slides/Session_3_VN.pptx
@@ -732,43 +732,25 @@
           <a:p>
             <a:r>
               <a:rPr lang="en-US" sz="1400" b="0" dirty="0"/>
-              <a:t>Mở đầu Buổi 3 (19:30). Chào mừng đến Tuần 3. Ở Buổi 1 và 2 cả lớp đã đặt câu hỏi và tìm bằng chứng. Hôm nay chọn cách một nghiên cứu trả lời câu hỏi. Thứ Bảy tuần sau (Buổi 4) đánh giá có tin được câu trả lời không và tác động lớn đến đâu.</a:t>
+              <a:t>Bắt đầu 19:30. Ý chính: thiết kế quyết định bạn được kết luận điều gì.</a:t>
             </a:r>
           </a:p>
           <a:p>
             <a:r>
               <a:rPr lang="en-US" sz="1400" b="0" dirty="0"/>
-              <a:t>Ý chính: thiết kế quyết định điều được phép kết luận ở cuối nghiên cứu. Câu hỏi hay mà chọn sai thiết kế sẽ cho ra một nghiên cứu yếu.</a:t>
+              <a:t>Hỏi: 'Ai đã từng thu thập số liệu cho một nghiên cứu?' Dùng họ làm ví dụ về sau.</a:t>
             </a:r>
           </a:p>
           <a:p>
             <a:r>
               <a:rPr lang="en-US" sz="1400" b="0" dirty="0"/>
-              <a:t>Cách học trực tuyến (nhắc ngắn): câu trả lời nhanh qua bình chọn (poll). Với các câu hỏi khác, giảng viên mời hai ba người trả lời, bật micro. Bấm nút 'giơ tay' khi muốn phát biểu. Mọi bài tập đều do cả lớp cùng làm, giảng viên gõ câu trả lời chung lên màn hình chia sẻ. Không chia nhóm.</a:t>
+              <a:t>Giờ: 19:30 ôn tập, 19:40 phần 3.1, 20:25 Gọi tên thiết kế, 20:40 giải lao, 20:55 phần 3.2, 21:25 chọn thiết kế, 21:40 xây dựng đề cương 3, 22:25 tổng kết.</a:t>
             </a:r>
           </a:p>
           <a:p>
             <a:r>
               <a:rPr lang="en-US" sz="1400" b="0" dirty="0"/>
-              <a:t>Nhịp độ: buổi này cố ý đi chậm. Mỗi thiết kế được trình bày bằng một hình hoặc một bảng ngắn, rồi một ví dụ từng bước, rồi một câu bình chọn nhanh.</a:t>
-            </a:r>
-          </a:p>
-          <a:p>
-            <a:r>
-              <a:rPr lang="en-US" sz="1400" b="0" dirty="0"/>
-              <a:t>Ví dụ xuyên suốt: câu hỏi về dịch truyền được trả lời hai lần: bằng một thử nghiệm ngẫu nhiên nhỏ (Bài báo 1, Boulet 2024) và một nghiên cứu thuần tập lớn (Bài báo 2, Hyun 2023). Cả hai bài nằm trong thư mục khóa học, Course/Papers.</a:t>
-            </a:r>
-          </a:p>
-          <a:p>
-            <a:r>
-              <a:rPr lang="en-US" sz="1400" b="0" dirty="0"/>
-              <a:t>Hỏi cả lớp (mời hai ba người trả lời, bật micro): ai đã từng thu thập dữ liệu cho một nghiên cứu? Dự kiến: vài người. Dùng họ làm ví dụ sau.</a:t>
-            </a:r>
-          </a:p>
-          <a:p>
-            <a:r>
-              <a:rPr lang="en-US" sz="1400" b="0" dirty="0"/>
-              <a:t>Thời gian: 1 phút. Lịch: 19:30 ôn tập (10), 19:40 phần 3.1 (45), 20:25 Gọi tên thiết kế (15), 20:40 giải lao (15), 20:55 phần 3.2 (30), 21:25 chọn thiết kế (15), 21:40 xây dựng đề cương 3 (45), 22:25 tổng kết (5), 22:30 kết thúc.</a:t>
+              <a:t>Thời gian: 1 phút.</a:t>
             </a:r>
           </a:p>
         </p:txBody>
@@ -849,31 +831,19 @@
           <a:p>
             <a:r>
               <a:rPr lang="en-US" sz="1400" b="0" dirty="0"/>
-              <a:t>Dùng con trỏ chuột vẽ theo mũi tên từ phải sang trái. Bắt đầu từ hôm nay, với những người đã có kết cục (nhóm bệnh) và những người tương tự không có (nhóm chứng). Rồi nhìn ngược lại tìm phơi nhiễm.</a:t>
+              <a:t>Lần theo mũi tên từ phải sang trái. Phù hợp với kết cục hiếm. Điểm yếu: sai lệch nhớ lại, khó chọn nhóm chứng, chỉ tính được OR.</a:t>
             </a:r>
           </a:p>
           <a:p>
             <a:r>
               <a:rPr lang="en-US" sz="1400" b="0" dirty="0"/>
-              <a:t>Ví dụ trên hình: người bệnh ICU bị nhiễm nấm Candida máu (nhóm bệnh) so với người bệnh ICU không bị (nhóm chứng). Tra hồ sơ xem có nuôi ăn tĩnh mạch không.</a:t>
+              <a:t>Bệnh-chứng chọn theo kết cục, thuần tập chọn theo phơi nhiễm.</a:t>
             </a:r>
           </a:p>
           <a:p>
             <a:r>
               <a:rPr lang="en-US" sz="1400" b="0" dirty="0"/>
-              <a:t>Điểm mạnh: hiệu quả với kết cục hiếm hoặc thời gian ủ bệnh dài, vì không cần theo dõi hàng nghìn người. Điểm yếu: sai lệch nhớ lại (recall bias), khó chọn nhóm chứng tốt, và chỉ tính được tỷ số chênh (OR), không tính được nguy cơ.</a:t>
-            </a:r>
-          </a:p>
-          <a:p>
-            <a:r>
-              <a:rPr lang="en-US" sz="1400" b="0" dirty="0"/>
-              <a:t>Quan niệm sai: 'bệnh–chứng giống thuần tập hồi cứu vì cùng dùng hồ sơ cũ'. Khác biệt nằm ở cách chọn người: theo kết cục trong bệnh–chứng, theo phơi nhiễm trong thuần tập.</a:t>
-            </a:r>
-          </a:p>
-          <a:p>
-            <a:r>
-              <a:rPr lang="en-US" sz="1400" b="0" dirty="0"/>
-              <a:t>Hỏi cả lớp (mời hai ba người trả lời, bật micro): vì sao không tính được nguy cơ nhiễm Candida máu từ nghiên cứu bệnh–chứng? Dự kiến: nhà nghiên cứu tự chọn số ca bệnh và ca chứng, nên tỷ lệ có kết cục do thiết kế quyết định chứ không phải do tự nhiên.</a:t>
+              <a:t>Hỏi: 'Vì sao không tính được nguy cơ nhiễm nấm Candida máu ở đây?' Mong đợi: mình tự chọn số ca bệnh và ca chứng.</a:t>
             </a:r>
           </a:p>
           <a:p>
@@ -960,25 +930,13 @@
           <a:p>
             <a:r>
               <a:rPr lang="en-US" sz="1400" b="0" dirty="0"/>
-              <a:t>Một ví dụ khác (ngoài câu hỏi về dịch truyền). Ở Buổi 4 cả lớp sẽ tính tỷ số chênh cho một nghiên cứu bệnh–chứng về câu hỏi dịch truyền dùng đúng các con số này (24/40 so với 16/80), nên hãy đi chậm.</a:t>
+              <a:t>Đi chậm: Buổi 4 dùng lại các số này để tính OR.</a:t>
             </a:r>
           </a:p>
           <a:p>
             <a:r>
               <a:rPr lang="en-US" sz="1400" b="0" dirty="0"/>
-              <a:t>Bước 1: ca bệnh là người có kết cục. Bước 2: ca chứng là những người tương tự không có kết cục, từ cùng nguồn (cùng ICU, cùng thời gian). Chọn ca chứng tốt là phần khó nhất. Bước 3: nhìn lại phơi nhiễm, cùng một cách cho cả hai nhóm. Bước 4: 60% ca bệnh so với 20% ca chứng có phơi nhiễm. Bước 5: kết quả là tỷ số chênh (OR = 6.0, sẽ tính thứ Bảy tuần sau).</a:t>
-            </a:r>
-          </a:p>
-          <a:p>
-            <a:r>
-              <a:rPr lang="en-US" sz="1400" b="0" dirty="0"/>
-              <a:t>Quan niệm sai: 'ca chứng nên là người tình nguyện khỏe mạnh'. Không. Ca chứng phải đến từ quần thể đã sinh ra ca bệnh, nếu không phép so sánh không công bằng.</a:t>
-            </a:r>
-          </a:p>
-          <a:p>
-            <a:r>
-              <a:rPr lang="en-US" sz="1400" b="0" dirty="0"/>
-              <a:t>Hỏi cả lớp (mời hai ba người trả lời, bật micro): vì sao không báo cáo được nguy cơ nhiễm Candida máu từ nghiên cứu này? Dự kiến: nhà nghiên cứu tự chọn số ca bệnh và ca chứng (1:2), nên tỷ lệ mắc do thiết kế quyết định.</a:t>
+              <a:t>Nhóm chứng phải đến từ cùng quần thể sinh ra ca bệnh, không phải người tình nguyện khỏe mạnh.</a:t>
             </a:r>
           </a:p>
           <a:p>
@@ -1065,31 +1023,13 @@
           <a:p>
             <a:r>
               <a:rPr lang="en-US" sz="1400" b="0" dirty="0"/>
-              <a:t>Mũi tên từ trái sang phải. Chia người theo phơi nhiễm (ở đây: cân bằng dịch dương và âm trong những ngày đầu ở ICU) rồi đếm ai có kết cục (tử vong ngày 28). Đó là Bài báo 2, Hyun 2023.</a:t>
+              <a:t>Mũi tên từ trái sang phải. Đây là Bài báo 2. Thuần tập hồi cứu vẫn đi từ phơi nhiễm đến kết cục.</a:t>
             </a:r>
           </a:p>
           <a:p>
             <a:r>
               <a:rPr lang="en-US" sz="1400" b="0" dirty="0"/>
-              <a:t>Thuần tập tiến cứu: bắt đầu từ bây giờ và theo dõi về tương lai. Thuần tập hồi cứu: bắt đầu từ hồ sơ cũ, nhưng logic vẫn là phơi nhiễm rồi đến kết cục. Hyun phân tích một sổ bộ (registry) có dữ liệu được thu thập tiến cứu.</a:t>
-            </a:r>
-          </a:p>
-          <a:p>
-            <a:r>
-              <a:rPr lang="en-US" sz="1400" b="0" dirty="0"/>
-              <a:t>Điểm mạnh: trình tự thời gian rõ, xét được nhiều kết cục, cho nguy cơ và tỷ lệ mới mắc. Điểm yếu: chậm và tốn kém nếu tiến cứu, kém với kết cục hiếm, và yếu tố nhiễu, vì nhà nghiên cứu không chọn ai được truyền nhiều dịch hơn.</a:t>
-            </a:r>
-          </a:p>
-          <a:p>
-            <a:r>
-              <a:rPr lang="en-US" sz="1400" b="0" dirty="0"/>
-              <a:t>Quan niệm sai: 'hồi cứu nghĩa là chất lượng kém'. Không hẳn. Chất lượng phụ thuộc vào việc ghi chép dữ liệu tốt đến đâu.</a:t>
-            </a:r>
-          </a:p>
-          <a:p>
-            <a:r>
-              <a:rPr lang="en-US" sz="1400" b="0" dirty="0"/>
-              <a:t>Hỏi cả lớp (mời hai ba người trả lời, bật micro): trong Hyun, ai quyết định người bệnh nào được truyền nhiều dịch hơn? Dự kiến: bác sĩ điều trị, tùy theo người bệnh trông nặng đến đâu. Giữ ý này cho phần yếu tố nhiễu ở Buổi 4.</a:t>
+              <a:t>Hỏi: 'Trong Hyun, ai quyết định người bệnh nào được truyền nhiều dịch hơn?' Mong đợi: bác sĩ điều trị, theo mức độ nặng. Giữ ý này cho Buổi 4.</a:t>
             </a:r>
           </a:p>
           <a:p>
@@ -1176,25 +1116,7 @@
           <a:p>
             <a:r>
               <a:rPr lang="en-US" sz="1400" b="0" dirty="0"/>
-              <a:t>Đây là cách Bài báo 2 (Hyun 2023, thư mục khóa học Course/Papers) hoạt động. Đây là ví dụ tốt về thuần tập xây dựng từ một sổ bộ có dữ liệu thu thập tiến cứu.</a:t>
-            </a:r>
-          </a:p>
-          <a:p>
-            <a:r>
-              <a:rPr lang="en-US" sz="1400" b="0" dirty="0"/>
-              <a:t>Bước 1: nhóm thuần tập: ai được theo dõi (và ai bị loại: người bệnh rời ICU trước ngày 3). Bước 2: phơi nhiễm được đo trước kết cục. Bước 3: kết cục được đếm sau đó. Bước 4: so sánh các nhóm. Hyun ghép cặp theo điểm xu hướng (propensity score) để các nhóm tương đồng (483, 373 và 392 cặp cho ngày 1, 2 và 3). Kết quả ngày 2: tỷ số nguy cơ tức thời (HR) 2.13 (khoảng tin cậy, KTC, 95% 1.48-3.06). Ngày 1 không khác biệt rõ. HR được giải thích kỹ ở Buổi 6. Học viên đã học cách đọc một bài báo ở Buổi 2 (2.3): câu hỏi, thiết kế, kết quả chính. Slide này áp dụng điều đó. Bài báo báo cáo tỷ số nguy cơ tức thời (hazard ratio, HR); slide diễn đạt bằng lời thường. Tỷ số nguy cơ (RR) và tỷ số chênh (OR) học ở Buổi 4, HR ở Buổi 6, kèm một slide tóm tắt khi nào dùng tỷ số nào. Lúc này hiểu là 'tốc độ tử vong khoảng gấp đôi'.</a:t>
-            </a:r>
-          </a:p>
-          <a:p>
-            <a:r>
-              <a:rPr lang="en-US" sz="1400" b="0" dirty="0"/>
-              <a:t>Quan niệm sai: 'thuần tập phải bắt đầu từ hôm nay'. Thuần tập hồi cứu dùng hồ sơ cũ nhưng vẫn đi từ phơi nhiễm đến kết cục.</a:t>
-            </a:r>
-          </a:p>
-          <a:p>
-            <a:r>
-              <a:rPr lang="en-US" sz="1400" b="0" dirty="0"/>
-              <a:t>Hỏi cả lớp (mời hai ba người trả lời, bật micro): ai quyết định người bệnh nào được truyền nhiều dịch hơn? Dự kiến: bác sĩ điều trị, thường vì người bệnh nặng hơn. Sẽ quay lại ở Buổi 4 (yếu tố nhiễu).</a:t>
+              <a:t>Kết quả ngày 2: HR 2.13 (KTC 95% 1.48-3.06). Ngày 1: không khác biệt rõ. Nói HR bằng lời thường. HR học ở Buổi 6.</a:t>
             </a:r>
           </a:p>
           <a:p>
@@ -1281,37 +1203,25 @@
           <a:p>
             <a:r>
               <a:rPr lang="en-US" sz="1400" b="0" dirty="0"/>
-              <a:t>Bài báo 1, Boulet 2024: 50 người lớn bị sốc nhiễm khuẩn được máy tính trung tâm phân nhóm ngẫu nhiên tỷ lệ 1:1 vào chiến lược hạn chế dịch không phải hồi sức hoặc chăm sóc thường quy. Hai người bệnh nhóm thường quy rút lại đồng ý, nên 24 + 24 được phân tích.</a:t>
+              <a:t>RCT là một thuần tập mà phơi nhiễm do ngẫu nhiên quyết định, nên hai nhóm giống nhau cả về yếu tố đo được và không đo được.</a:t>
             </a:r>
           </a:p>
           <a:p>
             <a:r>
               <a:rPr lang="en-US" sz="1400" b="0" dirty="0"/>
-              <a:t>Ý chính: RCT là một nghiên cứu thuần tập trong đó nhà nghiên cứu chỉ định phơi nhiễm bằng ngẫu nhiên. Vì vậy các nhóm giống nhau từ đầu, cả với yếu tố đã đo và yếu tố chưa đo.</a:t>
+              <a:t>Mỗi nhóm 6 ca tử vong: gần như không nói được gì về tử vong. Nghiên cứu thí điểm được tính lực mẫu cho cân bằng dịch.</a:t>
             </a:r>
           </a:p>
           <a:p>
             <a:r>
               <a:rPr lang="en-US" sz="1400" b="0" dirty="0"/>
-              <a:t>Lưu ý kết quả trung thực: mỗi nhóm có 6 ca tử vong đến ngày 28. Với 24 người bệnh mỗi nhóm, điều này gần như không nói được gì về tử vong. Thử nghiệm thí điểm được tính cỡ mẫu cho cân bằng dịch.</a:t>
+              <a:t>Hỏi: 'Sao không phân nhóm ngẫu nhiên mọi thứ?' Mong đợi: đạo đức, kết cục hiếm hoặc lâu, chi phí.</a:t>
             </a:r>
           </a:p>
           <a:p>
             <a:r>
               <a:rPr lang="en-US" sz="1400" b="0" dirty="0"/>
-              <a:t>Quan niệm sai: 'RCT = sự thật'. Một RCT nhỏ, không làm mù hoặc thực hiện kém vẫn có thể gây hiểu nhầm. Thiết kế là điều kiện cần, chưa đủ.</a:t>
-            </a:r>
-          </a:p>
-          <a:p>
-            <a:r>
-              <a:rPr lang="en-US" sz="1400" b="0" dirty="0"/>
-              <a:t>Hỏi cả lớp (mời hai ba người trả lời, bật micro): sao không phân nhóm ngẫu nhiên mọi thứ? Dự kiến: có phơi nhiễm không thể chỉ định về mặt đạo đức (hút thuốc, tác hại), có kết cục hiếm hoặc mất nhiều năm, và thử nghiệm rất tốn kém.</a:t>
-            </a:r>
-          </a:p>
-          <a:p>
-            <a:r>
-              <a:rPr lang="en-US" sz="1400" b="0" dirty="0"/>
-              <a:t>Thời gian: 2 phút. Sau giải lao, phần 3.2 cho thấy những cách bố trí thử nghiệm khác.</a:t>
+              <a:t>Thời gian: 2 phút.</a:t>
             </a:r>
           </a:p>
         </p:txBody>
@@ -1392,25 +1302,13 @@
           <a:p>
             <a:r>
               <a:rPr lang="en-US" sz="1400" b="0" dirty="0"/>
-              <a:t>Đây là Bài báo 1 (Boulet 2024, thư mục khóa học Course/Papers), thử nghiệm ngẫu nhiên thí điểm tại 3 ICU.</a:t>
+              <a:t>Bác sĩ biết người bệnh thuộc nhóm nào. Chỉ người bệnh và người phân tích thống kê bị làm mù.</a:t>
             </a:r>
           </a:p>
           <a:p>
             <a:r>
               <a:rPr lang="en-US" sz="1400" b="0" dirty="0"/>
-              <a:t>Bước 1: tiêu chuẩn chọn chặt chẽ (sẽ quay lại khi xây dựng đề cương). Bước 2: đồng ý tham gia (ở ICU thường từ người đại diện), trước hoặc ngay sau phân nhóm. Bước 3: phân nhóm bằng máy tính trung tâm giữ kín lần phân bổ tiếp theo (che giấu phân bổ, allocation concealment, Buổi 4). Bước 4: thực hiện hai chiến lược. Bước 5: kết cục chính là cân bằng dịch ngày 5. Tử vong ngày 28 là 6/24 ở mỗi nhóm.</a:t>
-            </a:r>
-          </a:p>
-          <a:p>
-            <a:r>
-              <a:rPr lang="en-US" sz="1400" b="0" dirty="0"/>
-              <a:t>Quan niệm sai: 'ngẫu nhiên = làm mù'. Không phải ở đây. Bác sĩ biết nhóm. Chỉ người bệnh và nhà thống kê được làm mù.</a:t>
-            </a:r>
-          </a:p>
-          <a:p>
-            <a:r>
-              <a:rPr lang="en-US" sz="1400" b="0" dirty="0"/>
-              <a:t>Hỏi cả lớp (bình chọn): bước nào biến đây thành thực nghiệm thay vì thuần tập? Dự kiến: bước 3, khi nhà nghiên cứu chỉ định phơi nhiễm.</a:t>
+              <a:t>Bình chọn: 'Bước nào làm đây thành thực nghiệm?' Mong đợi: bước 3, phân nhóm ngẫu nhiên.</a:t>
             </a:r>
           </a:p>
           <a:p>
@@ -1497,25 +1395,13 @@
           <a:p>
             <a:r>
               <a:rPr lang="en-US" sz="1400" b="0" dirty="0"/>
-              <a:t>Tổng quan hệ thống dùng chiến lược tìm kiếm định trước, có thể lặp lại (nhớ PubMed và toán tử Boolean ở Buổi 2) và thẩm định mọi nghiên cứu tìm được. Phân tích gộp sau đó gộp kết quả thành một ước lượng chung: hình thoi ở cuối biểu đồ rừng (forest plot).</a:t>
+              <a:t>Biểu đồ rừng minh họa. Phân tích gộp chỉ tốt bằng các nghiên cứu được gộp.</a:t>
             </a:r>
           </a:p>
           <a:p>
             <a:r>
               <a:rPr lang="en-US" sz="1400" b="0" dirty="0"/>
-              <a:t>Biểu đồ rừng ở đây chỉ minh họa: mỗi ô vuông là một thử nghiệm, đường ngang là khoảng tin cậy 95%, đường dọc là 'không khác biệt'. Buổi 4 sẽ đọc sơ đồ PRISMA và biểu đồ rừng từng bước.</a:t>
-            </a:r>
-          </a:p>
-          <a:p>
-            <a:r>
-              <a:rPr lang="en-US" sz="1400" b="0" dirty="0"/>
-              <a:t>Quan niệm sai: 'phân tích gộp luôn là bằng chứng tốt nhất'. Nó chỉ tốt bằng các nghiên cứu được gộp: đầu vào kém, đầu ra kém. Gộp các thử nghiệm nhỏ bị sai lệch cho một câu trả lời sai nhưng rất chính xác.</a:t>
-            </a:r>
-          </a:p>
-          <a:p>
-            <a:r>
-              <a:rPr lang="en-US" sz="1400" b="0" dirty="0"/>
-              <a:t>Hỏi cả lớp (mời hai ba người trả lời, bật micro): tổng quan tường thuật khác tổng quan hệ thống thế nào? Dự kiến: tổng quan hệ thống có phương pháp tìm kiếm và chọn lọc được nêu rõ, lặp lại được. Tổng quan tường thuật do tác giả tự chọn.</a:t>
+              <a:t>Hỏi: 'Tổng quan tường thuật khác tổng quan hệ thống thế nào?' Mong đợi: tổng quan hệ thống có cách tìm và chọn bài nêu rõ, lặp lại được.</a:t>
             </a:r>
           </a:p>
           <a:p>
@@ -1602,25 +1488,13 @@
           <a:p>
             <a:r>
               <a:rPr lang="en-US" sz="1400" b="0" dirty="0"/>
-              <a:t>Ôn lại từ Buổi 1, giờ có đặt thêm hai bài báo. Bài báo 1 (Boulet) là RCT, Bài báo 2 (Hyun) là thuần tập.</a:t>
+              <a:t>Thử nghiệm thí điểm 48 người không thể bác bỏ một thuần tập cẩn thận về tử vong.</a:t>
             </a:r>
           </a:p>
           <a:p>
             <a:r>
               <a:rPr lang="en-US" sz="1400" b="0" dirty="0"/>
-              <a:t>Ý chính: tháp xếp hạng thiết kế theo mức bảo vệ điển hình trước sai lệch với câu hỏi về hiệu quả điều trị. Nó không xếp hạng câu hỏi về tỷ lệ hiện mắc, tiên lượng hay tác hại hiếm, nơi các thiết kế khác mới là công cụ đúng.</a:t>
-            </a:r>
-          </a:p>
-          <a:p>
-            <a:r>
-              <a:rPr lang="en-US" sz="1400" b="0" dirty="0"/>
-              <a:t>Quan niệm sai: 'bất cứ thứ gì ở tầng cao hơn đều thắng tầng dưới'. Một RCT thí điểm 48 người bệnh không bác bỏ được một thuần tập đa trung tâm cẩn thận về tử vong. Chúng trả lời những phần khác nhau của câu hỏi.</a:t>
-            </a:r>
-          </a:p>
-          <a:p>
-            <a:r>
-              <a:rPr lang="en-US" sz="1400" b="0" dirty="0"/>
-              <a:t>Hỏi cả lớp (bình chọn): bài nào ở cao hơn, và điều đó có làm nó hữu ích hơn cho câu hỏi về tử vong không? Dự kiến: Boulet cao hơn, nhưng không được thiết kế hay đủ cỡ mẫu cho tử vong, nên với tử vong nó đóng góp ít.</a:t>
+              <a:t>Bình chọn: 'Bài nào cao hơn, và có hữu ích hơn cho câu hỏi tử vong không?' Mong đợi: Boulet cao hơn, nhưng không đủ lực mẫu cho tử vong.</a:t>
             </a:r>
           </a:p>
           <a:p>
@@ -1707,37 +1581,19 @@
           <a:p>
             <a:r>
               <a:rPr lang="en-US" sz="1400" b="0" dirty="0"/>
-              <a:t>Đây là công cụ cho bài tập 'Gọi tên thiết kế' ở cuối phần 3.1. Đi chậm một lần với Bài báo 1 (Boulet), rồi với Bài báo 2 (Hyun).</a:t>
+              <a:t>Đi qua cây một lần với Boulet (được phân nhóm, ngẫu nhiên: RCT) và một lần với Hyun (không phân nhóm, có so sánh, phơi nhiễm trước: thuần tập). Đừng gọi tên thiết kế theo từ trong tiêu đề.</a:t>
             </a:r>
           </a:p>
           <a:p>
             <a:r>
               <a:rPr lang="en-US" sz="1400" b="0" dirty="0"/>
-              <a:t>Boulet: nhà nghiên cứu có chỉ định chiến lược không? Có. Ngẫu nhiên? Có. RCT.</a:t>
+              <a:t>Bình chọn: 'Cân bằng dịch và chức năng thận của mọi người bệnh trong một ngày?' Mong đợi: cắt ngang. 'Áp dụng quy trình từ một ngày, so sánh trước và sau?' Mong đợi: không ngẫu nhiên (bán thực nghiệm).</a:t>
             </a:r>
           </a:p>
           <a:p>
             <a:r>
               <a:rPr lang="en-US" sz="1400" b="0" dirty="0"/>
-              <a:t>Hyun: có chỉ định? Không. Có nhóm so sánh? Có (cân bằng dương so với âm). Phơi nhiễm đo trước và kết cục theo dõi sau? Có. Thuần tập.</a:t>
-            </a:r>
-          </a:p>
-          <a:p>
-            <a:r>
-              <a:rPr lang="en-US" sz="1400" b="0" dirty="0"/>
-              <a:t>Quan niệm sai: gọi tên thiết kế theo chữ trong tiêu đề ('tiến cứu', 'sổ bộ', 'hồi cứu'). Tiêu đề có thể gây nhầm, vì vậy hãy dùng ba câu hỏi.</a:t>
-            </a:r>
-          </a:p>
-          <a:p>
-            <a:r>
-              <a:rPr lang="en-US" sz="1400" b="0" dirty="0"/>
-              <a:t>Hỏi cả lớp (bình chọn): một nghiên cứu so sánh cân bằng dịch và chức năng thận của mọi người bệnh ICU trong một ngày. Thiết kế gì? Dự kiến: không chỉ định, có so sánh, cùng thời điểm = cắt ngang. Còn một quy trình dịch truyền áp dụng từ một ngày, so sánh trước và sau? Có chỉ định nhưng không ngẫu nhiên: nghiên cứu không ngẫu nhiên (bán thực nghiệm).</a:t>
-            </a:r>
-          </a:p>
-          <a:p>
-            <a:r>
-              <a:rPr lang="en-US" sz="1400" b="0" dirty="0"/>
-              <a:t>Thời gian: 5 phút. Cây này cũng có trong phiếu bài tập Buổi 3 (PDF), Phần A, để học viên mở sẵn khi làm bài.</a:t>
+              <a:t>Thời gian: 5 phút.</a:t>
             </a:r>
           </a:p>
         </p:txBody>
@@ -1818,31 +1674,19 @@
           <a:p>
             <a:r>
               <a:rPr lang="en-US" sz="1400" b="0" dirty="0"/>
-              <a:t>Đừng đọc từng dòng. Chọn một điểm mạnh và một điểm yếu mỗi thẻ và nối với hình vừa xem.</a:t>
+              <a:t>Mỗi thẻ chọn một điểm mạnh và một điểm yếu. RCT cân bằng được yếu tố nhiễu chưa biết, nhưng người bệnh được chọn lọc (Boulet loại người trên 85 tuổi).</a:t>
             </a:r>
           </a:p>
           <a:p>
             <a:r>
               <a:rPr lang="en-US" sz="1400" b="0" dirty="0"/>
-              <a:t>Ý chính: điểm mạnh độc nhất của RCT là cân bằng các yếu tố nhiễu chưa biết. Điểm yếu thường là khả năng khái quát: người bệnh thử nghiệm được chọn lọc (Boulet loại người trên 85 tuổi, người cần lọc máu và người suy dinh dưỡng nặng).</a:t>
+              <a:t>Hỏi: 'Thiết kế nào để tìm yếu tố nguy cơ của một phản ứng thuốc hiếm?' Mong đợi: bệnh-chứng.</a:t>
             </a:r>
           </a:p>
           <a:p>
             <a:r>
               <a:rPr lang="en-US" sz="1400" b="0" dirty="0"/>
-              <a:t>Quan niệm sai: 'nghiên cứu bệnh–chứng yếu'. Với kết cục hiếm, đó thường là thiết kế khả thi duy nhất, và chính nó lần đầu liên kết hút thuốc với ung thư phổi.</a:t>
-            </a:r>
-          </a:p>
-          <a:p>
-            <a:r>
-              <a:rPr lang="en-US" sz="1400" b="0" dirty="0"/>
-              <a:t>Hỏi cả lớp (mời hai ba người trả lời, bật micro): muốn tìm yếu tố nguy cơ của một phản ứng thuốc hiếm, chọn thiết kế nào? Dự kiến: bệnh–chứng.</a:t>
-            </a:r>
-          </a:p>
-          <a:p>
-            <a:r>
-              <a:rPr lang="en-US" sz="1400" b="0" dirty="0"/>
-              <a:t>Thời gian: 2 phút. Phiếu bài tập Buổi 3 (PDF) có lại bảng này.</a:t>
+              <a:t>Thời gian: 2 phút.</a:t>
             </a:r>
           </a:p>
         </p:txBody>
@@ -1923,37 +1767,25 @@
           <a:p>
             <a:r>
               <a:rPr lang="en-US" sz="1400" b="0" dirty="0"/>
-              <a:t>Mục đích: gợi lại Buổi 2 và đặt câu hỏi nghiên cứu của mỗi học viên trở lại trước mắt họ. Phần xây dựng đề cương hôm nay chọn thiết kế cho câu hỏi đó.</a:t>
+              <a:t>Ba câu bình chọn. Hiện kết quả rồi đáp án.</a:t>
             </a:r>
           </a:p>
           <a:p>
             <a:r>
               <a:rPr lang="en-US" sz="1400" b="0" dirty="0"/>
-              <a:t>Chạy thành ba câu bình chọn (poll trên Zoom hoặc Teams). Chiếu kết quả, rồi công bố đáp án.</a:t>
+              <a:t>Đáp án: Câu 1 AND thu hẹp, OR mở rộng. Câu 2 hình và bảng. Câu 3 thổi phồng (spin).</a:t>
             </a:r>
           </a:p>
           <a:p>
             <a:r>
               <a:rPr lang="en-US" sz="1400" b="0" dirty="0"/>
-              <a:t>Đáp án. C1: AND với một khái niệm khác thu hẹp tìm kiếm. OR mở rộng. C2: hình và bảng (thứ tự đọc: tiêu đề, tóm tắt, hình và bảng, rồi phương pháp). C3: tô vẽ (spin), tức là mô tả kết quả không có ý nghĩa như thể có lợi.</a:t>
+              <a:t>Sau câu 3, hỏi cách viết lại. Mong đợi: 'tử vong không khác biệt rõ giữa hai nhóm (p = 0.42)'.</a:t>
             </a:r>
           </a:p>
           <a:p>
             <a:r>
               <a:rPr lang="en-US" sz="1400" b="0" dirty="0"/>
-              <a:t>Quan niệm sai cần sửa: 'p = 0.42 là gần có ý nghĩa'. Không phải. Cách nói trung thực là 'không có khác biệt rõ'.</a:t>
-            </a:r>
-          </a:p>
-          <a:p>
-            <a:r>
-              <a:rPr lang="en-US" sz="1400" b="0" dirty="0"/>
-              <a:t>Hỏi cả lớp sau C3 (mời hai ba người trả lời, bật micro): nên viết lại câu đó thế nào? Dự kiến: 'tử vong không khác biệt rõ giữa hai nhóm (p = 0.42)'.</a:t>
-            </a:r>
-          </a:p>
-          <a:p>
-            <a:r>
-              <a:rPr lang="en-US" sz="1400" b="0" dirty="0"/>
-              <a:t>Thời gian: 9 phút (khoảng 6 phút cho ba câu, 3 phút đọc lại). Cộng với slide mở đầu là 10 phút ôn tập.</a:t>
+              <a:t>Thời gian: 9 phút.</a:t>
             </a:r>
           </a:p>
         </p:txBody>
@@ -2034,37 +1866,19 @@
           <a:p>
             <a:r>
               <a:rPr lang="en-US" sz="1400" b="0" dirty="0"/>
-              <a:t>Quay lại ví dụ xuyên suốt để kết thúc phần 3.1.</a:t>
+              <a:t>Hiệu chỉnh hay ghép cặp chỉ giảm nhiễu đã đo được.</a:t>
             </a:r>
           </a:p>
           <a:p>
             <a:r>
               <a:rPr lang="en-US" sz="1400" b="0" dirty="0"/>
-              <a:t>Boulet (RCT): vì may rủi làm hai nhóm tương đồng, mọi khác biệt về cân bằng dịch có thể quy cho chiến lược. Nhưng với 48 người bệnh và 6 ca tử vong mỗi nhóm, nó không nói được gì chắc chắn về tử vong. Bác sĩ biết phân nhóm, điều này có thể ảnh hưởng lượng dịch họ truyền.</a:t>
+              <a:t>Hỏi mỗi bài một câu kết luận trung thực. Mong đợi: Boulet 'không giảm rõ cân bằng dịch ngày 5'. Hyun 'cân bằng dịch dương ngày 2-3 có liên quan với tử vong cao hơn'.</a:t>
             </a:r>
           </a:p>
           <a:p>
             <a:r>
               <a:rPr lang="en-US" sz="1400" b="0" dirty="0"/>
-              <a:t>Hyun (thuần tập): hàng nghìn người bệnh và đúng kết cục cần quan tâm. Cân bằng dịch dương ở ngày 2-3 có liên quan với tử vong ngày 28 cao hơn (tỷ số nguy cơ tức thời, HR, 2.13 ở ngày 2 và 1.56 ở ngày 3, ngày 1 không khác biệt rõ). Nhưng không chứng minh được dịch gây tử vong, vì người bệnh nặng hơn được truyền nhiều dịch hơn.</a:t>
-            </a:r>
-          </a:p>
-          <a:p>
-            <a:r>
-              <a:rPr lang="en-US" sz="1400" b="0" dirty="0"/>
-              <a:t>Quan niệm sai: 'đã hiệu chỉnh' hay 'đã ghép cặp theo điểm xu hướng' biến mối liên quan thành nhân quả. Nó chỉ giảm nhiễu do các yếu tố đã đo.</a:t>
-            </a:r>
-          </a:p>
-          <a:p>
-            <a:r>
-              <a:rPr lang="en-US" sz="1400" b="0" dirty="0"/>
-              <a:t>Hỏi cả lớp (mời hai ba người trả lời, bật micro): viết một câu kết luận trung thực cho mỗi bài. Dự kiến: với Boulet, 'chiến lược không làm giảm rõ cân bằng dịch ngày 5'. Với Hyun, 'cân bằng dịch dương ở ngày 2-3 có liên quan với tử vong cao hơn'.</a:t>
-            </a:r>
-          </a:p>
-          <a:p>
-            <a:r>
-              <a:rPr lang="en-US" sz="1400" b="0" dirty="0"/>
-              <a:t>Thời gian: 4 phút. Sau đó là 3 phút bình chọn, rồi đến bài tập.</a:t>
+              <a:t>Thời gian: 4 phút.</a:t>
             </a:r>
           </a:p>
         </p:txBody>
@@ -2145,25 +1959,13 @@
           <a:p>
             <a:r>
               <a:rPr lang="en-US" sz="1400" b="0" dirty="0"/>
-              <a:t>Chạy thành ba câu bình chọn (đúng hay sai cho mỗi câu). Chiếu kết quả sau mỗi câu.</a:t>
+              <a:t>Ba câu bình chọn. Đáp án: A đúng. B sai, thuần tập chỉ nói 'có liên quan'. C đúng.</a:t>
             </a:r>
           </a:p>
           <a:p>
             <a:r>
               <a:rPr lang="en-US" sz="1400" b="0" dirty="0"/>
-              <a:t>Đáp án. A: đúng. Thử nghiệm ngẫu nhiên được phép nói về nhân quả, và câu này báo cáo trung thực một kết quả âm tính. B: sai. Thuần tập chỉ nói 'có liên quan', không nói 'gây ra' (chính tóm tắt của Hyun dùng đúng chữ 'có liên quan'). C: đúng. 'Có liên quan' là từ đúng cho khảo sát cắt ngang. Nó không cho biết cái nào có trước.</a:t>
-            </a:r>
-          </a:p>
-          <a:p>
-            <a:r>
-              <a:rPr lang="en-US" sz="1400" b="0" dirty="0"/>
-              <a:t>Ý chính: đây là câu 8 trong bảng kiểm thẩm định 10 câu dùng ở Buổi 8 (Course/Resources/Critical_Appraisal_Checklist.pdf): lời lẽ có khớp với thiết kế không?</a:t>
-            </a:r>
-          </a:p>
-          <a:p>
-            <a:r>
-              <a:rPr lang="en-US" sz="1400" b="0" dirty="0"/>
-              <a:t>Thời gian: 3 phút. Slide này khép lại 45 phút của phần 3.1.</a:t>
+              <a:t>Thời gian: 3 phút. Kết thúc phần 3.1.</a:t>
             </a:r>
           </a:p>
         </p:txBody>
@@ -2244,37 +2046,19 @@
           <a:p>
             <a:r>
               <a:rPr lang="en-US" sz="1400" b="0" dirty="0"/>
-              <a:t>Bài tập cả lớp, khoảng 2.5 phút mỗi tóm tắt. Phiếu: Course/Practicals/s3_exercises.md, Phần A (gửi dạng PDF trước buổi học). Đáp án: Course/Solutions/s3_solutions.md, Phần A.</a:t>
+              <a:t>Khoảng 2.5 phút mỗi tóm tắt: đọc, bình chọn, mời một người nêu cụm từ chứng minh, gõ lên màn hình.</a:t>
             </a:r>
           </a:p>
           <a:p>
             <a:r>
               <a:rPr lang="en-US" sz="1400" b="0" dirty="0"/>
-              <a:t>Cách chạy: chiếu tóm tắt 1 lên màn hình chia sẻ và đọc to. Mở bình chọn với các lựa chọn thiết kế (cắt ngang, bệnh–chứng, thuần tập, nghiên cứu không ngẫu nhiên, RCT, tổng quan hệ thống). Chiếu kết quả. Mời một bạn (giơ tay, bật micro) nêu cụm từ làm bằng chứng, và gõ cụm từ đó cạnh tóm tắt trên màn hình. Rồi sang tóm tắt tiếp theo.</a:t>
+              <a:t>Tóm tắt 3 và 4 khó nhất. Nếu có người nói 'dùng hồ sơ cũ nên là bệnh-chứng', hỏi: chọn theo kết cục hay theo phơi nhiễm?</a:t>
             </a:r>
           </a:p>
           <a:p>
             <a:r>
               <a:rPr lang="en-US" sz="1400" b="0" dirty="0"/>
-              <a:t>Tóm tắt 3 (bệnh–chứng, nhìn ngược lại từ việc phải lọc máu) và 4 (thuần tập hồi cứu nghe giống bệnh–chứng) thường khó nhất. Dành thêm thời gian cho hai câu này.</a:t>
-            </a:r>
-          </a:p>
-          <a:p>
-            <a:r>
-              <a:rPr lang="en-US" sz="1400" b="0" dirty="0"/>
-              <a:t>Ý chính: cụm từ làm bằng chứng quan trọng hơn cái nhãn: 'phân bổ ngẫu nhiên', 'so sánh với những người bệnh không bị', 'chia họ theo', 'trong một ngày'.</a:t>
-            </a:r>
-          </a:p>
-          <a:p>
-            <a:r>
-              <a:rPr lang="en-US" sz="1400" b="0" dirty="0"/>
-              <a:t>Quan niệm sai cần lắng nghe: 'dùng hồ sơ cũ nên là bệnh–chứng'. Hỏi lại: người được chọn theo kết cục hay theo phơi nhiễm?</a:t>
-            </a:r>
-          </a:p>
-          <a:p>
-            <a:r>
-              <a:rPr lang="en-US" sz="1400" b="0" dirty="0"/>
-              <a:t>Nếu lớp làm nhanh: phiếu có thêm chín tóm tắt về chủ đề khác để tự học (Phần A, luyện tập thêm). Thông báo giải lao ở cuối slide này.</a:t>
+              <a:t>Đáp án: s3_solutions_VN, Phần A. Cuối slide thông báo giải lao.</a:t>
             </a:r>
           </a:p>
         </p:txBody>
@@ -2355,19 +2139,7 @@
           <a:p>
             <a:r>
               <a:rPr lang="en-US" sz="1400" b="0" dirty="0"/>
-              <a:t>Slide chỉ có hình, có chủ ý. Trước giờ giải lao, nói: đứng dậy, vươn vai, uống nước. Gợi ý (tùy chọn): thiết kế nào có thể hợp với câu hỏi của bạn? Sau giải lao sẽ học tiếp các thiết kế khác.</a:t>
-            </a:r>
-          </a:p>
-          <a:p>
-            <a:r>
-              <a:rPr lang="en-US" sz="1400" b="0" dirty="0"/>
-              <a:t>Giải lao 15 phút (20:40-20:55). Chiếu đồng hồ đếm ngược trên màn hình chia sẻ và để phiên họp mở.</a:t>
-            </a:r>
-          </a:p>
-          <a:p>
-            <a:r>
-              <a:rPr lang="en-US" sz="1400" b="0" dirty="0"/>
-              <a:t>Bắt đầu lại đúng giờ, kể cả khi vài người chưa bật lại camera.</a:t>
+              <a:t>Giải lao 20:40-20:55. Chiếu đồng hồ đếm ngược. Bắt đầu lại đúng giờ.</a:t>
             </a:r>
           </a:p>
         </p:txBody>
@@ -2448,13 +2220,7 @@
           <a:p>
             <a:r>
               <a:rPr lang="en-US" sz="1400" b="0" dirty="0"/>
-              <a:t>Đánh dấu phần 3.2 (30 phút).</a:t>
-            </a:r>
-          </a:p>
-          <a:p>
-            <a:r>
-              <a:rPr lang="en-US" sz="1400" b="0" dirty="0"/>
-              <a:t>Vì sao quan trọng: phần lớn dự án trong một khoa bệnh viện không phải thử nghiệm hai nhóm kinh điển. Đó là thay đổi ở cấp khoa, dự án cải tiến chất lượng, nghiên cứu thí điểm hay phỏng vấn. Biết các thiết kế này giúp học viên chọn được thiết kế khả thi cho đề cương của mình.</a:t>
+              <a:t>Phần 3.2: 30 phút. Phần lớn dự án ở bệnh viện là thay đổi cấp khoa, cải tiến chất lượng, thí điểm hoặc phỏng vấn.</a:t>
             </a:r>
           </a:p>
           <a:p>
@@ -2541,37 +2307,13 @@
           <a:p>
             <a:r>
               <a:rPr lang="en-US" sz="1400" b="0" dirty="0"/>
-              <a:t>Phần lớn thử nghiệm là song song (parallel): mỗi người bệnh nhận một điều trị (Boulet). Ba biến thể giải quyết những vấn đề riêng.</a:t>
+              <a:t>Bắt chéo chỉ dùng cho bệnh mạn tính ổn định, không dùng cho sốc nhiễm khuẩn. Thử nghiệm theo cụm vẫn là RCT, phân tích có tính đến cụm.</a:t>
             </a:r>
           </a:p>
           <a:p>
             <a:r>
               <a:rPr lang="en-US" sz="1400" b="0" dirty="0"/>
-              <a:t>Bắt chéo (crossover): mỗi người bệnh nhận cả hai điều trị theo thứ tự ngẫu nhiên, có giai đoạn thải trừ ở giữa, và là đối chứng của chính mình, nên cần ít người bệnh hơn. Chỉ dùng cho bệnh mạn tính, ổn định, khi tác dụng hết đi (ví dụ thuốc hít trong bệnh phổi tắc nghẽn mạn tính). Vô dụng trong sốc nhiễm khuẩn: người bệnh ở ngày 7 không còn như ngày 1.</a:t>
-            </a:r>
-          </a:p>
-          <a:p>
-            <a:r>
-              <a:rPr lang="en-US" sz="1400" b="0" dirty="0"/>
-              <a:t>Theo cụm (cluster): phân nhóm ngẫu nhiên cả khoa, ICU hoặc bệnh viện, không phải từng người bệnh. Dùng khi can thiệp tác động ở cấp đơn vị (chương trình vệ sinh tay, gói xử trí nhiễm khuẩn huyết, quy trình ghi cân bằng dịch do điều dưỡng thực hiện) hoặc khi người bệnh cùng khoa 'lây' can thiệp cho nhau. Cần nhiều người bệnh hơn vì người bệnh trong một cụm giống nhau.</a:t>
-            </a:r>
-          </a:p>
-          <a:p>
-            <a:r>
-              <a:rPr lang="en-US" sz="1400" b="0" dirty="0"/>
-              <a:t>Giai thừa (factorial): hai câu hỏi trong một thử nghiệm. Người bệnh được phân nhóm hai lần (ví dụ chiến lược dịch và vitamin C), tạo bốn nhóm. Hiệu quả nếu hai điều trị không tương tác.</a:t>
-            </a:r>
-          </a:p>
-          <a:p>
-            <a:r>
-              <a:rPr lang="en-US" sz="1400" b="0" dirty="0"/>
-              <a:t>Quan niệm sai: 'thử nghiệm theo cụm là thử nghiệm yếu hơn'. Đó là RCT thực thụ. Phân tích phải tính đến yếu tố cụm.</a:t>
-            </a:r>
-          </a:p>
-          <a:p>
-            <a:r>
-              <a:rPr lang="en-US" sz="1400" b="0" dirty="0"/>
-              <a:t>Hỏi cả lớp (bình chọn): muốn thử một quy trình ghi cân bằng dịch mới do điều dưỡng ICU thực hiện, chọn cách bố trí nào? Dự kiến: theo cụm. Phân nhóm ngẫu nhiên theo ICU, không theo người bệnh.</a:t>
+              <a:t>Bình chọn: 'Quy trình ghi cân bằng dịch do điều dưỡng thực hiện: cách bố trí nào?' Mong đợi: theo cụm, phân nhóm ngẫu nhiên các ICU.</a:t>
             </a:r>
           </a:p>
           <a:p>
@@ -2658,31 +2400,19 @@
           <a:p>
             <a:r>
               <a:rPr lang="en-US" sz="1400" b="0" dirty="0"/>
-              <a:t>Thử nghiệm vượt trội (superiority) hỏi: điều trị mới có tốt hơn không? Thử nghiệm không kém hơn (non-inferiority) hỏi: nó có không kém hơn đến mức không chấp nhận được không (thường vì nó rẻ hơn, an toàn hơn, đơn giản hơn hoặc dùng ít dịch hơn).</a:t>
+              <a:t>Ngưỡng được định trong đề cương, trước khi có dữ liệu. A vượt trội, B không kém hơn, C chưa kết luận được, D kém hơn.</a:t>
             </a:r>
           </a:p>
           <a:p>
             <a:r>
               <a:rPr lang="en-US" sz="1400" b="0" dirty="0"/>
-              <a:t>Ngưỡng (ở đây +5 điểm phần trăm tử vong, giả định) là mức thiệt hại lớn nhất có thể chấp nhận. Ngưỡng được định trong đề cương, trước khi có dữ liệu, dựa trên lập luận lâm sàng.</a:t>
+              <a:t>p = 0.42 của Boulet không chứng minh hạn chế dịch tốt ngang chăm sóc thường quy.</a:t>
             </a:r>
           </a:p>
           <a:p>
             <a:r>
               <a:rPr lang="en-US" sz="1400" b="0" dirty="0"/>
-              <a:t>Đọc các thanh (hiệu số và khoảng tin cậy, KTC, 95%). A: toàn bộ KTC dưới 0, vậy là vượt trội. B: KTC cắt 0 nhưng vẫn dưới ngưỡng, vậy là không kém hơn. C: KTC cắt ngưỡng, vậy là chưa kết luận. D: toàn bộ KTC trên ngưỡng, vậy là kém hơn.</a:t>
-            </a:r>
-          </a:p>
-          <a:p>
-            <a:r>
-              <a:rPr lang="en-US" sz="1400" b="0" dirty="0"/>
-              <a:t>Quan niệm sai: 'p &gt; 0.05 trong thử nghiệm vượt trội chứng tỏ hai điều trị tương đương'. Không. Không có bằng chứng không phải là bằng chứng của sự không có. p = 0.42 của Boulet không chứng tỏ hạn chế dịch tốt bằng chăm sóc thường quy.</a:t>
-            </a:r>
-          </a:p>
-          <a:p>
-            <a:r>
-              <a:rPr lang="en-US" sz="1400" b="0" dirty="0"/>
-              <a:t>Hỏi cả lớp (bình chọn): ai nên quyết định ngưỡng: nhà thống kê hay bác sĩ lâm sàng? Dự kiến: bác sĩ lâm sàng (và người bệnh), cùng nhà thống kê. Đó là một nhận định lâm sàng.</a:t>
+              <a:t>Bình chọn: 'Ai quyết định ngưỡng?' Mong đợi: bác sĩ lâm sàng và người bệnh, cùng người làm thống kê.</a:t>
             </a:r>
           </a:p>
           <a:p>
@@ -2769,31 +2499,13 @@
           <a:p>
             <a:r>
               <a:rPr lang="en-US" sz="1400" b="0" dirty="0"/>
-              <a:t>Boulet 2024 tự gọi là thử nghiệm thí điểm (pilot). Giá trị thực sự nằm ở các con số bên trái: 1201 người bệnh được sàng lọc để có 50 người bệnh được phân nhóm (khoảng 4%), khoảng 3 người bệnh mỗi tháng tại 3 ICU, 48/50 được phân tích.</a:t>
+              <a:t>Boulet: sàng lọc 1201, phân nhóm 50, khoảng 3 người bệnh mỗi tháng. Nghiên cứu thí điểm đánh giá tính khả thi, không đánh giá hiệu quả, và phải được lên kế hoạch là thí điểm ngay từ đầu.</a:t>
             </a:r>
           </a:p>
           <a:p>
             <a:r>
               <a:rPr lang="en-US" sz="1400" b="0" dirty="0"/>
-              <a:t>Nghiên cứu thí điểm hay khả thi kiểm tra các khâu vận hành của thử nghiệm lớn: tuyển chọn, đồng ý tham gia, nhân viên có thực hiện được can thiệp không, kết cục có đo đầy đủ không, và các con số cần để tính cỡ mẫu.</a:t>
-            </a:r>
-          </a:p>
-          <a:p>
-            <a:r>
-              <a:rPr lang="en-US" sz="1400" b="0" dirty="0"/>
-              <a:t>Ý chính: không nên dùng nghiên cứu thí điểm để khẳng định hiệu quả. Tiêu chí thành công của nó là về tính khả thi (ví dụ 'tuyển 2 người bệnh mỗi điểm mỗi tháng', 'dữ liệu đầy đủ trên 90%').</a:t>
-            </a:r>
-          </a:p>
-          <a:p>
-            <a:r>
-              <a:rPr lang="en-US" sz="1400" b="0" dirty="0"/>
-              <a:t>Quan niệm sai: 'nghiên cứu nhỏ của chúng tôi không thấy tác động, nên gọi là thí điểm'. Nghiên cứu thí điểm phải được lên kế hoạch như vậy từ đầu, với mục tiêu khả thi.</a:t>
-            </a:r>
-          </a:p>
-          <a:p>
-            <a:r>
-              <a:rPr lang="en-US" sz="1400" b="0" dirty="0"/>
-              <a:t>Hỏi cả lớp (bình chọn): với những con số này, có nên làm thử nghiệm 1000 người bệnh tại đúng 3 ICU đó không? Dự kiến: không theo thiết kế này. Với 3 người bệnh mỗi tháng sẽ mất hàng chục năm. Cần nhiều điểm hơn hoặc tiêu chuẩn chọn rộng hơn.</a:t>
+              <a:t>Bình chọn: 'Có nên làm thử nghiệm 1000 người ở cùng 3 ICU không?' Mong đợi: không như thiết kế hiện tại. Sẽ mất hàng chục năm.</a:t>
             </a:r>
           </a:p>
           <a:p>
@@ -2880,37 +2592,13 @@
           <a:p>
             <a:r>
               <a:rPr lang="en-US" sz="1400" b="0" dirty="0"/>
-              <a:t>Phần lớn dự án cải tiến chất lượng (QI) áp dụng thay đổi cho mọi người cùng lúc, không ngẫu nhiên và không có nhóm chứng song song. Đó là thiết kế bán thực nghiệm (quasi-experimental).</a:t>
+              <a:t>Trước-sau là thiết kế yếu: tỷ lệ thường tự giảm. Chuỗi thời gian ngắt quãng so sánh dữ liệu sau thay đổi với xu hướng trước đó (mức và độ dốc).</a:t>
             </a:r>
           </a:p>
           <a:p>
             <a:r>
               <a:rPr lang="en-US" sz="1400" b="0" dirty="0"/>
-              <a:t>Nghiên cứu trước-sau đơn giản so sánh trung bình trước với trung bình sau. Yếu: tỷ lệ thường tự giảm (mùa, nhân viên mới, dự án khác, hồi quy về trung bình sau một tháng xấu).</a:t>
-            </a:r>
-          </a:p>
-          <a:p>
-            <a:r>
-              <a:rPr lang="en-US" sz="1400" b="0" dirty="0"/>
-              <a:t>Chuỗi thời gian ngắt quãng (interrupted time series, ITS) mạnh hơn nhiều: nhiều lần đo trước và sau (ở đây mỗi bên 24 điểm theo tháng). So sánh điều đã xảy ra với điều mà xu hướng trước thay đổi dự báo (đường nét đứt). Tìm sự thay đổi về mức (sụt giảm) và về độ dốc (giảm nhanh hơn).</a:t>
-            </a:r>
-          </a:p>
-          <a:p>
-            <a:r>
-              <a:rPr lang="en-US" sz="1400" b="0" dirty="0"/>
-              <a:t>Ý chính: ITS là thiết kế chuẩn để đánh giá một gói can thiệp, quy trình hay chính sách trong một bệnh viện. Thêm một chuỗi đối chứng (một khoa không thay đổi) để mạnh hơn.</a:t>
-            </a:r>
-          </a:p>
-          <a:p>
-            <a:r>
-              <a:rPr lang="en-US" sz="1400" b="0" dirty="0"/>
-              <a:t>Quan niệm sai: 'tỷ lệ nhiễm khuẩn giảm sau gói can thiệp, vậy gói can thiệp hiệu quả'. Chỉ đúng nếu mức giảm lớn hơn xu hướng sẵn có.</a:t>
-            </a:r>
-          </a:p>
-          <a:p>
-            <a:r>
-              <a:rPr lang="en-US" sz="1400" b="0" dirty="0"/>
-              <a:t>Hỏi cả lớp (mời hai ba người trả lời, bật micro): trong tháng thực hiện dự án cải tiến gần nhất, bệnh viện còn thay đổi gì khác? Dự kiến: thường có (luân chuyển nhân sự, chính sách mới, kiểm tra), chính vì vậy xu hướng mới quan trọng.</a:t>
+              <a:t>Hỏi: 'Trong tháng làm dự án cải tiến gần nhất, bệnh viện còn thay đổi gì khác?' Mong đợi: thường là có.</a:t>
             </a:r>
           </a:p>
           <a:p>
@@ -2997,37 +2685,13 @@
           <a:p>
             <a:r>
               <a:rPr lang="en-US" sz="1400" b="0" dirty="0"/>
-              <a:t>Có những câu hỏi không phải về bao nhiêu mà về vì sao, như thế nào và cảm nhận ra sao. Vì sao điều dưỡng không ghi lượng nước tiểu ban đêm? Gia đình trải qua việc đồng ý thay ở ICU như thế nào? Con số không trả lời được.</a:t>
+              <a:t>Lấy mẫu có chủ đích, đến khi không có chủ đề mới (bão hòa). Hướng dẫn báo cáo: COREQ hoặc SRQR.</a:t>
             </a:r>
           </a:p>
           <a:p>
             <a:r>
               <a:rPr lang="en-US" sz="1400" b="0" dirty="0"/>
-              <a:t>Ba phương pháp chính: phỏng vấn sâu (một người, câu hỏi mở), thảo luận nhóm (6-8 người, thảo luận làm lộ ra quan điểm chung và bất đồng), và quan sát (điều mọi người thực sự làm, có thể khác điều họ nói).</a:t>
-            </a:r>
-          </a:p>
-          <a:p>
-            <a:r>
-              <a:rPr lang="en-US" sz="1400" b="0" dirty="0"/>
-              <a:t>Chọn mẫu có chủ đích (chọn người hiểu vấn đề) và tiếp tục đến khi không còn chủ đề mới (bão hòa). Phân tích tìm các chủ đề trong bản ghi. Hướng dẫn báo cáo: COREQ (tiêu chí hợp nhất để báo cáo nghiên cứu định tính) hoặc SRQR (chuẩn báo cáo nghiên cứu định tính).</a:t>
-            </a:r>
-          </a:p>
-          <a:p>
-            <a:r>
-              <a:rPr lang="en-US" sz="1400" b="0" dirty="0"/>
-              <a:t>Phương pháp hỗn hợp kết hợp cả hai: một thử nghiệm kèm phỏng vấn để hiểu vì sao can thiệp được hoặc không được thực hiện.</a:t>
-            </a:r>
-          </a:p>
-          <a:p>
-            <a:r>
-              <a:rPr lang="en-US" sz="1400" b="0" dirty="0"/>
-              <a:t>Quan niệm sai: 'định tính nghĩa là giai thoại'. Làm đúng cách, nó có hệ thống, minh bạch và được bình duyệt.</a:t>
-            </a:r>
-          </a:p>
-          <a:p>
-            <a:r>
-              <a:rPr lang="en-US" sz="1400" b="0" dirty="0"/>
-              <a:t>Hỏi cả lớp (mời hai ba người trả lời, bật micro): một câu hỏi về quản lý dịch truyền ở khoa mình mà chỉ phỏng vấn mới trả lời được. Dự kiến: vì sao phiếu theo dõi dịch không đầy đủ, vì sao bác sĩ ngại ngừng dịch duy trì.</a:t>
+              <a:t>Hỏi: 'Một câu hỏi về dịch truyền chỉ phỏng vấn mới trả lời được?' Mong đợi: vì sao phiếu theo dõi dịch không đầy đủ, vì sao bác sĩ ngại ngừng dịch duy trì.</a:t>
             </a:r>
           </a:p>
           <a:p>
@@ -3114,31 +2778,13 @@
           <a:p>
             <a:r>
               <a:rPr lang="en-US" sz="1400" b="0" dirty="0"/>
-              <a:t>Phần 3.1 bắt đầu từ đây (tổng cộng 45 phút, từ slide này đến câu bình chọn 'gây ra hay có liên quan').</a:t>
+              <a:t>Phần 3.1 bắt đầu ở đây (45 phút). Chỉ đọc bốn tiêu đề.</a:t>
             </a:r>
           </a:p>
           <a:p>
             <a:r>
               <a:rPr lang="en-US" sz="1400" b="0" dirty="0"/>
-              <a:t>Chỉ đọc bốn tiêu đề. Chi tiết đến dần theo từng slide. Các từ này cũng có ở đầu phiếu bài tập Buổi 3 (file PDF gửi trước buổi học).</a:t>
-            </a:r>
-          </a:p>
-          <a:p>
-            <a:r>
-              <a:rPr lang="en-US" sz="1400" b="0" dirty="0"/>
-              <a:t>Ý chính: gần như mọi câu hỏi về thiết kế trở nên dễ khi gọi tên được phơi nhiễm và kết cục. Vì vậy luyện điều đó trước.</a:t>
-            </a:r>
-          </a:p>
-          <a:p>
-            <a:r>
-              <a:rPr lang="en-US" sz="1400" b="0" dirty="0"/>
-              <a:t>Quan niệm sai: 'phải học thuộc tên thiết kế'. Không. Có thể suy ra từ hai câu hỏi ở thông điệp chính.</a:t>
-            </a:r>
-          </a:p>
-          <a:p>
-            <a:r>
-              <a:rPr lang="en-US" sz="1400" b="0" dirty="0"/>
-              <a:t>Hỏi cả lớp (mời hai ba người trả lời, bật micro): trong câu hỏi về dịch truyền, đâu là phơi nhiễm và đâu là kết cục? Dự kiến: phơi nhiễm = chiến lược hạn chế dịch (so với thường quy). Kết cục = tử vong ngày 28.</a:t>
+              <a:t>Hỏi: 'Trong câu hỏi về dịch truyền, phơi nhiễm là gì, kết cục là gì?' Mong đợi: chiến lược hạn chế dịch (so với thường quy), tử vong đến ngày 28.</a:t>
             </a:r>
           </a:p>
           <a:p>
@@ -3225,37 +2871,19 @@
           <a:p>
             <a:r>
               <a:rPr lang="en-US" sz="1400" b="0" dirty="0"/>
-              <a:t>Đây là tóm tắt thực hành của cả hai phần hôm nay. Đọc mỗi dòng như sau: nếu câu hỏi của bạn giống thế này, hãy bắt đầu với thiết kế này.</a:t>
+              <a:t>Trong phần xây dựng đề cương, mỗi người giải thích thiết kế theo cách này: 'câu hỏi của tôi về X, nên thiết kế khả thi tốt nhất là Y'. Thuần tập hồi cứu nêu rõ hạn chế vẫn được chấp nhận.</a:t>
             </a:r>
           </a:p>
           <a:p>
             <a:r>
               <a:rPr lang="en-US" sz="1400" b="0" dirty="0"/>
-              <a:t>Ý chính: lát nữa trong phần xây dựng đề cương, mỗi học viên sẽ biện luận thiết kế cho câu hỏi của chính mình bằng đúng logic này: 'câu hỏi của tôi về X, nên thiết kế khả thi tốt nhất là Y'.</a:t>
+              <a:t>Bình chọn: 'Hôm nay bao nhiêu người bệnh ICU có cân bằng dịch dương?' Mong đợi: cắt ngang.</a:t>
             </a:r>
           </a:p>
           <a:p>
             <a:r>
               <a:rPr lang="en-US" sz="1400" b="0" dirty="0"/>
-              <a:t>Lưu ý chữ khả thi: thiết kế lý tưởng cho câu hỏi 'hạn chế dịch có cứu sống người bệnh không?' là một RCT lớn, nhưng một học viên chỉ có một ICU và không có kinh phí có thể trung thực chọn thuần tập hồi cứu và nêu rõ giới hạn.</a:t>
-            </a:r>
-          </a:p>
-          <a:p>
-            <a:r>
-              <a:rPr lang="en-US" sz="1400" b="0" dirty="0"/>
-              <a:t>Quan niệm sai: 'phải làm RCT mới được coi trọng'. Một nghiên cứu thuần tập làm tốt và báo cáo trung thực vẫn có thể công bố và hữu ích.</a:t>
-            </a:r>
-          </a:p>
-          <a:p>
-            <a:r>
-              <a:rPr lang="en-US" sz="1400" b="0" dirty="0"/>
-              <a:t>Hỏi cả lớp (bình chọn): muốn biết hôm nay có bao nhiêu người bệnh ICU có cân bằng dịch dương. Thiết kế nào? Dự kiến: cắt ngang (hiện mắc tại một thời điểm).</a:t>
-            </a:r>
-          </a:p>
-          <a:p>
-            <a:r>
-              <a:rPr lang="en-US" sz="1400" b="0" dirty="0"/>
-              <a:t>Thời gian: 5.5 phút. Slide này khép lại 30 phút của phần 3.2.</a:t>
+              <a:t>Thời gian: 5.5 phút. Kết thúc phần 3.2.</a:t>
             </a:r>
           </a:p>
         </p:txBody>
@@ -3336,37 +2964,31 @@
           <a:p>
             <a:r>
               <a:rPr lang="en-US" sz="1400" b="0" dirty="0"/>
-              <a:t>Bài tập cả lớp. Phiếu: phiếu bài tập Buổi 3 (Course/Practicals/s3_exercises.md, file PDF gửi trước buổi học), Phần B. Đáp án: Course/Solutions/s3_solutions.md, Phần B.</a:t>
+              <a:t>Khoảng 2 phút mỗi câu, rồi 5 phút cho câu hỏi của chính học viên.</a:t>
             </a:r>
           </a:p>
           <a:p>
             <a:r>
               <a:rPr lang="en-US" sz="1400" b="0" dirty="0"/>
-              <a:t>Cách chạy: khoảng 2 phút mỗi câu (10 phút), rồi 5 phút cho câu hỏi của chính học viên.</a:t>
+              <a:t>Đáp án: 1 RCT không kém hơn. 2 RCT theo cụm. 3 chuỗi thời gian ngắt quãng. 4 phỏng vấn sâu hoặc thảo luận nhóm. 5 nghiên cứu thí điểm hoặc khả thi.</a:t>
             </a:r>
           </a:p>
           <a:p>
             <a:r>
               <a:rPr lang="en-US" sz="1400" b="0" dirty="0"/>
-              <a:t>Đáp án cho năm câu: 1 một chiến lược rẻ hơn, chỉ cần chứng minh tử vong ngày 28 không kém hơn (RCT không kém hơn, ngưỡng định trước), 2 quy trình ghi cân bằng dịch do điều dưỡng thực hiện cho cả ICU (thử nghiệm ngẫu nhiên theo cụm), 3 gói xử trí nhiễm khuẩn huyết có giới hạn dịch đã áp dụng từ năm 2023, có số liệu theo tháng (chuỗi thời gian ngắt quãng), 4 vì sao điều dưỡng ca đêm khó ghi lượng nước tiểu (phỏng vấn định tính hoặc thảo luận nhóm), 5 hai ICU của mình có tuyển được người bệnh và thực hiện được hạn chế dịch trước khi làm thử nghiệm lớn không (nghiên cứu thí điểm hoặc khả thi).</a:t>
+              <a:t>Sau đó mời 4-5 người nói: 'thiết kế của tôi là ..., nên tôi được nói gây ra / có liên quan'.</a:t>
             </a:r>
           </a:p>
           <a:p>
             <a:r>
               <a:rPr lang="en-US" sz="1400" b="0" dirty="0"/>
-              <a:t>Câu hỏi của học viên: mời bốn hoặc năm người nói 'thiết kế của tôi là ..., nên tôi được nói gây ra / có liên quan', bật micro, và nhận xét ngắn. Đây là cầu nối sang phần xây dựng đề cương.</a:t>
+              <a:t>Chú ý: chọn RCT cho câu hỏi về tác hại hay tiên lượng. Hỏi: có thể phân nhóm phơi nhiễm này một cách có đạo đức không?</a:t>
             </a:r>
           </a:p>
           <a:p>
             <a:r>
               <a:rPr lang="en-US" sz="1400" b="0" dirty="0"/>
-              <a:t>Vấn đề thường gặp: chọn RCT cho câu hỏi về tác hại hay tiên lượng. Hỏi: có thể chỉ định phơi nhiễm này một cách đạo đức không?</a:t>
-            </a:r>
-          </a:p>
-          <a:p>
-            <a:r>
-              <a:rPr lang="en-US" sz="1400" b="0" dirty="0"/>
-              <a:t>Nếu lớp làm nhanh: Phần B của phiếu còn bốn câu về chủ đề khác để tự học.</a:t>
+              <a:t>Đáp án: s3_solutions_VN, Phần B.</a:t>
             </a:r>
           </a:p>
         </p:txBody>
@@ -3447,43 +3069,25 @@
           <a:p>
             <a:r>
               <a:rPr lang="en-US" sz="1400" b="0" dirty="0"/>
-              <a:t>Phần xây dựng đề cương 3 bắt đầu từ đây (tổng cộng 45 phút, đúng như trên băng tiêu đề và trong chương trình: slide này 3 phút, rồi 42 phút xây dựng đề cương).</a:t>
+              <a:t>Xây dựng đề cương 3 bắt đầu ở đây (slide này 3 phút, rồi 42 phút).</a:t>
             </a:r>
           </a:p>
           <a:p>
             <a:r>
               <a:rPr lang="en-US" sz="1400" b="0" dirty="0"/>
-              <a:t>Slide này chuẩn bị cho phần xây dựng đề cương: hôm nay mỗi người viết đối tượng nghiên cứu cho đề cương của chính mình.</a:t>
+              <a:t>Boulet chọn người 18-85 tuổi trong vòng 24 giờ dùng vận mạch, loại người cần lọc máu trong 24 giờ, bệnh thận giai đoạn cuối và BMI dưới 18.</a:t>
             </a:r>
           </a:p>
           <a:p>
             <a:r>
               <a:rPr lang="en-US" sz="1400" b="0" dirty="0"/>
-              <a:t>Đi xuống phễu với ví dụ ICU (phiên bản quan sát của câu hỏi về dịch truyền). Quần thể nguồn: mọi người có thể được nghiên cứu. Tiêu chuẩn chọn: chữ P (Đối tượng) của PICO, đo được (từ 18 tuổi, sốc nhiễm khuẩn, vận mạch bắt đầu trong 24 giờ). Tiêu chuẩn loại trừ: người đạt tiêu chuẩn chọn nhưng phải loại vì một lý do như an toàn, hoặc không đo được kết cục (lọc máu mạn, chỉ chăm sóc giảm nhẹ).</a:t>
+              <a:t>'Dưới 18 tuổi' không phải tiêu chuẩn loại trừ, chỉ là không được chọn.</a:t>
             </a:r>
           </a:p>
           <a:p>
             <a:r>
               <a:rPr lang="en-US" sz="1400" b="0" dirty="0"/>
-              <a:t>So với Bài báo 1 (Boulet): chọn sốc nhiễm khuẩn, 18-85 tuổi, trong 24 giờ từ khi dùng vận mạch. Loại tổn thương thận cấp cần điều trị thay thế thận trong 24 giờ, bệnh thận giai đoạn cuối, suy dinh dưỡng nặng (chỉ số khối cơ thể dưới 18).</a:t>
-            </a:r>
-          </a:p>
-          <a:p>
-            <a:r>
-              <a:rPr lang="en-US" sz="1400" b="0" dirty="0"/>
-              <a:t>Quan niệm sai: viết tiêu chuẩn loại trừ là ngược lại của tiêu chuẩn chọn ('dưới 18 tuổi' không phải loại trừ, chỉ là không được chọn).</a:t>
-            </a:r>
-          </a:p>
-          <a:p>
-            <a:r>
-              <a:rPr lang="en-US" sz="1400" b="0" dirty="0"/>
-              <a:t>Ý chính: mỗi tiêu chuẩn loại trừ thêm vào làm nghiên cứu 'sạch' hơn nhưng kết quả áp dụng cho ít người bệnh hơn (giá trị ngoại suy, Buổi 4).</a:t>
-            </a:r>
-          </a:p>
-          <a:p>
-            <a:r>
-              <a:rPr lang="en-US" sz="1400" b="0" dirty="0"/>
-              <a:t>Hỏi cả lớp (mời hai ba người trả lời, bật micro): nêu một tiêu chuẩn loại trừ tốt cho nghiên cứu dịch truyền của lớp. Dự kiến: lọc máu mạn (không diễn giải được cân bằng dịch), chỉ chăm sóc giảm nhẹ.</a:t>
+              <a:t>Hỏi: 'Một tiêu chuẩn loại trừ tốt cho nghiên cứu dịch truyền?' Mong đợi: lọc máu mạn tính, chỉ chăm sóc giảm nhẹ.</a:t>
             </a:r>
           </a:p>
           <a:p>
@@ -3570,37 +3174,25 @@
           <a:p>
             <a:r>
               <a:rPr lang="en-US" sz="1400" b="0" dirty="0"/>
-              <a:t>Phiếu làm việc: phiếu bài tập Buổi 3 (PDF), Phần C, và mẫu đề cương (Course/Templates/Research_Proposal_Template.docx, Phần 2). Mỗi người viết đề cương của chính mình. Không chia nhóm.</a:t>
+              <a:t>15 phút: điền Phần 2a cho ví dụ xuyên suốt trên màn hình, vừa làm vừa nói. 20 phút: mỗi người tự viết. 7 phút: ba bạn tình nguyện đọc thiết kế và lý do chọn.</a:t>
             </a:r>
           </a:p>
           <a:p>
             <a:r>
               <a:rPr lang="en-US" sz="1400" b="0" dirty="0"/>
-              <a:t>Nhịp (42 phút): 15 phút giảng viên điền Phần 2a cho ví dụ xuyên suốt trên màn hình chia sẻ, vừa viết vừa nói ra suy nghĩ, 20 phút học viên tự viết nháp Phần 2a của mình (có thể tắt camera, giảng viên vẫn trực tuyến để trả lời câu hỏi trong khung chat), 7 phút ba bạn tình nguyện đọc to câu thiết kế và biện luận và giảng viên nhận xét.</a:t>
+              <a:t>Mẫu: thuần tập hồi cứu, một ICU người lớn, 3 năm. RCT không khả thi khi không có kinh phí, nên viết 'có liên quan'. Bản đầy đủ trong s3_solutions_VN, Phần C.</a:t>
             </a:r>
           </a:p>
           <a:p>
             <a:r>
               <a:rPr lang="en-US" sz="1400" b="0" dirty="0"/>
-              <a:t>Đáp án mẫu cho ví dụ xuyên suốt (phiên bản quan sát), để viết trực tiếp: thuần tập hồi cứu người lớn sốc nhiễm khuẩn tại ICU của mình trong 3 năm. Biện luận: RCT là lý tưởng nhưng không khả thi với một ICU không có kinh phí. Hồ sơ sẵn có ghi dịch vào và ra cùng kết cục. Sẽ kết luận 'có liên quan với'. Bối cảnh: một ICU hỗn hợp người lớn, 3 năm, hồ sơ điện tử và sổ ICU. Tiêu chuẩn chọn và loại trừ như slide phễu. Mẫu đầy đủ ở Course/Solutions/s3_solutions.md, Phần C.</a:t>
+              <a:t>Chú ý: chọn RCT cho phơi nhiễm không thể phân nhóm, bối cảnh quá lớn, tiêu chuẩn loại trừ lặp lại tiêu chuẩn chọn.</a:t>
             </a:r>
           </a:p>
           <a:p>
             <a:r>
               <a:rPr lang="en-US" sz="1400" b="0" dirty="0"/>
-              <a:t>Vấn đề thường gặp: chọn RCT cho phơi nhiễm không thể chỉ định. Bối cảnh quá lớn. Tiêu chuẩn loại trừ chỉ lặp lại tiêu chuẩn chọn theo chiều ngược.</a:t>
-            </a:r>
-          </a:p>
-          <a:p>
-            <a:r>
-              <a:rPr lang="en-US" sz="1400" b="0" dirty="0"/>
-              <a:t>Phần còn lại của Phần 2 (phơi nhiễm, so sánh, kết cục, sai lệch) được xây dựng ở Buổi 4.</a:t>
-            </a:r>
-          </a:p>
-          <a:p>
-            <a:r>
-              <a:rPr lang="en-US" sz="1400" b="0" dirty="0"/>
-              <a:t>Thời gian: nhắc khi còn 10 phút và 2 phút của phần làm riêng.</a:t>
+              <a:t>Nhắc khi còn 10 phút và 2 phút.</a:t>
             </a:r>
           </a:p>
         </p:txBody>
@@ -3681,19 +3273,13 @@
           <a:p>
             <a:r>
               <a:rPr lang="en-US" sz="1400" b="0" dirty="0"/>
-              <a:t>Tóm tắt buổi học (22:25). Mời ba bạn tình nguyện (giơ tay) giải thích mỗi thẻ bằng lời của mình.</a:t>
+              <a:t>Mời ba bạn tình nguyện giải thích mỗi người một thẻ. Nếu thiếu thời gian, chỉ đọc thông điệp chính.</a:t>
             </a:r>
           </a:p>
           <a:p>
             <a:r>
               <a:rPr lang="en-US" sz="1400" b="0" dirty="0"/>
-              <a:t>Nếu thiếu thời gian, chỉ đọc thông điệp chính.</a:t>
-            </a:r>
-          </a:p>
-          <a:p>
-            <a:r>
-              <a:rPr lang="en-US" sz="1400" b="0" dirty="0"/>
-              <a:t>Thời gian: 2 phút. Cùng với slide tổng kết (3 phút) là 5 phút kết thúc buổi.</a:t>
+              <a:t>Thời gian: 2 phút.</a:t>
             </a:r>
           </a:p>
         </p:txBody>
@@ -3774,19 +3360,19 @@
           <a:p>
             <a:r>
               <a:rPr lang="en-US" sz="1400" b="0" dirty="0"/>
-              <a:t>Đáp án câu hỏi cuối buổi: thuần tập (chia theo phơi nhiễm do bác sĩ chọn, theo dõi về sau). Chỉ được nói 'có liên quan', vì bác sĩ chọn hạn chế dịch cho những người bệnh khác biệt ở nhiều mặt (nhẹ hơn, hoặc đã quá tải dịch). Đây là bước dẫn vào nhiễu do chỉ định thứ Bảy tuần sau.</a:t>
+              <a:t>Đáp án câu hỏi cuối buổi: thuần tập. Chỉ được nói 'có liên quan' (nhiễu do chỉ định, thứ Bảy tuần sau).</a:t>
             </a:r>
           </a:p>
           <a:p>
             <a:r>
               <a:rPr lang="en-US" sz="1400" b="0" dirty="0"/>
-              <a:t>Mục đích của câu hỏi cuối buổi: kiểm tra ý chính hôm nay đã được hiểu chưa. Đọc mọi câu trả lời trước Buổi 4 và mở đầu Buổi 4 bằng ba câu (ẩn danh).</a:t>
+              <a:t>Mở đầu Buổi 4 bằng ba câu trả lời (ẩn tên).</a:t>
             </a:r>
           </a:p>
           <a:p>
             <a:r>
               <a:rPr lang="en-US" sz="1400" b="0" dirty="0"/>
-              <a:t>Thời gian: 3 phút sau slide tóm tắt 2 phút (tổng cộng 5 phút, đúng như trên băng tiêu đề và trong chương trình). Kết thúc lúc 22:30.</a:t>
+              <a:t>Thời gian: 3 phút. Kết thúc lúc 22:30.</a:t>
             </a:r>
           </a:p>
         </p:txBody>
@@ -3867,13 +3453,7 @@
           <a:p>
             <a:r>
               <a:rPr lang="en-US" sz="1400" b="0" dirty="0"/>
-              <a:t>Extra (slide bổ sung): các slide sau đây là tùy chọn. Dùng nếu lớp đi nhanh, để trả lời câu hỏi, hoặc giới thiệu cho học viên tự học (bộ slide được gửi dạng PDF sau buổi học).</a:t>
-            </a:r>
-          </a:p>
-          <a:p>
-            <a:r>
-              <a:rPr lang="en-US" sz="1400" b="0" dirty="0"/>
-              <a:t>Thời gian: bỏ qua trong buổi học trừ khi còn thời gian.</a:t>
+              <a:t>Tùy chọn. Dùng nếu còn thời gian, hoặc để tự học.</a:t>
             </a:r>
           </a:p>
         </p:txBody>
@@ -3954,19 +3534,7 @@
           <a:p>
             <a:r>
               <a:rPr lang="en-US" sz="1400" b="0" dirty="0"/>
-              <a:t>Extra (slide bổ sung): đi chậm qua cây quyết định với hai bài báo xuyên suốt (cả hai trong Course/Papers). Hữu ích nếu bài tập 'Gọi tên thiết kế' cho thấy lớp còn lúng túng.</a:t>
-            </a:r>
-          </a:p>
-          <a:p>
-            <a:r>
-              <a:rPr lang="en-US" sz="1400" b="0" dirty="0"/>
-              <a:t>Boulet: chỉ định? Có. Ngẫu nhiên? Có. Vậy là RCT. Hyun: chỉ định? Không. Có nhóm so sánh? Có. Phơi nhiễm đo trước kết cục? Có. Vậy là thuần tập.</a:t>
-            </a:r>
-          </a:p>
-          <a:p>
-            <a:r>
-              <a:rPr lang="en-US" sz="1400" b="0" dirty="0"/>
-              <a:t>Mời học viên làm tương tự với một bài báo trong danh sách tài liệu tham khảo của mình (Phần 1 đề cương).</a:t>
+              <a:t>Dùng nếu bài Gọi tên thiết kế cho thấy lớp còn lúng túng. Sau đó nhờ học viên thử với một bài trong danh sách tài liệu của mình.</a:t>
             </a:r>
           </a:p>
           <a:p>
@@ -4053,19 +3621,13 @@
           <a:p>
             <a:r>
               <a:rPr lang="en-US" sz="1400" b="0" dirty="0"/>
-              <a:t>Extra (slide bổ sung): thêm ba tình huống từ các khoa khác, để bình chọn nhanh hoặc tự học.</a:t>
+              <a:t>Chú ý tình huống C: có hai nhóm, nhưng chuyên viên vật lý trị liệu quyết định, không phải ngẫu nhiên.</a:t>
             </a:r>
           </a:p>
           <a:p>
             <a:r>
               <a:rPr lang="en-US" sz="1400" b="0" dirty="0"/>
-              <a:t>Chú ý tình huống C: một số người sẽ nói RCT vì có hai nhóm. Hỏi: ai quyết định ai được vận động? (Chuyên viên vật lý trị liệu, không phải may rủi.)</a:t>
-            </a:r>
-          </a:p>
-          <a:p>
-            <a:r>
-              <a:rPr lang="en-US" sz="1400" b="0" dirty="0"/>
-              <a:t>Thời gian: 3 phút tính cả slide đáp án, nếu dùng.</a:t>
+              <a:t>Thời gian: 3 phút kể cả đáp án, nếu dùng.</a:t>
             </a:r>
           </a:p>
         </p:txBody>
@@ -4146,25 +3708,7 @@
           <a:p>
             <a:r>
               <a:rPr lang="en-US" sz="1400" b="0" dirty="0"/>
-              <a:t>Extra (slide bổ sung): đáp án cho slide trước.</a:t>
-            </a:r>
-          </a:p>
-          <a:p>
-            <a:r>
-              <a:rPr lang="en-US" sz="1400" b="0" dirty="0"/>
-              <a:t>Ý chính cho C: có hai nhóm không có nghĩa là thử nghiệm. Nếu không phải may rủi quyết định thì đó là nghiên cứu quan sát.</a:t>
-            </a:r>
-          </a:p>
-          <a:p>
-            <a:r>
-              <a:rPr lang="en-US" sz="1400" b="0" dirty="0"/>
-              <a:t>Quan niệm sai: 'xem hồ sơ cũ thì là bệnh–chứng'. Cách chọn mới quyết định: theo kết cục = bệnh–chứng. Theo phơi nhiễm = thuần tập.</a:t>
-            </a:r>
-          </a:p>
-          <a:p>
-            <a:r>
-              <a:rPr lang="en-US" sz="1400" b="0" dirty="0"/>
-              <a:t>Thời gian: nằm trong 3 phút, nếu dùng.</a:t>
+              <a:t>Có hai nhóm chưa phải là thử nghiệm. Chọn theo kết cục = bệnh-chứng, theo phơi nhiễm = thuần tập.</a:t>
             </a:r>
           </a:p>
         </p:txBody>
@@ -4245,37 +3789,13 @@
           <a:p>
             <a:r>
               <a:rPr lang="en-US" sz="1400" b="0" dirty="0"/>
-              <a:t>Đây là ví dụ xuyên suốt cả buổi. Đọc to câu hỏi: đó là PICO (Đối tượng, Can thiệp, So sánh, Kết cục) cả lớp đã xây dựng ở Buổi 1.</a:t>
+              <a:t>Boulet phân nhóm ngẫu nhiên. Hyun chỉ quan sát. Kết cục chính của Boulet là cân bằng dịch, không phải tử vong.</a:t>
             </a:r>
           </a:p>
           <a:p>
             <a:r>
               <a:rPr lang="en-US" sz="1400" b="0" dirty="0"/>
-              <a:t>Các bài báo ở đâu: toàn văn (bản gốc và bản có chú giải) nằm trong thư mục khóa học, Course/Papers: 'Paper 1 - Boulet 2024 Crit Care (RCT)' và 'Paper 2 - Hyun 2023 Ann Intensive Care (cohort)'. Học viên đã đọc hai bài này ở Buổi 2.</a:t>
-            </a:r>
-          </a:p>
-          <a:p>
-            <a:r>
-              <a:rPr lang="en-US" sz="1400" b="0" dirty="0"/>
-              <a:t>Ý chính: Boulet chỉ định chiến lược dịch truyền bằng ngẫu nhiên (một thực nghiệm). Hyun chỉ quan sát điều bác sĩ đã làm và điều xảy ra sau đó (một nghiên cứu thuần tập quan sát).</a:t>
-            </a:r>
-          </a:p>
-          <a:p>
-            <a:r>
-              <a:rPr lang="en-US" sz="1400" b="0" dirty="0"/>
-              <a:t>Chi tiết hay bị bỏ qua: kết cục chính của Boulet là cân bằng dịch ngày 5, không phải tử vong. Đây là thử nghiệm thí điểm (pilot RCT). Hyun xét tử vong ngày 28 (đúng câu hỏi của lớp) nhưng không chỉ định được gì.</a:t>
-            </a:r>
-          </a:p>
-          <a:p>
-            <a:r>
-              <a:rPr lang="en-US" sz="1400" b="0" dirty="0"/>
-              <a:t>Quan niệm sai: 'nghiên cứu lớn hơn luôn tốt hơn'. Cỡ mẫu làm giảm sai số ngẫu nhiên, không loại bỏ sai lệch. Sẽ quay lại ở Buổi 4.</a:t>
-            </a:r>
-          </a:p>
-          <a:p>
-            <a:r>
-              <a:rPr lang="en-US" sz="1400" b="0" dirty="0"/>
-              <a:t>Hỏi cả lớp (bình chọn, hoặc mời hai ba người trả lời): nghiên cứu nào đáng tin hơn để biết hạn chế dịch có cứu sống người bệnh không? Dự kiến: ý kiến khác nhau, và đó chính là vấn đề. Không nghiên cứu nào trả lời trọn vẹn. Giữ sự băn khoăn này đến cuối phần 3.1.</a:t>
+              <a:t>Bình chọn: 'Bạn tin nghiên cứu nào hơn về việc hạn chế dịch cứu được người bệnh?' Mong đợi: ý kiến chia đôi. Không bài nào trả lời trọn vẹn. Giải quyết ở cuối phần 3.1.</a:t>
             </a:r>
           </a:p>
           <a:p>
@@ -4362,13 +3882,7 @@
           <a:p>
             <a:r>
               <a:rPr lang="en-US" sz="1400" b="0" dirty="0"/>
-              <a:t>Extra (slide bổ sung): luyện thêm các thiết kế của phần 3.2, với ví dụ từ chủ đề khác.</a:t>
-            </a:r>
-          </a:p>
-          <a:p>
-            <a:r>
-              <a:rPr lang="en-US" sz="1400" b="0" dirty="0"/>
-              <a:t>Đáp án. A: thử nghiệm không kém hơn. Xác định ngưỡng từ trước. B: thử nghiệm ngẫu nhiên theo cụm. Phân nhóm theo khoa, không theo người bệnh. C: thiết kế định tính, dùng phỏng vấn sâu (hoặc thảo luận nhóm) với gia đình.</a:t>
+              <a:t>Đáp án: A thử nghiệm không kém hơn, ngưỡng định trước. B RCT theo cụm. C phỏng vấn sâu hoặc thảo luận nhóm.</a:t>
             </a:r>
           </a:p>
           <a:p>
@@ -4455,25 +3969,7 @@
           <a:p>
             <a:r>
               <a:rPr lang="en-US" sz="1400" b="0" dirty="0"/>
-              <a:t>Extra (slide bổ sung): dành cho học viên định làm nghiên cứu bệnh–chứng.</a:t>
-            </a:r>
-          </a:p>
-          <a:p>
-            <a:r>
-              <a:rPr lang="en-US" sz="1400" b="0" dirty="0"/>
-              <a:t>Ca chứng phải đến từ quần thể đã sinh ra ca bệnh: trong ví dụ nhiễm Candida máu là những người bệnh ICU khác cùng khoa và cùng tháng, không phải người tình nguyện khỏe mạnh.</a:t>
-            </a:r>
-          </a:p>
-          <a:p>
-            <a:r>
-              <a:rPr lang="en-US" sz="1400" b="0" dirty="0"/>
-              <a:t>Phơi nhiễm phải được đo cùng cách ở ca bệnh và ca chứng, tốt nhất bởi người không biết ai là ai.</a:t>
-            </a:r>
-          </a:p>
-          <a:p>
-            <a:r>
-              <a:rPr lang="en-US" sz="1400" b="0" dirty="0"/>
-              <a:t>Ghép cặp theo vài yếu tố có thể tăng hiệu quả, nhưng ghép quá mức (theo yếu tố liên quan đến phơi nhiễm) che mất tác động.</a:t>
+              <a:t>Nhóm chứng từ cùng khoa, cùng thời gian. Đo phơi nhiễm như nhau ở hai nhóm. Không ghép cặp quá mức.</a:t>
             </a:r>
           </a:p>
           <a:p>
@@ -4560,19 +4056,7 @@
           <a:p>
             <a:r>
               <a:rPr lang="en-US" sz="1400" b="0" dirty="0"/>
-              <a:t>Extra (slide bổ sung): bổ sung cho slide về ngưỡng ở phần 3.2.</a:t>
-            </a:r>
-          </a:p>
-          <a:p>
-            <a:r>
-              <a:rPr lang="en-US" sz="1400" b="0" dirty="0"/>
-              <a:t>Thử nghiệm vượt trội là loại thông thường. Thử nghiệm tương đương (thường gặp với thuốc generic) cần KTC nằm trong ngưỡng ở cả hai phía. Thử nghiệm không kém hơn chỉ cần phía trên.</a:t>
-            </a:r>
-          </a:p>
-          <a:p>
-            <a:r>
-              <a:rPr lang="en-US" sz="1400" b="0" dirty="0"/>
-              <a:t>Quan niệm sai: 'thử nghiệm vượt trội thất bại chứng tỏ tương đương'. Không. Nó không được thiết kế với một ngưỡng.</a:t>
+              <a:t>Thử nghiệm vượt trội thất bại không chứng minh tương đương: không có ngưỡng.</a:t>
             </a:r>
           </a:p>
           <a:p>
@@ -4659,19 +4143,7 @@
           <a:p>
             <a:r>
               <a:rPr lang="en-US" sz="1400" b="0" dirty="0"/>
-              <a:t>Extra (slide bổ sung): dành cho học viên có dự án đánh giá một thay đổi đã thực hiện ở khoa.</a:t>
-            </a:r>
-          </a:p>
-          <a:p>
-            <a:r>
-              <a:rPr lang="en-US" sz="1400" b="0" dirty="0"/>
-              <a:t>Chuỗi thời gian ngắt quãng so sánh dữ liệu sau thay đổi với xu hướng trước thay đổi. Nhiều điểm dữ liệu hơn, một chuỗi đối chứng và nhật ký các thay đổi khác làm kết quả thuyết phục hơn nhiều.</a:t>
-            </a:r>
-          </a:p>
-          <a:p>
-            <a:r>
-              <a:rPr lang="en-US" sz="1400" b="0" dirty="0"/>
-              <a:t>Hướng dẫn báo cáo cho dự án cải tiến chất lượng: SQUIRE 2.0 (chuẩn báo cáo cải tiến chất lượng).</a:t>
+              <a:t>Nhiều điểm dữ liệu hơn, chuỗi đối chứng và ghi lại các thay đổi khác. Hướng dẫn báo cáo: SQUIRE 2.0.</a:t>
             </a:r>
           </a:p>
           <a:p>
@@ -4758,7 +4230,7 @@
           <a:p>
             <a:r>
               <a:rPr lang="en-US" sz="1400" b="0" dirty="0"/>
-              <a:t>Slide bản quyền. Để trên màn hình khi học viên rời phòng họp.</a:t>
+              <a:t>Để trên màn hình khi học viên rời phòng họp.</a:t>
             </a:r>
           </a:p>
         </p:txBody>
@@ -4839,19 +4311,7 @@
           <a:p>
             <a:r>
               <a:rPr lang="en-US" sz="1400" b="0" dirty="0"/>
-              <a:t>Đánh dấu phần 3.1. 45 phút tính từ slide từ khóa đến câu bình chọn 'gây ra hay có liên quan', gồm một lần bình chọn ngắn.</a:t>
-            </a:r>
-          </a:p>
-          <a:p>
-            <a:r>
-              <a:rPr lang="en-US" sz="1400" b="0" dirty="0"/>
-              <a:t>Ý chính: học thiết kế như những hình vẽ trên trục thời gian, không phải định nghĩa. Với mỗi thiết kế hỏi: ai quyết định phơi nhiễm, và theo chiều thời gian nào? Sau mỗi hình là một ví dụ từng bước.</a:t>
-            </a:r>
-          </a:p>
-          <a:p>
-            <a:r>
-              <a:rPr lang="en-US" sz="1400" b="0" dirty="0"/>
-              <a:t>Nói với cả lớp: không cần thuộc tên. Cuối phần này họ sẽ tự phác họa được.</a:t>
+              <a:t>Với mỗi thiết kế, hỏi: ai quyết định phơi nhiễm, và thời gian đi theo chiều nào? Không cần thuộc tên.</a:t>
             </a:r>
           </a:p>
           <a:p>
@@ -4938,25 +4398,13 @@
           <a:p>
             <a:r>
               <a:rPr lang="en-US" sz="1400" b="0" dirty="0"/>
-              <a:t>Đi từ trái sang phải. Nghiên cứu mô tả mô tả điều đang có, không so sánh. Nghiên cứu phân tích so sánh các nhóm để kiểm định một mối liên quan, và có hai loại: quan sát (nhà nghiên cứu theo dõi điều xảy ra trong chăm sóc thường ngày) và thực nghiệm (nhà nghiên cứu quyết định ai nhận gì).</a:t>
+              <a:t>Quan sát không có nghĩa là kém: tác hại, tiên lượng và bệnh hiếm thường cần thiết kế quan sát.</a:t>
             </a:r>
           </a:p>
           <a:p>
             <a:r>
               <a:rPr lang="en-US" sz="1400" b="0" dirty="0"/>
-              <a:t>Tổng quan hệ thống đứng riêng: đó là nghiên cứu về các nghiên cứu, tổng hợp nhiều thiết kế trên slide này.</a:t>
-            </a:r>
-          </a:p>
-          <a:p>
-            <a:r>
-              <a:rPr lang="en-US" sz="1400" b="0" dirty="0"/>
-              <a:t>Quan niệm sai: 'quan sát nghĩa là kém'. Không. Nhiều câu hỏi quan trọng (tác hại, tiên lượng, bệnh hiếm) chỉ trả lời được bằng nghiên cứu quan sát. Vấn đề là sự phù hợp, không phải thứ hạng.</a:t>
-            </a:r>
-          </a:p>
-          <a:p>
-            <a:r>
-              <a:rPr lang="en-US" sz="1400" b="0" dirty="0"/>
-              <a:t>Hỏi cả lớp (bình chọn): Bài báo 1 (Boulet) thuộc thẻ nào? Bài báo 2 (Hyun)? Dự kiến: Boulet = thực nghiệm, RCT. Hyun = quan sát, thuần tập.</a:t>
+              <a:t>Bình chọn: 'Bài báo 1 thuộc thẻ nào? Bài báo 2?' Mong đợi: Boulet thực nghiệm (RCT), Hyun quan sát (thuần tập).</a:t>
             </a:r>
           </a:p>
           <a:p>
@@ -5043,31 +4491,13 @@
           <a:p>
             <a:r>
               <a:rPr lang="en-US" sz="1400" b="0" dirty="0"/>
-              <a:t>Trước mọi thiết kế, ai cũng phải gọi tên được hai thành phần của câu hỏi.</a:t>
+              <a:t>Cân bằng dịch là kết cục ở Boulet nhưng là phơi nhiễm ở Hyun. Điều trị cũng là một phơi nhiễm.</a:t>
             </a:r>
           </a:p>
           <a:p>
             <a:r>
               <a:rPr lang="en-US" sz="1400" b="0" dirty="0"/>
-              <a:t>Phơi nhiễm: điều có trước (một điều trị, chiến lược, yếu tố nguy cơ, hành vi). Kết cục: điều đếm sau đó (tử vong, nhiễm khuẩn, tổn thương, một chỉ số xét nghiệm). Nhóm so sánh là những người không có phơi nhiễm, hoặc được chăm sóc thường quy.</a:t>
-            </a:r>
-          </a:p>
-          <a:p>
-            <a:r>
-              <a:rPr lang="en-US" sz="1400" b="0" dirty="0"/>
-              <a:t>Đi qua từng dòng. Cùng một biến có thể đóng vai trò khác nhau: cân bằng dịch là kết cục trong Boulet (cân bằng dịch ngày 5) nhưng là phơi nhiễm trong Hyun (cân bằng đến ngày 3, kết cục tử vong). Hai dòng cuối là ví dụ khác, sẽ gặp lại trong buổi hôm nay.</a:t>
-            </a:r>
-          </a:p>
-          <a:p>
-            <a:r>
-              <a:rPr lang="en-US" sz="1400" b="0" dirty="0"/>
-              <a:t>Quan niệm sai: 'phơi nhiễm phải có hại'. Không. Một điều trị cũng là phơi nhiễm.</a:t>
-            </a:r>
-          </a:p>
-          <a:p>
-            <a:r>
-              <a:rPr lang="en-US" sz="1400" b="0" dirty="0"/>
-              <a:t>Hỏi cả lớp (mời hai ba người trả lời, bật micro): trong câu hỏi xuyên suốt, đâu là phơi nhiễm, kết cục và so sánh? Dự kiến: chiến lược hạn chế dịch. Tử vong ngày 28. Chăm sóc thường quy.</a:t>
+              <a:t>Hỏi: 'Nêu phơi nhiễm, kết cục và nhóm so sánh trong câu hỏi của mình.' Mong đợi: hạn chế dịch, tử vong đến ngày 28, chăm sóc thường quy.</a:t>
             </a:r>
           </a:p>
           <a:p>
@@ -5154,31 +4584,13 @@
           <a:p>
             <a:r>
               <a:rPr lang="en-US" sz="1400" b="0" dirty="0"/>
-              <a:t>Báo cáo ca hoặc loạt ca: vài người bệnh đặc biệt được mô tả chi tiết. Có vai trò lịch sử quan trọng (những báo cáo đầu tiên về AIDS, tác hại của thalidomide) vì chúng báo động và gợi giả thuyết.</a:t>
+              <a:t>Cắt ngang: phơi nhiễm và kết cục đo cùng lúc, nên không biết cái nào có trước.</a:t>
             </a:r>
           </a:p>
           <a:p>
             <a:r>
               <a:rPr lang="en-US" sz="1400" b="0" dirty="0"/>
-              <a:t>Nghiên cứu cắt ngang: khảo sát quần thể tại một thời điểm, ví dụ khảo sát mọi người bệnh trong ICU vào một ngày. Nó đo tỷ lệ hiện mắc (bao nhiêu người đang mắc ngay lúc này).</a:t>
-            </a:r>
-          </a:p>
-          <a:p>
-            <a:r>
-              <a:rPr lang="en-US" sz="1400" b="0" dirty="0"/>
-              <a:t>Ý chính: trong nghiên cứu cắt ngang, phơi nhiễm và kết cục được đo cùng lúc, nên thường không biết cái nào có trước.</a:t>
-            </a:r>
-          </a:p>
-          <a:p>
-            <a:r>
-              <a:rPr lang="en-US" sz="1400" b="0" dirty="0"/>
-              <a:t>Quan niệm sai: 'nghiên cứu cắt ngang chứng minh được nhân quả vì có hai nhóm'. Nó có thể so sánh các nhóm (cắt ngang phân tích) nhưng thiếu trình tự thời gian.</a:t>
-            </a:r>
-          </a:p>
-          <a:p>
-            <a:r>
-              <a:rPr lang="en-US" sz="1400" b="0" dirty="0"/>
-              <a:t>Hỏi cả lớp (mời hai ba người trả lời, bật micro): làm sao đo trong một ngày xem cân bằng dịch dương phổ biến thế nào ở ICU của bạn? Dự kiến: khảo sát hiện mắc tại một thời điểm, trên mọi người bệnh có mặt hôm đó.</a:t>
+              <a:t>Hỏi: 'Làm sao đo trong một ngày tỷ lệ cân bằng dịch dương ở ICU của bạn?' Mong đợi: khảo sát hiện mắc tại một thời điểm.</a:t>
             </a:r>
           </a:p>
           <a:p>
@@ -5265,31 +4677,13 @@
           <a:p>
             <a:r>
               <a:rPr lang="en-US" sz="1400" b="0" dirty="0"/>
-              <a:t>Một ví dụ khác (ngoài câu hỏi về dịch truyền) để 'cắt ngang' trở nên cụ thể. Số liệu giả định.</a:t>
+              <a:t>Số liệu giả định. Không biết đệm hay loét có trước. Với câu hỏi 'hiện nay phổ biến đến đâu?', đây là thiết kế đúng.</a:t>
             </a:r>
           </a:p>
           <a:p>
             <a:r>
               <a:rPr lang="en-US" sz="1400" b="0" dirty="0"/>
-              <a:t>Bước 1-2: mọi người có mặt trong một ngày, được khám cùng một cách (giúp tránh sai lệch thông tin, sẽ học ở Buổi 4). Bước 3: phơi nhiễm (đệm) và kết cục (loét) được ghi cùng lúc. Bước 4: kết quả là tỷ lệ hiện mắc: 37/412 người bệnh, 9%.</a:t>
-            </a:r>
-          </a:p>
-          <a:p>
-            <a:r>
-              <a:rPr lang="en-US" sz="1400" b="0" dirty="0"/>
-              <a:t>Ý chính: có thể so sánh các nhóm (loét ở đệm thường và đệm khí), nhưng không biết đệm có trước hay người bệnh đã bị loét mới được chuyển sang đệm khí.</a:t>
-            </a:r>
-          </a:p>
-          <a:p>
-            <a:r>
-              <a:rPr lang="en-US" sz="1400" b="0" dirty="0"/>
-              <a:t>Quan niệm sai: 'cắt ngang = chất lượng thấp'. Với câu hỏi 'hiện nay phổ biến thế nào?' đó đúng là thiết kế phù hợp, lại rẻ và nhanh.</a:t>
-            </a:r>
-          </a:p>
-          <a:p>
-            <a:r>
-              <a:rPr lang="en-US" sz="1400" b="0" dirty="0"/>
-              <a:t>Hỏi cả lớp (mời hai ba người trả lời, bật micro): với câu hỏi về dịch truyền, có thể đo gì ở ICU trong một ngày? Dự kiến: cân bằng dịch và chức năng thận hôm đó của mọi người bệnh có mặt.</a:t>
+              <a:t>Hỏi: 'Trong một ngày có thể đo gì cho câu hỏi dịch truyền?' Mong đợi: cân bằng dịch và chức năng thận hôm nay của mọi người bệnh.</a:t>
             </a:r>
           </a:p>
           <a:p>
@@ -22597,7 +21991,7 @@
                 <a:latin typeface="Arial"/>
                 <a:cs typeface="Arial"/>
               </a:rPr>
-              <a:t>Vì sao: để kiểm tra ý chính hôm nay. Giảng viên đọc mọi câu trả lời và mở đầu Buổi 4 bằng chúng</a:t>
+              <a:t>Bài về nhà: hoàn thành Phần 2a đề cương của bạn (thiết kế, bối cảnh, đối tượng)</a:t>
             </a:r>
           </a:p>
           <a:p>
@@ -22622,32 +22016,7 @@
                 <a:latin typeface="Arial"/>
                 <a:cs typeface="Arial"/>
               </a:rPr>
-              <a:t>Bài về nhà: hoàn thành Phần 2a đề cương của bạn (thiết kế, bối cảnh, đối tượng)</a:t>
-            </a:r>
-          </a:p>
-          <a:p>
-            <a:pPr marL="380000" indent="-380000" algn="l">
-              <a:lnSpc>
-                <a:spcPct val="104000"/>
-              </a:lnSpc>
-              <a:spcBef>
-                <a:spcPts val="450"/>
-              </a:spcBef>
-              <a:buClr>
-                <a:srgbClr val="1F5C7A"/>
-              </a:buClr>
-              <a:buFont typeface="Arial"/>
-              <a:buChar char="•"/>
-            </a:pPr>
-            <a:r>
-              <a:rPr lang="en-US" sz="1650" dirty="0">
-                <a:solidFill>
-                  <a:srgbClr val="000000"/>
-                </a:solidFill>
-                <a:latin typeface="Arial"/>
-                <a:cs typeface="Arial"/>
-              </a:rPr>
-              <a:t>Đọc: đoạn 'Patients' của Bài báo 1 (Boulet) và 'Data source' của Bài báo 2 (Hyun), trong Course/Papers</a:t>
+              <a:t>Đọc: đoạn 'Patients' của Bài báo 1 (Boulet) và 'Data source' của Bài báo 2 (Hyun)</a:t>
             </a:r>
           </a:p>
           <a:p>
@@ -25160,7 +24529,7 @@
                 <a:latin typeface="Arial"/>
                 <a:cs typeface="Arial"/>
               </a:rPr>
-              <a:t>Ở người lớn bị sốc nhiễm khuẩn, hạn chế dịch truyền có giảm tử vong ngày 28 không? Cả hai bài: thư mục khóa học, Course/Papers</a:t>
+              <a:t>Ở người lớn bị sốc nhiễm khuẩn, hạn chế dịch truyền có giảm tử vong ngày 28 không? Cả hai bài đã gửi qua email trước Buổi 1</a:t>
             </a:r>
           </a:p>
         </p:txBody>
